--- a/public/static/Torra_e_Terra_NoSQL.pptx
+++ b/public/static/Torra_e_Terra_NoSQL.pptx
@@ -4,6 +4,9 @@
   <p:sldMasterIdLst>
     <p:sldMasterId id="2147483648" r:id="rId1"/>
   </p:sldMasterIdLst>
+  <p:notesMasterIdLst>
+    <p:notesMasterId r:id="rId14"/>
+  </p:notesMasterIdLst>
   <p:sldIdLst>
     <p:sldId id="256" r:id="rId2"/>
     <p:sldId id="257" r:id="rId3"/>
@@ -18,9 +21,6 @@
     <p:sldId id="266" r:id="rId12"/>
     <p:sldId id="267" r:id="rId13"/>
   </p:sldIdLst>
-  <p:notesMasterIdLst>
-    <p:notesMasterId r:id="rId14"/>
-  </p:notesMasterIdLst>
   <p:sldSz cx="12192000" cy="6858000"/>
   <p:notesSz cx="6858000" cy="12192000"/>
   <p:defaultTextStyle>
@@ -115,6 +115,11 @@
       </a:defRPr>
     </a:lvl9pPr>
   </p:defaultTextStyle>
+  <p:extLst>
+    <p:ext uri="{EFAFB233-063F-42B5-8137-9DF3F51BA10A}">
+      <p15:sldGuideLst xmlns:p15="http://schemas.microsoft.com/office/powerpoint/2012/main"/>
+    </p:ext>
+  </p:extLst>
 </p:presentation>
 </file>
 
@@ -140,234 +145,10 @@
           <a:chExt cx="0" cy="0"/>
         </a:xfrm>
       </p:grpSpPr>
-      <p:sp>
-        <p:nvSpPr>
-          <p:cNvPr id="2" name="Header Placeholder 1"/>
-          <p:cNvSpPr>
-            <a:spLocks noGrp="1"/>
-          </p:cNvSpPr>
-          <p:nvPr>
-            <p:ph type="hdr" sz="quarter"/>
-          </p:nvPr>
-        </p:nvSpPr>
-        <p:spPr>
-          <a:xfrm>
-            <a:off x="0" y="0"/>
-            <a:ext cx="2971800" cy="458788"/>
-          </a:xfrm>
-          <a:prstGeom prst="rect">
-            <a:avLst/>
-          </a:prstGeom>
-        </p:spPr>
-        <p:txBody>
-          <a:bodyPr vert="horz" lIns="91440" tIns="45720" rIns="91440" bIns="45720" rtlCol="0"/>
-          <a:lstStyle>
-            <a:lvl1pPr algn="l">
-              <a:defRPr sz="1200"/>
-            </a:lvl1pPr>
-          </a:lstStyle>
-          <a:p>
-            <a:endParaRPr lang="en-US"/>
-          </a:p>
-        </p:txBody>
-      </p:sp>
-      <p:sp>
-        <p:nvSpPr>
-          <p:cNvPr id="3" name="Date Placeholder 2"/>
-          <p:cNvSpPr>
-            <a:spLocks noGrp="1"/>
-          </p:cNvSpPr>
-          <p:nvPr>
-            <p:ph type="dt" idx="1"/>
-          </p:nvPr>
-        </p:nvSpPr>
-        <p:spPr>
-          <a:xfrm>
-            <a:off x="3884613" y="0"/>
-            <a:ext cx="2971800" cy="458788"/>
-          </a:xfrm>
-          <a:prstGeom prst="rect">
-            <a:avLst/>
-          </a:prstGeom>
-        </p:spPr>
-        <p:txBody>
-          <a:bodyPr vert="horz" lIns="91440" tIns="45720" rIns="91440" bIns="45720" rtlCol="0"/>
-          <a:lstStyle>
-            <a:lvl1pPr algn="r">
-              <a:defRPr sz="1200"/>
-            </a:lvl1pPr>
-          </a:lstStyle>
-          <a:p>
-            <a:fld id="{5282F153-3F37-0F45-9E97-73ACFA13230C}" type="datetimeFigureOut">
-              <a:rPr lang="en-US"/>
-              <a:t>7/23/19</a:t>
-            </a:fld>
-            <a:endParaRPr lang="en-US"/>
-          </a:p>
-        </p:txBody>
-      </p:sp>
-      <p:sp>
-        <p:nvSpPr>
-          <p:cNvPr id="4" name="Slide Image Placeholder 3"/>
-          <p:cNvSpPr>
-            <a:spLocks noGrp="1" noRot="1" noChangeAspect="1"/>
-          </p:cNvSpPr>
-          <p:nvPr>
-            <p:ph type="sldImg" idx="2"/>
-          </p:nvPr>
-        </p:nvSpPr>
-        <p:spPr>
-          <a:xfrm>
-            <a:off x="685800" y="1143000"/>
-            <a:ext cx="5486400" cy="3086100"/>
-          </a:xfrm>
-          <a:prstGeom prst="rect">
-            <a:avLst/>
-          </a:prstGeom>
-          <a:noFill/>
-          <a:ln w="12700">
-            <a:solidFill>
-              <a:prstClr val="black"/>
-            </a:solidFill>
-          </a:ln>
-        </p:spPr>
-        <p:txBody>
-          <a:bodyPr vert="horz" lIns="91440" tIns="45720" rIns="91440" bIns="45720" rtlCol="0" anchor="ctr"/>
-          <a:lstStyle/>
-          <a:p>
-            <a:endParaRPr lang="en-US"/>
-          </a:p>
-        </p:txBody>
-      </p:sp>
-      <p:sp>
-        <p:nvSpPr>
-          <p:cNvPr id="5" name="Notes Placeholder 4"/>
-          <p:cNvSpPr>
-            <a:spLocks noGrp="1"/>
-          </p:cNvSpPr>
-          <p:nvPr>
-            <p:ph type="body" sz="quarter" idx="3"/>
-          </p:nvPr>
-        </p:nvSpPr>
-        <p:spPr>
-          <a:xfrm>
-            <a:off x="685800" y="4400550"/>
-            <a:ext cx="5486400" cy="3600450"/>
-          </a:xfrm>
-          <a:prstGeom prst="rect">
-            <a:avLst/>
-          </a:prstGeom>
-        </p:spPr>
-        <p:txBody>
-          <a:bodyPr vert="horz" lIns="91440" tIns="45720" rIns="91440" bIns="45720" rtlCol="0"/>
-          <a:lstStyle/>
-          <a:p>
-            <a:pPr lvl="0"/>
-            <a:r>
-              <a:rPr lang="en-US"/>
-              <a:t>Click to edit Master text styles</a:t>
-            </a:r>
-          </a:p>
-          <a:p>
-            <a:pPr lvl="1"/>
-            <a:r>
-              <a:rPr lang="en-US"/>
-              <a:t>Second level</a:t>
-            </a:r>
-          </a:p>
-          <a:p>
-            <a:pPr lvl="2"/>
-            <a:r>
-              <a:rPr lang="en-US"/>
-              <a:t>Third level</a:t>
-            </a:r>
-          </a:p>
-          <a:p>
-            <a:pPr lvl="3"/>
-            <a:r>
-              <a:rPr lang="en-US"/>
-              <a:t>Fourth level</a:t>
-            </a:r>
-          </a:p>
-          <a:p>
-            <a:pPr lvl="4"/>
-            <a:r>
-              <a:rPr lang="en-US"/>
-              <a:t>Fifth level</a:t>
-            </a:r>
-          </a:p>
-        </p:txBody>
-      </p:sp>
-      <p:sp>
-        <p:nvSpPr>
-          <p:cNvPr id="6" name="Footer Placeholder 5"/>
-          <p:cNvSpPr>
-            <a:spLocks noGrp="1"/>
-          </p:cNvSpPr>
-          <p:nvPr>
-            <p:ph type="ftr" sz="quarter" idx="4"/>
-          </p:nvPr>
-        </p:nvSpPr>
-        <p:spPr>
-          <a:xfrm>
-            <a:off x="0" y="8685213"/>
-            <a:ext cx="2971800" cy="458787"/>
-          </a:xfrm>
-          <a:prstGeom prst="rect">
-            <a:avLst/>
-          </a:prstGeom>
-        </p:spPr>
-        <p:txBody>
-          <a:bodyPr vert="horz" lIns="91440" tIns="45720" rIns="91440" bIns="45720" rtlCol="0" anchor="b"/>
-          <a:lstStyle>
-            <a:lvl1pPr algn="l">
-              <a:defRPr sz="1200"/>
-            </a:lvl1pPr>
-          </a:lstStyle>
-          <a:p>
-            <a:endParaRPr lang="en-US"/>
-          </a:p>
-        </p:txBody>
-      </p:sp>
-      <p:sp>
-        <p:nvSpPr>
-          <p:cNvPr id="7" name="Slide Number Placeholder 6"/>
-          <p:cNvSpPr>
-            <a:spLocks noGrp="1"/>
-          </p:cNvSpPr>
-          <p:nvPr>
-            <p:ph type="sldNum" sz="quarter" idx="5"/>
-          </p:nvPr>
-        </p:nvSpPr>
-        <p:spPr>
-          <a:xfrm>
-            <a:off x="3884613" y="8685213"/>
-            <a:ext cx="2971800" cy="458787"/>
-          </a:xfrm>
-          <a:prstGeom prst="rect">
-            <a:avLst/>
-          </a:prstGeom>
-        </p:spPr>
-        <p:txBody>
-          <a:bodyPr vert="horz" lIns="91440" tIns="45720" rIns="91440" bIns="45720" rtlCol="0" anchor="b"/>
-          <a:lstStyle>
-            <a:lvl1pPr algn="r">
-              <a:defRPr sz="1200"/>
-            </a:lvl1pPr>
-          </a:lstStyle>
-          <a:p>
-            <a:fld id="{CE5E9CC1-C706-0F49-92D6-E571CC5EEA8F}" type="slidenum">
-              <a:rPr lang="en-US"/>
-              <a:t>‹#›</a:t>
-            </a:fld>
-            <a:endParaRPr lang="en-US"/>
-          </a:p>
-        </p:txBody>
-      </p:sp>
     </p:spTree>
     <p:extLst>
       <p:ext uri="{BB962C8B-B14F-4D97-AF65-F5344CB8AC3E}">
-        <p14:creationId xmlns:p14="http://schemas.microsoft.com/office/powerpoint/2010/main" val="1024086991"/>
+        <p14:creationId xmlns:p14="http://schemas.microsoft.com/office/powerpoint/2010/main" val="3600572098"/>
       </p:ext>
     </p:extLst>
   </p:cSld>
@@ -515,7 +296,6 @@
               <a:rPr lang="en-US" dirty="0"/>
               <a:t>Apresentar o grupo. Dizer em uma frase o que é o projeto: a mesma loja de café especial do projeto 1, com o banco trocado — saiu o PostgreSQL, entrou o CouchDB. A loja é a mesma de propósito: assim dá para comparar só o que mudou por causa do banco. A demonstração ao vivo fica para o final.</a:t>
             </a:r>
-            <a:endParaRPr lang="en-US" dirty="0"/>
           </a:p>
         </p:txBody>
       </p:sp>
@@ -603,7 +383,6 @@
               <a:rPr lang="en-US" dirty="0"/>
               <a:t>Contar como história, um de cada vez. O terceiro rende boa conversa: no PostgreSQL, o UNIQUE resolvia; no CouchDB, a única coisa que o banco garante ser única é a etiqueta da ficha — então a etiqueta passou a ser o próprio e-mail. O primeiro dos menores é o tipo de erro que só aparece rodando: o arquivo de senhas do projeto 1 estava sendo lido pelo projeto 2, porque uma pasta mora dentro da outra. Corrigimos apontando o caminho exato do arquivo.</a:t>
             </a:r>
-            <a:endParaRPr lang="en-US" dirty="0"/>
           </a:p>
         </p:txBody>
       </p:sp>
@@ -691,7 +470,6 @@
               <a:rPr lang="en-US" dirty="0"/>
               <a:t>Saber o que não foi feito, e por quê, vale tanto quanto o que foi. Sobre as 8 idas ao banco: são sempre 8, com um café ou com vários, porque as reservas e a limpeza vão cada uma num lote só — e isso importa, porque o plano gratuito do Cloudant limita a 10 gravações por segundo. A reconciliação ser manual é a limitação mais honesta: em produção, ela rodaria sozinha de tempos em tempos.</a:t>
             </a:r>
-            <a:endParaRPr lang="en-US" dirty="0"/>
           </a:p>
         </p:txBody>
       </p:sp>
@@ -779,7 +557,6 @@
               <a:rPr lang="en-US" dirty="0"/>
               <a:t>Abrir a loja alguns minutos antes, porque a primeira visita acorda a função no Vercel. Deixar o painel do Cloudant aberto numa segunda aba, já no banco torra_terra. O passo 4 é o que mais impressiona: a mensagem diz o café que faltou, e o painel mostra que nenhum pedido novo foi gravado. No passo 5, abrir a ficha do café antes e depois de uma compra e mostrar o número antes do hífen, no _rev, subindo. No fim, o QR code do slide leva direto ao WhatsApp de quem cuida do estoque do Torra &amp; Terra: quem quiser um dos cafés só aponta a câmera.</a:t>
             </a:r>
-            <a:endParaRPr lang="en-US" dirty="0"/>
           </a:p>
         </p:txBody>
       </p:sp>
@@ -867,7 +644,6 @@
               <a:rPr lang="en-US" dirty="0"/>
               <a:t>A ordem veio do material: são as entregas 1 a 6 do projeto prático. A diferença em relação ao projeto 1 está na etapa 0. No relacional, começamos pelas tabelas; aqui, começamos pelas perguntas que o site faz ao banco — o material pede isso com todas as letras: “liste as consultas antes de modelar”. O projeto 1 inteiro continua no GitHub, na tag v1-relacional, porque comparar os dois é o objetivo da atividade.</a:t>
             </a:r>
-            <a:endParaRPr lang="en-US" dirty="0"/>
           </a:p>
         </p:txBody>
       </p:sp>
@@ -955,7 +731,6 @@
               <a:rPr lang="en-US" dirty="0"/>
               <a:t>O material exige justificar o NoSQL pelo padrão de acesso — e padrão de acesso é só isto: o que o site mais pergunta ao banco. Para explicar índice: é o índice remissivo de um livro; em vez de folhear tudo, você vai direto à página. Ser honesto aqui conta ponto: a ficha é ótima para ler o pedido inteiro de uma vez, mas perde a garantia de gravar várias fichas juntas. O resto da apresentação mostra o que fizemos com essa perda.</a:t>
             </a:r>
-            <a:endParaRPr lang="en-US" dirty="0"/>
           </a:p>
         </p:txBody>
       </p:sp>
@@ -1043,7 +818,6 @@
               <a:rPr lang="en-US" dirty="0"/>
               <a:t>No projeto 1, o porteiro era o gunicorn, rodando num servidor ligado o tempo todo. No Vercel não existe servidor esperando: a própria plataforma recebe o acesso e acorda o Python quando alguém chega. Também sumiram o SQLAlchemy, o tradutor, e o psycopg, o cabo. O CouchDB não precisa de tradutor, porque a língua dele é o HTTP, a mesma de qualquer site. Por isso o carteiro é o requests, a biblioteca que o Python usa para abrir endereços da web.</a:t>
             </a:r>
-            <a:endParaRPr lang="en-US" dirty="0"/>
           </a:p>
         </p:txBody>
       </p:sp>
@@ -1131,7 +905,6 @@
               <a:rPr lang="en-US" dirty="0"/>
               <a:t>Toda ferramenta aqui tem um porquê. O Cloudant é citado pelo próprio material, no slide 48, como opção compatível com o CouchDB; a conta da IBM pede cartão só para verificação. Sobre o Claude Code, vale dizer com transparência como ele foi usado: ele escrevia e testava, e o grupo decidia o que entrava. Um exemplo: foi rodando a regra do banco no Node que apareceu uma regra que nunca era usada, e ela saiu. Os próprios slides foram gerados por código: o PowerPoint com o pptxgenjs, e o PDF imprimindo a versão web no Chrome.</a:t>
             </a:r>
-            <a:endParaRPr lang="en-US" dirty="0"/>
           </a:p>
         </p:txBody>
       </p:sp>
@@ -1219,7 +992,6 @@
               <a:rPr lang="en-US" dirty="0"/>
               <a:t>É o slide de maior peso na nota: modelagem documental vale 25%. As três decisões resumem tudo: embutir o que é lido junto, referenciar o que tem vida própria, fotografar o que precisa ficar como estava no dia. A moagem é o argumento herdado do projeto 1: ela não é do café, é da compra — por isso continua dentro do item. Se perguntarem pelo _id: é a etiqueta da ficha, e quem escolhe o nome somos nós. Produto:chapada-geisha é legível, e nenhuma outra ficha pode ter a mesma etiqueta — é justamente isso que garante o e-mail único.</a:t>
             </a:r>
-            <a:endParaRPr lang="en-US" dirty="0"/>
           </a:p>
         </p:txBody>
       </p:sp>
@@ -1307,7 +1079,6 @@
               <a:rPr lang="en-US" dirty="0"/>
               <a:t>Ler a tabela pelas analogias. Nas regras, os dois recusam dado errado: no PostgreSQL é o CHECK; no CouchDB é uma função JavaScript que o próprio banco roda a cada gravação, a validate_doc_update. Temos 35 regras nela, testadas contra o CouchDB de verdade. A linha que importa é a última: o PostgreSQL grava várias tabelas como se fosse uma coisa só; o CouchDB garante uma ficha de cada vez. Um pedido de três cafés mexe em quatro fichas — e nada garante as quatro juntas. É o assunto do próximo slide.</a:t>
             </a:r>
-            <a:endParaRPr lang="en-US" dirty="0"/>
           </a:p>
         </p:txBody>
       </p:sp>
@@ -1395,7 +1166,6 @@
               <a:rPr lang="en-US" dirty="0"/>
               <a:t>Este é o coração. Começar pelo risco: sem transação, o pedido pode ficar gravado sem o estoque ter sido descontado. O projeto-base do material faz exatamente isso: avisa o conflito, mas não desfaz o que já entrou — e tentar de novo desconta duas vezes. A nossa solução se chama saga: uma sequência de passos em que cada passo sabe se desfazer. O detalhe que faz funcionar é o bilhete. Se a conexão cai no meio da reserva, a loja não sabe o que o banco gravou; o bilhete preso na ficha do café diz. O estorno devolve estoque só onde encontra bilhete, e por isso pode rodar duas vezes sem devolver em dobro. Se a função morrer no meio, um comando — reconciliar — termina o serviço depois.</a:t>
             </a:r>
-            <a:endParaRPr lang="en-US" dirty="0"/>
           </a:p>
         </p:txBody>
       </p:sp>
@@ -1483,7 +1253,6 @@
               <a:rPr lang="en-US" dirty="0"/>
               <a:t>Explicar o 409 com a analogia: o _rev é o número da versão da ficha. Quem grava precisa dizer qual versão leu; se alguém mexeu antes, o banco recusa — e isso é o erro 409. Não é falha, é o banco avisando. O teste força a corrida no instante exato: ele troca a função que grava por uma que, antes de gravar, faz a outra compra acontecer. Por isso o resultado é sempre o mesmo e não depende de sorte. Os dois testes rodam a cada envio ao GitHub, contra um CouchDB de verdade. Se houver tempo, o Fauxton mostra o mesmo 409 com duas abas editando a mesma ficha.</a:t>
             </a:r>
-            <a:endParaRPr lang="en-US" dirty="0"/>
           </a:p>
         </p:txBody>
       </p:sp>
@@ -1556,6 +1325,11 @@
 <file path=ppt/slideMasters/slideMaster1.xml><?xml version="1.0" encoding="utf-8"?>
 <p:sldMaster xmlns:a="http://schemas.openxmlformats.org/drawingml/2006/main" xmlns:r="http://schemas.openxmlformats.org/officeDocument/2006/relationships" xmlns:p="http://schemas.openxmlformats.org/presentationml/2006/main">
   <p:cSld>
+    <p:bg>
+      <p:bgRef idx="1001">
+        <a:schemeClr val="bg1"/>
+      </p:bgRef>
+    </p:bg>
     <p:spTree>
       <p:nvGrpSpPr>
         <p:cNvPr id="1" name=""/>
@@ -1838,6 +1612,7 @@
         <a:solidFill>
           <a:srgbClr val="14120F"/>
         </a:solidFill>
+        <a:effectLst/>
       </p:bgPr>
     </p:bg>
     <p:spTree>
@@ -1875,11 +1650,11 @@
           <a:bodyPr wrap="square" lIns="0" tIns="0" rIns="0" bIns="0" rtlCol="0" anchor="ctr"/>
           <a:lstStyle/>
           <a:p>
-            <a:pPr indent="0" marL="0">
-              <a:buNone/>
-            </a:pPr>
-            <a:r>
-              <a:rPr lang="en-US" sz="1000" b="1" spc="120" kern="0" dirty="0">
+            <a:pPr marL="0" indent="0">
+              <a:buNone/>
+            </a:pPr>
+            <a:r>
+              <a:rPr lang="en-US" sz="1000" b="1" kern="0" spc="120" dirty="0">
                 <a:solidFill>
                   <a:srgbClr val="9B928A"/>
                 </a:solidFill>
@@ -1914,7 +1689,7 @@
           <a:bodyPr wrap="square" lIns="0" tIns="0" rIns="0" bIns="0" rtlCol="0" anchor="ctr"/>
           <a:lstStyle/>
           <a:p>
-            <a:pPr indent="0" marL="0">
+            <a:pPr marL="0" indent="0">
               <a:buNone/>
             </a:pPr>
             <a:r>
@@ -1928,9 +1703,6 @@
               </a:rPr>
               <a:t>Torra </a:t>
             </a:r>
-            <a:pPr indent="0" marL="0">
-              <a:buNone/>
-            </a:pPr>
             <a:r>
               <a:rPr lang="en-US" sz="6200" dirty="0">
                 <a:solidFill>
@@ -1942,9 +1714,6 @@
               </a:rPr>
               <a:t>&amp;</a:t>
             </a:r>
-            <a:pPr indent="0" marL="0">
-              <a:buNone/>
-            </a:pPr>
             <a:r>
               <a:rPr lang="en-US" sz="6200" dirty="0">
                 <a:solidFill>
@@ -1981,7 +1750,7 @@
           <a:bodyPr wrap="square" lIns="0" tIns="0" rIns="0" bIns="0" rtlCol="0" anchor="ctr"/>
           <a:lstStyle/>
           <a:p>
-            <a:pPr indent="0" marL="0">
+            <a:pPr marL="0" indent="0">
               <a:buNone/>
             </a:pPr>
             <a:r>
@@ -2020,7 +1789,7 @@
           <a:bodyPr wrap="square" lIns="0" tIns="0" rIns="0" bIns="0" rtlCol="0" anchor="t"/>
           <a:lstStyle/>
           <a:p>
-            <a:pPr indent="0" marL="0">
+            <a:pPr marL="0" indent="0">
               <a:lnSpc>
                 <a:spcPct val="115000"/>
               </a:lnSpc>
@@ -2062,7 +1831,7 @@
           <a:bodyPr wrap="square" lIns="0" tIns="0" rIns="0" bIns="0" rtlCol="0" anchor="t"/>
           <a:lstStyle/>
           <a:p>
-            <a:pPr indent="0" marL="0">
+            <a:pPr marL="0" indent="0">
               <a:buNone/>
             </a:pPr>
             <a:r>
@@ -2076,9 +1845,6 @@
               </a:rPr>
               <a:t>Prof. Nivaldo T. Marcusso  ·  </a:t>
             </a:r>
-            <a:pPr indent="0" marL="0">
-              <a:buNone/>
-            </a:pPr>
             <a:r>
               <a:rPr lang="en-US" sz="1300" b="1" dirty="0">
                 <a:solidFill>
@@ -2091,7 +1857,49 @@
                 <a:ea typeface="Calibri" pitchFamily="34" charset="-122"/>
                 <a:cs typeface="Calibri" pitchFamily="34" charset="-120"/>
               </a:rPr>
-              <a:t>[PREENCHER: nomes do grupo]</a:t>
+              <a:t>Felipe Furlan; Henrique </a:t>
+            </a:r>
+            <a:r>
+              <a:rPr lang="en-US" sz="1300" b="1" dirty="0" err="1">
+                <a:solidFill>
+                  <a:srgbClr val="A8321F"/>
+                </a:solidFill>
+                <a:highlight>
+                  <a:srgbClr val="FDF0ED"/>
+                </a:highlight>
+                <a:latin typeface="Calibri" pitchFamily="34" charset="0"/>
+                <a:ea typeface="Calibri" pitchFamily="34" charset="-122"/>
+                <a:cs typeface="Calibri" pitchFamily="34" charset="-120"/>
+              </a:rPr>
+              <a:t>Biruel</a:t>
+            </a:r>
+            <a:r>
+              <a:rPr lang="en-US" sz="1300" b="1" dirty="0">
+                <a:solidFill>
+                  <a:srgbClr val="A8321F"/>
+                </a:solidFill>
+                <a:highlight>
+                  <a:srgbClr val="FDF0ED"/>
+                </a:highlight>
+                <a:latin typeface="Calibri" pitchFamily="34" charset="0"/>
+                <a:ea typeface="Calibri" pitchFamily="34" charset="-122"/>
+                <a:cs typeface="Calibri" pitchFamily="34" charset="-120"/>
+              </a:rPr>
+              <a:t>; Henrique </a:t>
+            </a:r>
+            <a:r>
+              <a:rPr lang="en-US" sz="1300" b="1" dirty="0" err="1">
+                <a:solidFill>
+                  <a:srgbClr val="A8321F"/>
+                </a:solidFill>
+                <a:highlight>
+                  <a:srgbClr val="FDF0ED"/>
+                </a:highlight>
+                <a:latin typeface="Calibri" pitchFamily="34" charset="0"/>
+                <a:ea typeface="Calibri" pitchFamily="34" charset="-122"/>
+                <a:cs typeface="Calibri" pitchFamily="34" charset="-120"/>
+              </a:rPr>
+              <a:t>Palorca</a:t>
             </a:r>
             <a:endParaRPr lang="en-US" sz="1300" dirty="0"/>
           </a:p>
@@ -2113,6 +1921,7 @@
         <a:solidFill>
           <a:srgbClr val="FAF9F7"/>
         </a:solidFill>
+        <a:effectLst/>
       </p:bgPr>
     </p:bg>
     <p:spTree>
@@ -2150,7 +1959,7 @@
           <a:bodyPr wrap="square" lIns="0" tIns="0" rIns="0" bIns="0" rtlCol="0" anchor="ctr"/>
           <a:lstStyle/>
           <a:p>
-            <a:pPr indent="0" marL="0">
+            <a:pPr marL="0" indent="0">
               <a:buNone/>
             </a:pPr>
             <a:r>
@@ -2189,7 +1998,7 @@
           <a:bodyPr wrap="square" lIns="0" tIns="0" rIns="0" bIns="0" rtlCol="0" anchor="t"/>
           <a:lstStyle/>
           <a:p>
-            <a:pPr indent="0" marL="0">
+            <a:pPr marL="0" indent="0">
               <a:buNone/>
             </a:pPr>
             <a:r>
@@ -2233,6 +2042,13 @@
             <a:prstDash val="solid"/>
           </a:ln>
         </p:spPr>
+        <p:txBody>
+          <a:bodyPr/>
+          <a:lstStyle/>
+          <a:p>
+            <a:endParaRPr lang="pt-BR"/>
+          </a:p>
+        </p:txBody>
       </p:sp>
       <p:sp>
         <p:nvSpPr>
@@ -2258,6 +2074,13 @@
             <a:prstDash val="solid"/>
           </a:ln>
         </p:spPr>
+        <p:txBody>
+          <a:bodyPr/>
+          <a:lstStyle/>
+          <a:p>
+            <a:endParaRPr lang="pt-BR"/>
+          </a:p>
+        </p:txBody>
       </p:sp>
       <p:sp>
         <p:nvSpPr>
@@ -2280,7 +2103,7 @@
           <a:bodyPr wrap="square" lIns="0" tIns="0" rIns="0" bIns="0" rtlCol="0" anchor="ctr"/>
           <a:lstStyle/>
           <a:p>
-            <a:pPr algn="ctr" indent="0" marL="0">
+            <a:pPr marL="0" indent="0" algn="ctr">
               <a:buNone/>
             </a:pPr>
             <a:r>
@@ -2319,7 +2142,7 @@
           <a:bodyPr wrap="square" lIns="0" tIns="0" rIns="0" bIns="0" rtlCol="0" anchor="t"/>
           <a:lstStyle/>
           <a:p>
-            <a:pPr indent="0" marL="0">
+            <a:pPr marL="0" indent="0">
               <a:lnSpc>
                 <a:spcPct val="100000"/>
               </a:lnSpc>
@@ -2361,7 +2184,7 @@
           <a:bodyPr wrap="square" lIns="0" tIns="0" rIns="0" bIns="0" rtlCol="0" anchor="t"/>
           <a:lstStyle/>
           <a:p>
-            <a:pPr indent="0" marL="0">
+            <a:pPr marL="0" indent="0">
               <a:lnSpc>
                 <a:spcPct val="100000"/>
               </a:lnSpc>
@@ -2403,7 +2226,7 @@
           <a:bodyPr wrap="square" lIns="0" tIns="0" rIns="0" bIns="0" rtlCol="0" anchor="t"/>
           <a:lstStyle/>
           <a:p>
-            <a:pPr indent="0" marL="0">
+            <a:pPr marL="0" indent="0">
               <a:lnSpc>
                 <a:spcPct val="100000"/>
               </a:lnSpc>
@@ -2450,6 +2273,13 @@
             <a:prstDash val="solid"/>
           </a:ln>
         </p:spPr>
+        <p:txBody>
+          <a:bodyPr/>
+          <a:lstStyle/>
+          <a:p>
+            <a:endParaRPr lang="pt-BR"/>
+          </a:p>
+        </p:txBody>
       </p:sp>
       <p:sp>
         <p:nvSpPr>
@@ -2475,6 +2305,13 @@
             <a:prstDash val="solid"/>
           </a:ln>
         </p:spPr>
+        <p:txBody>
+          <a:bodyPr/>
+          <a:lstStyle/>
+          <a:p>
+            <a:endParaRPr lang="pt-BR"/>
+          </a:p>
+        </p:txBody>
       </p:sp>
       <p:sp>
         <p:nvSpPr>
@@ -2497,7 +2334,7 @@
           <a:bodyPr wrap="square" lIns="0" tIns="0" rIns="0" bIns="0" rtlCol="0" anchor="ctr"/>
           <a:lstStyle/>
           <a:p>
-            <a:pPr algn="ctr" indent="0" marL="0">
+            <a:pPr marL="0" indent="0" algn="ctr">
               <a:buNone/>
             </a:pPr>
             <a:r>
@@ -2536,7 +2373,7 @@
           <a:bodyPr wrap="square" lIns="0" tIns="0" rIns="0" bIns="0" rtlCol="0" anchor="t"/>
           <a:lstStyle/>
           <a:p>
-            <a:pPr indent="0" marL="0">
+            <a:pPr marL="0" indent="0">
               <a:lnSpc>
                 <a:spcPct val="100000"/>
               </a:lnSpc>
@@ -2578,7 +2415,7 @@
           <a:bodyPr wrap="square" lIns="0" tIns="0" rIns="0" bIns="0" rtlCol="0" anchor="t"/>
           <a:lstStyle/>
           <a:p>
-            <a:pPr indent="0" marL="0">
+            <a:pPr marL="0" indent="0">
               <a:lnSpc>
                 <a:spcPct val="100000"/>
               </a:lnSpc>
@@ -2620,7 +2457,7 @@
           <a:bodyPr wrap="square" lIns="0" tIns="0" rIns="0" bIns="0" rtlCol="0" anchor="t"/>
           <a:lstStyle/>
           <a:p>
-            <a:pPr indent="0" marL="0">
+            <a:pPr marL="0" indent="0">
               <a:lnSpc>
                 <a:spcPct val="100000"/>
               </a:lnSpc>
@@ -2667,6 +2504,13 @@
             <a:prstDash val="solid"/>
           </a:ln>
         </p:spPr>
+        <p:txBody>
+          <a:bodyPr/>
+          <a:lstStyle/>
+          <a:p>
+            <a:endParaRPr lang="pt-BR"/>
+          </a:p>
+        </p:txBody>
       </p:sp>
       <p:sp>
         <p:nvSpPr>
@@ -2692,6 +2536,13 @@
             <a:prstDash val="solid"/>
           </a:ln>
         </p:spPr>
+        <p:txBody>
+          <a:bodyPr/>
+          <a:lstStyle/>
+          <a:p>
+            <a:endParaRPr lang="pt-BR"/>
+          </a:p>
+        </p:txBody>
       </p:sp>
       <p:sp>
         <p:nvSpPr>
@@ -2714,7 +2565,7 @@
           <a:bodyPr wrap="square" lIns="0" tIns="0" rIns="0" bIns="0" rtlCol="0" anchor="ctr"/>
           <a:lstStyle/>
           <a:p>
-            <a:pPr algn="ctr" indent="0" marL="0">
+            <a:pPr marL="0" indent="0" algn="ctr">
               <a:buNone/>
             </a:pPr>
             <a:r>
@@ -2753,7 +2604,7 @@
           <a:bodyPr wrap="square" lIns="0" tIns="0" rIns="0" bIns="0" rtlCol="0" anchor="t"/>
           <a:lstStyle/>
           <a:p>
-            <a:pPr indent="0" marL="0">
+            <a:pPr marL="0" indent="0">
               <a:lnSpc>
                 <a:spcPct val="100000"/>
               </a:lnSpc>
@@ -2795,7 +2646,7 @@
           <a:bodyPr wrap="square" lIns="0" tIns="0" rIns="0" bIns="0" rtlCol="0" anchor="t"/>
           <a:lstStyle/>
           <a:p>
-            <a:pPr indent="0" marL="0">
+            <a:pPr marL="0" indent="0">
               <a:lnSpc>
                 <a:spcPct val="100000"/>
               </a:lnSpc>
@@ -2837,7 +2688,7 @@
           <a:bodyPr wrap="square" lIns="0" tIns="0" rIns="0" bIns="0" rtlCol="0" anchor="t"/>
           <a:lstStyle/>
           <a:p>
-            <a:pPr indent="0" marL="0">
+            <a:pPr marL="0" indent="0">
               <a:lnSpc>
                 <a:spcPct val="100000"/>
               </a:lnSpc>
@@ -2884,6 +2735,13 @@
             <a:prstDash val="solid"/>
           </a:ln>
         </p:spPr>
+        <p:txBody>
+          <a:bodyPr/>
+          <a:lstStyle/>
+          <a:p>
+            <a:endParaRPr lang="pt-BR"/>
+          </a:p>
+        </p:txBody>
       </p:sp>
       <p:sp>
         <p:nvSpPr>
@@ -2909,6 +2767,13 @@
             <a:prstDash val="solid"/>
           </a:ln>
         </p:spPr>
+        <p:txBody>
+          <a:bodyPr/>
+          <a:lstStyle/>
+          <a:p>
+            <a:endParaRPr lang="pt-BR"/>
+          </a:p>
+        </p:txBody>
       </p:sp>
       <p:sp>
         <p:nvSpPr>
@@ -2931,7 +2796,7 @@
           <a:bodyPr wrap="square" lIns="0" tIns="0" rIns="0" bIns="0" rtlCol="0" anchor="ctr"/>
           <a:lstStyle/>
           <a:p>
-            <a:pPr algn="ctr" indent="0" marL="0">
+            <a:pPr marL="0" indent="0" algn="ctr">
               <a:buNone/>
             </a:pPr>
             <a:r>
@@ -2970,7 +2835,7 @@
           <a:bodyPr wrap="square" lIns="0" tIns="0" rIns="0" bIns="0" rtlCol="0" anchor="t"/>
           <a:lstStyle/>
           <a:p>
-            <a:pPr indent="0" marL="0">
+            <a:pPr marL="0" indent="0">
               <a:lnSpc>
                 <a:spcPct val="100000"/>
               </a:lnSpc>
@@ -3012,7 +2877,7 @@
           <a:bodyPr wrap="square" lIns="0" tIns="0" rIns="0" bIns="0" rtlCol="0" anchor="t"/>
           <a:lstStyle/>
           <a:p>
-            <a:pPr indent="0" marL="0">
+            <a:pPr marL="0" indent="0">
               <a:lnSpc>
                 <a:spcPct val="100000"/>
               </a:lnSpc>
@@ -3054,7 +2919,7 @@
           <a:bodyPr wrap="square" lIns="0" tIns="0" rIns="0" bIns="0" rtlCol="0" anchor="t"/>
           <a:lstStyle/>
           <a:p>
-            <a:pPr indent="0" marL="0">
+            <a:pPr marL="0" indent="0">
               <a:lnSpc>
                 <a:spcPct val="100000"/>
               </a:lnSpc>
@@ -3096,7 +2961,7 @@
           <a:bodyPr wrap="square" lIns="0" tIns="0" rIns="0" bIns="0" rtlCol="0" anchor="t"/>
           <a:lstStyle/>
           <a:p>
-            <a:pPr indent="0" marL="0">
+            <a:pPr marL="0" indent="0">
               <a:buNone/>
             </a:pPr>
             <a:r>
@@ -3135,7 +3000,7 @@
           <a:bodyPr wrap="square" lIns="0" tIns="0" rIns="0" bIns="0" rtlCol="0" anchor="t"/>
           <a:lstStyle/>
           <a:p>
-            <a:pPr algn="r" indent="0" marL="0">
+            <a:pPr marL="0" indent="0" algn="r">
               <a:buNone/>
             </a:pPr>
             <a:r>
@@ -3169,6 +3034,7 @@
         <a:solidFill>
           <a:srgbClr val="FAF9F7"/>
         </a:solidFill>
+        <a:effectLst/>
       </p:bgPr>
     </p:bg>
     <p:spTree>
@@ -3206,7 +3072,7 @@
           <a:bodyPr wrap="square" lIns="0" tIns="0" rIns="0" bIns="0" rtlCol="0" anchor="ctr"/>
           <a:lstStyle/>
           <a:p>
-            <a:pPr indent="0" marL="0">
+            <a:pPr marL="0" indent="0">
               <a:buNone/>
             </a:pPr>
             <a:r>
@@ -3250,6 +3116,13 @@
             <a:prstDash val="solid"/>
           </a:ln>
         </p:spPr>
+        <p:txBody>
+          <a:bodyPr/>
+          <a:lstStyle/>
+          <a:p>
+            <a:endParaRPr lang="pt-BR"/>
+          </a:p>
+        </p:txBody>
       </p:sp>
       <p:sp>
         <p:nvSpPr>
@@ -3272,7 +3145,7 @@
           <a:bodyPr wrap="square" lIns="0" tIns="0" rIns="0" bIns="0" rtlCol="0" anchor="ctr"/>
           <a:lstStyle/>
           <a:p>
-            <a:pPr indent="0" marL="0">
+            <a:pPr marL="0" indent="0">
               <a:buNone/>
             </a:pPr>
             <a:r>
@@ -3311,7 +3184,7 @@
           <a:bodyPr wrap="square" lIns="0" tIns="0" rIns="0" bIns="0" rtlCol="0" anchor="t"/>
           <a:lstStyle/>
           <a:p>
-            <a:pPr indent="0" marL="0">
+            <a:pPr marL="0" indent="0">
               <a:buNone/>
             </a:pPr>
             <a:r>
@@ -3350,7 +3223,7 @@
           <a:bodyPr wrap="square" lIns="0" tIns="0" rIns="0" bIns="0" rtlCol="0" anchor="t"/>
           <a:lstStyle/>
           <a:p>
-            <a:pPr indent="0" marL="0">
+            <a:pPr marL="0" indent="0">
               <a:lnSpc>
                 <a:spcPct val="100000"/>
               </a:lnSpc>
@@ -3397,6 +3270,13 @@
             <a:prstDash val="solid"/>
           </a:ln>
         </p:spPr>
+        <p:txBody>
+          <a:bodyPr/>
+          <a:lstStyle/>
+          <a:p>
+            <a:endParaRPr lang="pt-BR"/>
+          </a:p>
+        </p:txBody>
       </p:sp>
       <p:sp>
         <p:nvSpPr>
@@ -3419,7 +3299,7 @@
           <a:bodyPr wrap="square" lIns="0" tIns="0" rIns="0" bIns="0" rtlCol="0" anchor="ctr"/>
           <a:lstStyle/>
           <a:p>
-            <a:pPr indent="0" marL="0">
+            <a:pPr marL="0" indent="0">
               <a:buNone/>
             </a:pPr>
             <a:r>
@@ -3458,7 +3338,7 @@
           <a:bodyPr wrap="square" lIns="0" tIns="0" rIns="0" bIns="0" rtlCol="0" anchor="t"/>
           <a:lstStyle/>
           <a:p>
-            <a:pPr indent="0" marL="0">
+            <a:pPr marL="0" indent="0">
               <a:buNone/>
             </a:pPr>
             <a:r>
@@ -3497,7 +3377,7 @@
           <a:bodyPr wrap="square" lIns="0" tIns="0" rIns="0" bIns="0" rtlCol="0" anchor="t"/>
           <a:lstStyle/>
           <a:p>
-            <a:pPr indent="0" marL="0">
+            <a:pPr marL="0" indent="0">
               <a:lnSpc>
                 <a:spcPct val="100000"/>
               </a:lnSpc>
@@ -3544,6 +3424,13 @@
             <a:prstDash val="solid"/>
           </a:ln>
         </p:spPr>
+        <p:txBody>
+          <a:bodyPr/>
+          <a:lstStyle/>
+          <a:p>
+            <a:endParaRPr lang="pt-BR"/>
+          </a:p>
+        </p:txBody>
       </p:sp>
       <p:sp>
         <p:nvSpPr>
@@ -3566,7 +3453,7 @@
           <a:bodyPr wrap="square" lIns="0" tIns="0" rIns="0" bIns="0" rtlCol="0" anchor="ctr"/>
           <a:lstStyle/>
           <a:p>
-            <a:pPr indent="0" marL="0">
+            <a:pPr marL="0" indent="0">
               <a:buNone/>
             </a:pPr>
             <a:r>
@@ -3605,7 +3492,7 @@
           <a:bodyPr wrap="square" lIns="0" tIns="0" rIns="0" bIns="0" rtlCol="0" anchor="t"/>
           <a:lstStyle/>
           <a:p>
-            <a:pPr indent="0" marL="0">
+            <a:pPr marL="0" indent="0">
               <a:buNone/>
             </a:pPr>
             <a:r>
@@ -3644,7 +3531,7 @@
           <a:bodyPr wrap="square" lIns="0" tIns="0" rIns="0" bIns="0" rtlCol="0" anchor="t"/>
           <a:lstStyle/>
           <a:p>
-            <a:pPr indent="0" marL="0">
+            <a:pPr marL="0" indent="0">
               <a:lnSpc>
                 <a:spcPct val="100000"/>
               </a:lnSpc>
@@ -3691,6 +3578,13 @@
             <a:prstDash val="solid"/>
           </a:ln>
         </p:spPr>
+        <p:txBody>
+          <a:bodyPr/>
+          <a:lstStyle/>
+          <a:p>
+            <a:endParaRPr lang="pt-BR"/>
+          </a:p>
+        </p:txBody>
       </p:sp>
       <p:sp>
         <p:nvSpPr>
@@ -3713,7 +3607,7 @@
           <a:bodyPr wrap="square" lIns="0" tIns="0" rIns="0" bIns="0" rtlCol="0" anchor="ctr"/>
           <a:lstStyle/>
           <a:p>
-            <a:pPr indent="0" marL="0">
+            <a:pPr marL="0" indent="0">
               <a:buNone/>
             </a:pPr>
             <a:r>
@@ -3752,7 +3646,7 @@
           <a:bodyPr wrap="square" lIns="0" tIns="0" rIns="0" bIns="0" rtlCol="0" anchor="t"/>
           <a:lstStyle/>
           <a:p>
-            <a:pPr indent="0" marL="0">
+            <a:pPr marL="0" indent="0">
               <a:buNone/>
             </a:pPr>
             <a:r>
@@ -3791,7 +3685,7 @@
           <a:bodyPr wrap="square" lIns="0" tIns="0" rIns="0" bIns="0" rtlCol="0" anchor="t"/>
           <a:lstStyle/>
           <a:p>
-            <a:pPr indent="0" marL="0">
+            <a:pPr marL="0" indent="0">
               <a:lnSpc>
                 <a:spcPct val="100000"/>
               </a:lnSpc>
@@ -3838,6 +3732,13 @@
             <a:prstDash val="solid"/>
           </a:ln>
         </p:spPr>
+        <p:txBody>
+          <a:bodyPr/>
+          <a:lstStyle/>
+          <a:p>
+            <a:endParaRPr lang="pt-BR"/>
+          </a:p>
+        </p:txBody>
       </p:sp>
       <p:sp>
         <p:nvSpPr>
@@ -3860,7 +3761,7 @@
           <a:bodyPr wrap="square" lIns="0" tIns="0" rIns="0" bIns="0" rtlCol="0" anchor="ctr"/>
           <a:lstStyle/>
           <a:p>
-            <a:pPr indent="0" marL="0">
+            <a:pPr marL="0" indent="0">
               <a:buNone/>
             </a:pPr>
             <a:r>
@@ -3899,7 +3800,7 @@
           <a:bodyPr wrap="square" lIns="0" tIns="0" rIns="0" bIns="0" rtlCol="0" anchor="t"/>
           <a:lstStyle/>
           <a:p>
-            <a:pPr indent="0" marL="0">
+            <a:pPr marL="0" indent="0">
               <a:buNone/>
             </a:pPr>
             <a:r>
@@ -3938,7 +3839,7 @@
           <a:bodyPr wrap="square" lIns="0" tIns="0" rIns="0" bIns="0" rtlCol="0" anchor="t"/>
           <a:lstStyle/>
           <a:p>
-            <a:pPr indent="0" marL="0">
+            <a:pPr marL="0" indent="0">
               <a:lnSpc>
                 <a:spcPct val="100000"/>
               </a:lnSpc>
@@ -3985,6 +3886,13 @@
             <a:prstDash val="solid"/>
           </a:ln>
         </p:spPr>
+        <p:txBody>
+          <a:bodyPr/>
+          <a:lstStyle/>
+          <a:p>
+            <a:endParaRPr lang="pt-BR"/>
+          </a:p>
+        </p:txBody>
       </p:sp>
       <p:sp>
         <p:nvSpPr>
@@ -4007,7 +3915,7 @@
           <a:bodyPr wrap="square" lIns="0" tIns="0" rIns="0" bIns="0" rtlCol="0" anchor="ctr"/>
           <a:lstStyle/>
           <a:p>
-            <a:pPr indent="0" marL="0">
+            <a:pPr marL="0" indent="0">
               <a:buNone/>
             </a:pPr>
             <a:r>
@@ -4046,7 +3954,7 @@
           <a:bodyPr wrap="square" lIns="0" tIns="0" rIns="0" bIns="0" rtlCol="0" anchor="t"/>
           <a:lstStyle/>
           <a:p>
-            <a:pPr indent="0" marL="0">
+            <a:pPr marL="0" indent="0">
               <a:buNone/>
             </a:pPr>
             <a:r>
@@ -4085,7 +3993,7 @@
           <a:bodyPr wrap="square" lIns="0" tIns="0" rIns="0" bIns="0" rtlCol="0" anchor="t"/>
           <a:lstStyle/>
           <a:p>
-            <a:pPr indent="0" marL="0">
+            <a:pPr marL="0" indent="0">
               <a:lnSpc>
                 <a:spcPct val="100000"/>
               </a:lnSpc>
@@ -4127,7 +4035,7 @@
           <a:bodyPr wrap="square" lIns="0" tIns="0" rIns="0" bIns="0" rtlCol="0" anchor="t"/>
           <a:lstStyle/>
           <a:p>
-            <a:pPr indent="0" marL="0">
+            <a:pPr marL="0" indent="0">
               <a:buNone/>
             </a:pPr>
             <a:r>
@@ -4174,6 +4082,13 @@
             <a:prstDash val="solid"/>
           </a:ln>
         </p:spPr>
+        <p:txBody>
+          <a:bodyPr/>
+          <a:lstStyle/>
+          <a:p>
+            <a:endParaRPr lang="pt-BR"/>
+          </a:p>
+        </p:txBody>
       </p:sp>
       <p:sp>
         <p:nvSpPr>
@@ -4196,11 +4111,11 @@
           <a:bodyPr wrap="square" lIns="0" tIns="0" rIns="0" bIns="0" rtlCol="0" anchor="ctr"/>
           <a:lstStyle/>
           <a:p>
-            <a:pPr indent="0" marL="0">
-              <a:buNone/>
-            </a:pPr>
-            <a:r>
-              <a:rPr lang="en-US" sz="1000" b="1" spc="120" kern="0" dirty="0">
+            <a:pPr marL="0" indent="0">
+              <a:buNone/>
+            </a:pPr>
+            <a:r>
+              <a:rPr lang="en-US" sz="1000" b="1" kern="0" spc="120" dirty="0">
                 <a:solidFill>
                   <a:srgbClr val="D4622A"/>
                 </a:solidFill>
@@ -4238,6 +4153,13 @@
             <a:prstDash val="solid"/>
           </a:ln>
         </p:spPr>
+        <p:txBody>
+          <a:bodyPr/>
+          <a:lstStyle/>
+          <a:p>
+            <a:endParaRPr lang="pt-BR"/>
+          </a:p>
+        </p:txBody>
       </p:sp>
       <p:sp>
         <p:nvSpPr>
@@ -4260,7 +4182,7 @@
           <a:bodyPr wrap="square" lIns="0" tIns="0" rIns="0" bIns="0" rtlCol="0" anchor="t"/>
           <a:lstStyle/>
           <a:p>
-            <a:pPr indent="0" marL="0">
+            <a:pPr marL="0" indent="0">
               <a:lnSpc>
                 <a:spcPct val="100000"/>
               </a:lnSpc>
@@ -4305,6 +4227,13 @@
             <a:prstDash val="solid"/>
           </a:ln>
         </p:spPr>
+        <p:txBody>
+          <a:bodyPr/>
+          <a:lstStyle/>
+          <a:p>
+            <a:endParaRPr lang="pt-BR"/>
+          </a:p>
+        </p:txBody>
       </p:sp>
       <p:sp>
         <p:nvSpPr>
@@ -4327,7 +4256,7 @@
           <a:bodyPr wrap="square" lIns="0" tIns="0" rIns="0" bIns="0" rtlCol="0" anchor="t"/>
           <a:lstStyle/>
           <a:p>
-            <a:pPr indent="0" marL="0">
+            <a:pPr marL="0" indent="0">
               <a:lnSpc>
                 <a:spcPct val="100000"/>
               </a:lnSpc>
@@ -4372,6 +4301,13 @@
             <a:prstDash val="solid"/>
           </a:ln>
         </p:spPr>
+        <p:txBody>
+          <a:bodyPr/>
+          <a:lstStyle/>
+          <a:p>
+            <a:endParaRPr lang="pt-BR"/>
+          </a:p>
+        </p:txBody>
       </p:sp>
       <p:sp>
         <p:nvSpPr>
@@ -4394,7 +4330,7 @@
           <a:bodyPr wrap="square" lIns="0" tIns="0" rIns="0" bIns="0" rtlCol="0" anchor="t"/>
           <a:lstStyle/>
           <a:p>
-            <a:pPr indent="0" marL="0">
+            <a:pPr marL="0" indent="0">
               <a:lnSpc>
                 <a:spcPct val="100000"/>
               </a:lnSpc>
@@ -4439,6 +4375,13 @@
             <a:prstDash val="solid"/>
           </a:ln>
         </p:spPr>
+        <p:txBody>
+          <a:bodyPr/>
+          <a:lstStyle/>
+          <a:p>
+            <a:endParaRPr lang="pt-BR"/>
+          </a:p>
+        </p:txBody>
       </p:sp>
       <p:sp>
         <p:nvSpPr>
@@ -4461,7 +4404,7 @@
           <a:bodyPr wrap="square" lIns="0" tIns="0" rIns="0" bIns="0" rtlCol="0" anchor="t"/>
           <a:lstStyle/>
           <a:p>
-            <a:pPr indent="0" marL="0">
+            <a:pPr marL="0" indent="0">
               <a:lnSpc>
                 <a:spcPct val="100000"/>
               </a:lnSpc>
@@ -4506,6 +4449,13 @@
             <a:prstDash val="solid"/>
           </a:ln>
         </p:spPr>
+        <p:txBody>
+          <a:bodyPr/>
+          <a:lstStyle/>
+          <a:p>
+            <a:endParaRPr lang="pt-BR"/>
+          </a:p>
+        </p:txBody>
       </p:sp>
       <p:sp>
         <p:nvSpPr>
@@ -4528,7 +4478,7 @@
           <a:bodyPr wrap="square" lIns="0" tIns="0" rIns="0" bIns="0" rtlCol="0" anchor="t"/>
           <a:lstStyle/>
           <a:p>
-            <a:pPr indent="0" marL="0">
+            <a:pPr marL="0" indent="0">
               <a:lnSpc>
                 <a:spcPct val="100000"/>
               </a:lnSpc>
@@ -4570,7 +4520,7 @@
           <a:bodyPr wrap="square" lIns="0" tIns="0" rIns="0" bIns="0" rtlCol="0" anchor="t"/>
           <a:lstStyle/>
           <a:p>
-            <a:pPr algn="r" indent="0" marL="0">
+            <a:pPr marL="0" indent="0" algn="r">
               <a:buNone/>
             </a:pPr>
             <a:r>
@@ -4604,6 +4554,7 @@
         <a:solidFill>
           <a:srgbClr val="14120F"/>
         </a:solidFill>
+        <a:effectLst/>
       </p:bgPr>
     </p:bg>
     <p:spTree>
@@ -4641,7 +4592,7 @@
           <a:bodyPr wrap="square" lIns="0" tIns="0" rIns="0" bIns="0" rtlCol="0" anchor="ctr"/>
           <a:lstStyle/>
           <a:p>
-            <a:pPr indent="0" marL="0">
+            <a:pPr marL="0" indent="0">
               <a:buNone/>
             </a:pPr>
             <a:r>
@@ -4680,22 +4631,16 @@
           <a:bodyPr wrap="square" lIns="0" tIns="0" rIns="0" bIns="0" rtlCol="0" anchor="t"/>
           <a:lstStyle/>
           <a:p>
-            <a:pPr indent="0" marL="0">
-              <a:buNone/>
-            </a:pPr>
             <a:r>
               <a:rPr lang="en-US" sz="1600" b="1" dirty="0">
                 <a:solidFill>
                   <a:srgbClr val="A8321F"/>
                 </a:solidFill>
-                <a:highlight>
-                  <a:srgbClr val="FDF0ED"/>
-                </a:highlight>
-                <a:latin typeface="Calibri" pitchFamily="34" charset="0"/>
-                <a:ea typeface="Calibri" pitchFamily="34" charset="-122"/>
-                <a:cs typeface="Calibri" pitchFamily="34" charset="-120"/>
-              </a:rPr>
-              <a:t>[PREENCHER: endereço da loja no Vercel]</a:t>
+                <a:latin typeface="Calibri" pitchFamily="34" charset="0"/>
+                <a:ea typeface="Calibri" pitchFamily="34" charset="-122"/>
+                <a:cs typeface="Calibri" pitchFamily="34" charset="-120"/>
+              </a:rPr>
+              <a:t>https://projeto-nivaldo-nosql.vercel.app/</a:t>
             </a:r>
             <a:endParaRPr lang="en-US" sz="1600" dirty="0"/>
           </a:p>
@@ -4725,6 +4670,13 @@
             <a:prstDash val="solid"/>
           </a:ln>
         </p:spPr>
+        <p:txBody>
+          <a:bodyPr/>
+          <a:lstStyle/>
+          <a:p>
+            <a:endParaRPr lang="pt-BR"/>
+          </a:p>
+        </p:txBody>
       </p:sp>
       <p:sp>
         <p:nvSpPr>
@@ -4747,7 +4699,7 @@
           <a:bodyPr wrap="square" lIns="0" tIns="0" rIns="0" bIns="0" rtlCol="0" anchor="ctr"/>
           <a:lstStyle/>
           <a:p>
-            <a:pPr algn="ctr" indent="0" marL="0">
+            <a:pPr marL="0" indent="0" algn="ctr">
               <a:buNone/>
             </a:pPr>
             <a:r>
@@ -4786,7 +4738,7 @@
           <a:bodyPr wrap="square" lIns="0" tIns="0" rIns="0" bIns="0" rtlCol="0" anchor="ctr"/>
           <a:lstStyle/>
           <a:p>
-            <a:pPr indent="0" marL="0">
+            <a:pPr marL="0" indent="0">
               <a:lnSpc>
                 <a:spcPct val="100000"/>
               </a:lnSpc>
@@ -4831,6 +4783,13 @@
             <a:prstDash val="solid"/>
           </a:ln>
         </p:spPr>
+        <p:txBody>
+          <a:bodyPr/>
+          <a:lstStyle/>
+          <a:p>
+            <a:endParaRPr lang="pt-BR"/>
+          </a:p>
+        </p:txBody>
       </p:sp>
       <p:sp>
         <p:nvSpPr>
@@ -4853,7 +4812,7 @@
           <a:bodyPr wrap="square" lIns="0" tIns="0" rIns="0" bIns="0" rtlCol="0" anchor="ctr"/>
           <a:lstStyle/>
           <a:p>
-            <a:pPr algn="ctr" indent="0" marL="0">
+            <a:pPr marL="0" indent="0" algn="ctr">
               <a:buNone/>
             </a:pPr>
             <a:r>
@@ -4892,7 +4851,7 @@
           <a:bodyPr wrap="square" lIns="0" tIns="0" rIns="0" bIns="0" rtlCol="0" anchor="ctr"/>
           <a:lstStyle/>
           <a:p>
-            <a:pPr indent="0" marL="0">
+            <a:pPr marL="0" indent="0">
               <a:lnSpc>
                 <a:spcPct val="100000"/>
               </a:lnSpc>
@@ -4937,6 +4896,13 @@
             <a:prstDash val="solid"/>
           </a:ln>
         </p:spPr>
+        <p:txBody>
+          <a:bodyPr/>
+          <a:lstStyle/>
+          <a:p>
+            <a:endParaRPr lang="pt-BR"/>
+          </a:p>
+        </p:txBody>
       </p:sp>
       <p:sp>
         <p:nvSpPr>
@@ -4959,7 +4925,7 @@
           <a:bodyPr wrap="square" lIns="0" tIns="0" rIns="0" bIns="0" rtlCol="0" anchor="ctr"/>
           <a:lstStyle/>
           <a:p>
-            <a:pPr algn="ctr" indent="0" marL="0">
+            <a:pPr marL="0" indent="0" algn="ctr">
               <a:buNone/>
             </a:pPr>
             <a:r>
@@ -4998,7 +4964,7 @@
           <a:bodyPr wrap="square" lIns="0" tIns="0" rIns="0" bIns="0" rtlCol="0" anchor="ctr"/>
           <a:lstStyle/>
           <a:p>
-            <a:pPr indent="0" marL="0">
+            <a:pPr marL="0" indent="0">
               <a:lnSpc>
                 <a:spcPct val="100000"/>
               </a:lnSpc>
@@ -5043,6 +5009,13 @@
             <a:prstDash val="solid"/>
           </a:ln>
         </p:spPr>
+        <p:txBody>
+          <a:bodyPr/>
+          <a:lstStyle/>
+          <a:p>
+            <a:endParaRPr lang="pt-BR"/>
+          </a:p>
+        </p:txBody>
       </p:sp>
       <p:sp>
         <p:nvSpPr>
@@ -5065,7 +5038,7 @@
           <a:bodyPr wrap="square" lIns="0" tIns="0" rIns="0" bIns="0" rtlCol="0" anchor="ctr"/>
           <a:lstStyle/>
           <a:p>
-            <a:pPr algn="ctr" indent="0" marL="0">
+            <a:pPr marL="0" indent="0" algn="ctr">
               <a:buNone/>
             </a:pPr>
             <a:r>
@@ -5104,7 +5077,7 @@
           <a:bodyPr wrap="square" lIns="0" tIns="0" rIns="0" bIns="0" rtlCol="0" anchor="ctr"/>
           <a:lstStyle/>
           <a:p>
-            <a:pPr indent="0" marL="0">
+            <a:pPr marL="0" indent="0">
               <a:lnSpc>
                 <a:spcPct val="100000"/>
               </a:lnSpc>
@@ -5149,6 +5122,13 @@
             <a:prstDash val="solid"/>
           </a:ln>
         </p:spPr>
+        <p:txBody>
+          <a:bodyPr/>
+          <a:lstStyle/>
+          <a:p>
+            <a:endParaRPr lang="pt-BR"/>
+          </a:p>
+        </p:txBody>
       </p:sp>
       <p:sp>
         <p:nvSpPr>
@@ -5171,7 +5151,7 @@
           <a:bodyPr wrap="square" lIns="0" tIns="0" rIns="0" bIns="0" rtlCol="0" anchor="ctr"/>
           <a:lstStyle/>
           <a:p>
-            <a:pPr algn="ctr" indent="0" marL="0">
+            <a:pPr marL="0" indent="0" algn="ctr">
               <a:buNone/>
             </a:pPr>
             <a:r>
@@ -5210,7 +5190,7 @@
           <a:bodyPr wrap="square" lIns="0" tIns="0" rIns="0" bIns="0" rtlCol="0" anchor="ctr"/>
           <a:lstStyle/>
           <a:p>
-            <a:pPr indent="0" marL="0">
+            <a:pPr marL="0" indent="0">
               <a:lnSpc>
                 <a:spcPct val="100000"/>
               </a:lnSpc>
@@ -5252,7 +5232,7 @@
           <a:bodyPr wrap="square" lIns="0" tIns="0" rIns="0" bIns="0" rtlCol="0" anchor="t"/>
           <a:lstStyle/>
           <a:p>
-            <a:pPr indent="0" marL="0">
+            <a:pPr marL="0" indent="0">
               <a:buNone/>
             </a:pPr>
             <a:r>
@@ -5296,17 +5276,24 @@
             <a:prstDash val="solid"/>
           </a:ln>
         </p:spPr>
+        <p:txBody>
+          <a:bodyPr/>
+          <a:lstStyle/>
+          <a:p>
+            <a:endParaRPr lang="pt-BR"/>
+          </a:p>
+        </p:txBody>
       </p:sp>
       <p:pic>
         <p:nvPicPr>
-          <p:cNvPr id="21" name="Image 0" descr="C:\Users\lipef\AppData\Local\Temp\torra_terra_whatsapp_qr.png">    </p:cNvPr>
+          <p:cNvPr id="21" name="Image 0" descr="C:\Users\lipef\AppData\Local\Temp\torra_terra_whatsapp_qr.png"/>
           <p:cNvPicPr>
             <a:picLocks noChangeAspect="1"/>
           </p:cNvPicPr>
           <p:nvPr/>
         </p:nvPicPr>
         <p:blipFill>
-          <a:blip r:embed="rId1"/>
+          <a:blip r:embed="rId3"/>
           <a:stretch>
             <a:fillRect/>
           </a:stretch>
@@ -5342,7 +5329,7 @@
           <a:bodyPr wrap="square" lIns="0" tIns="0" rIns="0" bIns="0" rtlCol="0" anchor="t"/>
           <a:lstStyle/>
           <a:p>
-            <a:pPr algn="ctr" indent="0" marL="0">
+            <a:pPr marL="0" indent="0" algn="ctr">
               <a:buNone/>
             </a:pPr>
             <a:r>
@@ -5354,7 +5341,7 @@
                 <a:ea typeface="Calibri" pitchFamily="34" charset="-122"/>
                 <a:cs typeface="Calibri" pitchFamily="34" charset="-120"/>
               </a:rPr>
-              <a:t>Estoque do Torra &amp; Terra</a:t>
+              <a:t>Torra &amp; Terra</a:t>
             </a:r>
             <a:endParaRPr lang="en-US" sz="1400" dirty="0"/>
           </a:p>
@@ -5381,7 +5368,7 @@
           <a:bodyPr wrap="square" lIns="0" tIns="0" rIns="0" bIns="0" rtlCol="0" anchor="t"/>
           <a:lstStyle/>
           <a:p>
-            <a:pPr algn="ctr" indent="0" marL="0">
+            <a:pPr marL="0" indent="0" algn="ctr">
               <a:lnSpc>
                 <a:spcPct val="100000"/>
               </a:lnSpc>
@@ -5396,7 +5383,29 @@
                 <a:ea typeface="Calibri" pitchFamily="34" charset="-122"/>
                 <a:cs typeface="Calibri" pitchFamily="34" charset="-120"/>
               </a:rPr>
-              <a:t>Aponte a câmera do celular e fale com a gente no WhatsApp.</a:t>
+              <a:t>Aponte a câmera do celular e </a:t>
+            </a:r>
+            <a:r>
+              <a:rPr lang="en-US" sz="1100" dirty="0" err="1">
+                <a:solidFill>
+                  <a:srgbClr val="6B6560"/>
+                </a:solidFill>
+                <a:latin typeface="Calibri" pitchFamily="34" charset="0"/>
+                <a:ea typeface="Calibri" pitchFamily="34" charset="-122"/>
+                <a:cs typeface="Calibri" pitchFamily="34" charset="-120"/>
+              </a:rPr>
+              <a:t>compre</a:t>
+            </a:r>
+            <a:r>
+              <a:rPr lang="en-US" sz="1100" dirty="0">
+                <a:solidFill>
+                  <a:srgbClr val="6B6560"/>
+                </a:solidFill>
+                <a:latin typeface="Calibri" pitchFamily="34" charset="0"/>
+                <a:ea typeface="Calibri" pitchFamily="34" charset="-122"/>
+                <a:cs typeface="Calibri" pitchFamily="34" charset="-120"/>
+              </a:rPr>
+              <a:t> com a gente no WhatsApp.</a:t>
             </a:r>
             <a:endParaRPr lang="en-US" sz="1100" dirty="0"/>
           </a:p>
@@ -5423,7 +5432,7 @@
           <a:bodyPr wrap="square" lIns="0" tIns="0" rIns="0" bIns="0" rtlCol="0" anchor="t"/>
           <a:lstStyle/>
           <a:p>
-            <a:pPr algn="ctr" indent="0" marL="0">
+            <a:pPr marL="0" indent="0" algn="ctr">
               <a:buNone/>
             </a:pPr>
             <a:r>
@@ -5462,7 +5471,7 @@
           <a:bodyPr wrap="square" lIns="0" tIns="0" rIns="0" bIns="0" rtlCol="0" anchor="t"/>
           <a:lstStyle/>
           <a:p>
-            <a:pPr algn="r" indent="0" marL="0">
+            <a:pPr marL="0" indent="0" algn="r">
               <a:buNone/>
             </a:pPr>
             <a:r>
@@ -5496,6 +5505,7 @@
         <a:solidFill>
           <a:srgbClr val="FAF9F7"/>
         </a:solidFill>
+        <a:effectLst/>
       </p:bgPr>
     </p:bg>
     <p:spTree>
@@ -5533,7 +5543,7 @@
           <a:bodyPr wrap="square" lIns="0" tIns="0" rIns="0" bIns="0" rtlCol="0" anchor="ctr"/>
           <a:lstStyle/>
           <a:p>
-            <a:pPr indent="0" marL="0">
+            <a:pPr marL="0" indent="0">
               <a:buNone/>
             </a:pPr>
             <a:r>
@@ -5572,7 +5582,7 @@
           <a:bodyPr wrap="square" lIns="0" tIns="0" rIns="0" bIns="0" rtlCol="0" anchor="t"/>
           <a:lstStyle/>
           <a:p>
-            <a:pPr indent="0" marL="0">
+            <a:pPr marL="0" indent="0">
               <a:buNone/>
             </a:pPr>
             <a:r>
@@ -5616,6 +5626,13 @@
             <a:prstDash val="solid"/>
           </a:ln>
         </p:spPr>
+        <p:txBody>
+          <a:bodyPr/>
+          <a:lstStyle/>
+          <a:p>
+            <a:endParaRPr lang="pt-BR"/>
+          </a:p>
+        </p:txBody>
       </p:sp>
       <p:sp>
         <p:nvSpPr>
@@ -5641,6 +5658,13 @@
             <a:prstDash val="solid"/>
           </a:ln>
         </p:spPr>
+        <p:txBody>
+          <a:bodyPr/>
+          <a:lstStyle/>
+          <a:p>
+            <a:endParaRPr lang="pt-BR"/>
+          </a:p>
+        </p:txBody>
       </p:sp>
       <p:sp>
         <p:nvSpPr>
@@ -5663,7 +5687,7 @@
           <a:bodyPr wrap="square" lIns="0" tIns="0" rIns="0" bIns="0" rtlCol="0" anchor="ctr"/>
           <a:lstStyle/>
           <a:p>
-            <a:pPr algn="ctr" indent="0" marL="0">
+            <a:pPr marL="0" indent="0" algn="ctr">
               <a:buNone/>
             </a:pPr>
             <a:r>
@@ -5702,7 +5726,7 @@
           <a:bodyPr wrap="square" lIns="0" tIns="0" rIns="0" bIns="0" rtlCol="0" anchor="t"/>
           <a:lstStyle/>
           <a:p>
-            <a:pPr indent="0" marL="0">
+            <a:pPr marL="0" indent="0">
               <a:buNone/>
             </a:pPr>
             <a:r>
@@ -5741,7 +5765,7 @@
           <a:bodyPr wrap="square" lIns="0" tIns="0" rIns="0" bIns="0" rtlCol="0" anchor="t"/>
           <a:lstStyle/>
           <a:p>
-            <a:pPr indent="0" marL="0">
+            <a:pPr marL="0" indent="0">
               <a:buNone/>
             </a:pPr>
             <a:r>
@@ -5785,6 +5809,13 @@
             <a:prstDash val="solid"/>
           </a:ln>
         </p:spPr>
+        <p:txBody>
+          <a:bodyPr/>
+          <a:lstStyle/>
+          <a:p>
+            <a:endParaRPr lang="pt-BR"/>
+          </a:p>
+        </p:txBody>
       </p:sp>
       <p:sp>
         <p:nvSpPr>
@@ -5810,6 +5841,13 @@
             <a:prstDash val="solid"/>
           </a:ln>
         </p:spPr>
+        <p:txBody>
+          <a:bodyPr/>
+          <a:lstStyle/>
+          <a:p>
+            <a:endParaRPr lang="pt-BR"/>
+          </a:p>
+        </p:txBody>
       </p:sp>
       <p:sp>
         <p:nvSpPr>
@@ -5832,7 +5870,7 @@
           <a:bodyPr wrap="square" lIns="0" tIns="0" rIns="0" bIns="0" rtlCol="0" anchor="ctr"/>
           <a:lstStyle/>
           <a:p>
-            <a:pPr algn="ctr" indent="0" marL="0">
+            <a:pPr marL="0" indent="0" algn="ctr">
               <a:buNone/>
             </a:pPr>
             <a:r>
@@ -5871,7 +5909,7 @@
           <a:bodyPr wrap="square" lIns="0" tIns="0" rIns="0" bIns="0" rtlCol="0" anchor="t"/>
           <a:lstStyle/>
           <a:p>
-            <a:pPr indent="0" marL="0">
+            <a:pPr marL="0" indent="0">
               <a:buNone/>
             </a:pPr>
             <a:r>
@@ -5910,7 +5948,7 @@
           <a:bodyPr wrap="square" lIns="0" tIns="0" rIns="0" bIns="0" rtlCol="0" anchor="t"/>
           <a:lstStyle/>
           <a:p>
-            <a:pPr indent="0" marL="0">
+            <a:pPr marL="0" indent="0">
               <a:buNone/>
             </a:pPr>
             <a:r>
@@ -5954,6 +5992,13 @@
             <a:prstDash val="solid"/>
           </a:ln>
         </p:spPr>
+        <p:txBody>
+          <a:bodyPr/>
+          <a:lstStyle/>
+          <a:p>
+            <a:endParaRPr lang="pt-BR"/>
+          </a:p>
+        </p:txBody>
       </p:sp>
       <p:sp>
         <p:nvSpPr>
@@ -5979,6 +6024,13 @@
             <a:prstDash val="solid"/>
           </a:ln>
         </p:spPr>
+        <p:txBody>
+          <a:bodyPr/>
+          <a:lstStyle/>
+          <a:p>
+            <a:endParaRPr lang="pt-BR"/>
+          </a:p>
+        </p:txBody>
       </p:sp>
       <p:sp>
         <p:nvSpPr>
@@ -6001,7 +6053,7 @@
           <a:bodyPr wrap="square" lIns="0" tIns="0" rIns="0" bIns="0" rtlCol="0" anchor="ctr"/>
           <a:lstStyle/>
           <a:p>
-            <a:pPr algn="ctr" indent="0" marL="0">
+            <a:pPr marL="0" indent="0" algn="ctr">
               <a:buNone/>
             </a:pPr>
             <a:r>
@@ -6040,7 +6092,7 @@
           <a:bodyPr wrap="square" lIns="0" tIns="0" rIns="0" bIns="0" rtlCol="0" anchor="t"/>
           <a:lstStyle/>
           <a:p>
-            <a:pPr indent="0" marL="0">
+            <a:pPr marL="0" indent="0">
               <a:buNone/>
             </a:pPr>
             <a:r>
@@ -6079,7 +6131,7 @@
           <a:bodyPr wrap="square" lIns="0" tIns="0" rIns="0" bIns="0" rtlCol="0" anchor="t"/>
           <a:lstStyle/>
           <a:p>
-            <a:pPr indent="0" marL="0">
+            <a:pPr marL="0" indent="0">
               <a:buNone/>
             </a:pPr>
             <a:r>
@@ -6123,6 +6175,13 @@
             <a:prstDash val="solid"/>
           </a:ln>
         </p:spPr>
+        <p:txBody>
+          <a:bodyPr/>
+          <a:lstStyle/>
+          <a:p>
+            <a:endParaRPr lang="pt-BR"/>
+          </a:p>
+        </p:txBody>
       </p:sp>
       <p:sp>
         <p:nvSpPr>
@@ -6148,6 +6207,13 @@
             <a:prstDash val="solid"/>
           </a:ln>
         </p:spPr>
+        <p:txBody>
+          <a:bodyPr/>
+          <a:lstStyle/>
+          <a:p>
+            <a:endParaRPr lang="pt-BR"/>
+          </a:p>
+        </p:txBody>
       </p:sp>
       <p:sp>
         <p:nvSpPr>
@@ -6170,7 +6236,7 @@
           <a:bodyPr wrap="square" lIns="0" tIns="0" rIns="0" bIns="0" rtlCol="0" anchor="ctr"/>
           <a:lstStyle/>
           <a:p>
-            <a:pPr algn="ctr" indent="0" marL="0">
+            <a:pPr marL="0" indent="0" algn="ctr">
               <a:buNone/>
             </a:pPr>
             <a:r>
@@ -6209,7 +6275,7 @@
           <a:bodyPr wrap="square" lIns="0" tIns="0" rIns="0" bIns="0" rtlCol="0" anchor="t"/>
           <a:lstStyle/>
           <a:p>
-            <a:pPr indent="0" marL="0">
+            <a:pPr marL="0" indent="0">
               <a:buNone/>
             </a:pPr>
             <a:r>
@@ -6248,7 +6314,7 @@
           <a:bodyPr wrap="square" lIns="0" tIns="0" rIns="0" bIns="0" rtlCol="0" anchor="t"/>
           <a:lstStyle/>
           <a:p>
-            <a:pPr indent="0" marL="0">
+            <a:pPr marL="0" indent="0">
               <a:buNone/>
             </a:pPr>
             <a:r>
@@ -6292,6 +6358,13 @@
             <a:prstDash val="solid"/>
           </a:ln>
         </p:spPr>
+        <p:txBody>
+          <a:bodyPr/>
+          <a:lstStyle/>
+          <a:p>
+            <a:endParaRPr lang="pt-BR"/>
+          </a:p>
+        </p:txBody>
       </p:sp>
       <p:sp>
         <p:nvSpPr>
@@ -6317,6 +6390,13 @@
             <a:prstDash val="solid"/>
           </a:ln>
         </p:spPr>
+        <p:txBody>
+          <a:bodyPr/>
+          <a:lstStyle/>
+          <a:p>
+            <a:endParaRPr lang="pt-BR"/>
+          </a:p>
+        </p:txBody>
       </p:sp>
       <p:sp>
         <p:nvSpPr>
@@ -6339,7 +6419,7 @@
           <a:bodyPr wrap="square" lIns="0" tIns="0" rIns="0" bIns="0" rtlCol="0" anchor="ctr"/>
           <a:lstStyle/>
           <a:p>
-            <a:pPr algn="ctr" indent="0" marL="0">
+            <a:pPr marL="0" indent="0" algn="ctr">
               <a:buNone/>
             </a:pPr>
             <a:r>
@@ -6378,7 +6458,7 @@
           <a:bodyPr wrap="square" lIns="0" tIns="0" rIns="0" bIns="0" rtlCol="0" anchor="t"/>
           <a:lstStyle/>
           <a:p>
-            <a:pPr indent="0" marL="0">
+            <a:pPr marL="0" indent="0">
               <a:buNone/>
             </a:pPr>
             <a:r>
@@ -6417,7 +6497,7 @@
           <a:bodyPr wrap="square" lIns="0" tIns="0" rIns="0" bIns="0" rtlCol="0" anchor="t"/>
           <a:lstStyle/>
           <a:p>
-            <a:pPr indent="0" marL="0">
+            <a:pPr marL="0" indent="0">
               <a:buNone/>
             </a:pPr>
             <a:r>
@@ -6461,6 +6541,13 @@
             <a:prstDash val="solid"/>
           </a:ln>
         </p:spPr>
+        <p:txBody>
+          <a:bodyPr/>
+          <a:lstStyle/>
+          <a:p>
+            <a:endParaRPr lang="pt-BR"/>
+          </a:p>
+        </p:txBody>
       </p:sp>
       <p:sp>
         <p:nvSpPr>
@@ -6486,6 +6573,13 @@
             <a:prstDash val="solid"/>
           </a:ln>
         </p:spPr>
+        <p:txBody>
+          <a:bodyPr/>
+          <a:lstStyle/>
+          <a:p>
+            <a:endParaRPr lang="pt-BR"/>
+          </a:p>
+        </p:txBody>
       </p:sp>
       <p:sp>
         <p:nvSpPr>
@@ -6508,7 +6602,7 @@
           <a:bodyPr wrap="square" lIns="0" tIns="0" rIns="0" bIns="0" rtlCol="0" anchor="ctr"/>
           <a:lstStyle/>
           <a:p>
-            <a:pPr algn="ctr" indent="0" marL="0">
+            <a:pPr marL="0" indent="0" algn="ctr">
               <a:buNone/>
             </a:pPr>
             <a:r>
@@ -6547,7 +6641,7 @@
           <a:bodyPr wrap="square" lIns="0" tIns="0" rIns="0" bIns="0" rtlCol="0" anchor="t"/>
           <a:lstStyle/>
           <a:p>
-            <a:pPr indent="0" marL="0">
+            <a:pPr marL="0" indent="0">
               <a:buNone/>
             </a:pPr>
             <a:r>
@@ -6586,7 +6680,7 @@
           <a:bodyPr wrap="square" lIns="0" tIns="0" rIns="0" bIns="0" rtlCol="0" anchor="t"/>
           <a:lstStyle/>
           <a:p>
-            <a:pPr indent="0" marL="0">
+            <a:pPr marL="0" indent="0">
               <a:buNone/>
             </a:pPr>
             <a:r>
@@ -6630,6 +6724,13 @@
             <a:prstDash val="solid"/>
           </a:ln>
         </p:spPr>
+        <p:txBody>
+          <a:bodyPr/>
+          <a:lstStyle/>
+          <a:p>
+            <a:endParaRPr lang="pt-BR"/>
+          </a:p>
+        </p:txBody>
       </p:sp>
       <p:sp>
         <p:nvSpPr>
@@ -6655,6 +6756,13 @@
             <a:prstDash val="solid"/>
           </a:ln>
         </p:spPr>
+        <p:txBody>
+          <a:bodyPr/>
+          <a:lstStyle/>
+          <a:p>
+            <a:endParaRPr lang="pt-BR"/>
+          </a:p>
+        </p:txBody>
       </p:sp>
       <p:sp>
         <p:nvSpPr>
@@ -6677,7 +6785,7 @@
           <a:bodyPr wrap="square" lIns="0" tIns="0" rIns="0" bIns="0" rtlCol="0" anchor="ctr"/>
           <a:lstStyle/>
           <a:p>
-            <a:pPr algn="ctr" indent="0" marL="0">
+            <a:pPr marL="0" indent="0" algn="ctr">
               <a:buNone/>
             </a:pPr>
             <a:r>
@@ -6716,7 +6824,7 @@
           <a:bodyPr wrap="square" lIns="0" tIns="0" rIns="0" bIns="0" rtlCol="0" anchor="t"/>
           <a:lstStyle/>
           <a:p>
-            <a:pPr indent="0" marL="0">
+            <a:pPr marL="0" indent="0">
               <a:buNone/>
             </a:pPr>
             <a:r>
@@ -6755,7 +6863,7 @@
           <a:bodyPr wrap="square" lIns="0" tIns="0" rIns="0" bIns="0" rtlCol="0" anchor="t"/>
           <a:lstStyle/>
           <a:p>
-            <a:pPr indent="0" marL="0">
+            <a:pPr marL="0" indent="0">
               <a:buNone/>
             </a:pPr>
             <a:r>
@@ -6794,7 +6902,7 @@
           <a:bodyPr wrap="square" lIns="0" tIns="0" rIns="0" bIns="0" rtlCol="0" anchor="ctr"/>
           <a:lstStyle/>
           <a:p>
-            <a:pPr indent="0" marL="0">
+            <a:pPr marL="0" indent="0">
               <a:lnSpc>
                 <a:spcPct val="110000"/>
               </a:lnSpc>
@@ -6836,7 +6944,7 @@
           <a:bodyPr wrap="square" lIns="0" tIns="0" rIns="0" bIns="0" rtlCol="0" anchor="t"/>
           <a:lstStyle/>
           <a:p>
-            <a:pPr algn="r" indent="0" marL="0">
+            <a:pPr marL="0" indent="0" algn="r">
               <a:buNone/>
             </a:pPr>
             <a:r>
@@ -6870,6 +6978,7 @@
         <a:solidFill>
           <a:srgbClr val="FAF9F7"/>
         </a:solidFill>
+        <a:effectLst/>
       </p:bgPr>
     </p:bg>
     <p:spTree>
@@ -6907,7 +7016,7 @@
           <a:bodyPr wrap="square" lIns="0" tIns="0" rIns="0" bIns="0" rtlCol="0" anchor="ctr"/>
           <a:lstStyle/>
           <a:p>
-            <a:pPr indent="0" marL="0">
+            <a:pPr marL="0" indent="0">
               <a:buNone/>
             </a:pPr>
             <a:r>
@@ -6946,7 +7055,7 @@
           <a:bodyPr wrap="square" lIns="0" tIns="0" rIns="0" bIns="0" rtlCol="0" anchor="t"/>
           <a:lstStyle/>
           <a:p>
-            <a:pPr indent="0" marL="0">
+            <a:pPr marL="0" indent="0">
               <a:buNone/>
             </a:pPr>
             <a:r>
@@ -6990,6 +7099,13 @@
             <a:prstDash val="solid"/>
           </a:ln>
         </p:spPr>
+        <p:txBody>
+          <a:bodyPr/>
+          <a:lstStyle/>
+          <a:p>
+            <a:endParaRPr lang="pt-BR"/>
+          </a:p>
+        </p:txBody>
       </p:sp>
       <p:sp>
         <p:nvSpPr>
@@ -7012,7 +7128,7 @@
           <a:bodyPr wrap="square" lIns="0" tIns="0" rIns="0" bIns="0" rtlCol="0" anchor="t"/>
           <a:lstStyle/>
           <a:p>
-            <a:pPr indent="0" marL="0">
+            <a:pPr marL="0" indent="0">
               <a:buNone/>
             </a:pPr>
             <a:r>
@@ -7051,7 +7167,7 @@
           <a:bodyPr wrap="square" lIns="0" tIns="0" rIns="0" bIns="0" rtlCol="0" anchor="t"/>
           <a:lstStyle/>
           <a:p>
-            <a:pPr indent="0" marL="0">
+            <a:pPr marL="0" indent="0">
               <a:lnSpc>
                 <a:spcPct val="105000"/>
               </a:lnSpc>
@@ -7098,6 +7214,13 @@
             <a:prstDash val="solid"/>
           </a:ln>
         </p:spPr>
+        <p:txBody>
+          <a:bodyPr/>
+          <a:lstStyle/>
+          <a:p>
+            <a:endParaRPr lang="pt-BR"/>
+          </a:p>
+        </p:txBody>
       </p:sp>
       <p:sp>
         <p:nvSpPr>
@@ -7120,7 +7243,7 @@
           <a:bodyPr wrap="square" lIns="0" tIns="0" rIns="0" bIns="0" rtlCol="0" anchor="t"/>
           <a:lstStyle/>
           <a:p>
-            <a:pPr indent="0" marL="0">
+            <a:pPr marL="0" indent="0">
               <a:buNone/>
             </a:pPr>
             <a:r>
@@ -7159,7 +7282,7 @@
           <a:bodyPr wrap="square" lIns="0" tIns="0" rIns="0" bIns="0" rtlCol="0" anchor="t"/>
           <a:lstStyle/>
           <a:p>
-            <a:pPr indent="0" marL="0">
+            <a:pPr marL="0" indent="0">
               <a:lnSpc>
                 <a:spcPct val="105000"/>
               </a:lnSpc>
@@ -7206,6 +7329,13 @@
             <a:prstDash val="solid"/>
           </a:ln>
         </p:spPr>
+        <p:txBody>
+          <a:bodyPr/>
+          <a:lstStyle/>
+          <a:p>
+            <a:endParaRPr lang="pt-BR"/>
+          </a:p>
+        </p:txBody>
       </p:sp>
       <p:sp>
         <p:nvSpPr>
@@ -7228,7 +7358,7 @@
           <a:bodyPr wrap="square" lIns="0" tIns="0" rIns="0" bIns="0" rtlCol="0" anchor="t"/>
           <a:lstStyle/>
           <a:p>
-            <a:pPr indent="0" marL="0">
+            <a:pPr marL="0" indent="0">
               <a:buNone/>
             </a:pPr>
             <a:r>
@@ -7267,7 +7397,7 @@
           <a:bodyPr wrap="square" lIns="0" tIns="0" rIns="0" bIns="0" rtlCol="0" anchor="t"/>
           <a:lstStyle/>
           <a:p>
-            <a:pPr indent="0" marL="0">
+            <a:pPr marL="0" indent="0">
               <a:lnSpc>
                 <a:spcPct val="105000"/>
               </a:lnSpc>
@@ -7314,6 +7444,13 @@
             <a:prstDash val="solid"/>
           </a:ln>
         </p:spPr>
+        <p:txBody>
+          <a:bodyPr/>
+          <a:lstStyle/>
+          <a:p>
+            <a:endParaRPr lang="pt-BR"/>
+          </a:p>
+        </p:txBody>
       </p:sp>
       <p:sp>
         <p:nvSpPr>
@@ -7336,11 +7473,11 @@
           <a:bodyPr wrap="square" lIns="0" tIns="0" rIns="0" bIns="0" rtlCol="0" anchor="ctr"/>
           <a:lstStyle/>
           <a:p>
-            <a:pPr indent="0" marL="0">
-              <a:buNone/>
-            </a:pPr>
-            <a:r>
-              <a:rPr lang="en-US" sz="1000" b="1" spc="120" kern="0" dirty="0">
+            <a:pPr marL="0" indent="0">
+              <a:buNone/>
+            </a:pPr>
+            <a:r>
+              <a:rPr lang="en-US" sz="1000" b="1" kern="0" spc="120" dirty="0">
                 <a:solidFill>
                   <a:srgbClr val="D4622A"/>
                 </a:solidFill>
@@ -7375,7 +7512,7 @@
           <a:bodyPr wrap="square" lIns="0" tIns="0" rIns="0" bIns="0" rtlCol="0" anchor="t"/>
           <a:lstStyle/>
           <a:p>
-            <a:pPr indent="0" marL="0">
+            <a:pPr marL="0" indent="0">
               <a:buNone/>
             </a:pPr>
             <a:r>
@@ -7414,7 +7551,7 @@
           <a:bodyPr wrap="square" lIns="0" tIns="0" rIns="0" bIns="0" rtlCol="0" anchor="t"/>
           <a:lstStyle/>
           <a:p>
-            <a:pPr indent="0" marL="0">
+            <a:pPr marL="0" indent="0">
               <a:buNone/>
             </a:pPr>
             <a:r>
@@ -7454,6 +7591,13 @@
             <a:prstDash val="solid"/>
           </a:ln>
         </p:spPr>
+        <p:txBody>
+          <a:bodyPr/>
+          <a:lstStyle/>
+          <a:p>
+            <a:endParaRPr lang="pt-BR"/>
+          </a:p>
+        </p:txBody>
       </p:sp>
       <p:sp>
         <p:nvSpPr>
@@ -7476,7 +7620,7 @@
           <a:bodyPr wrap="square" lIns="0" tIns="0" rIns="0" bIns="0" rtlCol="0" anchor="t"/>
           <a:lstStyle/>
           <a:p>
-            <a:pPr indent="0" marL="0">
+            <a:pPr marL="0" indent="0">
               <a:buNone/>
             </a:pPr>
             <a:r>
@@ -7515,7 +7659,7 @@
           <a:bodyPr wrap="square" lIns="0" tIns="0" rIns="0" bIns="0" rtlCol="0" anchor="t"/>
           <a:lstStyle/>
           <a:p>
-            <a:pPr indent="0" marL="0">
+            <a:pPr marL="0" indent="0">
               <a:buNone/>
             </a:pPr>
             <a:r>
@@ -7555,6 +7699,13 @@
             <a:prstDash val="solid"/>
           </a:ln>
         </p:spPr>
+        <p:txBody>
+          <a:bodyPr/>
+          <a:lstStyle/>
+          <a:p>
+            <a:endParaRPr lang="pt-BR"/>
+          </a:p>
+        </p:txBody>
       </p:sp>
       <p:sp>
         <p:nvSpPr>
@@ -7577,7 +7728,7 @@
           <a:bodyPr wrap="square" lIns="0" tIns="0" rIns="0" bIns="0" rtlCol="0" anchor="t"/>
           <a:lstStyle/>
           <a:p>
-            <a:pPr indent="0" marL="0">
+            <a:pPr marL="0" indent="0">
               <a:buNone/>
             </a:pPr>
             <a:r>
@@ -7616,7 +7767,7 @@
           <a:bodyPr wrap="square" lIns="0" tIns="0" rIns="0" bIns="0" rtlCol="0" anchor="t"/>
           <a:lstStyle/>
           <a:p>
-            <a:pPr indent="0" marL="0">
+            <a:pPr marL="0" indent="0">
               <a:buNone/>
             </a:pPr>
             <a:r>
@@ -7656,6 +7807,13 @@
             <a:prstDash val="solid"/>
           </a:ln>
         </p:spPr>
+        <p:txBody>
+          <a:bodyPr/>
+          <a:lstStyle/>
+          <a:p>
+            <a:endParaRPr lang="pt-BR"/>
+          </a:p>
+        </p:txBody>
       </p:sp>
       <p:sp>
         <p:nvSpPr>
@@ -7678,7 +7836,7 @@
           <a:bodyPr wrap="square" lIns="0" tIns="0" rIns="0" bIns="0" rtlCol="0" anchor="t"/>
           <a:lstStyle/>
           <a:p>
-            <a:pPr indent="0" marL="0">
+            <a:pPr marL="0" indent="0">
               <a:buNone/>
             </a:pPr>
             <a:r>
@@ -7717,7 +7875,7 @@
           <a:bodyPr wrap="square" lIns="0" tIns="0" rIns="0" bIns="0" rtlCol="0" anchor="t"/>
           <a:lstStyle/>
           <a:p>
-            <a:pPr indent="0" marL="0">
+            <a:pPr marL="0" indent="0">
               <a:buNone/>
             </a:pPr>
             <a:r>
@@ -7756,7 +7914,7 @@
           <a:bodyPr wrap="square" lIns="0" tIns="0" rIns="0" bIns="0" rtlCol="0" anchor="t"/>
           <a:lstStyle/>
           <a:p>
-            <a:pPr indent="0" marL="0">
+            <a:pPr marL="0" indent="0">
               <a:buNone/>
             </a:pPr>
             <a:r>
@@ -7795,7 +7953,7 @@
           <a:bodyPr wrap="square" lIns="0" tIns="0" rIns="0" bIns="0" rtlCol="0" anchor="t"/>
           <a:lstStyle/>
           <a:p>
-            <a:pPr algn="r" indent="0" marL="0">
+            <a:pPr marL="0" indent="0" algn="r">
               <a:buNone/>
             </a:pPr>
             <a:r>
@@ -7829,6 +7987,7 @@
         <a:solidFill>
           <a:srgbClr val="FAF9F7"/>
         </a:solidFill>
+        <a:effectLst/>
       </p:bgPr>
     </p:bg>
     <p:spTree>
@@ -7866,7 +8025,7 @@
           <a:bodyPr wrap="square" lIns="0" tIns="0" rIns="0" bIns="0" rtlCol="0" anchor="ctr"/>
           <a:lstStyle/>
           <a:p>
-            <a:pPr indent="0" marL="0">
+            <a:pPr marL="0" indent="0">
               <a:buNone/>
             </a:pPr>
             <a:r>
@@ -7905,7 +8064,7 @@
           <a:bodyPr wrap="square" lIns="0" tIns="0" rIns="0" bIns="0" rtlCol="0" anchor="t"/>
           <a:lstStyle/>
           <a:p>
-            <a:pPr indent="0" marL="0">
+            <a:pPr marL="0" indent="0">
               <a:buNone/>
             </a:pPr>
             <a:r>
@@ -7949,6 +8108,13 @@
             <a:prstDash val="solid"/>
           </a:ln>
         </p:spPr>
+        <p:txBody>
+          <a:bodyPr/>
+          <a:lstStyle/>
+          <a:p>
+            <a:endParaRPr lang="pt-BR"/>
+          </a:p>
+        </p:txBody>
       </p:sp>
       <p:sp>
         <p:nvSpPr>
@@ -7971,7 +8137,7 @@
           <a:bodyPr wrap="square" lIns="0" tIns="0" rIns="0" bIns="0" rtlCol="0" anchor="t"/>
           <a:lstStyle/>
           <a:p>
-            <a:pPr algn="ctr" indent="0" marL="0">
+            <a:pPr marL="0" indent="0" algn="ctr">
               <a:buNone/>
             </a:pPr>
             <a:r>
@@ -8010,7 +8176,7 @@
           <a:bodyPr wrap="square" lIns="0" tIns="0" rIns="0" bIns="0" rtlCol="0" anchor="t"/>
           <a:lstStyle/>
           <a:p>
-            <a:pPr algn="ctr" indent="0" marL="0">
+            <a:pPr marL="0" indent="0" algn="ctr">
               <a:buNone/>
             </a:pPr>
             <a:r>
@@ -8049,7 +8215,7 @@
           <a:bodyPr wrap="square" lIns="0" tIns="0" rIns="0" bIns="0" rtlCol="0" anchor="ctr"/>
           <a:lstStyle/>
           <a:p>
-            <a:pPr algn="ctr" indent="0" marL="0">
+            <a:pPr marL="0" indent="0" algn="ctr">
               <a:buNone/>
             </a:pPr>
             <a:r>
@@ -8093,6 +8259,13 @@
             <a:prstDash val="solid"/>
           </a:ln>
         </p:spPr>
+        <p:txBody>
+          <a:bodyPr/>
+          <a:lstStyle/>
+          <a:p>
+            <a:endParaRPr lang="pt-BR"/>
+          </a:p>
+        </p:txBody>
       </p:sp>
       <p:sp>
         <p:nvSpPr>
@@ -8115,7 +8288,7 @@
           <a:bodyPr wrap="square" lIns="0" tIns="0" rIns="0" bIns="0" rtlCol="0" anchor="t"/>
           <a:lstStyle/>
           <a:p>
-            <a:pPr algn="ctr" indent="0" marL="0">
+            <a:pPr marL="0" indent="0" algn="ctr">
               <a:buNone/>
             </a:pPr>
             <a:r>
@@ -8154,7 +8327,7 @@
           <a:bodyPr wrap="square" lIns="0" tIns="0" rIns="0" bIns="0" rtlCol="0" anchor="t"/>
           <a:lstStyle/>
           <a:p>
-            <a:pPr algn="ctr" indent="0" marL="0">
+            <a:pPr marL="0" indent="0" algn="ctr">
               <a:buNone/>
             </a:pPr>
             <a:r>
@@ -8193,7 +8366,7 @@
           <a:bodyPr wrap="square" lIns="0" tIns="0" rIns="0" bIns="0" rtlCol="0" anchor="ctr"/>
           <a:lstStyle/>
           <a:p>
-            <a:pPr algn="ctr" indent="0" marL="0">
+            <a:pPr marL="0" indent="0" algn="ctr">
               <a:buNone/>
             </a:pPr>
             <a:r>
@@ -8237,6 +8410,13 @@
             <a:prstDash val="solid"/>
           </a:ln>
         </p:spPr>
+        <p:txBody>
+          <a:bodyPr/>
+          <a:lstStyle/>
+          <a:p>
+            <a:endParaRPr lang="pt-BR"/>
+          </a:p>
+        </p:txBody>
       </p:sp>
       <p:sp>
         <p:nvSpPr>
@@ -8259,7 +8439,7 @@
           <a:bodyPr wrap="square" lIns="0" tIns="0" rIns="0" bIns="0" rtlCol="0" anchor="t"/>
           <a:lstStyle/>
           <a:p>
-            <a:pPr algn="ctr" indent="0" marL="0">
+            <a:pPr marL="0" indent="0" algn="ctr">
               <a:buNone/>
             </a:pPr>
             <a:r>
@@ -8298,7 +8478,7 @@
           <a:bodyPr wrap="square" lIns="0" tIns="0" rIns="0" bIns="0" rtlCol="0" anchor="t"/>
           <a:lstStyle/>
           <a:p>
-            <a:pPr algn="ctr" indent="0" marL="0">
+            <a:pPr marL="0" indent="0" algn="ctr">
               <a:buNone/>
             </a:pPr>
             <a:r>
@@ -8337,7 +8517,7 @@
           <a:bodyPr wrap="square" lIns="0" tIns="0" rIns="0" bIns="0" rtlCol="0" anchor="ctr"/>
           <a:lstStyle/>
           <a:p>
-            <a:pPr algn="ctr" indent="0" marL="0">
+            <a:pPr marL="0" indent="0" algn="ctr">
               <a:buNone/>
             </a:pPr>
             <a:r>
@@ -8381,6 +8561,13 @@
             <a:prstDash val="solid"/>
           </a:ln>
         </p:spPr>
+        <p:txBody>
+          <a:bodyPr/>
+          <a:lstStyle/>
+          <a:p>
+            <a:endParaRPr lang="pt-BR"/>
+          </a:p>
+        </p:txBody>
       </p:sp>
       <p:sp>
         <p:nvSpPr>
@@ -8403,7 +8590,7 @@
           <a:bodyPr wrap="square" lIns="0" tIns="0" rIns="0" bIns="0" rtlCol="0" anchor="t"/>
           <a:lstStyle/>
           <a:p>
-            <a:pPr algn="ctr" indent="0" marL="0">
+            <a:pPr marL="0" indent="0" algn="ctr">
               <a:buNone/>
             </a:pPr>
             <a:r>
@@ -8442,7 +8629,7 @@
           <a:bodyPr wrap="square" lIns="0" tIns="0" rIns="0" bIns="0" rtlCol="0" anchor="t"/>
           <a:lstStyle/>
           <a:p>
-            <a:pPr algn="ctr" indent="0" marL="0">
+            <a:pPr marL="0" indent="0" algn="ctr">
               <a:buNone/>
             </a:pPr>
             <a:r>
@@ -8481,7 +8668,7 @@
           <a:bodyPr wrap="square" lIns="0" tIns="0" rIns="0" bIns="0" rtlCol="0" anchor="ctr"/>
           <a:lstStyle/>
           <a:p>
-            <a:pPr algn="ctr" indent="0" marL="0">
+            <a:pPr marL="0" indent="0" algn="ctr">
               <a:buNone/>
             </a:pPr>
             <a:r>
@@ -8525,6 +8712,13 @@
             <a:prstDash val="solid"/>
           </a:ln>
         </p:spPr>
+        <p:txBody>
+          <a:bodyPr/>
+          <a:lstStyle/>
+          <a:p>
+            <a:endParaRPr lang="pt-BR"/>
+          </a:p>
+        </p:txBody>
       </p:sp>
       <p:sp>
         <p:nvSpPr>
@@ -8547,7 +8741,7 @@
           <a:bodyPr wrap="square" lIns="0" tIns="0" rIns="0" bIns="0" rtlCol="0" anchor="t"/>
           <a:lstStyle/>
           <a:p>
-            <a:pPr algn="ctr" indent="0" marL="0">
+            <a:pPr marL="0" indent="0" algn="ctr">
               <a:buNone/>
             </a:pPr>
             <a:r>
@@ -8586,7 +8780,7 @@
           <a:bodyPr wrap="square" lIns="0" tIns="0" rIns="0" bIns="0" rtlCol="0" anchor="t"/>
           <a:lstStyle/>
           <a:p>
-            <a:pPr algn="ctr" indent="0" marL="0">
+            <a:pPr marL="0" indent="0" algn="ctr">
               <a:buNone/>
             </a:pPr>
             <a:r>
@@ -8625,7 +8819,7 @@
           <a:bodyPr wrap="square" lIns="0" tIns="0" rIns="0" bIns="0" rtlCol="0" anchor="t"/>
           <a:lstStyle/>
           <a:p>
-            <a:pPr indent="0" marL="0">
+            <a:pPr marL="0" indent="0">
               <a:buNone/>
             </a:pPr>
             <a:r>
@@ -8664,11 +8858,11 @@
           <a:bodyPr wrap="square" lIns="0" tIns="0" rIns="0" bIns="0" rtlCol="0" anchor="ctr"/>
           <a:lstStyle/>
           <a:p>
-            <a:pPr indent="0" marL="0">
-              <a:buNone/>
-            </a:pPr>
-            <a:r>
-              <a:rPr lang="en-US" sz="1000" b="1" spc="120" kern="0" dirty="0">
+            <a:pPr marL="0" indent="0">
+              <a:buNone/>
+            </a:pPr>
+            <a:r>
+              <a:rPr lang="en-US" sz="1000" b="1" kern="0" spc="120" dirty="0">
                 <a:solidFill>
                   <a:srgbClr val="D4622A"/>
                 </a:solidFill>
@@ -8703,7 +8897,7 @@
           <a:bodyPr wrap="square" lIns="0" tIns="0" rIns="0" bIns="0" rtlCol="0" anchor="ctr"/>
           <a:lstStyle/>
           <a:p>
-            <a:pPr indent="0" marL="0">
+            <a:pPr marL="0" indent="0">
               <a:buNone/>
             </a:pPr>
             <a:r>
@@ -8742,7 +8936,7 @@
           <a:bodyPr wrap="square" lIns="0" tIns="0" rIns="0" bIns="0" rtlCol="0" anchor="ctr"/>
           <a:lstStyle/>
           <a:p>
-            <a:pPr indent="0" marL="0">
+            <a:pPr marL="0" indent="0">
               <a:buNone/>
             </a:pPr>
             <a:r>
@@ -8781,7 +8975,7 @@
           <a:bodyPr wrap="square" lIns="0" tIns="0" rIns="0" bIns="0" rtlCol="0" anchor="ctr"/>
           <a:lstStyle/>
           <a:p>
-            <a:pPr indent="0" marL="0">
+            <a:pPr marL="0" indent="0">
               <a:buNone/>
             </a:pPr>
             <a:r>
@@ -8795,9 +8989,6 @@
               </a:rPr>
               <a:t>É o </a:t>
             </a:r>
-            <a:pPr indent="0" marL="0">
-              <a:buNone/>
-            </a:pPr>
             <a:r>
               <a:rPr lang="en-US" sz="1250" b="1" dirty="0">
                 <a:solidFill>
@@ -8809,9 +9000,6 @@
               </a:rPr>
               <a:t>PORTEIRO</a:t>
             </a:r>
-            <a:pPr indent="0" marL="0">
-              <a:buNone/>
-            </a:pPr>
             <a:r>
               <a:rPr lang="en-US" sz="1250" dirty="0">
                 <a:solidFill>
@@ -8849,6 +9037,13 @@
             <a:prstDash val="solid"/>
           </a:ln>
         </p:spPr>
+        <p:txBody>
+          <a:bodyPr/>
+          <a:lstStyle/>
+          <a:p>
+            <a:endParaRPr lang="pt-BR"/>
+          </a:p>
+        </p:txBody>
       </p:sp>
       <p:sp>
         <p:nvSpPr>
@@ -8871,7 +9066,7 @@
           <a:bodyPr wrap="square" lIns="0" tIns="0" rIns="0" bIns="0" rtlCol="0" anchor="ctr"/>
           <a:lstStyle/>
           <a:p>
-            <a:pPr indent="0" marL="0">
+            <a:pPr marL="0" indent="0">
               <a:buNone/>
             </a:pPr>
             <a:r>
@@ -8910,7 +9105,7 @@
           <a:bodyPr wrap="square" lIns="0" tIns="0" rIns="0" bIns="0" rtlCol="0" anchor="ctr"/>
           <a:lstStyle/>
           <a:p>
-            <a:pPr indent="0" marL="0">
+            <a:pPr marL="0" indent="0">
               <a:buNone/>
             </a:pPr>
             <a:r>
@@ -8949,7 +9144,7 @@
           <a:bodyPr wrap="square" lIns="0" tIns="0" rIns="0" bIns="0" rtlCol="0" anchor="ctr"/>
           <a:lstStyle/>
           <a:p>
-            <a:pPr indent="0" marL="0">
+            <a:pPr marL="0" indent="0">
               <a:buNone/>
             </a:pPr>
             <a:r>
@@ -8963,9 +9158,6 @@
               </a:rPr>
               <a:t>É o </a:t>
             </a:r>
-            <a:pPr indent="0" marL="0">
-              <a:buNone/>
-            </a:pPr>
             <a:r>
               <a:rPr lang="en-US" sz="1250" b="1" dirty="0">
                 <a:solidFill>
@@ -8977,9 +9169,6 @@
               </a:rPr>
               <a:t>CÉREBRO</a:t>
             </a:r>
-            <a:pPr indent="0" marL="0">
-              <a:buNone/>
-            </a:pPr>
             <a:r>
               <a:rPr lang="en-US" sz="1250" dirty="0">
                 <a:solidFill>
@@ -9017,6 +9206,13 @@
             <a:prstDash val="solid"/>
           </a:ln>
         </p:spPr>
+        <p:txBody>
+          <a:bodyPr/>
+          <a:lstStyle/>
+          <a:p>
+            <a:endParaRPr lang="pt-BR"/>
+          </a:p>
+        </p:txBody>
       </p:sp>
       <p:sp>
         <p:nvSpPr>
@@ -9039,7 +9235,7 @@
           <a:bodyPr wrap="square" lIns="0" tIns="0" rIns="0" bIns="0" rtlCol="0" anchor="ctr"/>
           <a:lstStyle/>
           <a:p>
-            <a:pPr indent="0" marL="0">
+            <a:pPr marL="0" indent="0">
               <a:buNone/>
             </a:pPr>
             <a:r>
@@ -9078,7 +9274,7 @@
           <a:bodyPr wrap="square" lIns="0" tIns="0" rIns="0" bIns="0" rtlCol="0" anchor="ctr"/>
           <a:lstStyle/>
           <a:p>
-            <a:pPr indent="0" marL="0">
+            <a:pPr marL="0" indent="0">
               <a:buNone/>
             </a:pPr>
             <a:r>
@@ -9117,7 +9313,7 @@
           <a:bodyPr wrap="square" lIns="0" tIns="0" rIns="0" bIns="0" rtlCol="0" anchor="ctr"/>
           <a:lstStyle/>
           <a:p>
-            <a:pPr indent="0" marL="0">
+            <a:pPr marL="0" indent="0">
               <a:buNone/>
             </a:pPr>
             <a:r>
@@ -9131,9 +9327,6 @@
               </a:rPr>
               <a:t>É o </a:t>
             </a:r>
-            <a:pPr indent="0" marL="0">
-              <a:buNone/>
-            </a:pPr>
             <a:r>
               <a:rPr lang="en-US" sz="1250" b="1" dirty="0">
                 <a:solidFill>
@@ -9145,9 +9338,6 @@
               </a:rPr>
               <a:t>MOLDE</a:t>
             </a:r>
-            <a:pPr indent="0" marL="0">
-              <a:buNone/>
-            </a:pPr>
             <a:r>
               <a:rPr lang="en-US" sz="1250" dirty="0">
                 <a:solidFill>
@@ -9185,6 +9375,13 @@
             <a:prstDash val="solid"/>
           </a:ln>
         </p:spPr>
+        <p:txBody>
+          <a:bodyPr/>
+          <a:lstStyle/>
+          <a:p>
+            <a:endParaRPr lang="pt-BR"/>
+          </a:p>
+        </p:txBody>
       </p:sp>
       <p:sp>
         <p:nvSpPr>
@@ -9207,7 +9404,7 @@
           <a:bodyPr wrap="square" lIns="0" tIns="0" rIns="0" bIns="0" rtlCol="0" anchor="ctr"/>
           <a:lstStyle/>
           <a:p>
-            <a:pPr indent="0" marL="0">
+            <a:pPr marL="0" indent="0">
               <a:buNone/>
             </a:pPr>
             <a:r>
@@ -9246,7 +9443,7 @@
           <a:bodyPr wrap="square" lIns="0" tIns="0" rIns="0" bIns="0" rtlCol="0" anchor="ctr"/>
           <a:lstStyle/>
           <a:p>
-            <a:pPr indent="0" marL="0">
+            <a:pPr marL="0" indent="0">
               <a:buNone/>
             </a:pPr>
             <a:r>
@@ -9285,7 +9482,7 @@
           <a:bodyPr wrap="square" lIns="0" tIns="0" rIns="0" bIns="0" rtlCol="0" anchor="ctr"/>
           <a:lstStyle/>
           <a:p>
-            <a:pPr indent="0" marL="0">
+            <a:pPr marL="0" indent="0">
               <a:buNone/>
             </a:pPr>
             <a:r>
@@ -9299,9 +9496,6 @@
               </a:rPr>
               <a:t>É o </a:t>
             </a:r>
-            <a:pPr indent="0" marL="0">
-              <a:buNone/>
-            </a:pPr>
             <a:r>
               <a:rPr lang="en-US" sz="1250" b="1" dirty="0">
                 <a:solidFill>
@@ -9313,9 +9507,6 @@
               </a:rPr>
               <a:t>CARTEIRO</a:t>
             </a:r>
-            <a:pPr indent="0" marL="0">
-              <a:buNone/>
-            </a:pPr>
             <a:r>
               <a:rPr lang="en-US" sz="1250" dirty="0">
                 <a:solidFill>
@@ -9353,6 +9544,13 @@
             <a:prstDash val="solid"/>
           </a:ln>
         </p:spPr>
+        <p:txBody>
+          <a:bodyPr/>
+          <a:lstStyle/>
+          <a:p>
+            <a:endParaRPr lang="pt-BR"/>
+          </a:p>
+        </p:txBody>
       </p:sp>
       <p:sp>
         <p:nvSpPr>
@@ -9375,7 +9573,7 @@
           <a:bodyPr wrap="square" lIns="0" tIns="0" rIns="0" bIns="0" rtlCol="0" anchor="ctr"/>
           <a:lstStyle/>
           <a:p>
-            <a:pPr indent="0" marL="0">
+            <a:pPr marL="0" indent="0">
               <a:buNone/>
             </a:pPr>
             <a:r>
@@ -9414,7 +9612,7 @@
           <a:bodyPr wrap="square" lIns="0" tIns="0" rIns="0" bIns="0" rtlCol="0" anchor="ctr"/>
           <a:lstStyle/>
           <a:p>
-            <a:pPr indent="0" marL="0">
+            <a:pPr marL="0" indent="0">
               <a:buNone/>
             </a:pPr>
             <a:r>
@@ -9453,7 +9651,7 @@
           <a:bodyPr wrap="square" lIns="0" tIns="0" rIns="0" bIns="0" rtlCol="0" anchor="ctr"/>
           <a:lstStyle/>
           <a:p>
-            <a:pPr indent="0" marL="0">
+            <a:pPr marL="0" indent="0">
               <a:buNone/>
             </a:pPr>
             <a:r>
@@ -9467,9 +9665,6 @@
               </a:rPr>
               <a:t>É o </a:t>
             </a:r>
-            <a:pPr indent="0" marL="0">
-              <a:buNone/>
-            </a:pPr>
             <a:r>
               <a:rPr lang="en-US" sz="1250" b="1" dirty="0">
                 <a:solidFill>
@@ -9481,9 +9676,6 @@
               </a:rPr>
               <a:t>ARQUIVO DE FICHAS</a:t>
             </a:r>
-            <a:pPr indent="0" marL="0">
-              <a:buNone/>
-            </a:pPr>
             <a:r>
               <a:rPr lang="en-US" sz="1250" dirty="0">
                 <a:solidFill>
@@ -9521,6 +9713,13 @@
             <a:prstDash val="solid"/>
           </a:ln>
         </p:spPr>
+        <p:txBody>
+          <a:bodyPr/>
+          <a:lstStyle/>
+          <a:p>
+            <a:endParaRPr lang="pt-BR"/>
+          </a:p>
+        </p:txBody>
       </p:sp>
       <p:sp>
         <p:nvSpPr>
@@ -9543,7 +9742,7 @@
           <a:bodyPr wrap="square" lIns="0" tIns="0" rIns="0" bIns="0" rtlCol="0" anchor="ctr"/>
           <a:lstStyle/>
           <a:p>
-            <a:pPr indent="0" marL="0">
+            <a:pPr marL="0" indent="0">
               <a:buNone/>
             </a:pPr>
             <a:r>
@@ -9582,7 +9781,7 @@
           <a:bodyPr wrap="square" lIns="0" tIns="0" rIns="0" bIns="0" rtlCol="0" anchor="ctr"/>
           <a:lstStyle/>
           <a:p>
-            <a:pPr indent="0" marL="0">
+            <a:pPr marL="0" indent="0">
               <a:buNone/>
             </a:pPr>
             <a:r>
@@ -9621,7 +9820,7 @@
           <a:bodyPr wrap="square" lIns="0" tIns="0" rIns="0" bIns="0" rtlCol="0" anchor="ctr"/>
           <a:lstStyle/>
           <a:p>
-            <a:pPr indent="0" marL="0">
+            <a:pPr marL="0" indent="0">
               <a:buNone/>
             </a:pPr>
             <a:r>
@@ -9660,7 +9859,7 @@
           <a:bodyPr wrap="square" lIns="0" tIns="0" rIns="0" bIns="0" rtlCol="0" anchor="t"/>
           <a:lstStyle/>
           <a:p>
-            <a:pPr indent="0" marL="0">
+            <a:pPr marL="0" indent="0">
               <a:buNone/>
             </a:pPr>
             <a:r>
@@ -9699,7 +9898,7 @@
           <a:bodyPr wrap="square" lIns="0" tIns="0" rIns="0" bIns="0" rtlCol="0" anchor="t"/>
           <a:lstStyle/>
           <a:p>
-            <a:pPr algn="r" indent="0" marL="0">
+            <a:pPr marL="0" indent="0" algn="r">
               <a:buNone/>
             </a:pPr>
             <a:r>
@@ -9733,6 +9932,7 @@
         <a:solidFill>
           <a:srgbClr val="FAF9F7"/>
         </a:solidFill>
+        <a:effectLst/>
       </p:bgPr>
     </p:bg>
     <p:spTree>
@@ -9770,7 +9970,7 @@
           <a:bodyPr wrap="square" lIns="0" tIns="0" rIns="0" bIns="0" rtlCol="0" anchor="ctr"/>
           <a:lstStyle/>
           <a:p>
-            <a:pPr indent="0" marL="0">
+            <a:pPr marL="0" indent="0">
               <a:buNone/>
             </a:pPr>
             <a:r>
@@ -9809,7 +10009,7 @@
           <a:bodyPr wrap="square" lIns="0" tIns="0" rIns="0" bIns="0" rtlCol="0" anchor="t"/>
           <a:lstStyle/>
           <a:p>
-            <a:pPr indent="0" marL="0">
+            <a:pPr marL="0" indent="0">
               <a:buNone/>
             </a:pPr>
             <a:r>
@@ -9853,6 +10053,13 @@
             <a:prstDash val="solid"/>
           </a:ln>
         </p:spPr>
+        <p:txBody>
+          <a:bodyPr/>
+          <a:lstStyle/>
+          <a:p>
+            <a:endParaRPr lang="pt-BR"/>
+          </a:p>
+        </p:txBody>
       </p:sp>
       <p:sp>
         <p:nvSpPr>
@@ -9875,11 +10082,11 @@
           <a:bodyPr wrap="square" lIns="0" tIns="0" rIns="0" bIns="0" rtlCol="0" anchor="ctr"/>
           <a:lstStyle/>
           <a:p>
-            <a:pPr indent="0" marL="0">
-              <a:buNone/>
-            </a:pPr>
-            <a:r>
-              <a:rPr lang="en-US" sz="1000" b="1" spc="120" kern="0" dirty="0">
+            <a:pPr marL="0" indent="0">
+              <a:buNone/>
+            </a:pPr>
+            <a:r>
+              <a:rPr lang="en-US" sz="1000" b="1" kern="0" spc="120" dirty="0">
                 <a:solidFill>
                   <a:srgbClr val="D4622A"/>
                 </a:solidFill>
@@ -9914,7 +10121,7 @@
           <a:bodyPr wrap="square" lIns="0" tIns="0" rIns="0" bIns="0" rtlCol="0" anchor="t"/>
           <a:lstStyle/>
           <a:p>
-            <a:pPr indent="0" marL="0">
+            <a:pPr marL="0" indent="0">
               <a:buNone/>
             </a:pPr>
             <a:r>
@@ -9953,7 +10160,7 @@
           <a:bodyPr wrap="square" lIns="0" tIns="0" rIns="0" bIns="0" rtlCol="0" anchor="t"/>
           <a:lstStyle/>
           <a:p>
-            <a:pPr indent="0" marL="0">
+            <a:pPr marL="0" indent="0">
               <a:buNone/>
             </a:pPr>
             <a:r>
@@ -9992,7 +10199,7 @@
           <a:bodyPr wrap="square" lIns="0" tIns="0" rIns="0" bIns="0" rtlCol="0" anchor="t"/>
           <a:lstStyle/>
           <a:p>
-            <a:pPr indent="0" marL="0">
+            <a:pPr marL="0" indent="0">
               <a:buNone/>
             </a:pPr>
             <a:r>
@@ -10031,7 +10238,7 @@
           <a:bodyPr wrap="square" lIns="0" tIns="0" rIns="0" bIns="0" rtlCol="0" anchor="t"/>
           <a:lstStyle/>
           <a:p>
-            <a:pPr indent="0" marL="0">
+            <a:pPr marL="0" indent="0">
               <a:buNone/>
             </a:pPr>
             <a:r>
@@ -10070,7 +10277,7 @@
           <a:bodyPr wrap="square" lIns="0" tIns="0" rIns="0" bIns="0" rtlCol="0" anchor="t"/>
           <a:lstStyle/>
           <a:p>
-            <a:pPr indent="0" marL="0">
+            <a:pPr marL="0" indent="0">
               <a:buNone/>
             </a:pPr>
             <a:r>
@@ -10109,7 +10316,7 @@
           <a:bodyPr wrap="square" lIns="0" tIns="0" rIns="0" bIns="0" rtlCol="0" anchor="t"/>
           <a:lstStyle/>
           <a:p>
-            <a:pPr indent="0" marL="0">
+            <a:pPr marL="0" indent="0">
               <a:buNone/>
             </a:pPr>
             <a:r>
@@ -10148,7 +10355,7 @@
           <a:bodyPr wrap="square" lIns="0" tIns="0" rIns="0" bIns="0" rtlCol="0" anchor="t"/>
           <a:lstStyle/>
           <a:p>
-            <a:pPr indent="0" marL="0">
+            <a:pPr marL="0" indent="0">
               <a:buNone/>
             </a:pPr>
             <a:r>
@@ -10187,7 +10394,7 @@
           <a:bodyPr wrap="square" lIns="0" tIns="0" rIns="0" bIns="0" rtlCol="0" anchor="t"/>
           <a:lstStyle/>
           <a:p>
-            <a:pPr indent="0" marL="0">
+            <a:pPr marL="0" indent="0">
               <a:buNone/>
             </a:pPr>
             <a:r>
@@ -10231,6 +10438,13 @@
             <a:prstDash val="solid"/>
           </a:ln>
         </p:spPr>
+        <p:txBody>
+          <a:bodyPr/>
+          <a:lstStyle/>
+          <a:p>
+            <a:endParaRPr lang="pt-BR"/>
+          </a:p>
+        </p:txBody>
       </p:sp>
       <p:sp>
         <p:nvSpPr>
@@ -10253,11 +10467,11 @@
           <a:bodyPr wrap="square" lIns="0" tIns="0" rIns="0" bIns="0" rtlCol="0" anchor="ctr"/>
           <a:lstStyle/>
           <a:p>
-            <a:pPr indent="0" marL="0">
-              <a:buNone/>
-            </a:pPr>
-            <a:r>
-              <a:rPr lang="en-US" sz="1000" b="1" spc="120" kern="0" dirty="0">
+            <a:pPr marL="0" indent="0">
+              <a:buNone/>
+            </a:pPr>
+            <a:r>
+              <a:rPr lang="en-US" sz="1000" b="1" kern="0" spc="120" dirty="0">
                 <a:solidFill>
                   <a:srgbClr val="14120F"/>
                 </a:solidFill>
@@ -10292,7 +10506,7 @@
           <a:bodyPr wrap="square" lIns="0" tIns="0" rIns="0" bIns="0" rtlCol="0" anchor="t"/>
           <a:lstStyle/>
           <a:p>
-            <a:pPr indent="0" marL="0">
+            <a:pPr marL="0" indent="0">
               <a:buNone/>
             </a:pPr>
             <a:r>
@@ -10331,7 +10545,7 @@
           <a:bodyPr wrap="square" lIns="0" tIns="0" rIns="0" bIns="0" rtlCol="0" anchor="t"/>
           <a:lstStyle/>
           <a:p>
-            <a:pPr indent="0" marL="0">
+            <a:pPr marL="0" indent="0">
               <a:buNone/>
             </a:pPr>
             <a:r>
@@ -10370,7 +10584,7 @@
           <a:bodyPr wrap="square" lIns="0" tIns="0" rIns="0" bIns="0" rtlCol="0" anchor="t"/>
           <a:lstStyle/>
           <a:p>
-            <a:pPr indent="0" marL="0">
+            <a:pPr marL="0" indent="0">
               <a:buNone/>
             </a:pPr>
             <a:r>
@@ -10409,7 +10623,7 @@
           <a:bodyPr wrap="square" lIns="0" tIns="0" rIns="0" bIns="0" rtlCol="0" anchor="t"/>
           <a:lstStyle/>
           <a:p>
-            <a:pPr indent="0" marL="0">
+            <a:pPr marL="0" indent="0">
               <a:buNone/>
             </a:pPr>
             <a:r>
@@ -10448,7 +10662,7 @@
           <a:bodyPr wrap="square" lIns="0" tIns="0" rIns="0" bIns="0" rtlCol="0" anchor="t"/>
           <a:lstStyle/>
           <a:p>
-            <a:pPr indent="0" marL="0">
+            <a:pPr marL="0" indent="0">
               <a:buNone/>
             </a:pPr>
             <a:r>
@@ -10487,7 +10701,7 @@
           <a:bodyPr wrap="square" lIns="0" tIns="0" rIns="0" bIns="0" rtlCol="0" anchor="t"/>
           <a:lstStyle/>
           <a:p>
-            <a:pPr indent="0" marL="0">
+            <a:pPr marL="0" indent="0">
               <a:buNone/>
             </a:pPr>
             <a:r>
@@ -10526,7 +10740,7 @@
           <a:bodyPr wrap="square" lIns="0" tIns="0" rIns="0" bIns="0" rtlCol="0" anchor="t"/>
           <a:lstStyle/>
           <a:p>
-            <a:pPr indent="0" marL="0">
+            <a:pPr marL="0" indent="0">
               <a:buNone/>
             </a:pPr>
             <a:r>
@@ -10565,7 +10779,7 @@
           <a:bodyPr wrap="square" lIns="0" tIns="0" rIns="0" bIns="0" rtlCol="0" anchor="t"/>
           <a:lstStyle/>
           <a:p>
-            <a:pPr indent="0" marL="0">
+            <a:pPr marL="0" indent="0">
               <a:buNone/>
             </a:pPr>
             <a:r>
@@ -10609,6 +10823,13 @@
             <a:prstDash val="solid"/>
           </a:ln>
         </p:spPr>
+        <p:txBody>
+          <a:bodyPr/>
+          <a:lstStyle/>
+          <a:p>
+            <a:endParaRPr lang="pt-BR"/>
+          </a:p>
+        </p:txBody>
       </p:sp>
       <p:sp>
         <p:nvSpPr>
@@ -10631,11 +10852,11 @@
           <a:bodyPr wrap="square" lIns="0" tIns="0" rIns="0" bIns="0" rtlCol="0" anchor="ctr"/>
           <a:lstStyle/>
           <a:p>
-            <a:pPr indent="0" marL="0">
-              <a:buNone/>
-            </a:pPr>
-            <a:r>
-              <a:rPr lang="en-US" sz="1000" b="1" spc="120" kern="0" dirty="0">
+            <a:pPr marL="0" indent="0">
+              <a:buNone/>
+            </a:pPr>
+            <a:r>
+              <a:rPr lang="en-US" sz="1000" b="1" kern="0" spc="120" dirty="0">
                 <a:solidFill>
                   <a:srgbClr val="2F6B45"/>
                 </a:solidFill>
@@ -10670,7 +10891,7 @@
           <a:bodyPr wrap="square" lIns="0" tIns="0" rIns="0" bIns="0" rtlCol="0" anchor="t"/>
           <a:lstStyle/>
           <a:p>
-            <a:pPr indent="0" marL="0">
+            <a:pPr marL="0" indent="0">
               <a:buNone/>
             </a:pPr>
             <a:r>
@@ -10709,7 +10930,7 @@
           <a:bodyPr wrap="square" lIns="0" tIns="0" rIns="0" bIns="0" rtlCol="0" anchor="t"/>
           <a:lstStyle/>
           <a:p>
-            <a:pPr indent="0" marL="0">
+            <a:pPr marL="0" indent="0">
               <a:buNone/>
             </a:pPr>
             <a:r>
@@ -10748,7 +10969,7 @@
           <a:bodyPr wrap="square" lIns="0" tIns="0" rIns="0" bIns="0" rtlCol="0" anchor="t"/>
           <a:lstStyle/>
           <a:p>
-            <a:pPr indent="0" marL="0">
+            <a:pPr marL="0" indent="0">
               <a:buNone/>
             </a:pPr>
             <a:r>
@@ -10787,7 +11008,7 @@
           <a:bodyPr wrap="square" lIns="0" tIns="0" rIns="0" bIns="0" rtlCol="0" anchor="t"/>
           <a:lstStyle/>
           <a:p>
-            <a:pPr indent="0" marL="0">
+            <a:pPr marL="0" indent="0">
               <a:buNone/>
             </a:pPr>
             <a:r>
@@ -10826,7 +11047,7 @@
           <a:bodyPr wrap="square" lIns="0" tIns="0" rIns="0" bIns="0" rtlCol="0" anchor="t"/>
           <a:lstStyle/>
           <a:p>
-            <a:pPr indent="0" marL="0">
+            <a:pPr marL="0" indent="0">
               <a:buNone/>
             </a:pPr>
             <a:r>
@@ -10865,7 +11086,7 @@
           <a:bodyPr wrap="square" lIns="0" tIns="0" rIns="0" bIns="0" rtlCol="0" anchor="t"/>
           <a:lstStyle/>
           <a:p>
-            <a:pPr indent="0" marL="0">
+            <a:pPr marL="0" indent="0">
               <a:buNone/>
             </a:pPr>
             <a:r>
@@ -10904,7 +11125,7 @@
           <a:bodyPr wrap="square" lIns="0" tIns="0" rIns="0" bIns="0" rtlCol="0" anchor="t"/>
           <a:lstStyle/>
           <a:p>
-            <a:pPr indent="0" marL="0">
+            <a:pPr marL="0" indent="0">
               <a:buNone/>
             </a:pPr>
             <a:r>
@@ -10943,7 +11164,7 @@
           <a:bodyPr wrap="square" lIns="0" tIns="0" rIns="0" bIns="0" rtlCol="0" anchor="t"/>
           <a:lstStyle/>
           <a:p>
-            <a:pPr indent="0" marL="0">
+            <a:pPr marL="0" indent="0">
               <a:buNone/>
             </a:pPr>
             <a:r>
@@ -10987,6 +11208,13 @@
             <a:prstDash val="solid"/>
           </a:ln>
         </p:spPr>
+        <p:txBody>
+          <a:bodyPr/>
+          <a:lstStyle/>
+          <a:p>
+            <a:endParaRPr lang="pt-BR"/>
+          </a:p>
+        </p:txBody>
       </p:sp>
       <p:sp>
         <p:nvSpPr>
@@ -11009,7 +11237,7 @@
           <a:bodyPr wrap="square" lIns="0" tIns="0" rIns="0" bIns="0" rtlCol="0" anchor="ctr"/>
           <a:lstStyle/>
           <a:p>
-            <a:pPr indent="0" marL="0">
+            <a:pPr marL="0" indent="0">
               <a:buNone/>
             </a:pPr>
             <a:r>
@@ -11048,11 +11276,11 @@
           <a:bodyPr wrap="square" lIns="0" tIns="0" rIns="0" bIns="0" rtlCol="0" anchor="ctr"/>
           <a:lstStyle/>
           <a:p>
-            <a:pPr indent="0" marL="0">
-              <a:buNone/>
-            </a:pPr>
-            <a:r>
-              <a:rPr lang="en-US" sz="1000" b="1" spc="120" kern="0" dirty="0">
+            <a:pPr marL="0" indent="0">
+              <a:buNone/>
+            </a:pPr>
+            <a:r>
+              <a:rPr lang="en-US" sz="1000" b="1" kern="0" spc="120" dirty="0">
                 <a:solidFill>
                   <a:srgbClr val="D4622A"/>
                 </a:solidFill>
@@ -11087,7 +11315,7 @@
           <a:bodyPr wrap="square" lIns="0" tIns="0" rIns="0" bIns="0" rtlCol="0" anchor="ctr"/>
           <a:lstStyle/>
           <a:p>
-            <a:pPr indent="0" marL="0">
+            <a:pPr marL="0" indent="0">
               <a:lnSpc>
                 <a:spcPct val="108000"/>
               </a:lnSpc>
@@ -11102,48 +11330,8 @@
                 <a:ea typeface="Calibri" pitchFamily="34" charset="-122"/>
                 <a:cs typeface="Calibri" pitchFamily="34" charset="-120"/>
               </a:rPr>
-              <a:t>O </a:t>
-            </a:r>
-            <a:pPr indent="0" marL="0">
-              <a:lnSpc>
-                <a:spcPct val="108000"/>
-              </a:lnSpc>
-              <a:buNone/>
-            </a:pPr>
-            <a:r>
-              <a:rPr lang="en-US" sz="1300" b="1" dirty="0">
-                <a:solidFill>
-                  <a:srgbClr val="D4622A"/>
-                </a:solidFill>
-                <a:latin typeface="Calibri" pitchFamily="34" charset="0"/>
-                <a:ea typeface="Calibri" pitchFamily="34" charset="-122"/>
-                <a:cs typeface="Calibri" pitchFamily="34" charset="-120"/>
-              </a:rPr>
-              <a:t>PARCEIRO DE BANCADA</a:t>
-            </a:r>
-            <a:pPr indent="0" marL="0">
-              <a:lnSpc>
-                <a:spcPct val="108000"/>
-              </a:lnSpc>
-              <a:buNone/>
-            </a:pPr>
-            <a:r>
-              <a:rPr lang="en-US" sz="1300" b="1" dirty="0">
-                <a:solidFill>
-                  <a:srgbClr val="D4622A"/>
-                </a:solidFill>
-                <a:latin typeface="Calibri" pitchFamily="34" charset="0"/>
-                <a:ea typeface="Calibri" pitchFamily="34" charset="-122"/>
-                <a:cs typeface="Calibri" pitchFamily="34" charset="-120"/>
-              </a:rPr>
-              <a:t>.</a:t>
-            </a:r>
-            <a:pPr indent="0" marL="0">
-              <a:lnSpc>
-                <a:spcPct val="108000"/>
-              </a:lnSpc>
-              <a:buNone/>
-            </a:pPr>
+              <a:t>O PARCEIRO DE BANCADA.</a:t>
+            </a:r>
             <a:r>
               <a:rPr lang="en-US" sz="1300" dirty="0">
                 <a:solidFill>
@@ -11180,7 +11368,7 @@
           <a:bodyPr wrap="square" lIns="0" tIns="0" rIns="0" bIns="0" rtlCol="0" anchor="t"/>
           <a:lstStyle/>
           <a:p>
-            <a:pPr indent="0" marL="0">
+            <a:pPr marL="0" indent="0">
               <a:buNone/>
             </a:pPr>
             <a:r>
@@ -11219,7 +11407,7 @@
           <a:bodyPr wrap="square" lIns="0" tIns="0" rIns="0" bIns="0" rtlCol="0" anchor="t"/>
           <a:lstStyle/>
           <a:p>
-            <a:pPr algn="r" indent="0" marL="0">
+            <a:pPr marL="0" indent="0" algn="r">
               <a:buNone/>
             </a:pPr>
             <a:r>
@@ -11253,6 +11441,7 @@
         <a:solidFill>
           <a:srgbClr val="FAF9F7"/>
         </a:solidFill>
+        <a:effectLst/>
       </p:bgPr>
     </p:bg>
     <p:spTree>
@@ -11290,7 +11479,7 @@
           <a:bodyPr wrap="square" lIns="0" tIns="0" rIns="0" bIns="0" rtlCol="0" anchor="ctr"/>
           <a:lstStyle/>
           <a:p>
-            <a:pPr indent="0" marL="0">
+            <a:pPr marL="0" indent="0">
               <a:buNone/>
             </a:pPr>
             <a:r>
@@ -11329,7 +11518,7 @@
           <a:bodyPr wrap="square" lIns="0" tIns="0" rIns="0" bIns="0" rtlCol="0" anchor="t"/>
           <a:lstStyle/>
           <a:p>
-            <a:pPr indent="0" marL="0">
+            <a:pPr marL="0" indent="0">
               <a:buNone/>
             </a:pPr>
             <a:r>
@@ -11373,6 +11562,13 @@
             <a:prstDash val="solid"/>
           </a:ln>
         </p:spPr>
+        <p:txBody>
+          <a:bodyPr/>
+          <a:lstStyle/>
+          <a:p>
+            <a:endParaRPr lang="pt-BR"/>
+          </a:p>
+        </p:txBody>
       </p:sp>
       <p:sp>
         <p:nvSpPr>
@@ -11395,11 +11591,11 @@
           <a:bodyPr wrap="square" lIns="0" tIns="0" rIns="0" bIns="0" rtlCol="0" anchor="ctr"/>
           <a:lstStyle/>
           <a:p>
-            <a:pPr indent="0" marL="0">
-              <a:buNone/>
-            </a:pPr>
-            <a:r>
-              <a:rPr lang="en-US" sz="1000" b="1" spc="120" kern="0" dirty="0">
+            <a:pPr marL="0" indent="0">
+              <a:buNone/>
+            </a:pPr>
+            <a:r>
+              <a:rPr lang="en-US" sz="1000" b="1" kern="0" spc="120" dirty="0">
                 <a:solidFill>
                   <a:srgbClr val="6B6560"/>
                 </a:solidFill>
@@ -11434,7 +11630,7 @@
           <a:bodyPr wrap="square" lIns="0" tIns="0" rIns="0" bIns="0" rtlCol="0" anchor="t"/>
           <a:lstStyle/>
           <a:p>
-            <a:pPr indent="0" marL="0">
+            <a:pPr marL="0" indent="0">
               <a:lnSpc>
                 <a:spcPct val="100000"/>
               </a:lnSpc>
@@ -11454,7 +11650,7 @@
             <a:endParaRPr lang="en-US" sz="1050" dirty="0"/>
           </a:p>
           <a:p>
-            <a:pPr indent="0" marL="0">
+            <a:pPr marL="0" indent="0">
               <a:lnSpc>
                 <a:spcPct val="100000"/>
               </a:lnSpc>
@@ -11474,7 +11670,7 @@
             <a:endParaRPr lang="en-US" sz="1050" dirty="0"/>
           </a:p>
           <a:p>
-            <a:pPr indent="0" marL="0">
+            <a:pPr marL="0" indent="0">
               <a:lnSpc>
                 <a:spcPct val="100000"/>
               </a:lnSpc>
@@ -11494,7 +11690,7 @@
             <a:endParaRPr lang="en-US" sz="1050" dirty="0"/>
           </a:p>
           <a:p>
-            <a:pPr indent="0" marL="0">
+            <a:pPr marL="0" indent="0">
               <a:lnSpc>
                 <a:spcPct val="100000"/>
               </a:lnSpc>
@@ -11514,7 +11710,7 @@
             <a:endParaRPr lang="en-US" sz="1050" dirty="0"/>
           </a:p>
           <a:p>
-            <a:pPr indent="0" marL="0">
+            <a:pPr marL="0" indent="0">
               <a:lnSpc>
                 <a:spcPct val="100000"/>
               </a:lnSpc>
@@ -11534,7 +11730,7 @@
             <a:endParaRPr lang="en-US" sz="1050" dirty="0"/>
           </a:p>
           <a:p>
-            <a:pPr indent="0" marL="0">
+            <a:pPr marL="0" indent="0">
               <a:lnSpc>
                 <a:spcPct val="100000"/>
               </a:lnSpc>
@@ -11581,6 +11777,13 @@
             <a:prstDash val="solid"/>
           </a:ln>
         </p:spPr>
+        <p:txBody>
+          <a:bodyPr/>
+          <a:lstStyle/>
+          <a:p>
+            <a:endParaRPr lang="pt-BR"/>
+          </a:p>
+        </p:txBody>
       </p:sp>
       <p:sp>
         <p:nvSpPr>
@@ -11603,11 +11806,11 @@
           <a:bodyPr wrap="square" lIns="0" tIns="0" rIns="0" bIns="0" rtlCol="0" anchor="ctr"/>
           <a:lstStyle/>
           <a:p>
-            <a:pPr indent="0" marL="0">
-              <a:buNone/>
-            </a:pPr>
-            <a:r>
-              <a:rPr lang="en-US" sz="1000" b="1" spc="120" kern="0" dirty="0">
+            <a:pPr marL="0" indent="0">
+              <a:buNone/>
+            </a:pPr>
+            <a:r>
+              <a:rPr lang="en-US" sz="1000" b="1" kern="0" spc="120" dirty="0">
                 <a:solidFill>
                   <a:srgbClr val="6B6560"/>
                 </a:solidFill>
@@ -11642,7 +11845,7 @@
           <a:bodyPr wrap="square" lIns="0" tIns="0" rIns="0" bIns="0" rtlCol="0" anchor="t"/>
           <a:lstStyle/>
           <a:p>
-            <a:pPr indent="0" marL="0">
+            <a:pPr marL="0" indent="0">
               <a:lnSpc>
                 <a:spcPct val="100000"/>
               </a:lnSpc>
@@ -11662,7 +11865,7 @@
             <a:endParaRPr lang="en-US" sz="1050" dirty="0"/>
           </a:p>
           <a:p>
-            <a:pPr indent="0" marL="0">
+            <a:pPr marL="0" indent="0">
               <a:lnSpc>
                 <a:spcPct val="100000"/>
               </a:lnSpc>
@@ -11682,7 +11885,7 @@
             <a:endParaRPr lang="en-US" sz="1050" dirty="0"/>
           </a:p>
           <a:p>
-            <a:pPr indent="0" marL="0">
+            <a:pPr marL="0" indent="0">
               <a:lnSpc>
                 <a:spcPct val="100000"/>
               </a:lnSpc>
@@ -11702,7 +11905,7 @@
             <a:endParaRPr lang="en-US" sz="1050" dirty="0"/>
           </a:p>
           <a:p>
-            <a:pPr indent="0" marL="0">
+            <a:pPr marL="0" indent="0">
               <a:lnSpc>
                 <a:spcPct val="100000"/>
               </a:lnSpc>
@@ -11722,7 +11925,7 @@
             <a:endParaRPr lang="en-US" sz="1050" dirty="0"/>
           </a:p>
           <a:p>
-            <a:pPr indent="0" marL="0">
+            <a:pPr marL="0" indent="0">
               <a:lnSpc>
                 <a:spcPct val="100000"/>
               </a:lnSpc>
@@ -11742,7 +11945,7 @@
             <a:endParaRPr lang="en-US" sz="1050" dirty="0"/>
           </a:p>
           <a:p>
-            <a:pPr indent="0" marL="0">
+            <a:pPr marL="0" indent="0">
               <a:lnSpc>
                 <a:spcPct val="100000"/>
               </a:lnSpc>
@@ -11789,6 +11992,13 @@
             <a:prstDash val="solid"/>
           </a:ln>
         </p:spPr>
+        <p:txBody>
+          <a:bodyPr/>
+          <a:lstStyle/>
+          <a:p>
+            <a:endParaRPr lang="pt-BR"/>
+          </a:p>
+        </p:txBody>
       </p:sp>
       <p:sp>
         <p:nvSpPr>
@@ -11811,11 +12021,11 @@
           <a:bodyPr wrap="square" lIns="0" tIns="0" rIns="0" bIns="0" rtlCol="0" anchor="ctr"/>
           <a:lstStyle/>
           <a:p>
-            <a:pPr indent="0" marL="0">
-              <a:buNone/>
-            </a:pPr>
-            <a:r>
-              <a:rPr lang="en-US" sz="1000" b="1" spc="120" kern="0" dirty="0">
+            <a:pPr marL="0" indent="0">
+              <a:buNone/>
+            </a:pPr>
+            <a:r>
+              <a:rPr lang="en-US" sz="1000" b="1" kern="0" spc="120" dirty="0">
                 <a:solidFill>
                   <a:srgbClr val="D4622A"/>
                 </a:solidFill>
@@ -11850,7 +12060,7 @@
           <a:bodyPr wrap="square" lIns="0" tIns="0" rIns="0" bIns="0" rtlCol="0" anchor="t"/>
           <a:lstStyle/>
           <a:p>
-            <a:pPr indent="0" marL="0">
+            <a:pPr marL="0" indent="0">
               <a:lnSpc>
                 <a:spcPct val="100000"/>
               </a:lnSpc>
@@ -11870,7 +12080,7 @@
             <a:endParaRPr lang="en-US" sz="1050" dirty="0"/>
           </a:p>
           <a:p>
-            <a:pPr indent="0" marL="0">
+            <a:pPr marL="0" indent="0">
               <a:lnSpc>
                 <a:spcPct val="100000"/>
               </a:lnSpc>
@@ -11890,7 +12100,7 @@
             <a:endParaRPr lang="en-US" sz="1050" dirty="0"/>
           </a:p>
           <a:p>
-            <a:pPr indent="0" marL="0">
+            <a:pPr marL="0" indent="0">
               <a:lnSpc>
                 <a:spcPct val="100000"/>
               </a:lnSpc>
@@ -11910,7 +12120,7 @@
             <a:endParaRPr lang="en-US" sz="1050" dirty="0"/>
           </a:p>
           <a:p>
-            <a:pPr indent="0" marL="0">
+            <a:pPr marL="0" indent="0">
               <a:lnSpc>
                 <a:spcPct val="100000"/>
               </a:lnSpc>
@@ -11930,7 +12140,7 @@
             <a:endParaRPr lang="en-US" sz="1050" dirty="0"/>
           </a:p>
           <a:p>
-            <a:pPr indent="0" marL="0">
+            <a:pPr marL="0" indent="0">
               <a:lnSpc>
                 <a:spcPct val="100000"/>
               </a:lnSpc>
@@ -11950,7 +12160,7 @@
             <a:endParaRPr lang="en-US" sz="1050" dirty="0"/>
           </a:p>
           <a:p>
-            <a:pPr indent="0" marL="0">
+            <a:pPr marL="0" indent="0">
               <a:lnSpc>
                 <a:spcPct val="100000"/>
               </a:lnSpc>
@@ -11970,7 +12180,7 @@
             <a:endParaRPr lang="en-US" sz="1050" dirty="0"/>
           </a:p>
           <a:p>
-            <a:pPr indent="0" marL="0">
+            <a:pPr marL="0" indent="0">
               <a:lnSpc>
                 <a:spcPct val="100000"/>
               </a:lnSpc>
@@ -11990,7 +12200,7 @@
             <a:endParaRPr lang="en-US" sz="1050" dirty="0"/>
           </a:p>
           <a:p>
-            <a:pPr indent="0" marL="0">
+            <a:pPr marL="0" indent="0">
               <a:lnSpc>
                 <a:spcPct val="100000"/>
               </a:lnSpc>
@@ -12007,12 +12217,6 @@
               </a:rPr>
               <a:t>    </a:t>
             </a:r>
-            <a:pPr indent="0" marL="0">
-              <a:lnSpc>
-                <a:spcPct val="100000"/>
-              </a:lnSpc>
-              <a:buNone/>
-            </a:pPr>
             <a:r>
               <a:rPr lang="en-US" sz="1050" b="1" dirty="0">
                 <a:solidFill>
@@ -12030,7 +12234,7 @@
             <a:endParaRPr lang="en-US" sz="1050" dirty="0"/>
           </a:p>
           <a:p>
-            <a:pPr indent="0" marL="0">
+            <a:pPr marL="0" indent="0">
               <a:lnSpc>
                 <a:spcPct val="100000"/>
               </a:lnSpc>
@@ -12050,7 +12254,7 @@
             <a:endParaRPr lang="en-US" sz="1050" dirty="0"/>
           </a:p>
           <a:p>
-            <a:pPr indent="0" marL="0">
+            <a:pPr marL="0" indent="0">
               <a:lnSpc>
                 <a:spcPct val="100000"/>
               </a:lnSpc>
@@ -12070,7 +12274,7 @@
             <a:endParaRPr lang="en-US" sz="1050" dirty="0"/>
           </a:p>
           <a:p>
-            <a:pPr indent="0" marL="0">
+            <a:pPr marL="0" indent="0">
               <a:lnSpc>
                 <a:spcPct val="100000"/>
               </a:lnSpc>
@@ -12112,7 +12316,7 @@
           <a:bodyPr wrap="square" lIns="0" tIns="0" rIns="0" bIns="0" rtlCol="0" anchor="t"/>
           <a:lstStyle/>
           <a:p>
-            <a:pPr indent="0" marL="0">
+            <a:pPr marL="0" indent="0">
               <a:buNone/>
             </a:pPr>
             <a:r>
@@ -12156,6 +12360,13 @@
             <a:prstDash val="solid"/>
           </a:ln>
         </p:spPr>
+        <p:txBody>
+          <a:bodyPr/>
+          <a:lstStyle/>
+          <a:p>
+            <a:endParaRPr lang="pt-BR"/>
+          </a:p>
+        </p:txBody>
       </p:sp>
       <p:sp>
         <p:nvSpPr>
@@ -12178,11 +12389,11 @@
           <a:bodyPr wrap="square" lIns="0" tIns="0" rIns="0" bIns="0" rtlCol="0" anchor="ctr"/>
           <a:lstStyle/>
           <a:p>
-            <a:pPr indent="0" marL="0">
-              <a:buNone/>
-            </a:pPr>
-            <a:r>
-              <a:rPr lang="en-US" sz="1000" b="1" spc="120" kern="0" dirty="0">
+            <a:pPr marL="0" indent="0">
+              <a:buNone/>
+            </a:pPr>
+            <a:r>
+              <a:rPr lang="en-US" sz="1000" b="1" kern="0" spc="120" dirty="0">
                 <a:solidFill>
                   <a:srgbClr val="D4622A"/>
                 </a:solidFill>
@@ -12217,7 +12428,7 @@
           <a:bodyPr wrap="square" lIns="0" tIns="0" rIns="0" bIns="0" rtlCol="0" anchor="t"/>
           <a:lstStyle/>
           <a:p>
-            <a:pPr indent="0" marL="0">
+            <a:pPr marL="0" indent="0">
               <a:buNone/>
             </a:pPr>
             <a:r>
@@ -12256,7 +12467,7 @@
           <a:bodyPr wrap="square" lIns="0" tIns="0" rIns="0" bIns="0" rtlCol="0" anchor="t"/>
           <a:lstStyle/>
           <a:p>
-            <a:pPr indent="0" marL="0">
+            <a:pPr marL="0" indent="0">
               <a:lnSpc>
                 <a:spcPct val="100000"/>
               </a:lnSpc>
@@ -12303,6 +12514,13 @@
             <a:prstDash val="solid"/>
           </a:ln>
         </p:spPr>
+        <p:txBody>
+          <a:bodyPr/>
+          <a:lstStyle/>
+          <a:p>
+            <a:endParaRPr lang="pt-BR"/>
+          </a:p>
+        </p:txBody>
       </p:sp>
       <p:sp>
         <p:nvSpPr>
@@ -12325,11 +12543,11 @@
           <a:bodyPr wrap="square" lIns="0" tIns="0" rIns="0" bIns="0" rtlCol="0" anchor="ctr"/>
           <a:lstStyle/>
           <a:p>
-            <a:pPr indent="0" marL="0">
-              <a:buNone/>
-            </a:pPr>
-            <a:r>
-              <a:rPr lang="en-US" sz="1000" b="1" spc="120" kern="0" dirty="0">
+            <a:pPr marL="0" indent="0">
+              <a:buNone/>
+            </a:pPr>
+            <a:r>
+              <a:rPr lang="en-US" sz="1000" b="1" kern="0" spc="120" dirty="0">
                 <a:solidFill>
                   <a:srgbClr val="D4622A"/>
                 </a:solidFill>
@@ -12364,7 +12582,7 @@
           <a:bodyPr wrap="square" lIns="0" tIns="0" rIns="0" bIns="0" rtlCol="0" anchor="t"/>
           <a:lstStyle/>
           <a:p>
-            <a:pPr indent="0" marL="0">
+            <a:pPr marL="0" indent="0">
               <a:buNone/>
             </a:pPr>
             <a:r>
@@ -12403,7 +12621,7 @@
           <a:bodyPr wrap="square" lIns="0" tIns="0" rIns="0" bIns="0" rtlCol="0" anchor="t"/>
           <a:lstStyle/>
           <a:p>
-            <a:pPr indent="0" marL="0">
+            <a:pPr marL="0" indent="0">
               <a:lnSpc>
                 <a:spcPct val="100000"/>
               </a:lnSpc>
@@ -12450,6 +12668,13 @@
             <a:prstDash val="solid"/>
           </a:ln>
         </p:spPr>
+        <p:txBody>
+          <a:bodyPr/>
+          <a:lstStyle/>
+          <a:p>
+            <a:endParaRPr lang="pt-BR"/>
+          </a:p>
+        </p:txBody>
       </p:sp>
       <p:sp>
         <p:nvSpPr>
@@ -12472,11 +12697,11 @@
           <a:bodyPr wrap="square" lIns="0" tIns="0" rIns="0" bIns="0" rtlCol="0" anchor="ctr"/>
           <a:lstStyle/>
           <a:p>
-            <a:pPr indent="0" marL="0">
-              <a:buNone/>
-            </a:pPr>
-            <a:r>
-              <a:rPr lang="en-US" sz="1000" b="1" spc="120" kern="0" dirty="0">
+            <a:pPr marL="0" indent="0">
+              <a:buNone/>
+            </a:pPr>
+            <a:r>
+              <a:rPr lang="en-US" sz="1000" b="1" kern="0" spc="120" dirty="0">
                 <a:solidFill>
                   <a:srgbClr val="D4622A"/>
                 </a:solidFill>
@@ -12511,7 +12736,7 @@
           <a:bodyPr wrap="square" lIns="0" tIns="0" rIns="0" bIns="0" rtlCol="0" anchor="t"/>
           <a:lstStyle/>
           <a:p>
-            <a:pPr indent="0" marL="0">
+            <a:pPr marL="0" indent="0">
               <a:buNone/>
             </a:pPr>
             <a:r>
@@ -12550,7 +12775,7 @@
           <a:bodyPr wrap="square" lIns="0" tIns="0" rIns="0" bIns="0" rtlCol="0" anchor="t"/>
           <a:lstStyle/>
           <a:p>
-            <a:pPr indent="0" marL="0">
+            <a:pPr marL="0" indent="0">
               <a:lnSpc>
                 <a:spcPct val="100000"/>
               </a:lnSpc>
@@ -12592,7 +12817,7 @@
           <a:bodyPr wrap="square" lIns="0" tIns="0" rIns="0" bIns="0" rtlCol="0" anchor="t"/>
           <a:lstStyle/>
           <a:p>
-            <a:pPr indent="0" marL="0">
+            <a:pPr marL="0" indent="0">
               <a:buNone/>
             </a:pPr>
             <a:r>
@@ -12631,7 +12856,7 @@
           <a:bodyPr wrap="square" lIns="0" tIns="0" rIns="0" bIns="0" rtlCol="0" anchor="t"/>
           <a:lstStyle/>
           <a:p>
-            <a:pPr algn="r" indent="0" marL="0">
+            <a:pPr marL="0" indent="0" algn="r">
               <a:buNone/>
             </a:pPr>
             <a:r>
@@ -12665,6 +12890,7 @@
         <a:solidFill>
           <a:srgbClr val="FAF9F7"/>
         </a:solidFill>
+        <a:effectLst/>
       </p:bgPr>
     </p:bg>
     <p:spTree>
@@ -12702,7 +12928,7 @@
           <a:bodyPr wrap="square" lIns="0" tIns="0" rIns="0" bIns="0" rtlCol="0" anchor="ctr"/>
           <a:lstStyle/>
           <a:p>
-            <a:pPr indent="0" marL="0">
+            <a:pPr marL="0" indent="0">
               <a:buNone/>
             </a:pPr>
             <a:r>
@@ -12741,7 +12967,7 @@
           <a:bodyPr wrap="square" lIns="0" tIns="0" rIns="0" bIns="0" rtlCol="0" anchor="t"/>
           <a:lstStyle/>
           <a:p>
-            <a:pPr indent="0" marL="0">
+            <a:pPr marL="0" indent="0">
               <a:buNone/>
             </a:pPr>
             <a:r>
@@ -12785,6 +13011,13 @@
             <a:prstDash val="solid"/>
           </a:ln>
         </p:spPr>
+        <p:txBody>
+          <a:bodyPr/>
+          <a:lstStyle/>
+          <a:p>
+            <a:endParaRPr lang="pt-BR"/>
+          </a:p>
+        </p:txBody>
       </p:sp>
       <p:sp>
         <p:nvSpPr>
@@ -12807,11 +13040,11 @@
           <a:bodyPr wrap="square" lIns="0" tIns="0" rIns="0" bIns="0" rtlCol="0" anchor="ctr"/>
           <a:lstStyle/>
           <a:p>
-            <a:pPr indent="0" marL="0">
-              <a:buNone/>
-            </a:pPr>
-            <a:r>
-              <a:rPr lang="en-US" sz="1000" b="1" spc="120" kern="0" dirty="0">
+            <a:pPr marL="0" indent="0">
+              <a:buNone/>
+            </a:pPr>
+            <a:r>
+              <a:rPr lang="en-US" sz="1000" b="1" kern="0" spc="120" dirty="0">
                 <a:solidFill>
                   <a:srgbClr val="6B6560"/>
                 </a:solidFill>
@@ -12846,7 +13079,7 @@
           <a:bodyPr wrap="square" lIns="0" tIns="0" rIns="0" bIns="0" rtlCol="0" anchor="t"/>
           <a:lstStyle/>
           <a:p>
-            <a:pPr indent="0" marL="0">
+            <a:pPr marL="0" indent="0">
               <a:lnSpc>
                 <a:spcPct val="100000"/>
               </a:lnSpc>
@@ -12893,6 +13126,13 @@
             <a:prstDash val="solid"/>
           </a:ln>
         </p:spPr>
+        <p:txBody>
+          <a:bodyPr/>
+          <a:lstStyle/>
+          <a:p>
+            <a:endParaRPr lang="pt-BR"/>
+          </a:p>
+        </p:txBody>
       </p:sp>
       <p:sp>
         <p:nvSpPr>
@@ -12915,11 +13155,11 @@
           <a:bodyPr wrap="square" lIns="0" tIns="0" rIns="0" bIns="0" rtlCol="0" anchor="ctr"/>
           <a:lstStyle/>
           <a:p>
-            <a:pPr indent="0" marL="0">
-              <a:buNone/>
-            </a:pPr>
-            <a:r>
-              <a:rPr lang="en-US" sz="1000" b="1" spc="120" kern="0" dirty="0">
+            <a:pPr marL="0" indent="0">
+              <a:buNone/>
+            </a:pPr>
+            <a:r>
+              <a:rPr lang="en-US" sz="1000" b="1" kern="0" spc="120" dirty="0">
                 <a:solidFill>
                   <a:srgbClr val="D4622A"/>
                 </a:solidFill>
@@ -12954,7 +13194,7 @@
           <a:bodyPr wrap="square" lIns="0" tIns="0" rIns="0" bIns="0" rtlCol="0" anchor="t"/>
           <a:lstStyle/>
           <a:p>
-            <a:pPr indent="0" marL="0">
+            <a:pPr marL="0" indent="0">
               <a:lnSpc>
                 <a:spcPct val="100000"/>
               </a:lnSpc>
@@ -12996,11 +13236,11 @@
           <a:bodyPr wrap="square" lIns="0" tIns="0" rIns="0" bIns="0" rtlCol="0" anchor="ctr"/>
           <a:lstStyle/>
           <a:p>
-            <a:pPr indent="0" marL="0">
-              <a:buNone/>
-            </a:pPr>
-            <a:r>
-              <a:rPr lang="en-US" sz="1000" b="1" spc="120" kern="0" dirty="0">
+            <a:pPr marL="0" indent="0">
+              <a:buNone/>
+            </a:pPr>
+            <a:r>
+              <a:rPr lang="en-US" sz="1000" b="1" kern="0" spc="120" dirty="0">
                 <a:solidFill>
                   <a:srgbClr val="6B6560"/>
                 </a:solidFill>
@@ -13035,11 +13275,11 @@
           <a:bodyPr wrap="square" lIns="0" tIns="0" rIns="0" bIns="0" rtlCol="0" anchor="ctr"/>
           <a:lstStyle/>
           <a:p>
-            <a:pPr indent="0" marL="0">
-              <a:buNone/>
-            </a:pPr>
-            <a:r>
-              <a:rPr lang="en-US" sz="1000" b="1" spc="120" kern="0" dirty="0">
+            <a:pPr marL="0" indent="0">
+              <a:buNone/>
+            </a:pPr>
+            <a:r>
+              <a:rPr lang="en-US" sz="1000" b="1" kern="0" spc="120" dirty="0">
                 <a:solidFill>
                   <a:srgbClr val="D4622A"/>
                 </a:solidFill>
@@ -13075,6 +13315,13 @@
             <a:prstDash val="solid"/>
           </a:ln>
         </p:spPr>
+        <p:txBody>
+          <a:bodyPr/>
+          <a:lstStyle/>
+          <a:p>
+            <a:endParaRPr lang="pt-BR"/>
+          </a:p>
+        </p:txBody>
       </p:sp>
       <p:sp>
         <p:nvSpPr>
@@ -13097,7 +13344,7 @@
           <a:bodyPr wrap="square" lIns="0" tIns="0" rIns="0" bIns="0" rtlCol="0" anchor="ctr"/>
           <a:lstStyle/>
           <a:p>
-            <a:pPr indent="0" marL="0">
+            <a:pPr marL="0" indent="0">
               <a:buNone/>
             </a:pPr>
             <a:r>
@@ -13136,7 +13383,7 @@
           <a:bodyPr wrap="square" lIns="0" tIns="0" rIns="0" bIns="0" rtlCol="0" anchor="ctr"/>
           <a:lstStyle/>
           <a:p>
-            <a:pPr indent="0" marL="0">
+            <a:pPr marL="0" indent="0">
               <a:buNone/>
             </a:pPr>
             <a:r>
@@ -13175,7 +13422,7 @@
           <a:bodyPr wrap="square" lIns="0" tIns="0" rIns="0" bIns="0" rtlCol="0" anchor="ctr"/>
           <a:lstStyle/>
           <a:p>
-            <a:pPr indent="0" marL="0">
+            <a:pPr marL="0" indent="0">
               <a:buNone/>
             </a:pPr>
             <a:r>
@@ -13215,6 +13462,13 @@
             <a:prstDash val="solid"/>
           </a:ln>
         </p:spPr>
+        <p:txBody>
+          <a:bodyPr/>
+          <a:lstStyle/>
+          <a:p>
+            <a:endParaRPr lang="pt-BR"/>
+          </a:p>
+        </p:txBody>
       </p:sp>
       <p:sp>
         <p:nvSpPr>
@@ -13237,7 +13491,7 @@
           <a:bodyPr wrap="square" lIns="0" tIns="0" rIns="0" bIns="0" rtlCol="0" anchor="ctr"/>
           <a:lstStyle/>
           <a:p>
-            <a:pPr indent="0" marL="0">
+            <a:pPr marL="0" indent="0">
               <a:buNone/>
             </a:pPr>
             <a:r>
@@ -13276,7 +13530,7 @@
           <a:bodyPr wrap="square" lIns="0" tIns="0" rIns="0" bIns="0" rtlCol="0" anchor="ctr"/>
           <a:lstStyle/>
           <a:p>
-            <a:pPr indent="0" marL="0">
+            <a:pPr marL="0" indent="0">
               <a:buNone/>
             </a:pPr>
             <a:r>
@@ -13315,7 +13569,7 @@
           <a:bodyPr wrap="square" lIns="0" tIns="0" rIns="0" bIns="0" rtlCol="0" anchor="ctr"/>
           <a:lstStyle/>
           <a:p>
-            <a:pPr indent="0" marL="0">
+            <a:pPr marL="0" indent="0">
               <a:buNone/>
             </a:pPr>
             <a:r>
@@ -13355,6 +13609,13 @@
             <a:prstDash val="solid"/>
           </a:ln>
         </p:spPr>
+        <p:txBody>
+          <a:bodyPr/>
+          <a:lstStyle/>
+          <a:p>
+            <a:endParaRPr lang="pt-BR"/>
+          </a:p>
+        </p:txBody>
       </p:sp>
       <p:sp>
         <p:nvSpPr>
@@ -13377,7 +13638,7 @@
           <a:bodyPr wrap="square" lIns="0" tIns="0" rIns="0" bIns="0" rtlCol="0" anchor="ctr"/>
           <a:lstStyle/>
           <a:p>
-            <a:pPr indent="0" marL="0">
+            <a:pPr marL="0" indent="0">
               <a:buNone/>
             </a:pPr>
             <a:r>
@@ -13416,7 +13677,7 @@
           <a:bodyPr wrap="square" lIns="0" tIns="0" rIns="0" bIns="0" rtlCol="0" anchor="ctr"/>
           <a:lstStyle/>
           <a:p>
-            <a:pPr indent="0" marL="0">
+            <a:pPr marL="0" indent="0">
               <a:buNone/>
             </a:pPr>
             <a:r>
@@ -13455,7 +13716,7 @@
           <a:bodyPr wrap="square" lIns="0" tIns="0" rIns="0" bIns="0" rtlCol="0" anchor="ctr"/>
           <a:lstStyle/>
           <a:p>
-            <a:pPr indent="0" marL="0">
+            <a:pPr marL="0" indent="0">
               <a:buNone/>
             </a:pPr>
             <a:r>
@@ -13495,6 +13756,13 @@
             <a:prstDash val="solid"/>
           </a:ln>
         </p:spPr>
+        <p:txBody>
+          <a:bodyPr/>
+          <a:lstStyle/>
+          <a:p>
+            <a:endParaRPr lang="pt-BR"/>
+          </a:p>
+        </p:txBody>
       </p:sp>
       <p:sp>
         <p:nvSpPr>
@@ -13517,7 +13785,7 @@
           <a:bodyPr wrap="square" lIns="0" tIns="0" rIns="0" bIns="0" rtlCol="0" anchor="ctr"/>
           <a:lstStyle/>
           <a:p>
-            <a:pPr indent="0" marL="0">
+            <a:pPr marL="0" indent="0">
               <a:buNone/>
             </a:pPr>
             <a:r>
@@ -13556,7 +13824,7 @@
           <a:bodyPr wrap="square" lIns="0" tIns="0" rIns="0" bIns="0" rtlCol="0" anchor="ctr"/>
           <a:lstStyle/>
           <a:p>
-            <a:pPr indent="0" marL="0">
+            <a:pPr marL="0" indent="0">
               <a:buNone/>
             </a:pPr>
             <a:r>
@@ -13595,7 +13863,7 @@
           <a:bodyPr wrap="square" lIns="0" tIns="0" rIns="0" bIns="0" rtlCol="0" anchor="ctr"/>
           <a:lstStyle/>
           <a:p>
-            <a:pPr indent="0" marL="0">
+            <a:pPr marL="0" indent="0">
               <a:buNone/>
             </a:pPr>
             <a:r>
@@ -13635,6 +13903,13 @@
             <a:prstDash val="solid"/>
           </a:ln>
         </p:spPr>
+        <p:txBody>
+          <a:bodyPr/>
+          <a:lstStyle/>
+          <a:p>
+            <a:endParaRPr lang="pt-BR"/>
+          </a:p>
+        </p:txBody>
       </p:sp>
       <p:sp>
         <p:nvSpPr>
@@ -13657,7 +13932,7 @@
           <a:bodyPr wrap="square" lIns="0" tIns="0" rIns="0" bIns="0" rtlCol="0" anchor="ctr"/>
           <a:lstStyle/>
           <a:p>
-            <a:pPr indent="0" marL="0">
+            <a:pPr marL="0" indent="0">
               <a:buNone/>
             </a:pPr>
             <a:r>
@@ -13696,7 +13971,7 @@
           <a:bodyPr wrap="square" lIns="0" tIns="0" rIns="0" bIns="0" rtlCol="0" anchor="ctr"/>
           <a:lstStyle/>
           <a:p>
-            <a:pPr indent="0" marL="0">
+            <a:pPr marL="0" indent="0">
               <a:buNone/>
             </a:pPr>
             <a:r>
@@ -13735,7 +14010,7 @@
           <a:bodyPr wrap="square" lIns="0" tIns="0" rIns="0" bIns="0" rtlCol="0" anchor="ctr"/>
           <a:lstStyle/>
           <a:p>
-            <a:pPr indent="0" marL="0">
+            <a:pPr marL="0" indent="0">
               <a:buNone/>
             </a:pPr>
             <a:r>
@@ -13775,6 +14050,13 @@
             <a:prstDash val="solid"/>
           </a:ln>
         </p:spPr>
+        <p:txBody>
+          <a:bodyPr/>
+          <a:lstStyle/>
+          <a:p>
+            <a:endParaRPr lang="pt-BR"/>
+          </a:p>
+        </p:txBody>
       </p:sp>
       <p:sp>
         <p:nvSpPr>
@@ -13797,7 +14079,7 @@
           <a:bodyPr wrap="square" lIns="0" tIns="0" rIns="0" bIns="0" rtlCol="0" anchor="ctr"/>
           <a:lstStyle/>
           <a:p>
-            <a:pPr indent="0" marL="0">
+            <a:pPr marL="0" indent="0">
               <a:buNone/>
             </a:pPr>
             <a:r>
@@ -13836,7 +14118,7 @@
           <a:bodyPr wrap="square" lIns="0" tIns="0" rIns="0" bIns="0" rtlCol="0" anchor="ctr"/>
           <a:lstStyle/>
           <a:p>
-            <a:pPr indent="0" marL="0">
+            <a:pPr marL="0" indent="0">
               <a:buNone/>
             </a:pPr>
             <a:r>
@@ -13875,7 +14157,7 @@
           <a:bodyPr wrap="square" lIns="0" tIns="0" rIns="0" bIns="0" rtlCol="0" anchor="ctr"/>
           <a:lstStyle/>
           <a:p>
-            <a:pPr indent="0" marL="0">
+            <a:pPr marL="0" indent="0">
               <a:buNone/>
             </a:pPr>
             <a:r>
@@ -13915,6 +14197,13 @@
             <a:prstDash val="solid"/>
           </a:ln>
         </p:spPr>
+        <p:txBody>
+          <a:bodyPr/>
+          <a:lstStyle/>
+          <a:p>
+            <a:endParaRPr lang="pt-BR"/>
+          </a:p>
+        </p:txBody>
       </p:sp>
       <p:sp>
         <p:nvSpPr>
@@ -13937,7 +14226,7 @@
           <a:bodyPr wrap="square" lIns="0" tIns="0" rIns="0" bIns="0" rtlCol="0" anchor="ctr"/>
           <a:lstStyle/>
           <a:p>
-            <a:pPr indent="0" marL="0">
+            <a:pPr marL="0" indent="0">
               <a:buNone/>
             </a:pPr>
             <a:r>
@@ -13976,7 +14265,7 @@
           <a:bodyPr wrap="square" lIns="0" tIns="0" rIns="0" bIns="0" rtlCol="0" anchor="ctr"/>
           <a:lstStyle/>
           <a:p>
-            <a:pPr indent="0" marL="0">
+            <a:pPr marL="0" indent="0">
               <a:buNone/>
             </a:pPr>
             <a:r>
@@ -14015,7 +14304,7 @@
           <a:bodyPr wrap="square" lIns="0" tIns="0" rIns="0" bIns="0" rtlCol="0" anchor="ctr"/>
           <a:lstStyle/>
           <a:p>
-            <a:pPr indent="0" marL="0">
+            <a:pPr marL="0" indent="0">
               <a:buNone/>
             </a:pPr>
             <a:r>
@@ -14055,6 +14344,13 @@
             <a:prstDash val="solid"/>
           </a:ln>
         </p:spPr>
+        <p:txBody>
+          <a:bodyPr/>
+          <a:lstStyle/>
+          <a:p>
+            <a:endParaRPr lang="pt-BR"/>
+          </a:p>
+        </p:txBody>
       </p:sp>
       <p:sp>
         <p:nvSpPr>
@@ -14077,7 +14373,7 @@
           <a:bodyPr wrap="square" lIns="0" tIns="0" rIns="0" bIns="0" rtlCol="0" anchor="ctr"/>
           <a:lstStyle/>
           <a:p>
-            <a:pPr indent="0" marL="0">
+            <a:pPr marL="0" indent="0">
               <a:buNone/>
             </a:pPr>
             <a:r>
@@ -14116,7 +14412,7 @@
           <a:bodyPr wrap="square" lIns="0" tIns="0" rIns="0" bIns="0" rtlCol="0" anchor="ctr"/>
           <a:lstStyle/>
           <a:p>
-            <a:pPr indent="0" marL="0">
+            <a:pPr marL="0" indent="0">
               <a:buNone/>
             </a:pPr>
             <a:r>
@@ -14155,7 +14451,7 @@
           <a:bodyPr wrap="square" lIns="0" tIns="0" rIns="0" bIns="0" rtlCol="0" anchor="ctr"/>
           <a:lstStyle/>
           <a:p>
-            <a:pPr indent="0" marL="0">
+            <a:pPr marL="0" indent="0">
               <a:buNone/>
             </a:pPr>
             <a:r>
@@ -14194,7 +14490,7 @@
           <a:bodyPr wrap="square" lIns="0" tIns="0" rIns="0" bIns="0" rtlCol="0" anchor="t"/>
           <a:lstStyle/>
           <a:p>
-            <a:pPr algn="r" indent="0" marL="0">
+            <a:pPr marL="0" indent="0" algn="r">
               <a:buNone/>
             </a:pPr>
             <a:r>
@@ -14228,6 +14524,7 @@
         <a:solidFill>
           <a:srgbClr val="FAF9F7"/>
         </a:solidFill>
+        <a:effectLst/>
       </p:bgPr>
     </p:bg>
     <p:spTree>
@@ -14265,7 +14562,7 @@
           <a:bodyPr wrap="square" lIns="0" tIns="0" rIns="0" bIns="0" rtlCol="0" anchor="ctr"/>
           <a:lstStyle/>
           <a:p>
-            <a:pPr indent="0" marL="0">
+            <a:pPr marL="0" indent="0">
               <a:buNone/>
             </a:pPr>
             <a:r>
@@ -14304,7 +14601,7 @@
           <a:bodyPr wrap="square" lIns="0" tIns="0" rIns="0" bIns="0" rtlCol="0" anchor="t"/>
           <a:lstStyle/>
           <a:p>
-            <a:pPr indent="0" marL="0">
+            <a:pPr marL="0" indent="0">
               <a:buNone/>
             </a:pPr>
             <a:r>
@@ -14348,6 +14645,13 @@
             <a:prstDash val="solid"/>
           </a:ln>
         </p:spPr>
+        <p:txBody>
+          <a:bodyPr/>
+          <a:lstStyle/>
+          <a:p>
+            <a:endParaRPr lang="pt-BR"/>
+          </a:p>
+        </p:txBody>
       </p:sp>
       <p:sp>
         <p:nvSpPr>
@@ -14370,11 +14674,11 @@
           <a:bodyPr wrap="square" lIns="0" tIns="0" rIns="0" bIns="0" rtlCol="0" anchor="ctr"/>
           <a:lstStyle/>
           <a:p>
-            <a:pPr indent="0" marL="0">
-              <a:buNone/>
-            </a:pPr>
-            <a:r>
-              <a:rPr lang="en-US" sz="1000" b="1" spc="120" kern="0" dirty="0">
+            <a:pPr marL="0" indent="0">
+              <a:buNone/>
+            </a:pPr>
+            <a:r>
+              <a:rPr lang="en-US" sz="1000" b="1" kern="0" spc="120" dirty="0">
                 <a:solidFill>
                   <a:srgbClr val="A8321F"/>
                 </a:solidFill>
@@ -14409,7 +14713,7 @@
           <a:bodyPr wrap="square" lIns="0" tIns="0" rIns="0" bIns="0" rtlCol="0" anchor="t"/>
           <a:lstStyle/>
           <a:p>
-            <a:pPr indent="0" marL="0">
+            <a:pPr marL="0" indent="0">
               <a:lnSpc>
                 <a:spcPct val="100000"/>
               </a:lnSpc>
@@ -14456,6 +14760,13 @@
             <a:prstDash val="solid"/>
           </a:ln>
         </p:spPr>
+        <p:txBody>
+          <a:bodyPr/>
+          <a:lstStyle/>
+          <a:p>
+            <a:endParaRPr lang="pt-BR"/>
+          </a:p>
+        </p:txBody>
       </p:sp>
       <p:sp>
         <p:nvSpPr>
@@ -14478,11 +14789,11 @@
           <a:bodyPr wrap="square" lIns="0" tIns="0" rIns="0" bIns="0" rtlCol="0" anchor="ctr"/>
           <a:lstStyle/>
           <a:p>
-            <a:pPr indent="0" marL="0">
-              <a:buNone/>
-            </a:pPr>
-            <a:r>
-              <a:rPr lang="en-US" sz="1000" b="1" spc="120" kern="0" dirty="0">
+            <a:pPr marL="0" indent="0">
+              <a:buNone/>
+            </a:pPr>
+            <a:r>
+              <a:rPr lang="en-US" sz="1000" b="1" kern="0" spc="120" dirty="0">
                 <a:solidFill>
                   <a:srgbClr val="6B6560"/>
                 </a:solidFill>
@@ -14517,7 +14828,7 @@
           <a:bodyPr wrap="square" lIns="0" tIns="0" rIns="0" bIns="0" rtlCol="0" anchor="t"/>
           <a:lstStyle/>
           <a:p>
-            <a:pPr indent="0" marL="0">
+            <a:pPr marL="0" indent="0">
               <a:lnSpc>
                 <a:spcPct val="100000"/>
               </a:lnSpc>
@@ -14564,6 +14875,13 @@
             <a:prstDash val="solid"/>
           </a:ln>
         </p:spPr>
+        <p:txBody>
+          <a:bodyPr/>
+          <a:lstStyle/>
+          <a:p>
+            <a:endParaRPr lang="pt-BR"/>
+          </a:p>
+        </p:txBody>
       </p:sp>
       <p:sp>
         <p:nvSpPr>
@@ -14589,6 +14907,13 @@
             <a:prstDash val="solid"/>
           </a:ln>
         </p:spPr>
+        <p:txBody>
+          <a:bodyPr/>
+          <a:lstStyle/>
+          <a:p>
+            <a:endParaRPr lang="pt-BR"/>
+          </a:p>
+        </p:txBody>
       </p:sp>
       <p:sp>
         <p:nvSpPr>
@@ -14611,7 +14936,7 @@
           <a:bodyPr wrap="square" lIns="0" tIns="0" rIns="0" bIns="0" rtlCol="0" anchor="ctr"/>
           <a:lstStyle/>
           <a:p>
-            <a:pPr algn="ctr" indent="0" marL="0">
+            <a:pPr marL="0" indent="0" algn="ctr">
               <a:buNone/>
             </a:pPr>
             <a:r>
@@ -14650,7 +14975,7 @@
           <a:bodyPr wrap="square" lIns="0" tIns="0" rIns="0" bIns="0" rtlCol="0" anchor="t"/>
           <a:lstStyle/>
           <a:p>
-            <a:pPr indent="0" marL="0">
+            <a:pPr marL="0" indent="0">
               <a:buNone/>
             </a:pPr>
             <a:r>
@@ -14689,7 +15014,7 @@
           <a:bodyPr wrap="square" lIns="0" tIns="0" rIns="0" bIns="0" rtlCol="0" anchor="t"/>
           <a:lstStyle/>
           <a:p>
-            <a:pPr indent="0" marL="0">
+            <a:pPr marL="0" indent="0">
               <a:lnSpc>
                 <a:spcPct val="100000"/>
               </a:lnSpc>
@@ -14731,7 +15056,7 @@
           <a:bodyPr wrap="square" lIns="0" tIns="0" rIns="0" bIns="0" rtlCol="0" anchor="ctr"/>
           <a:lstStyle/>
           <a:p>
-            <a:pPr algn="ctr" indent="0" marL="0">
+            <a:pPr marL="0" indent="0" algn="ctr">
               <a:buNone/>
             </a:pPr>
             <a:r>
@@ -14775,6 +15100,13 @@
             <a:prstDash val="solid"/>
           </a:ln>
         </p:spPr>
+        <p:txBody>
+          <a:bodyPr/>
+          <a:lstStyle/>
+          <a:p>
+            <a:endParaRPr lang="pt-BR"/>
+          </a:p>
+        </p:txBody>
       </p:sp>
       <p:sp>
         <p:nvSpPr>
@@ -14800,6 +15132,13 @@
             <a:prstDash val="solid"/>
           </a:ln>
         </p:spPr>
+        <p:txBody>
+          <a:bodyPr/>
+          <a:lstStyle/>
+          <a:p>
+            <a:endParaRPr lang="pt-BR"/>
+          </a:p>
+        </p:txBody>
       </p:sp>
       <p:sp>
         <p:nvSpPr>
@@ -14822,7 +15161,7 @@
           <a:bodyPr wrap="square" lIns="0" tIns="0" rIns="0" bIns="0" rtlCol="0" anchor="ctr"/>
           <a:lstStyle/>
           <a:p>
-            <a:pPr algn="ctr" indent="0" marL="0">
+            <a:pPr marL="0" indent="0" algn="ctr">
               <a:buNone/>
             </a:pPr>
             <a:r>
@@ -14861,7 +15200,7 @@
           <a:bodyPr wrap="square" lIns="0" tIns="0" rIns="0" bIns="0" rtlCol="0" anchor="t"/>
           <a:lstStyle/>
           <a:p>
-            <a:pPr indent="0" marL="0">
+            <a:pPr marL="0" indent="0">
               <a:buNone/>
             </a:pPr>
             <a:r>
@@ -14900,7 +15239,7 @@
           <a:bodyPr wrap="square" lIns="0" tIns="0" rIns="0" bIns="0" rtlCol="0" anchor="t"/>
           <a:lstStyle/>
           <a:p>
-            <a:pPr indent="0" marL="0">
+            <a:pPr marL="0" indent="0">
               <a:lnSpc>
                 <a:spcPct val="100000"/>
               </a:lnSpc>
@@ -14942,7 +15281,7 @@
           <a:bodyPr wrap="square" lIns="0" tIns="0" rIns="0" bIns="0" rtlCol="0" anchor="ctr"/>
           <a:lstStyle/>
           <a:p>
-            <a:pPr algn="ctr" indent="0" marL="0">
+            <a:pPr marL="0" indent="0" algn="ctr">
               <a:buNone/>
             </a:pPr>
             <a:r>
@@ -14986,6 +15325,13 @@
             <a:prstDash val="solid"/>
           </a:ln>
         </p:spPr>
+        <p:txBody>
+          <a:bodyPr/>
+          <a:lstStyle/>
+          <a:p>
+            <a:endParaRPr lang="pt-BR"/>
+          </a:p>
+        </p:txBody>
       </p:sp>
       <p:sp>
         <p:nvSpPr>
@@ -15011,6 +15357,13 @@
             <a:prstDash val="solid"/>
           </a:ln>
         </p:spPr>
+        <p:txBody>
+          <a:bodyPr/>
+          <a:lstStyle/>
+          <a:p>
+            <a:endParaRPr lang="pt-BR"/>
+          </a:p>
+        </p:txBody>
       </p:sp>
       <p:sp>
         <p:nvSpPr>
@@ -15033,7 +15386,7 @@
           <a:bodyPr wrap="square" lIns="0" tIns="0" rIns="0" bIns="0" rtlCol="0" anchor="ctr"/>
           <a:lstStyle/>
           <a:p>
-            <a:pPr algn="ctr" indent="0" marL="0">
+            <a:pPr marL="0" indent="0" algn="ctr">
               <a:buNone/>
             </a:pPr>
             <a:r>
@@ -15072,7 +15425,7 @@
           <a:bodyPr wrap="square" lIns="0" tIns="0" rIns="0" bIns="0" rtlCol="0" anchor="t"/>
           <a:lstStyle/>
           <a:p>
-            <a:pPr indent="0" marL="0">
+            <a:pPr marL="0" indent="0">
               <a:buNone/>
             </a:pPr>
             <a:r>
@@ -15111,7 +15464,7 @@
           <a:bodyPr wrap="square" lIns="0" tIns="0" rIns="0" bIns="0" rtlCol="0" anchor="t"/>
           <a:lstStyle/>
           <a:p>
-            <a:pPr indent="0" marL="0">
+            <a:pPr marL="0" indent="0">
               <a:lnSpc>
                 <a:spcPct val="100000"/>
               </a:lnSpc>
@@ -15153,7 +15506,7 @@
           <a:bodyPr wrap="square" lIns="0" tIns="0" rIns="0" bIns="0" rtlCol="0" anchor="ctr"/>
           <a:lstStyle/>
           <a:p>
-            <a:pPr algn="ctr" indent="0" marL="0">
+            <a:pPr marL="0" indent="0" algn="ctr">
               <a:buNone/>
             </a:pPr>
             <a:r>
@@ -15197,6 +15550,13 @@
             <a:prstDash val="solid"/>
           </a:ln>
         </p:spPr>
+        <p:txBody>
+          <a:bodyPr/>
+          <a:lstStyle/>
+          <a:p>
+            <a:endParaRPr lang="pt-BR"/>
+          </a:p>
+        </p:txBody>
       </p:sp>
       <p:sp>
         <p:nvSpPr>
@@ -15222,6 +15582,13 @@
             <a:prstDash val="solid"/>
           </a:ln>
         </p:spPr>
+        <p:txBody>
+          <a:bodyPr/>
+          <a:lstStyle/>
+          <a:p>
+            <a:endParaRPr lang="pt-BR"/>
+          </a:p>
+        </p:txBody>
       </p:sp>
       <p:sp>
         <p:nvSpPr>
@@ -15244,7 +15611,7 @@
           <a:bodyPr wrap="square" lIns="0" tIns="0" rIns="0" bIns="0" rtlCol="0" anchor="ctr"/>
           <a:lstStyle/>
           <a:p>
-            <a:pPr algn="ctr" indent="0" marL="0">
+            <a:pPr marL="0" indent="0" algn="ctr">
               <a:buNone/>
             </a:pPr>
             <a:r>
@@ -15283,7 +15650,7 @@
           <a:bodyPr wrap="square" lIns="0" tIns="0" rIns="0" bIns="0" rtlCol="0" anchor="t"/>
           <a:lstStyle/>
           <a:p>
-            <a:pPr indent="0" marL="0">
+            <a:pPr marL="0" indent="0">
               <a:buNone/>
             </a:pPr>
             <a:r>
@@ -15322,7 +15689,7 @@
           <a:bodyPr wrap="square" lIns="0" tIns="0" rIns="0" bIns="0" rtlCol="0" anchor="t"/>
           <a:lstStyle/>
           <a:p>
-            <a:pPr indent="0" marL="0">
+            <a:pPr marL="0" indent="0">
               <a:lnSpc>
                 <a:spcPct val="100000"/>
               </a:lnSpc>
@@ -15364,7 +15731,7 @@
           <a:bodyPr wrap="square" lIns="0" tIns="0" rIns="0" bIns="0" rtlCol="0" anchor="ctr"/>
           <a:lstStyle/>
           <a:p>
-            <a:pPr algn="ctr" indent="0" marL="0">
+            <a:pPr marL="0" indent="0" algn="ctr">
               <a:buNone/>
             </a:pPr>
             <a:r>
@@ -15408,6 +15775,13 @@
             <a:prstDash val="solid"/>
           </a:ln>
         </p:spPr>
+        <p:txBody>
+          <a:bodyPr/>
+          <a:lstStyle/>
+          <a:p>
+            <a:endParaRPr lang="pt-BR"/>
+          </a:p>
+        </p:txBody>
       </p:sp>
       <p:sp>
         <p:nvSpPr>
@@ -15433,6 +15807,13 @@
             <a:prstDash val="solid"/>
           </a:ln>
         </p:spPr>
+        <p:txBody>
+          <a:bodyPr/>
+          <a:lstStyle/>
+          <a:p>
+            <a:endParaRPr lang="pt-BR"/>
+          </a:p>
+        </p:txBody>
       </p:sp>
       <p:sp>
         <p:nvSpPr>
@@ -15455,7 +15836,7 @@
           <a:bodyPr wrap="square" lIns="0" tIns="0" rIns="0" bIns="0" rtlCol="0" anchor="ctr"/>
           <a:lstStyle/>
           <a:p>
-            <a:pPr algn="ctr" indent="0" marL="0">
+            <a:pPr marL="0" indent="0" algn="ctr">
               <a:buNone/>
             </a:pPr>
             <a:r>
@@ -15494,7 +15875,7 @@
           <a:bodyPr wrap="square" lIns="0" tIns="0" rIns="0" bIns="0" rtlCol="0" anchor="t"/>
           <a:lstStyle/>
           <a:p>
-            <a:pPr indent="0" marL="0">
+            <a:pPr marL="0" indent="0">
               <a:buNone/>
             </a:pPr>
             <a:r>
@@ -15533,7 +15914,7 @@
           <a:bodyPr wrap="square" lIns="0" tIns="0" rIns="0" bIns="0" rtlCol="0" anchor="t"/>
           <a:lstStyle/>
           <a:p>
-            <a:pPr indent="0" marL="0">
+            <a:pPr marL="0" indent="0">
               <a:lnSpc>
                 <a:spcPct val="100000"/>
               </a:lnSpc>
@@ -15580,6 +15961,13 @@
             <a:prstDash val="solid"/>
           </a:ln>
         </p:spPr>
+        <p:txBody>
+          <a:bodyPr/>
+          <a:lstStyle/>
+          <a:p>
+            <a:endParaRPr lang="pt-BR"/>
+          </a:p>
+        </p:txBody>
       </p:sp>
       <p:sp>
         <p:nvSpPr>
@@ -15602,11 +15990,11 @@
           <a:bodyPr wrap="square" lIns="0" tIns="0" rIns="0" bIns="0" rtlCol="0" anchor="ctr"/>
           <a:lstStyle/>
           <a:p>
-            <a:pPr indent="0" marL="0">
-              <a:buNone/>
-            </a:pPr>
-            <a:r>
-              <a:rPr lang="en-US" sz="1000" b="1" spc="120" kern="0" dirty="0">
+            <a:pPr marL="0" indent="0">
+              <a:buNone/>
+            </a:pPr>
+            <a:r>
+              <a:rPr lang="en-US" sz="1000" b="1" kern="0" spc="120" dirty="0">
                 <a:solidFill>
                   <a:srgbClr val="A8321F"/>
                 </a:solidFill>
@@ -15641,7 +16029,7 @@
           <a:bodyPr wrap="square" lIns="0" tIns="0" rIns="0" bIns="0" rtlCol="0" anchor="t"/>
           <a:lstStyle/>
           <a:p>
-            <a:pPr indent="0" marL="0">
+            <a:pPr marL="0" indent="0">
               <a:buNone/>
             </a:pPr>
             <a:r>
@@ -15685,6 +16073,13 @@
             <a:prstDash val="solid"/>
           </a:ln>
         </p:spPr>
+        <p:txBody>
+          <a:bodyPr/>
+          <a:lstStyle/>
+          <a:p>
+            <a:endParaRPr lang="pt-BR"/>
+          </a:p>
+        </p:txBody>
       </p:sp>
       <p:sp>
         <p:nvSpPr>
@@ -15707,11 +16102,11 @@
           <a:bodyPr wrap="square" lIns="0" tIns="0" rIns="0" bIns="0" rtlCol="0" anchor="ctr"/>
           <a:lstStyle/>
           <a:p>
-            <a:pPr indent="0" marL="0">
-              <a:buNone/>
-            </a:pPr>
-            <a:r>
-              <a:rPr lang="en-US" sz="1000" b="1" spc="120" kern="0" dirty="0">
+            <a:pPr marL="0" indent="0">
+              <a:buNone/>
+            </a:pPr>
+            <a:r>
+              <a:rPr lang="en-US" sz="1000" b="1" kern="0" spc="120" dirty="0">
                 <a:solidFill>
                   <a:srgbClr val="2F6B45"/>
                 </a:solidFill>
@@ -15746,7 +16141,7 @@
           <a:bodyPr wrap="square" lIns="0" tIns="0" rIns="0" bIns="0" rtlCol="0" anchor="t"/>
           <a:lstStyle/>
           <a:p>
-            <a:pPr indent="0" marL="0">
+            <a:pPr marL="0" indent="0">
               <a:buNone/>
             </a:pPr>
             <a:r>
@@ -15785,7 +16180,7 @@
           <a:bodyPr wrap="square" lIns="0" tIns="0" rIns="0" bIns="0" rtlCol="0" anchor="t"/>
           <a:lstStyle/>
           <a:p>
-            <a:pPr indent="0" marL="0">
+            <a:pPr marL="0" indent="0">
               <a:buNone/>
             </a:pPr>
             <a:r>
@@ -15824,7 +16219,7 @@
           <a:bodyPr wrap="square" lIns="0" tIns="0" rIns="0" bIns="0" rtlCol="0" anchor="t"/>
           <a:lstStyle/>
           <a:p>
-            <a:pPr algn="r" indent="0" marL="0">
+            <a:pPr marL="0" indent="0" algn="r">
               <a:buNone/>
             </a:pPr>
             <a:r>
@@ -15858,6 +16253,7 @@
         <a:solidFill>
           <a:srgbClr val="FAF9F7"/>
         </a:solidFill>
+        <a:effectLst/>
       </p:bgPr>
     </p:bg>
     <p:spTree>
@@ -15895,7 +16291,7 @@
           <a:bodyPr wrap="square" lIns="0" tIns="0" rIns="0" bIns="0" rtlCol="0" anchor="ctr"/>
           <a:lstStyle/>
           <a:p>
-            <a:pPr indent="0" marL="0">
+            <a:pPr marL="0" indent="0">
               <a:buNone/>
             </a:pPr>
             <a:r>
@@ -15934,7 +16330,7 @@
           <a:bodyPr wrap="square" lIns="0" tIns="0" rIns="0" bIns="0" rtlCol="0" anchor="t"/>
           <a:lstStyle/>
           <a:p>
-            <a:pPr indent="0" marL="0">
+            <a:pPr marL="0" indent="0">
               <a:buNone/>
             </a:pPr>
             <a:r>
@@ -15976,6 +16372,13 @@
             <a:prstDash val="solid"/>
           </a:ln>
         </p:spPr>
+        <p:txBody>
+          <a:bodyPr/>
+          <a:lstStyle/>
+          <a:p>
+            <a:endParaRPr lang="pt-BR"/>
+          </a:p>
+        </p:txBody>
       </p:sp>
       <p:sp>
         <p:nvSpPr>
@@ -15998,7 +16401,7 @@
           <a:bodyPr wrap="square" lIns="0" tIns="0" rIns="0" bIns="0" rtlCol="0" anchor="ctr"/>
           <a:lstStyle/>
           <a:p>
-            <a:pPr algn="ctr" indent="0" marL="0">
+            <a:pPr marL="0" indent="0" algn="ctr">
               <a:buNone/>
             </a:pPr>
             <a:r>
@@ -16037,7 +16440,7 @@
           <a:bodyPr wrap="square" lIns="0" tIns="0" rIns="0" bIns="0" rtlCol="0" anchor="t"/>
           <a:lstStyle/>
           <a:p>
-            <a:pPr indent="0" marL="0">
+            <a:pPr marL="0" indent="0">
               <a:lnSpc>
                 <a:spcPct val="100000"/>
               </a:lnSpc>
@@ -16054,12 +16457,6 @@
               </a:rPr>
               <a:t>A Ana confere o carrinho</a:t>
             </a:r>
-            <a:pPr indent="0" marL="0">
-              <a:lnSpc>
-                <a:spcPct val="100000"/>
-              </a:lnSpc>
-              <a:buNone/>
-            </a:pPr>
             <a:r>
               <a:rPr lang="en-US" sz="1250" dirty="0">
                 <a:solidFill>
@@ -16099,6 +16496,13 @@
             <a:prstDash val="solid"/>
           </a:ln>
         </p:spPr>
+        <p:txBody>
+          <a:bodyPr/>
+          <a:lstStyle/>
+          <a:p>
+            <a:endParaRPr lang="pt-BR"/>
+          </a:p>
+        </p:txBody>
       </p:sp>
       <p:sp>
         <p:nvSpPr>
@@ -16121,7 +16525,7 @@
           <a:bodyPr wrap="square" lIns="0" tIns="0" rIns="0" bIns="0" rtlCol="0" anchor="ctr"/>
           <a:lstStyle/>
           <a:p>
-            <a:pPr algn="ctr" indent="0" marL="0">
+            <a:pPr marL="0" indent="0" algn="ctr">
               <a:buNone/>
             </a:pPr>
             <a:r>
@@ -16160,7 +16564,7 @@
           <a:bodyPr wrap="square" lIns="0" tIns="0" rIns="0" bIns="0" rtlCol="0" anchor="t"/>
           <a:lstStyle/>
           <a:p>
-            <a:pPr indent="0" marL="0">
+            <a:pPr marL="0" indent="0">
               <a:lnSpc>
                 <a:spcPct val="100000"/>
               </a:lnSpc>
@@ -16177,12 +16581,6 @@
               </a:rPr>
               <a:t>Outra compra chega antes</a:t>
             </a:r>
-            <a:pPr indent="0" marL="0">
-              <a:lnSpc>
-                <a:spcPct val="100000"/>
-              </a:lnSpc>
-              <a:buNone/>
-            </a:pPr>
             <a:r>
               <a:rPr lang="en-US" sz="1250" dirty="0">
                 <a:solidFill>
@@ -16222,6 +16620,13 @@
             <a:prstDash val="solid"/>
           </a:ln>
         </p:spPr>
+        <p:txBody>
+          <a:bodyPr/>
+          <a:lstStyle/>
+          <a:p>
+            <a:endParaRPr lang="pt-BR"/>
+          </a:p>
+        </p:txBody>
       </p:sp>
       <p:sp>
         <p:nvSpPr>
@@ -16244,7 +16649,7 @@
           <a:bodyPr wrap="square" lIns="0" tIns="0" rIns="0" bIns="0" rtlCol="0" anchor="ctr"/>
           <a:lstStyle/>
           <a:p>
-            <a:pPr algn="ctr" indent="0" marL="0">
+            <a:pPr marL="0" indent="0" algn="ctr">
               <a:buNone/>
             </a:pPr>
             <a:r>
@@ -16283,7 +16688,7 @@
           <a:bodyPr wrap="square" lIns="0" tIns="0" rIns="0" bIns="0" rtlCol="0" anchor="t"/>
           <a:lstStyle/>
           <a:p>
-            <a:pPr indent="0" marL="0">
+            <a:pPr marL="0" indent="0">
               <a:lnSpc>
                 <a:spcPct val="100000"/>
               </a:lnSpc>
@@ -16300,12 +16705,6 @@
               </a:rPr>
               <a:t>A Ana reserva com a versão velha</a:t>
             </a:r>
-            <a:pPr indent="0" marL="0">
-              <a:lnSpc>
-                <a:spcPct val="100000"/>
-              </a:lnSpc>
-              <a:buNone/>
-            </a:pPr>
             <a:r>
               <a:rPr lang="en-US" sz="1250" dirty="0">
                 <a:solidFill>
@@ -16345,6 +16744,13 @@
             <a:prstDash val="solid"/>
           </a:ln>
         </p:spPr>
+        <p:txBody>
+          <a:bodyPr/>
+          <a:lstStyle/>
+          <a:p>
+            <a:endParaRPr lang="pt-BR"/>
+          </a:p>
+        </p:txBody>
       </p:sp>
       <p:sp>
         <p:nvSpPr>
@@ -16367,7 +16773,7 @@
           <a:bodyPr wrap="square" lIns="0" tIns="0" rIns="0" bIns="0" rtlCol="0" anchor="ctr"/>
           <a:lstStyle/>
           <a:p>
-            <a:pPr algn="ctr" indent="0" marL="0">
+            <a:pPr marL="0" indent="0" algn="ctr">
               <a:buNone/>
             </a:pPr>
             <a:r>
@@ -16406,7 +16812,7 @@
           <a:bodyPr wrap="square" lIns="0" tIns="0" rIns="0" bIns="0" rtlCol="0" anchor="t"/>
           <a:lstStyle/>
           <a:p>
-            <a:pPr indent="0" marL="0">
+            <a:pPr marL="0" indent="0">
               <a:lnSpc>
                 <a:spcPct val="100000"/>
               </a:lnSpc>
@@ -16423,12 +16829,6 @@
               </a:rPr>
               <a:t>A loja relê o Geisha</a:t>
             </a:r>
-            <a:pPr indent="0" marL="0">
-              <a:lnSpc>
-                <a:spcPct val="100000"/>
-              </a:lnSpc>
-              <a:buNone/>
-            </a:pPr>
             <a:r>
               <a:rPr lang="en-US" sz="1250" dirty="0">
                 <a:solidFill>
@@ -16468,6 +16868,13 @@
             <a:prstDash val="solid"/>
           </a:ln>
         </p:spPr>
+        <p:txBody>
+          <a:bodyPr/>
+          <a:lstStyle/>
+          <a:p>
+            <a:endParaRPr lang="pt-BR"/>
+          </a:p>
+        </p:txBody>
       </p:sp>
       <p:sp>
         <p:nvSpPr>
@@ -16490,7 +16897,7 @@
           <a:bodyPr wrap="square" lIns="0" tIns="0" rIns="0" bIns="0" rtlCol="0" anchor="ctr"/>
           <a:lstStyle/>
           <a:p>
-            <a:pPr algn="ctr" indent="0" marL="0">
+            <a:pPr marL="0" indent="0" algn="ctr">
               <a:buNone/>
             </a:pPr>
             <a:r>
@@ -16529,7 +16936,7 @@
           <a:bodyPr wrap="square" lIns="0" tIns="0" rIns="0" bIns="0" rtlCol="0" anchor="t"/>
           <a:lstStyle/>
           <a:p>
-            <a:pPr indent="0" marL="0">
+            <a:pPr marL="0" indent="0">
               <a:lnSpc>
                 <a:spcPct val="100000"/>
               </a:lnSpc>
@@ -16546,12 +16953,6 @@
               </a:rPr>
               <a:t>Estorno</a:t>
             </a:r>
-            <a:pPr indent="0" marL="0">
-              <a:lnSpc>
-                <a:spcPct val="100000"/>
-              </a:lnSpc>
-              <a:buNone/>
-            </a:pPr>
             <a:r>
               <a:rPr lang="en-US" sz="1250" dirty="0">
                 <a:solidFill>
@@ -16591,6 +16992,13 @@
             <a:prstDash val="solid"/>
           </a:ln>
         </p:spPr>
+        <p:txBody>
+          <a:bodyPr/>
+          <a:lstStyle/>
+          <a:p>
+            <a:endParaRPr lang="pt-BR"/>
+          </a:p>
+        </p:txBody>
       </p:sp>
       <p:sp>
         <p:nvSpPr>
@@ -16613,7 +17021,7 @@
           <a:bodyPr wrap="square" lIns="0" tIns="0" rIns="0" bIns="0" rtlCol="0" anchor="ctr"/>
           <a:lstStyle/>
           <a:p>
-            <a:pPr algn="ctr" indent="0" marL="0">
+            <a:pPr marL="0" indent="0" algn="ctr">
               <a:buNone/>
             </a:pPr>
             <a:r>
@@ -16652,7 +17060,7 @@
           <a:bodyPr wrap="square" lIns="0" tIns="0" rIns="0" bIns="0" rtlCol="0" anchor="t"/>
           <a:lstStyle/>
           <a:p>
-            <a:pPr indent="0" marL="0">
+            <a:pPr marL="0" indent="0">
               <a:lnSpc>
                 <a:spcPct val="100000"/>
               </a:lnSpc>
@@ -16669,12 +17077,6 @@
               </a:rPr>
               <a:t>A Ana vê a mensagem</a:t>
             </a:r>
-            <a:pPr indent="0" marL="0">
-              <a:lnSpc>
-                <a:spcPct val="100000"/>
-              </a:lnSpc>
-              <a:buNone/>
-            </a:pPr>
             <a:r>
               <a:rPr lang="en-US" sz="1250" dirty="0">
                 <a:solidFill>
@@ -16716,6 +17118,13 @@
             <a:prstDash val="solid"/>
           </a:ln>
         </p:spPr>
+        <p:txBody>
+          <a:bodyPr/>
+          <a:lstStyle/>
+          <a:p>
+            <a:endParaRPr lang="pt-BR"/>
+          </a:p>
+        </p:txBody>
       </p:sp>
       <p:sp>
         <p:nvSpPr>
@@ -16738,11 +17147,11 @@
           <a:bodyPr wrap="square" lIns="0" tIns="0" rIns="0" bIns="0" rtlCol="0" anchor="ctr"/>
           <a:lstStyle/>
           <a:p>
-            <a:pPr indent="0" marL="0">
-              <a:buNone/>
-            </a:pPr>
-            <a:r>
-              <a:rPr lang="en-US" sz="1000" b="1" spc="120" kern="0" dirty="0">
+            <a:pPr marL="0" indent="0">
+              <a:buNone/>
+            </a:pPr>
+            <a:r>
+              <a:rPr lang="en-US" sz="1000" b="1" kern="0" spc="120" dirty="0">
                 <a:solidFill>
                   <a:srgbClr val="2F6B45"/>
                 </a:solidFill>
@@ -16777,7 +17186,7 @@
           <a:bodyPr wrap="square" lIns="0" tIns="0" rIns="0" bIns="0" rtlCol="0" anchor="t"/>
           <a:lstStyle/>
           <a:p>
-            <a:pPr indent="0" marL="0">
+            <a:pPr marL="0" indent="0">
               <a:lnSpc>
                 <a:spcPct val="105000"/>
               </a:lnSpc>
@@ -16819,7 +17228,7 @@
           <a:bodyPr wrap="square" lIns="0" tIns="0" rIns="0" bIns="0" rtlCol="0" anchor="t"/>
           <a:lstStyle/>
           <a:p>
-            <a:pPr indent="0" marL="0">
+            <a:pPr marL="0" indent="0">
               <a:buNone/>
             </a:pPr>
             <a:r>
@@ -16863,6 +17272,13 @@
             <a:prstDash val="solid"/>
           </a:ln>
         </p:spPr>
+        <p:txBody>
+          <a:bodyPr/>
+          <a:lstStyle/>
+          <a:p>
+            <a:endParaRPr lang="pt-BR"/>
+          </a:p>
+        </p:txBody>
       </p:sp>
       <p:sp>
         <p:nvSpPr>
@@ -16885,11 +17301,11 @@
           <a:bodyPr wrap="square" lIns="0" tIns="0" rIns="0" bIns="0" rtlCol="0" anchor="ctr"/>
           <a:lstStyle/>
           <a:p>
-            <a:pPr indent="0" marL="0">
-              <a:buNone/>
-            </a:pPr>
-            <a:r>
-              <a:rPr lang="en-US" sz="1000" b="1" spc="120" kern="0" dirty="0">
+            <a:pPr marL="0" indent="0">
+              <a:buNone/>
+            </a:pPr>
+            <a:r>
+              <a:rPr lang="en-US" sz="1000" b="1" kern="0" spc="120" dirty="0">
                 <a:solidFill>
                   <a:srgbClr val="2F6B45"/>
                 </a:solidFill>
@@ -16924,7 +17340,7 @@
           <a:bodyPr wrap="square" lIns="0" tIns="0" rIns="0" bIns="0" rtlCol="0" anchor="t"/>
           <a:lstStyle/>
           <a:p>
-            <a:pPr indent="0" marL="0">
+            <a:pPr marL="0" indent="0">
               <a:lnSpc>
                 <a:spcPct val="105000"/>
               </a:lnSpc>
@@ -16966,7 +17382,7 @@
           <a:bodyPr wrap="square" lIns="0" tIns="0" rIns="0" bIns="0" rtlCol="0" anchor="t"/>
           <a:lstStyle/>
           <a:p>
-            <a:pPr indent="0" marL="0">
+            <a:pPr marL="0" indent="0">
               <a:buNone/>
             </a:pPr>
             <a:r>
@@ -17005,7 +17421,7 @@
           <a:bodyPr wrap="square" lIns="0" tIns="0" rIns="0" bIns="0" rtlCol="0" anchor="t"/>
           <a:lstStyle/>
           <a:p>
-            <a:pPr algn="r" indent="0" marL="0">
+            <a:pPr marL="0" indent="0" algn="r">
               <a:buNone/>
             </a:pPr>
             <a:r>
@@ -17324,4 +17740,319 @@
     </a:ext>
   </a:extLst>
 </a:theme>
+</file>
+
+<file path=ppt/theme/theme2.xml><?xml version="1.0" encoding="utf-8"?>
+<a:theme xmlns:a="http://schemas.openxmlformats.org/drawingml/2006/main" name="Tema do Office">
+  <a:themeElements>
+    <a:clrScheme name="Office">
+      <a:dk1>
+        <a:sysClr val="windowText" lastClr="000000"/>
+      </a:dk1>
+      <a:lt1>
+        <a:sysClr val="window" lastClr="FFFFFF"/>
+      </a:lt1>
+      <a:dk2>
+        <a:srgbClr val="0E2841"/>
+      </a:dk2>
+      <a:lt2>
+        <a:srgbClr val="E8E8E8"/>
+      </a:lt2>
+      <a:accent1>
+        <a:srgbClr val="156082"/>
+      </a:accent1>
+      <a:accent2>
+        <a:srgbClr val="E97132"/>
+      </a:accent2>
+      <a:accent3>
+        <a:srgbClr val="196B24"/>
+      </a:accent3>
+      <a:accent4>
+        <a:srgbClr val="0F9ED5"/>
+      </a:accent4>
+      <a:accent5>
+        <a:srgbClr val="A02B93"/>
+      </a:accent5>
+      <a:accent6>
+        <a:srgbClr val="4EA72E"/>
+      </a:accent6>
+      <a:hlink>
+        <a:srgbClr val="467886"/>
+      </a:hlink>
+      <a:folHlink>
+        <a:srgbClr val="96607D"/>
+      </a:folHlink>
+    </a:clrScheme>
+    <a:fontScheme name="Office">
+      <a:majorFont>
+        <a:latin typeface="Aptos Display" panose="02110004020202020204"/>
+        <a:ea typeface=""/>
+        <a:cs typeface=""/>
+        <a:font script="Jpan" typeface="游ゴシック Light"/>
+        <a:font script="Hang" typeface="맑은 고딕"/>
+        <a:font script="Hans" typeface="等线 Light"/>
+        <a:font script="Hant" typeface="新細明體"/>
+        <a:font script="Arab" typeface="Times New Roman"/>
+        <a:font script="Hebr" typeface="Times New Roman"/>
+        <a:font script="Thai" typeface="Angsana New"/>
+        <a:font script="Ethi" typeface="Nyala"/>
+        <a:font script="Beng" typeface="Vrinda"/>
+        <a:font script="Gujr" typeface="Shruti"/>
+        <a:font script="Khmr" typeface="MoolBoran"/>
+        <a:font script="Knda" typeface="Tunga"/>
+        <a:font script="Guru" typeface="Raavi"/>
+        <a:font script="Cans" typeface="Euphemia"/>
+        <a:font script="Cher" typeface="Plantagenet Cherokee"/>
+        <a:font script="Yiii" typeface="Microsoft Yi Baiti"/>
+        <a:font script="Tibt" typeface="Microsoft Himalaya"/>
+        <a:font script="Thaa" typeface="MV Boli"/>
+        <a:font script="Deva" typeface="Mangal"/>
+        <a:font script="Telu" typeface="Gautami"/>
+        <a:font script="Taml" typeface="Latha"/>
+        <a:font script="Syrc" typeface="Estrangelo Edessa"/>
+        <a:font script="Orya" typeface="Kalinga"/>
+        <a:font script="Mlym" typeface="Kartika"/>
+        <a:font script="Laoo" typeface="DokChampa"/>
+        <a:font script="Sinh" typeface="Iskoola Pota"/>
+        <a:font script="Mong" typeface="Mongolian Baiti"/>
+        <a:font script="Viet" typeface="Times New Roman"/>
+        <a:font script="Uigh" typeface="Microsoft Uighur"/>
+        <a:font script="Geor" typeface="Sylfaen"/>
+        <a:font script="Armn" typeface="Arial"/>
+        <a:font script="Bugi" typeface="Leelawadee UI"/>
+        <a:font script="Bopo" typeface="Microsoft JhengHei"/>
+        <a:font script="Java" typeface="Javanese Text"/>
+        <a:font script="Lisu" typeface="Segoe UI"/>
+        <a:font script="Mymr" typeface="Myanmar Text"/>
+        <a:font script="Nkoo" typeface="Ebrima"/>
+        <a:font script="Olck" typeface="Nirmala UI"/>
+        <a:font script="Osma" typeface="Ebrima"/>
+        <a:font script="Phag" typeface="Phagspa"/>
+        <a:font script="Syrn" typeface="Estrangelo Edessa"/>
+        <a:font script="Syrj" typeface="Estrangelo Edessa"/>
+        <a:font script="Syre" typeface="Estrangelo Edessa"/>
+        <a:font script="Sora" typeface="Nirmala UI"/>
+        <a:font script="Tale" typeface="Microsoft Tai Le"/>
+        <a:font script="Talu" typeface="Microsoft New Tai Lue"/>
+        <a:font script="Tfng" typeface="Ebrima"/>
+      </a:majorFont>
+      <a:minorFont>
+        <a:latin typeface="Aptos" panose="02110004020202020204"/>
+        <a:ea typeface=""/>
+        <a:cs typeface=""/>
+        <a:font script="Jpan" typeface="游ゴシック"/>
+        <a:font script="Hang" typeface="맑은 고딕"/>
+        <a:font script="Hans" typeface="等线"/>
+        <a:font script="Hant" typeface="新細明體"/>
+        <a:font script="Arab" typeface="Arial"/>
+        <a:font script="Hebr" typeface="Arial"/>
+        <a:font script="Thai" typeface="Cordia New"/>
+        <a:font script="Ethi" typeface="Nyala"/>
+        <a:font script="Beng" typeface="Vrinda"/>
+        <a:font script="Gujr" typeface="Shruti"/>
+        <a:font script="Khmr" typeface="DaunPenh"/>
+        <a:font script="Knda" typeface="Tunga"/>
+        <a:font script="Guru" typeface="Raavi"/>
+        <a:font script="Cans" typeface="Euphemia"/>
+        <a:font script="Cher" typeface="Plantagenet Cherokee"/>
+        <a:font script="Yiii" typeface="Microsoft Yi Baiti"/>
+        <a:font script="Tibt" typeface="Microsoft Himalaya"/>
+        <a:font script="Thaa" typeface="MV Boli"/>
+        <a:font script="Deva" typeface="Mangal"/>
+        <a:font script="Telu" typeface="Gautami"/>
+        <a:font script="Taml" typeface="Latha"/>
+        <a:font script="Syrc" typeface="Estrangelo Edessa"/>
+        <a:font script="Orya" typeface="Kalinga"/>
+        <a:font script="Mlym" typeface="Kartika"/>
+        <a:font script="Laoo" typeface="DokChampa"/>
+        <a:font script="Sinh" typeface="Iskoola Pota"/>
+        <a:font script="Mong" typeface="Mongolian Baiti"/>
+        <a:font script="Viet" typeface="Arial"/>
+        <a:font script="Uigh" typeface="Microsoft Uighur"/>
+        <a:font script="Geor" typeface="Sylfaen"/>
+        <a:font script="Armn" typeface="Arial"/>
+        <a:font script="Bugi" typeface="Leelawadee UI"/>
+        <a:font script="Bopo" typeface="Microsoft JhengHei"/>
+        <a:font script="Java" typeface="Javanese Text"/>
+        <a:font script="Lisu" typeface="Segoe UI"/>
+        <a:font script="Mymr" typeface="Myanmar Text"/>
+        <a:font script="Nkoo" typeface="Ebrima"/>
+        <a:font script="Olck" typeface="Nirmala UI"/>
+        <a:font script="Osma" typeface="Ebrima"/>
+        <a:font script="Phag" typeface="Phagspa"/>
+        <a:font script="Syrn" typeface="Estrangelo Edessa"/>
+        <a:font script="Syrj" typeface="Estrangelo Edessa"/>
+        <a:font script="Syre" typeface="Estrangelo Edessa"/>
+        <a:font script="Sora" typeface="Nirmala UI"/>
+        <a:font script="Tale" typeface="Microsoft Tai Le"/>
+        <a:font script="Talu" typeface="Microsoft New Tai Lue"/>
+        <a:font script="Tfng" typeface="Ebrima"/>
+      </a:minorFont>
+    </a:fontScheme>
+    <a:fmtScheme name="Office">
+      <a:fillStyleLst>
+        <a:solidFill>
+          <a:schemeClr val="phClr"/>
+        </a:solidFill>
+        <a:gradFill rotWithShape="1">
+          <a:gsLst>
+            <a:gs pos="0">
+              <a:schemeClr val="phClr">
+                <a:lumMod val="110000"/>
+                <a:satMod val="105000"/>
+                <a:tint val="67000"/>
+              </a:schemeClr>
+            </a:gs>
+            <a:gs pos="50000">
+              <a:schemeClr val="phClr">
+                <a:lumMod val="105000"/>
+                <a:satMod val="103000"/>
+                <a:tint val="73000"/>
+              </a:schemeClr>
+            </a:gs>
+            <a:gs pos="100000">
+              <a:schemeClr val="phClr">
+                <a:lumMod val="105000"/>
+                <a:satMod val="109000"/>
+                <a:tint val="81000"/>
+              </a:schemeClr>
+            </a:gs>
+          </a:gsLst>
+          <a:lin ang="5400000" scaled="0"/>
+        </a:gradFill>
+        <a:gradFill rotWithShape="1">
+          <a:gsLst>
+            <a:gs pos="0">
+              <a:schemeClr val="phClr">
+                <a:satMod val="103000"/>
+                <a:lumMod val="102000"/>
+                <a:tint val="94000"/>
+              </a:schemeClr>
+            </a:gs>
+            <a:gs pos="50000">
+              <a:schemeClr val="phClr">
+                <a:satMod val="110000"/>
+                <a:lumMod val="100000"/>
+                <a:shade val="100000"/>
+              </a:schemeClr>
+            </a:gs>
+            <a:gs pos="100000">
+              <a:schemeClr val="phClr">
+                <a:lumMod val="99000"/>
+                <a:satMod val="120000"/>
+                <a:shade val="78000"/>
+              </a:schemeClr>
+            </a:gs>
+          </a:gsLst>
+          <a:lin ang="5400000" scaled="0"/>
+        </a:gradFill>
+      </a:fillStyleLst>
+      <a:lnStyleLst>
+        <a:ln w="12700" cap="flat" cmpd="sng" algn="ctr">
+          <a:solidFill>
+            <a:schemeClr val="phClr"/>
+          </a:solidFill>
+          <a:prstDash val="solid"/>
+          <a:miter lim="800000"/>
+        </a:ln>
+        <a:ln w="19050" cap="flat" cmpd="sng" algn="ctr">
+          <a:solidFill>
+            <a:schemeClr val="phClr"/>
+          </a:solidFill>
+          <a:prstDash val="solid"/>
+          <a:miter lim="800000"/>
+        </a:ln>
+        <a:ln w="25400" cap="flat" cmpd="sng" algn="ctr">
+          <a:solidFill>
+            <a:schemeClr val="phClr"/>
+          </a:solidFill>
+          <a:prstDash val="solid"/>
+          <a:miter lim="800000"/>
+        </a:ln>
+      </a:lnStyleLst>
+      <a:effectStyleLst>
+        <a:effectStyle>
+          <a:effectLst/>
+        </a:effectStyle>
+        <a:effectStyle>
+          <a:effectLst/>
+        </a:effectStyle>
+        <a:effectStyle>
+          <a:effectLst>
+            <a:outerShdw blurRad="57150" dist="19050" dir="5400000" algn="ctr" rotWithShape="0">
+              <a:srgbClr val="000000">
+                <a:alpha val="63000"/>
+              </a:srgbClr>
+            </a:outerShdw>
+          </a:effectLst>
+        </a:effectStyle>
+      </a:effectStyleLst>
+      <a:bgFillStyleLst>
+        <a:solidFill>
+          <a:schemeClr val="phClr"/>
+        </a:solidFill>
+        <a:solidFill>
+          <a:schemeClr val="phClr">
+            <a:tint val="95000"/>
+            <a:satMod val="170000"/>
+          </a:schemeClr>
+        </a:solidFill>
+        <a:gradFill rotWithShape="1">
+          <a:gsLst>
+            <a:gs pos="0">
+              <a:schemeClr val="phClr">
+                <a:tint val="93000"/>
+                <a:satMod val="150000"/>
+                <a:shade val="98000"/>
+                <a:lumMod val="102000"/>
+              </a:schemeClr>
+            </a:gs>
+            <a:gs pos="50000">
+              <a:schemeClr val="phClr">
+                <a:tint val="98000"/>
+                <a:satMod val="130000"/>
+                <a:shade val="90000"/>
+                <a:lumMod val="103000"/>
+              </a:schemeClr>
+            </a:gs>
+            <a:gs pos="100000">
+              <a:schemeClr val="phClr">
+                <a:shade val="63000"/>
+                <a:satMod val="120000"/>
+              </a:schemeClr>
+            </a:gs>
+          </a:gsLst>
+          <a:lin ang="5400000" scaled="0"/>
+        </a:gradFill>
+      </a:bgFillStyleLst>
+    </a:fmtScheme>
+  </a:themeElements>
+  <a:objectDefaults>
+    <a:lnDef>
+      <a:spPr/>
+      <a:bodyPr/>
+      <a:lstStyle/>
+      <a:style>
+        <a:lnRef idx="2">
+          <a:schemeClr val="accent1"/>
+        </a:lnRef>
+        <a:fillRef idx="0">
+          <a:schemeClr val="accent1"/>
+        </a:fillRef>
+        <a:effectRef idx="1">
+          <a:schemeClr val="accent1"/>
+        </a:effectRef>
+        <a:fontRef idx="minor">
+          <a:schemeClr val="tx1"/>
+        </a:fontRef>
+      </a:style>
+    </a:lnDef>
+  </a:objectDefaults>
+  <a:extraClrSchemeLst/>
+  <a:extLst>
+    <a:ext uri="{05A4C25C-085E-4340-85A3-A5531E510DB2}">
+      <thm15:themeFamily xmlns:thm15="http://schemas.microsoft.com/office/thememl/2012/main" name="Office Theme" id="{2E142A2C-CD16-42D6-873A-C26D2A0506FA}" vid="{1BDDFF52-6CD6-40A5-AB3C-68EB2F1E4D0A}"/>
+    </a:ext>
+  </a:extLst>
+</a:theme>
 </file>
--- a/public/static/Torra_e_Terra_NoSQL.pptx
+++ b/public/static/Torra_e_Terra_NoSQL.pptx
@@ -4,9 +4,6 @@
   <p:sldMasterIdLst>
     <p:sldMasterId id="2147483648" r:id="rId1"/>
   </p:sldMasterIdLst>
-  <p:notesMasterIdLst>
-    <p:notesMasterId r:id="rId14"/>
-  </p:notesMasterIdLst>
   <p:sldIdLst>
     <p:sldId id="256" r:id="rId2"/>
     <p:sldId id="257" r:id="rId3"/>
@@ -21,6 +18,9 @@
     <p:sldId id="266" r:id="rId12"/>
     <p:sldId id="267" r:id="rId13"/>
   </p:sldIdLst>
+  <p:notesMasterIdLst>
+    <p:notesMasterId r:id="rId14"/>
+  </p:notesMasterIdLst>
   <p:sldSz cx="12192000" cy="6858000"/>
   <p:notesSz cx="6858000" cy="12192000"/>
   <p:defaultTextStyle>
@@ -115,11 +115,6 @@
       </a:defRPr>
     </a:lvl9pPr>
   </p:defaultTextStyle>
-  <p:extLst>
-    <p:ext uri="{EFAFB233-063F-42B5-8137-9DF3F51BA10A}">
-      <p15:sldGuideLst xmlns:p15="http://schemas.microsoft.com/office/powerpoint/2012/main"/>
-    </p:ext>
-  </p:extLst>
 </p:presentation>
 </file>
 
@@ -145,10 +140,234 @@
           <a:chExt cx="0" cy="0"/>
         </a:xfrm>
       </p:grpSpPr>
+      <p:sp>
+        <p:nvSpPr>
+          <p:cNvPr id="2" name="Header Placeholder 1"/>
+          <p:cNvSpPr>
+            <a:spLocks noGrp="1"/>
+          </p:cNvSpPr>
+          <p:nvPr>
+            <p:ph type="hdr" sz="quarter"/>
+          </p:nvPr>
+        </p:nvSpPr>
+        <p:spPr>
+          <a:xfrm>
+            <a:off x="0" y="0"/>
+            <a:ext cx="2971800" cy="458788"/>
+          </a:xfrm>
+          <a:prstGeom prst="rect">
+            <a:avLst/>
+          </a:prstGeom>
+        </p:spPr>
+        <p:txBody>
+          <a:bodyPr vert="horz" lIns="91440" tIns="45720" rIns="91440" bIns="45720" rtlCol="0"/>
+          <a:lstStyle>
+            <a:lvl1pPr algn="l">
+              <a:defRPr sz="1200"/>
+            </a:lvl1pPr>
+          </a:lstStyle>
+          <a:p>
+            <a:endParaRPr lang="en-US"/>
+          </a:p>
+        </p:txBody>
+      </p:sp>
+      <p:sp>
+        <p:nvSpPr>
+          <p:cNvPr id="3" name="Date Placeholder 2"/>
+          <p:cNvSpPr>
+            <a:spLocks noGrp="1"/>
+          </p:cNvSpPr>
+          <p:nvPr>
+            <p:ph type="dt" idx="1"/>
+          </p:nvPr>
+        </p:nvSpPr>
+        <p:spPr>
+          <a:xfrm>
+            <a:off x="3884613" y="0"/>
+            <a:ext cx="2971800" cy="458788"/>
+          </a:xfrm>
+          <a:prstGeom prst="rect">
+            <a:avLst/>
+          </a:prstGeom>
+        </p:spPr>
+        <p:txBody>
+          <a:bodyPr vert="horz" lIns="91440" tIns="45720" rIns="91440" bIns="45720" rtlCol="0"/>
+          <a:lstStyle>
+            <a:lvl1pPr algn="r">
+              <a:defRPr sz="1200"/>
+            </a:lvl1pPr>
+          </a:lstStyle>
+          <a:p>
+            <a:fld id="{5282F153-3F37-0F45-9E97-73ACFA13230C}" type="datetimeFigureOut">
+              <a:rPr lang="en-US"/>
+              <a:t>7/23/19</a:t>
+            </a:fld>
+            <a:endParaRPr lang="en-US"/>
+          </a:p>
+        </p:txBody>
+      </p:sp>
+      <p:sp>
+        <p:nvSpPr>
+          <p:cNvPr id="4" name="Slide Image Placeholder 3"/>
+          <p:cNvSpPr>
+            <a:spLocks noGrp="1" noRot="1" noChangeAspect="1"/>
+          </p:cNvSpPr>
+          <p:nvPr>
+            <p:ph type="sldImg" idx="2"/>
+          </p:nvPr>
+        </p:nvSpPr>
+        <p:spPr>
+          <a:xfrm>
+            <a:off x="685800" y="1143000"/>
+            <a:ext cx="5486400" cy="3086100"/>
+          </a:xfrm>
+          <a:prstGeom prst="rect">
+            <a:avLst/>
+          </a:prstGeom>
+          <a:noFill/>
+          <a:ln w="12700">
+            <a:solidFill>
+              <a:prstClr val="black"/>
+            </a:solidFill>
+          </a:ln>
+        </p:spPr>
+        <p:txBody>
+          <a:bodyPr vert="horz" lIns="91440" tIns="45720" rIns="91440" bIns="45720" rtlCol="0" anchor="ctr"/>
+          <a:lstStyle/>
+          <a:p>
+            <a:endParaRPr lang="en-US"/>
+          </a:p>
+        </p:txBody>
+      </p:sp>
+      <p:sp>
+        <p:nvSpPr>
+          <p:cNvPr id="5" name="Notes Placeholder 4"/>
+          <p:cNvSpPr>
+            <a:spLocks noGrp="1"/>
+          </p:cNvSpPr>
+          <p:nvPr>
+            <p:ph type="body" sz="quarter" idx="3"/>
+          </p:nvPr>
+        </p:nvSpPr>
+        <p:spPr>
+          <a:xfrm>
+            <a:off x="685800" y="4400550"/>
+            <a:ext cx="5486400" cy="3600450"/>
+          </a:xfrm>
+          <a:prstGeom prst="rect">
+            <a:avLst/>
+          </a:prstGeom>
+        </p:spPr>
+        <p:txBody>
+          <a:bodyPr vert="horz" lIns="91440" tIns="45720" rIns="91440" bIns="45720" rtlCol="0"/>
+          <a:lstStyle/>
+          <a:p>
+            <a:pPr lvl="0"/>
+            <a:r>
+              <a:rPr lang="en-US"/>
+              <a:t>Click to edit Master text styles</a:t>
+            </a:r>
+          </a:p>
+          <a:p>
+            <a:pPr lvl="1"/>
+            <a:r>
+              <a:rPr lang="en-US"/>
+              <a:t>Second level</a:t>
+            </a:r>
+          </a:p>
+          <a:p>
+            <a:pPr lvl="2"/>
+            <a:r>
+              <a:rPr lang="en-US"/>
+              <a:t>Third level</a:t>
+            </a:r>
+          </a:p>
+          <a:p>
+            <a:pPr lvl="3"/>
+            <a:r>
+              <a:rPr lang="en-US"/>
+              <a:t>Fourth level</a:t>
+            </a:r>
+          </a:p>
+          <a:p>
+            <a:pPr lvl="4"/>
+            <a:r>
+              <a:rPr lang="en-US"/>
+              <a:t>Fifth level</a:t>
+            </a:r>
+          </a:p>
+        </p:txBody>
+      </p:sp>
+      <p:sp>
+        <p:nvSpPr>
+          <p:cNvPr id="6" name="Footer Placeholder 5"/>
+          <p:cNvSpPr>
+            <a:spLocks noGrp="1"/>
+          </p:cNvSpPr>
+          <p:nvPr>
+            <p:ph type="ftr" sz="quarter" idx="4"/>
+          </p:nvPr>
+        </p:nvSpPr>
+        <p:spPr>
+          <a:xfrm>
+            <a:off x="0" y="8685213"/>
+            <a:ext cx="2971800" cy="458787"/>
+          </a:xfrm>
+          <a:prstGeom prst="rect">
+            <a:avLst/>
+          </a:prstGeom>
+        </p:spPr>
+        <p:txBody>
+          <a:bodyPr vert="horz" lIns="91440" tIns="45720" rIns="91440" bIns="45720" rtlCol="0" anchor="b"/>
+          <a:lstStyle>
+            <a:lvl1pPr algn="l">
+              <a:defRPr sz="1200"/>
+            </a:lvl1pPr>
+          </a:lstStyle>
+          <a:p>
+            <a:endParaRPr lang="en-US"/>
+          </a:p>
+        </p:txBody>
+      </p:sp>
+      <p:sp>
+        <p:nvSpPr>
+          <p:cNvPr id="7" name="Slide Number Placeholder 6"/>
+          <p:cNvSpPr>
+            <a:spLocks noGrp="1"/>
+          </p:cNvSpPr>
+          <p:nvPr>
+            <p:ph type="sldNum" sz="quarter" idx="5"/>
+          </p:nvPr>
+        </p:nvSpPr>
+        <p:spPr>
+          <a:xfrm>
+            <a:off x="3884613" y="8685213"/>
+            <a:ext cx="2971800" cy="458787"/>
+          </a:xfrm>
+          <a:prstGeom prst="rect">
+            <a:avLst/>
+          </a:prstGeom>
+        </p:spPr>
+        <p:txBody>
+          <a:bodyPr vert="horz" lIns="91440" tIns="45720" rIns="91440" bIns="45720" rtlCol="0" anchor="b"/>
+          <a:lstStyle>
+            <a:lvl1pPr algn="r">
+              <a:defRPr sz="1200"/>
+            </a:lvl1pPr>
+          </a:lstStyle>
+          <a:p>
+            <a:fld id="{CE5E9CC1-C706-0F49-92D6-E571CC5EEA8F}" type="slidenum">
+              <a:rPr lang="en-US"/>
+              <a:t>‹#›</a:t>
+            </a:fld>
+            <a:endParaRPr lang="en-US"/>
+          </a:p>
+        </p:txBody>
+      </p:sp>
     </p:spTree>
     <p:extLst>
       <p:ext uri="{BB962C8B-B14F-4D97-AF65-F5344CB8AC3E}">
-        <p14:creationId xmlns:p14="http://schemas.microsoft.com/office/powerpoint/2010/main" val="3600572098"/>
+        <p14:creationId xmlns:p14="http://schemas.microsoft.com/office/powerpoint/2010/main" val="1024086991"/>
       </p:ext>
     </p:extLst>
   </p:cSld>
@@ -296,6 +515,7 @@
               <a:rPr lang="en-US" dirty="0"/>
               <a:t>Apresentar o grupo. Dizer em uma frase o que é o projeto: a mesma loja de café especial do projeto 1, com o banco trocado — saiu o PostgreSQL, entrou o CouchDB. A loja é a mesma de propósito: assim dá para comparar só o que mudou por causa do banco. A demonstração ao vivo fica para o final.</a:t>
             </a:r>
+            <a:endParaRPr lang="en-US" dirty="0"/>
           </a:p>
         </p:txBody>
       </p:sp>
@@ -383,6 +603,7 @@
               <a:rPr lang="en-US" dirty="0"/>
               <a:t>Contar como história, um de cada vez. O terceiro rende boa conversa: no PostgreSQL, o UNIQUE resolvia; no CouchDB, a única coisa que o banco garante ser única é a etiqueta da ficha — então a etiqueta passou a ser o próprio e-mail. O primeiro dos menores é o tipo de erro que só aparece rodando: o arquivo de senhas do projeto 1 estava sendo lido pelo projeto 2, porque uma pasta mora dentro da outra. Corrigimos apontando o caminho exato do arquivo.</a:t>
             </a:r>
+            <a:endParaRPr lang="en-US" dirty="0"/>
           </a:p>
         </p:txBody>
       </p:sp>
@@ -468,8 +689,9 @@
           <a:p>
             <a:r>
               <a:rPr lang="en-US" dirty="0"/>
-              <a:t>Saber o que não foi feito, e por quê, vale tanto quanto o que foi. Sobre as 8 idas ao banco: são sempre 8, com um café ou com vários, porque as reservas e a limpeza vão cada uma num lote só — e isso importa, porque o plano gratuito do Cloudant limita a 10 gravações por segundo. A reconciliação ser manual é a limitação mais honesta: em produção, ela rodaria sozinha de tempos em tempos.</a:t>
-            </a:r>
+              <a:t>Saber o que não foi feito, e por quê, vale tanto quanto o que foi. Sobre as 8 idas ao banco: são sempre 8, com um café ou com vários, porque as reservas e a limpeza vão cada uma num lote só — e isso importa, porque cada ida ao banco é espera: no ar, cada uma leva uns 20 ms, com o site no Vercel e o banco no Railway, os dois na costa leste dos Estados Unidos. A reconciliação ser manual é a limitação mais honesta: em produção, ela rodaria sozinha de tempos em tempos.</a:t>
+            </a:r>
+            <a:endParaRPr lang="en-US" dirty="0"/>
           </a:p>
         </p:txBody>
       </p:sp>
@@ -555,8 +777,9 @@
           <a:p>
             <a:r>
               <a:rPr lang="en-US" dirty="0"/>
-              <a:t>Abrir a loja alguns minutos antes, porque a primeira visita acorda a função no Vercel. Deixar o painel do Cloudant aberto numa segunda aba, já no banco torra_terra. O passo 4 é o que mais impressiona: a mensagem diz o café que faltou, e o painel mostra que nenhum pedido novo foi gravado. No passo 5, abrir a ficha do café antes e depois de uma compra e mostrar o número antes do hífen, no _rev, subindo. No fim, o QR code do slide leva direto ao WhatsApp de quem cuida do estoque do Torra &amp; Terra: quem quiser um dos cafés só aponta a câmera.</a:t>
-            </a:r>
+              <a:t>Abrir a loja alguns minutos antes, porque a primeira visita acorda a função no Vercel. Deixar o Fauxton, o painel do CouchDB no Railway, aberto numa segunda aba, já no banco torra_terra, e com o login feito antes: a senha não pode aparecer na tela. O passo 4 é o que mais impressiona: a mensagem diz o café que faltou, e o painel mostra que nenhum pedido novo foi gravado. No passo 5, abrir a ficha do café antes e depois de uma compra e mostrar o número antes do hífen, no _rev, subindo. No fim, o QR code do slide leva direto ao WhatsApp de quem cuida do estoque do Torra &amp; Terra: quem quiser um dos cafés só aponta a câmera.</a:t>
+            </a:r>
+            <a:endParaRPr lang="en-US" dirty="0"/>
           </a:p>
         </p:txBody>
       </p:sp>
@@ -644,6 +867,7 @@
               <a:rPr lang="en-US" dirty="0"/>
               <a:t>A ordem veio do material: são as entregas 1 a 6 do projeto prático. A diferença em relação ao projeto 1 está na etapa 0. No relacional, começamos pelas tabelas; aqui, começamos pelas perguntas que o site faz ao banco — o material pede isso com todas as letras: “liste as consultas antes de modelar”. O projeto 1 inteiro continua no GitHub, na tag v1-relacional, porque comparar os dois é o objetivo da atividade.</a:t>
             </a:r>
+            <a:endParaRPr lang="en-US" dirty="0"/>
           </a:p>
         </p:txBody>
       </p:sp>
@@ -731,6 +955,7 @@
               <a:rPr lang="en-US" dirty="0"/>
               <a:t>O material exige justificar o NoSQL pelo padrão de acesso — e padrão de acesso é só isto: o que o site mais pergunta ao banco. Para explicar índice: é o índice remissivo de um livro; em vez de folhear tudo, você vai direto à página. Ser honesto aqui conta ponto: a ficha é ótima para ler o pedido inteiro de uma vez, mas perde a garantia de gravar várias fichas juntas. O resto da apresentação mostra o que fizemos com essa perda.</a:t>
             </a:r>
+            <a:endParaRPr lang="en-US" dirty="0"/>
           </a:p>
         </p:txBody>
       </p:sp>
@@ -818,6 +1043,7 @@
               <a:rPr lang="en-US" dirty="0"/>
               <a:t>No projeto 1, o porteiro era o gunicorn, rodando num servidor ligado o tempo todo. No Vercel não existe servidor esperando: a própria plataforma recebe o acesso e acorda o Python quando alguém chega. Também sumiram o SQLAlchemy, o tradutor, e o psycopg, o cabo. O CouchDB não precisa de tradutor, porque a língua dele é o HTTP, a mesma de qualquer site. Por isso o carteiro é o requests, a biblioteca que o Python usa para abrir endereços da web.</a:t>
             </a:r>
+            <a:endParaRPr lang="en-US" dirty="0"/>
           </a:p>
         </p:txBody>
       </p:sp>
@@ -903,8 +1129,9 @@
           <a:p>
             <a:r>
               <a:rPr lang="en-US" dirty="0"/>
-              <a:t>Toda ferramenta aqui tem um porquê. O Cloudant é citado pelo próprio material, no slide 48, como opção compatível com o CouchDB; a conta da IBM pede cartão só para verificação. Sobre o Claude Code, vale dizer com transparência como ele foi usado: ele escrevia e testava, e o grupo decidia o que entrava. Um exemplo: foi rodando a regra do banco no Node que apareceu uma regra que nunca era usada, e ela saiu. Os próprios slides foram gerados por código: o PowerPoint com o pptxgenjs, e o PDF imprimindo a versão web no Chrome.</a:t>
-            </a:r>
+              <a:t>Toda ferramenta aqui tem um porquê. O primeiro plano para o banco era o IBM Cloudant, que o próprio material cita no slide 48; a conta da IBM pedia cartão de crédito, e o grupo decidiu publicar sem cartão. O CouchDB foi para um container no Railway, onde o projeto 1 já rodava, e nenhuma linha de código mudou: só o endereço do banco. O site em si saiu do Railway para o Vercel, que não cobra. Sobre o Claude Code, vale dizer com transparência como ele foi usado: ele escrevia e testava, e o grupo decidia o que entrava. Um exemplo: foi rodando a regra do banco no Node que apareceu uma regra que nunca era usada, e ela saiu. Os próprios slides foram gerados por código, com o pptxgenjs, e ajustados pelo grupo no PowerPoint, de onde sai o PDF.</a:t>
+            </a:r>
+            <a:endParaRPr lang="en-US" dirty="0"/>
           </a:p>
         </p:txBody>
       </p:sp>
@@ -992,6 +1219,7 @@
               <a:rPr lang="en-US" dirty="0"/>
               <a:t>É o slide de maior peso na nota: modelagem documental vale 25%. As três decisões resumem tudo: embutir o que é lido junto, referenciar o que tem vida própria, fotografar o que precisa ficar como estava no dia. A moagem é o argumento herdado do projeto 1: ela não é do café, é da compra — por isso continua dentro do item. Se perguntarem pelo _id: é a etiqueta da ficha, e quem escolhe o nome somos nós. Produto:chapada-geisha é legível, e nenhuma outra ficha pode ter a mesma etiqueta — é justamente isso que garante o e-mail único.</a:t>
             </a:r>
+            <a:endParaRPr lang="en-US" dirty="0"/>
           </a:p>
         </p:txBody>
       </p:sp>
@@ -1079,6 +1307,7 @@
               <a:rPr lang="en-US" dirty="0"/>
               <a:t>Ler a tabela pelas analogias. Nas regras, os dois recusam dado errado: no PostgreSQL é o CHECK; no CouchDB é uma função JavaScript que o próprio banco roda a cada gravação, a validate_doc_update. Temos 35 regras nela, testadas contra o CouchDB de verdade. A linha que importa é a última: o PostgreSQL grava várias tabelas como se fosse uma coisa só; o CouchDB garante uma ficha de cada vez. Um pedido de três cafés mexe em quatro fichas — e nada garante as quatro juntas. É o assunto do próximo slide.</a:t>
             </a:r>
+            <a:endParaRPr lang="en-US" dirty="0"/>
           </a:p>
         </p:txBody>
       </p:sp>
@@ -1166,6 +1395,7 @@
               <a:rPr lang="en-US" dirty="0"/>
               <a:t>Este é o coração. Começar pelo risco: sem transação, o pedido pode ficar gravado sem o estoque ter sido descontado. O projeto-base do material faz exatamente isso: avisa o conflito, mas não desfaz o que já entrou — e tentar de novo desconta duas vezes. A nossa solução se chama saga: uma sequência de passos em que cada passo sabe se desfazer. O detalhe que faz funcionar é o bilhete. Se a conexão cai no meio da reserva, a loja não sabe o que o banco gravou; o bilhete preso na ficha do café diz. O estorno devolve estoque só onde encontra bilhete, e por isso pode rodar duas vezes sem devolver em dobro. Se a função morrer no meio, um comando — reconciliar — termina o serviço depois.</a:t>
             </a:r>
+            <a:endParaRPr lang="en-US" dirty="0"/>
           </a:p>
         </p:txBody>
       </p:sp>
@@ -1253,6 +1483,7 @@
               <a:rPr lang="en-US" dirty="0"/>
               <a:t>Explicar o 409 com a analogia: o _rev é o número da versão da ficha. Quem grava precisa dizer qual versão leu; se alguém mexeu antes, o banco recusa — e isso é o erro 409. Não é falha, é o banco avisando. O teste força a corrida no instante exato: ele troca a função que grava por uma que, antes de gravar, faz a outra compra acontecer. Por isso o resultado é sempre o mesmo e não depende de sorte. Os dois testes rodam a cada envio ao GitHub, contra um CouchDB de verdade. Se houver tempo, o Fauxton mostra o mesmo 409 com duas abas editando a mesma ficha.</a:t>
             </a:r>
+            <a:endParaRPr lang="en-US" dirty="0"/>
           </a:p>
         </p:txBody>
       </p:sp>
@@ -1325,11 +1556,6 @@
 <file path=ppt/slideMasters/slideMaster1.xml><?xml version="1.0" encoding="utf-8"?>
 <p:sldMaster xmlns:a="http://schemas.openxmlformats.org/drawingml/2006/main" xmlns:r="http://schemas.openxmlformats.org/officeDocument/2006/relationships" xmlns:p="http://schemas.openxmlformats.org/presentationml/2006/main">
   <p:cSld>
-    <p:bg>
-      <p:bgRef idx="1001">
-        <a:schemeClr val="bg1"/>
-      </p:bgRef>
-    </p:bg>
     <p:spTree>
       <p:nvGrpSpPr>
         <p:cNvPr id="1" name=""/>
@@ -1612,7 +1838,6 @@
         <a:solidFill>
           <a:srgbClr val="14120F"/>
         </a:solidFill>
-        <a:effectLst/>
       </p:bgPr>
     </p:bg>
     <p:spTree>
@@ -1650,11 +1875,11 @@
           <a:bodyPr wrap="square" lIns="0" tIns="0" rIns="0" bIns="0" rtlCol="0" anchor="ctr"/>
           <a:lstStyle/>
           <a:p>
-            <a:pPr marL="0" indent="0">
-              <a:buNone/>
-            </a:pPr>
-            <a:r>
-              <a:rPr lang="en-US" sz="1000" b="1" kern="0" spc="120" dirty="0">
+            <a:pPr indent="0" marL="0">
+              <a:buNone/>
+            </a:pPr>
+            <a:r>
+              <a:rPr lang="en-US" sz="1000" b="1" spc="120" kern="0" dirty="0">
                 <a:solidFill>
                   <a:srgbClr val="9B928A"/>
                 </a:solidFill>
@@ -1689,7 +1914,7 @@
           <a:bodyPr wrap="square" lIns="0" tIns="0" rIns="0" bIns="0" rtlCol="0" anchor="ctr"/>
           <a:lstStyle/>
           <a:p>
-            <a:pPr marL="0" indent="0">
+            <a:pPr indent="0" marL="0">
               <a:buNone/>
             </a:pPr>
             <a:r>
@@ -1703,6 +1928,9 @@
               </a:rPr>
               <a:t>Torra </a:t>
             </a:r>
+            <a:pPr indent="0" marL="0">
+              <a:buNone/>
+            </a:pPr>
             <a:r>
               <a:rPr lang="en-US" sz="6200" dirty="0">
                 <a:solidFill>
@@ -1714,6 +1942,9 @@
               </a:rPr>
               <a:t>&amp;</a:t>
             </a:r>
+            <a:pPr indent="0" marL="0">
+              <a:buNone/>
+            </a:pPr>
             <a:r>
               <a:rPr lang="en-US" sz="6200" dirty="0">
                 <a:solidFill>
@@ -1750,7 +1981,7 @@
           <a:bodyPr wrap="square" lIns="0" tIns="0" rIns="0" bIns="0" rtlCol="0" anchor="ctr"/>
           <a:lstStyle/>
           <a:p>
-            <a:pPr marL="0" indent="0">
+            <a:pPr indent="0" marL="0">
               <a:buNone/>
             </a:pPr>
             <a:r>
@@ -1789,7 +2020,7 @@
           <a:bodyPr wrap="square" lIns="0" tIns="0" rIns="0" bIns="0" rtlCol="0" anchor="t"/>
           <a:lstStyle/>
           <a:p>
-            <a:pPr marL="0" indent="0">
+            <a:pPr indent="0" marL="0">
               <a:lnSpc>
                 <a:spcPct val="115000"/>
               </a:lnSpc>
@@ -1831,7 +2062,7 @@
           <a:bodyPr wrap="square" lIns="0" tIns="0" rIns="0" bIns="0" rtlCol="0" anchor="t"/>
           <a:lstStyle/>
           <a:p>
-            <a:pPr marL="0" indent="0">
+            <a:pPr indent="0" marL="0">
               <a:buNone/>
             </a:pPr>
             <a:r>
@@ -1843,63 +2074,7 @@
                 <a:ea typeface="Calibri" pitchFamily="34" charset="-122"/>
                 <a:cs typeface="Calibri" pitchFamily="34" charset="-120"/>
               </a:rPr>
-              <a:t>Prof. Nivaldo T. Marcusso  ·  </a:t>
-            </a:r>
-            <a:r>
-              <a:rPr lang="en-US" sz="1300" b="1" dirty="0">
-                <a:solidFill>
-                  <a:srgbClr val="A8321F"/>
-                </a:solidFill>
-                <a:highlight>
-                  <a:srgbClr val="FDF0ED"/>
-                </a:highlight>
-                <a:latin typeface="Calibri" pitchFamily="34" charset="0"/>
-                <a:ea typeface="Calibri" pitchFamily="34" charset="-122"/>
-                <a:cs typeface="Calibri" pitchFamily="34" charset="-120"/>
-              </a:rPr>
-              <a:t>Felipe Furlan; Henrique </a:t>
-            </a:r>
-            <a:r>
-              <a:rPr lang="en-US" sz="1300" b="1" dirty="0" err="1">
-                <a:solidFill>
-                  <a:srgbClr val="A8321F"/>
-                </a:solidFill>
-                <a:highlight>
-                  <a:srgbClr val="FDF0ED"/>
-                </a:highlight>
-                <a:latin typeface="Calibri" pitchFamily="34" charset="0"/>
-                <a:ea typeface="Calibri" pitchFamily="34" charset="-122"/>
-                <a:cs typeface="Calibri" pitchFamily="34" charset="-120"/>
-              </a:rPr>
-              <a:t>Biruel</a:t>
-            </a:r>
-            <a:r>
-              <a:rPr lang="en-US" sz="1300" b="1" dirty="0">
-                <a:solidFill>
-                  <a:srgbClr val="A8321F"/>
-                </a:solidFill>
-                <a:highlight>
-                  <a:srgbClr val="FDF0ED"/>
-                </a:highlight>
-                <a:latin typeface="Calibri" pitchFamily="34" charset="0"/>
-                <a:ea typeface="Calibri" pitchFamily="34" charset="-122"/>
-                <a:cs typeface="Calibri" pitchFamily="34" charset="-120"/>
-              </a:rPr>
-              <a:t>; Henrique </a:t>
-            </a:r>
-            <a:r>
-              <a:rPr lang="en-US" sz="1300" b="1" dirty="0" err="1">
-                <a:solidFill>
-                  <a:srgbClr val="A8321F"/>
-                </a:solidFill>
-                <a:highlight>
-                  <a:srgbClr val="FDF0ED"/>
-                </a:highlight>
-                <a:latin typeface="Calibri" pitchFamily="34" charset="0"/>
-                <a:ea typeface="Calibri" pitchFamily="34" charset="-122"/>
-                <a:cs typeface="Calibri" pitchFamily="34" charset="-120"/>
-              </a:rPr>
-              <a:t>Palorca</a:t>
+              <a:t>Prof. Nivaldo T. Marcusso  ·  Felipe Furlan; Henrique Biruel; Henrique Palorca</a:t>
             </a:r>
             <a:endParaRPr lang="en-US" sz="1300" dirty="0"/>
           </a:p>
@@ -1921,7 +2096,6 @@
         <a:solidFill>
           <a:srgbClr val="FAF9F7"/>
         </a:solidFill>
-        <a:effectLst/>
       </p:bgPr>
     </p:bg>
     <p:spTree>
@@ -1959,7 +2133,7 @@
           <a:bodyPr wrap="square" lIns="0" tIns="0" rIns="0" bIns="0" rtlCol="0" anchor="ctr"/>
           <a:lstStyle/>
           <a:p>
-            <a:pPr marL="0" indent="0">
+            <a:pPr indent="0" marL="0">
               <a:buNone/>
             </a:pPr>
             <a:r>
@@ -1998,7 +2172,7 @@
           <a:bodyPr wrap="square" lIns="0" tIns="0" rIns="0" bIns="0" rtlCol="0" anchor="t"/>
           <a:lstStyle/>
           <a:p>
-            <a:pPr marL="0" indent="0">
+            <a:pPr indent="0" marL="0">
               <a:buNone/>
             </a:pPr>
             <a:r>
@@ -2042,13 +2216,6 @@
             <a:prstDash val="solid"/>
           </a:ln>
         </p:spPr>
-        <p:txBody>
-          <a:bodyPr/>
-          <a:lstStyle/>
-          <a:p>
-            <a:endParaRPr lang="pt-BR"/>
-          </a:p>
-        </p:txBody>
       </p:sp>
       <p:sp>
         <p:nvSpPr>
@@ -2074,13 +2241,6 @@
             <a:prstDash val="solid"/>
           </a:ln>
         </p:spPr>
-        <p:txBody>
-          <a:bodyPr/>
-          <a:lstStyle/>
-          <a:p>
-            <a:endParaRPr lang="pt-BR"/>
-          </a:p>
-        </p:txBody>
       </p:sp>
       <p:sp>
         <p:nvSpPr>
@@ -2103,7 +2263,7 @@
           <a:bodyPr wrap="square" lIns="0" tIns="0" rIns="0" bIns="0" rtlCol="0" anchor="ctr"/>
           <a:lstStyle/>
           <a:p>
-            <a:pPr marL="0" indent="0" algn="ctr">
+            <a:pPr algn="ctr" indent="0" marL="0">
               <a:buNone/>
             </a:pPr>
             <a:r>
@@ -2142,7 +2302,7 @@
           <a:bodyPr wrap="square" lIns="0" tIns="0" rIns="0" bIns="0" rtlCol="0" anchor="t"/>
           <a:lstStyle/>
           <a:p>
-            <a:pPr marL="0" indent="0">
+            <a:pPr indent="0" marL="0">
               <a:lnSpc>
                 <a:spcPct val="100000"/>
               </a:lnSpc>
@@ -2184,7 +2344,7 @@
           <a:bodyPr wrap="square" lIns="0" tIns="0" rIns="0" bIns="0" rtlCol="0" anchor="t"/>
           <a:lstStyle/>
           <a:p>
-            <a:pPr marL="0" indent="0">
+            <a:pPr indent="0" marL="0">
               <a:lnSpc>
                 <a:spcPct val="100000"/>
               </a:lnSpc>
@@ -2226,7 +2386,7 @@
           <a:bodyPr wrap="square" lIns="0" tIns="0" rIns="0" bIns="0" rtlCol="0" anchor="t"/>
           <a:lstStyle/>
           <a:p>
-            <a:pPr marL="0" indent="0">
+            <a:pPr indent="0" marL="0">
               <a:lnSpc>
                 <a:spcPct val="100000"/>
               </a:lnSpc>
@@ -2273,13 +2433,6 @@
             <a:prstDash val="solid"/>
           </a:ln>
         </p:spPr>
-        <p:txBody>
-          <a:bodyPr/>
-          <a:lstStyle/>
-          <a:p>
-            <a:endParaRPr lang="pt-BR"/>
-          </a:p>
-        </p:txBody>
       </p:sp>
       <p:sp>
         <p:nvSpPr>
@@ -2305,13 +2458,6 @@
             <a:prstDash val="solid"/>
           </a:ln>
         </p:spPr>
-        <p:txBody>
-          <a:bodyPr/>
-          <a:lstStyle/>
-          <a:p>
-            <a:endParaRPr lang="pt-BR"/>
-          </a:p>
-        </p:txBody>
       </p:sp>
       <p:sp>
         <p:nvSpPr>
@@ -2334,7 +2480,7 @@
           <a:bodyPr wrap="square" lIns="0" tIns="0" rIns="0" bIns="0" rtlCol="0" anchor="ctr"/>
           <a:lstStyle/>
           <a:p>
-            <a:pPr marL="0" indent="0" algn="ctr">
+            <a:pPr algn="ctr" indent="0" marL="0">
               <a:buNone/>
             </a:pPr>
             <a:r>
@@ -2373,7 +2519,7 @@
           <a:bodyPr wrap="square" lIns="0" tIns="0" rIns="0" bIns="0" rtlCol="0" anchor="t"/>
           <a:lstStyle/>
           <a:p>
-            <a:pPr marL="0" indent="0">
+            <a:pPr indent="0" marL="0">
               <a:lnSpc>
                 <a:spcPct val="100000"/>
               </a:lnSpc>
@@ -2415,7 +2561,7 @@
           <a:bodyPr wrap="square" lIns="0" tIns="0" rIns="0" bIns="0" rtlCol="0" anchor="t"/>
           <a:lstStyle/>
           <a:p>
-            <a:pPr marL="0" indent="0">
+            <a:pPr indent="0" marL="0">
               <a:lnSpc>
                 <a:spcPct val="100000"/>
               </a:lnSpc>
@@ -2457,7 +2603,7 @@
           <a:bodyPr wrap="square" lIns="0" tIns="0" rIns="0" bIns="0" rtlCol="0" anchor="t"/>
           <a:lstStyle/>
           <a:p>
-            <a:pPr marL="0" indent="0">
+            <a:pPr indent="0" marL="0">
               <a:lnSpc>
                 <a:spcPct val="100000"/>
               </a:lnSpc>
@@ -2504,13 +2650,6 @@
             <a:prstDash val="solid"/>
           </a:ln>
         </p:spPr>
-        <p:txBody>
-          <a:bodyPr/>
-          <a:lstStyle/>
-          <a:p>
-            <a:endParaRPr lang="pt-BR"/>
-          </a:p>
-        </p:txBody>
       </p:sp>
       <p:sp>
         <p:nvSpPr>
@@ -2536,13 +2675,6 @@
             <a:prstDash val="solid"/>
           </a:ln>
         </p:spPr>
-        <p:txBody>
-          <a:bodyPr/>
-          <a:lstStyle/>
-          <a:p>
-            <a:endParaRPr lang="pt-BR"/>
-          </a:p>
-        </p:txBody>
       </p:sp>
       <p:sp>
         <p:nvSpPr>
@@ -2565,7 +2697,7 @@
           <a:bodyPr wrap="square" lIns="0" tIns="0" rIns="0" bIns="0" rtlCol="0" anchor="ctr"/>
           <a:lstStyle/>
           <a:p>
-            <a:pPr marL="0" indent="0" algn="ctr">
+            <a:pPr algn="ctr" indent="0" marL="0">
               <a:buNone/>
             </a:pPr>
             <a:r>
@@ -2604,7 +2736,7 @@
           <a:bodyPr wrap="square" lIns="0" tIns="0" rIns="0" bIns="0" rtlCol="0" anchor="t"/>
           <a:lstStyle/>
           <a:p>
-            <a:pPr marL="0" indent="0">
+            <a:pPr indent="0" marL="0">
               <a:lnSpc>
                 <a:spcPct val="100000"/>
               </a:lnSpc>
@@ -2646,7 +2778,7 @@
           <a:bodyPr wrap="square" lIns="0" tIns="0" rIns="0" bIns="0" rtlCol="0" anchor="t"/>
           <a:lstStyle/>
           <a:p>
-            <a:pPr marL="0" indent="0">
+            <a:pPr indent="0" marL="0">
               <a:lnSpc>
                 <a:spcPct val="100000"/>
               </a:lnSpc>
@@ -2688,7 +2820,7 @@
           <a:bodyPr wrap="square" lIns="0" tIns="0" rIns="0" bIns="0" rtlCol="0" anchor="t"/>
           <a:lstStyle/>
           <a:p>
-            <a:pPr marL="0" indent="0">
+            <a:pPr indent="0" marL="0">
               <a:lnSpc>
                 <a:spcPct val="100000"/>
               </a:lnSpc>
@@ -2735,13 +2867,6 @@
             <a:prstDash val="solid"/>
           </a:ln>
         </p:spPr>
-        <p:txBody>
-          <a:bodyPr/>
-          <a:lstStyle/>
-          <a:p>
-            <a:endParaRPr lang="pt-BR"/>
-          </a:p>
-        </p:txBody>
       </p:sp>
       <p:sp>
         <p:nvSpPr>
@@ -2767,13 +2892,6 @@
             <a:prstDash val="solid"/>
           </a:ln>
         </p:spPr>
-        <p:txBody>
-          <a:bodyPr/>
-          <a:lstStyle/>
-          <a:p>
-            <a:endParaRPr lang="pt-BR"/>
-          </a:p>
-        </p:txBody>
       </p:sp>
       <p:sp>
         <p:nvSpPr>
@@ -2796,7 +2914,7 @@
           <a:bodyPr wrap="square" lIns="0" tIns="0" rIns="0" bIns="0" rtlCol="0" anchor="ctr"/>
           <a:lstStyle/>
           <a:p>
-            <a:pPr marL="0" indent="0" algn="ctr">
+            <a:pPr algn="ctr" indent="0" marL="0">
               <a:buNone/>
             </a:pPr>
             <a:r>
@@ -2835,7 +2953,7 @@
           <a:bodyPr wrap="square" lIns="0" tIns="0" rIns="0" bIns="0" rtlCol="0" anchor="t"/>
           <a:lstStyle/>
           <a:p>
-            <a:pPr marL="0" indent="0">
+            <a:pPr indent="0" marL="0">
               <a:lnSpc>
                 <a:spcPct val="100000"/>
               </a:lnSpc>
@@ -2877,7 +2995,7 @@
           <a:bodyPr wrap="square" lIns="0" tIns="0" rIns="0" bIns="0" rtlCol="0" anchor="t"/>
           <a:lstStyle/>
           <a:p>
-            <a:pPr marL="0" indent="0">
+            <a:pPr indent="0" marL="0">
               <a:lnSpc>
                 <a:spcPct val="100000"/>
               </a:lnSpc>
@@ -2919,7 +3037,7 @@
           <a:bodyPr wrap="square" lIns="0" tIns="0" rIns="0" bIns="0" rtlCol="0" anchor="t"/>
           <a:lstStyle/>
           <a:p>
-            <a:pPr marL="0" indent="0">
+            <a:pPr indent="0" marL="0">
               <a:lnSpc>
                 <a:spcPct val="100000"/>
               </a:lnSpc>
@@ -2961,7 +3079,7 @@
           <a:bodyPr wrap="square" lIns="0" tIns="0" rIns="0" bIns="0" rtlCol="0" anchor="t"/>
           <a:lstStyle/>
           <a:p>
-            <a:pPr marL="0" indent="0">
+            <a:pPr indent="0" marL="0">
               <a:buNone/>
             </a:pPr>
             <a:r>
@@ -3000,7 +3118,7 @@
           <a:bodyPr wrap="square" lIns="0" tIns="0" rIns="0" bIns="0" rtlCol="0" anchor="t"/>
           <a:lstStyle/>
           <a:p>
-            <a:pPr marL="0" indent="0" algn="r">
+            <a:pPr algn="r" indent="0" marL="0">
               <a:buNone/>
             </a:pPr>
             <a:r>
@@ -3034,7 +3152,6 @@
         <a:solidFill>
           <a:srgbClr val="FAF9F7"/>
         </a:solidFill>
-        <a:effectLst/>
       </p:bgPr>
     </p:bg>
     <p:spTree>
@@ -3072,7 +3189,7 @@
           <a:bodyPr wrap="square" lIns="0" tIns="0" rIns="0" bIns="0" rtlCol="0" anchor="ctr"/>
           <a:lstStyle/>
           <a:p>
-            <a:pPr marL="0" indent="0">
+            <a:pPr indent="0" marL="0">
               <a:buNone/>
             </a:pPr>
             <a:r>
@@ -3116,13 +3233,6 @@
             <a:prstDash val="solid"/>
           </a:ln>
         </p:spPr>
-        <p:txBody>
-          <a:bodyPr/>
-          <a:lstStyle/>
-          <a:p>
-            <a:endParaRPr lang="pt-BR"/>
-          </a:p>
-        </p:txBody>
       </p:sp>
       <p:sp>
         <p:nvSpPr>
@@ -3145,7 +3255,7 @@
           <a:bodyPr wrap="square" lIns="0" tIns="0" rIns="0" bIns="0" rtlCol="0" anchor="ctr"/>
           <a:lstStyle/>
           <a:p>
-            <a:pPr marL="0" indent="0">
+            <a:pPr indent="0" marL="0">
               <a:buNone/>
             </a:pPr>
             <a:r>
@@ -3157,7 +3267,7 @@
                 <a:ea typeface="Cambria" pitchFamily="34" charset="-122"/>
                 <a:cs typeface="Cambria" pitchFamily="34" charset="-120"/>
               </a:rPr>
-              <a:t>107</a:t>
+              <a:t>110</a:t>
             </a:r>
             <a:endParaRPr lang="en-US" sz="3600" dirty="0"/>
           </a:p>
@@ -3184,7 +3294,7 @@
           <a:bodyPr wrap="square" lIns="0" tIns="0" rIns="0" bIns="0" rtlCol="0" anchor="t"/>
           <a:lstStyle/>
           <a:p>
-            <a:pPr marL="0" indent="0">
+            <a:pPr indent="0" marL="0">
               <a:buNone/>
             </a:pPr>
             <a:r>
@@ -3223,7 +3333,7 @@
           <a:bodyPr wrap="square" lIns="0" tIns="0" rIns="0" bIns="0" rtlCol="0" anchor="t"/>
           <a:lstStyle/>
           <a:p>
-            <a:pPr marL="0" indent="0">
+            <a:pPr indent="0" marL="0">
               <a:lnSpc>
                 <a:spcPct val="100000"/>
               </a:lnSpc>
@@ -3270,13 +3380,6 @@
             <a:prstDash val="solid"/>
           </a:ln>
         </p:spPr>
-        <p:txBody>
-          <a:bodyPr/>
-          <a:lstStyle/>
-          <a:p>
-            <a:endParaRPr lang="pt-BR"/>
-          </a:p>
-        </p:txBody>
       </p:sp>
       <p:sp>
         <p:nvSpPr>
@@ -3299,7 +3402,7 @@
           <a:bodyPr wrap="square" lIns="0" tIns="0" rIns="0" bIns="0" rtlCol="0" anchor="ctr"/>
           <a:lstStyle/>
           <a:p>
-            <a:pPr marL="0" indent="0">
+            <a:pPr indent="0" marL="0">
               <a:buNone/>
             </a:pPr>
             <a:r>
@@ -3338,7 +3441,7 @@
           <a:bodyPr wrap="square" lIns="0" tIns="0" rIns="0" bIns="0" rtlCol="0" anchor="t"/>
           <a:lstStyle/>
           <a:p>
-            <a:pPr marL="0" indent="0">
+            <a:pPr indent="0" marL="0">
               <a:buNone/>
             </a:pPr>
             <a:r>
@@ -3377,7 +3480,7 @@
           <a:bodyPr wrap="square" lIns="0" tIns="0" rIns="0" bIns="0" rtlCol="0" anchor="t"/>
           <a:lstStyle/>
           <a:p>
-            <a:pPr marL="0" indent="0">
+            <a:pPr indent="0" marL="0">
               <a:lnSpc>
                 <a:spcPct val="100000"/>
               </a:lnSpc>
@@ -3424,13 +3527,6 @@
             <a:prstDash val="solid"/>
           </a:ln>
         </p:spPr>
-        <p:txBody>
-          <a:bodyPr/>
-          <a:lstStyle/>
-          <a:p>
-            <a:endParaRPr lang="pt-BR"/>
-          </a:p>
-        </p:txBody>
       </p:sp>
       <p:sp>
         <p:nvSpPr>
@@ -3453,7 +3549,7 @@
           <a:bodyPr wrap="square" lIns="0" tIns="0" rIns="0" bIns="0" rtlCol="0" anchor="ctr"/>
           <a:lstStyle/>
           <a:p>
-            <a:pPr marL="0" indent="0">
+            <a:pPr indent="0" marL="0">
               <a:buNone/>
             </a:pPr>
             <a:r>
@@ -3492,7 +3588,7 @@
           <a:bodyPr wrap="square" lIns="0" tIns="0" rIns="0" bIns="0" rtlCol="0" anchor="t"/>
           <a:lstStyle/>
           <a:p>
-            <a:pPr marL="0" indent="0">
+            <a:pPr indent="0" marL="0">
               <a:buNone/>
             </a:pPr>
             <a:r>
@@ -3531,7 +3627,7 @@
           <a:bodyPr wrap="square" lIns="0" tIns="0" rIns="0" bIns="0" rtlCol="0" anchor="t"/>
           <a:lstStyle/>
           <a:p>
-            <a:pPr marL="0" indent="0">
+            <a:pPr indent="0" marL="0">
               <a:lnSpc>
                 <a:spcPct val="100000"/>
               </a:lnSpc>
@@ -3578,13 +3674,6 @@
             <a:prstDash val="solid"/>
           </a:ln>
         </p:spPr>
-        <p:txBody>
-          <a:bodyPr/>
-          <a:lstStyle/>
-          <a:p>
-            <a:endParaRPr lang="pt-BR"/>
-          </a:p>
-        </p:txBody>
       </p:sp>
       <p:sp>
         <p:nvSpPr>
@@ -3607,7 +3696,7 @@
           <a:bodyPr wrap="square" lIns="0" tIns="0" rIns="0" bIns="0" rtlCol="0" anchor="ctr"/>
           <a:lstStyle/>
           <a:p>
-            <a:pPr marL="0" indent="0">
+            <a:pPr indent="0" marL="0">
               <a:buNone/>
             </a:pPr>
             <a:r>
@@ -3646,7 +3735,7 @@
           <a:bodyPr wrap="square" lIns="0" tIns="0" rIns="0" bIns="0" rtlCol="0" anchor="t"/>
           <a:lstStyle/>
           <a:p>
-            <a:pPr marL="0" indent="0">
+            <a:pPr indent="0" marL="0">
               <a:buNone/>
             </a:pPr>
             <a:r>
@@ -3685,7 +3774,7 @@
           <a:bodyPr wrap="square" lIns="0" tIns="0" rIns="0" bIns="0" rtlCol="0" anchor="t"/>
           <a:lstStyle/>
           <a:p>
-            <a:pPr marL="0" indent="0">
+            <a:pPr indent="0" marL="0">
               <a:lnSpc>
                 <a:spcPct val="100000"/>
               </a:lnSpc>
@@ -3732,13 +3821,6 @@
             <a:prstDash val="solid"/>
           </a:ln>
         </p:spPr>
-        <p:txBody>
-          <a:bodyPr/>
-          <a:lstStyle/>
-          <a:p>
-            <a:endParaRPr lang="pt-BR"/>
-          </a:p>
-        </p:txBody>
       </p:sp>
       <p:sp>
         <p:nvSpPr>
@@ -3761,7 +3843,7 @@
           <a:bodyPr wrap="square" lIns="0" tIns="0" rIns="0" bIns="0" rtlCol="0" anchor="ctr"/>
           <a:lstStyle/>
           <a:p>
-            <a:pPr marL="0" indent="0">
+            <a:pPr indent="0" marL="0">
               <a:buNone/>
             </a:pPr>
             <a:r>
@@ -3800,7 +3882,7 @@
           <a:bodyPr wrap="square" lIns="0" tIns="0" rIns="0" bIns="0" rtlCol="0" anchor="t"/>
           <a:lstStyle/>
           <a:p>
-            <a:pPr marL="0" indent="0">
+            <a:pPr indent="0" marL="0">
               <a:buNone/>
             </a:pPr>
             <a:r>
@@ -3839,7 +3921,7 @@
           <a:bodyPr wrap="square" lIns="0" tIns="0" rIns="0" bIns="0" rtlCol="0" anchor="t"/>
           <a:lstStyle/>
           <a:p>
-            <a:pPr marL="0" indent="0">
+            <a:pPr indent="0" marL="0">
               <a:lnSpc>
                 <a:spcPct val="100000"/>
               </a:lnSpc>
@@ -3886,13 +3968,6 @@
             <a:prstDash val="solid"/>
           </a:ln>
         </p:spPr>
-        <p:txBody>
-          <a:bodyPr/>
-          <a:lstStyle/>
-          <a:p>
-            <a:endParaRPr lang="pt-BR"/>
-          </a:p>
-        </p:txBody>
       </p:sp>
       <p:sp>
         <p:nvSpPr>
@@ -3915,7 +3990,7 @@
           <a:bodyPr wrap="square" lIns="0" tIns="0" rIns="0" bIns="0" rtlCol="0" anchor="ctr"/>
           <a:lstStyle/>
           <a:p>
-            <a:pPr marL="0" indent="0">
+            <a:pPr indent="0" marL="0">
               <a:buNone/>
             </a:pPr>
             <a:r>
@@ -3954,7 +4029,7 @@
           <a:bodyPr wrap="square" lIns="0" tIns="0" rIns="0" bIns="0" rtlCol="0" anchor="t"/>
           <a:lstStyle/>
           <a:p>
-            <a:pPr marL="0" indent="0">
+            <a:pPr indent="0" marL="0">
               <a:buNone/>
             </a:pPr>
             <a:r>
@@ -3993,7 +4068,7 @@
           <a:bodyPr wrap="square" lIns="0" tIns="0" rIns="0" bIns="0" rtlCol="0" anchor="t"/>
           <a:lstStyle/>
           <a:p>
-            <a:pPr marL="0" indent="0">
+            <a:pPr indent="0" marL="0">
               <a:lnSpc>
                 <a:spcPct val="100000"/>
               </a:lnSpc>
@@ -4035,22 +4110,47 @@
           <a:bodyPr wrap="square" lIns="0" tIns="0" rIns="0" bIns="0" rtlCol="0" anchor="t"/>
           <a:lstStyle/>
           <a:p>
-            <a:pPr marL="0" indent="0">
+            <a:pPr indent="0" marL="0">
+              <a:buNone/>
+            </a:pPr>
+            <a:r>
+              <a:rPr lang="en-US" sz="1200" dirty="0">
+                <a:solidFill>
+                  <a:srgbClr val="14120F"/>
+                </a:solidFill>
+                <a:latin typeface="Calibri" pitchFamily="34" charset="0"/>
+                <a:ea typeface="Calibri" pitchFamily="34" charset="-122"/>
+                <a:cs typeface="Calibri" pitchFamily="34" charset="-120"/>
+              </a:rPr>
+              <a:t>No ar: </a:t>
+            </a:r>
+            <a:pPr indent="0" marL="0">
               <a:buNone/>
             </a:pPr>
             <a:r>
               <a:rPr lang="en-US" sz="1200" b="1" dirty="0">
                 <a:solidFill>
-                  <a:srgbClr val="A8321F"/>
-                </a:solidFill>
-                <a:highlight>
-                  <a:srgbClr val="FDF0ED"/>
-                </a:highlight>
-                <a:latin typeface="Calibri" pitchFamily="34" charset="0"/>
-                <a:ea typeface="Calibri" pitchFamily="34" charset="-122"/>
-                <a:cs typeface="Calibri" pitchFamily="34" charset="-120"/>
-              </a:rPr>
-              <a:t>[PREENCHER: tempo de resposta no ar, medido em /saude depois do deploy]</a:t>
+                  <a:srgbClr val="14120F"/>
+                </a:solidFill>
+                <a:latin typeface="Calibri" pitchFamily="34" charset="0"/>
+                <a:ea typeface="Calibri" pitchFamily="34" charset="-122"/>
+                <a:cs typeface="Calibri" pitchFamily="34" charset="-120"/>
+              </a:rPr>
+              <a:t>20 ms</a:t>
+            </a:r>
+            <a:pPr indent="0" marL="0">
+              <a:buNone/>
+            </a:pPr>
+            <a:r>
+              <a:rPr lang="en-US" sz="1200" dirty="0">
+                <a:solidFill>
+                  <a:srgbClr val="14120F"/>
+                </a:solidFill>
+                <a:latin typeface="Calibri" pitchFamily="34" charset="0"/>
+                <a:ea typeface="Calibri" pitchFamily="34" charset="-122"/>
+                <a:cs typeface="Calibri" pitchFamily="34" charset="-120"/>
+              </a:rPr>
+              <a:t> por ida ao banco — mediana de 15 medições em /saude.</a:t>
             </a:r>
             <a:endParaRPr lang="en-US" sz="1200" dirty="0"/>
           </a:p>
@@ -4082,13 +4182,6 @@
             <a:prstDash val="solid"/>
           </a:ln>
         </p:spPr>
-        <p:txBody>
-          <a:bodyPr/>
-          <a:lstStyle/>
-          <a:p>
-            <a:endParaRPr lang="pt-BR"/>
-          </a:p>
-        </p:txBody>
       </p:sp>
       <p:sp>
         <p:nvSpPr>
@@ -4111,11 +4204,11 @@
           <a:bodyPr wrap="square" lIns="0" tIns="0" rIns="0" bIns="0" rtlCol="0" anchor="ctr"/>
           <a:lstStyle/>
           <a:p>
-            <a:pPr marL="0" indent="0">
-              <a:buNone/>
-            </a:pPr>
-            <a:r>
-              <a:rPr lang="en-US" sz="1000" b="1" kern="0" spc="120" dirty="0">
+            <a:pPr indent="0" marL="0">
+              <a:buNone/>
+            </a:pPr>
+            <a:r>
+              <a:rPr lang="en-US" sz="1000" b="1" spc="120" kern="0" dirty="0">
                 <a:solidFill>
                   <a:srgbClr val="D4622A"/>
                 </a:solidFill>
@@ -4153,13 +4246,6 @@
             <a:prstDash val="solid"/>
           </a:ln>
         </p:spPr>
-        <p:txBody>
-          <a:bodyPr/>
-          <a:lstStyle/>
-          <a:p>
-            <a:endParaRPr lang="pt-BR"/>
-          </a:p>
-        </p:txBody>
       </p:sp>
       <p:sp>
         <p:nvSpPr>
@@ -4182,7 +4268,7 @@
           <a:bodyPr wrap="square" lIns="0" tIns="0" rIns="0" bIns="0" rtlCol="0" anchor="t"/>
           <a:lstStyle/>
           <a:p>
-            <a:pPr marL="0" indent="0">
+            <a:pPr indent="0" marL="0">
               <a:lnSpc>
                 <a:spcPct val="100000"/>
               </a:lnSpc>
@@ -4227,13 +4313,6 @@
             <a:prstDash val="solid"/>
           </a:ln>
         </p:spPr>
-        <p:txBody>
-          <a:bodyPr/>
-          <a:lstStyle/>
-          <a:p>
-            <a:endParaRPr lang="pt-BR"/>
-          </a:p>
-        </p:txBody>
       </p:sp>
       <p:sp>
         <p:nvSpPr>
@@ -4256,7 +4335,7 @@
           <a:bodyPr wrap="square" lIns="0" tIns="0" rIns="0" bIns="0" rtlCol="0" anchor="t"/>
           <a:lstStyle/>
           <a:p>
-            <a:pPr marL="0" indent="0">
+            <a:pPr indent="0" marL="0">
               <a:lnSpc>
                 <a:spcPct val="100000"/>
               </a:lnSpc>
@@ -4301,13 +4380,6 @@
             <a:prstDash val="solid"/>
           </a:ln>
         </p:spPr>
-        <p:txBody>
-          <a:bodyPr/>
-          <a:lstStyle/>
-          <a:p>
-            <a:endParaRPr lang="pt-BR"/>
-          </a:p>
-        </p:txBody>
       </p:sp>
       <p:sp>
         <p:nvSpPr>
@@ -4330,7 +4402,7 @@
           <a:bodyPr wrap="square" lIns="0" tIns="0" rIns="0" bIns="0" rtlCol="0" anchor="t"/>
           <a:lstStyle/>
           <a:p>
-            <a:pPr marL="0" indent="0">
+            <a:pPr indent="0" marL="0">
               <a:lnSpc>
                 <a:spcPct val="100000"/>
               </a:lnSpc>
@@ -4375,13 +4447,6 @@
             <a:prstDash val="solid"/>
           </a:ln>
         </p:spPr>
-        <p:txBody>
-          <a:bodyPr/>
-          <a:lstStyle/>
-          <a:p>
-            <a:endParaRPr lang="pt-BR"/>
-          </a:p>
-        </p:txBody>
       </p:sp>
       <p:sp>
         <p:nvSpPr>
@@ -4404,7 +4469,7 @@
           <a:bodyPr wrap="square" lIns="0" tIns="0" rIns="0" bIns="0" rtlCol="0" anchor="t"/>
           <a:lstStyle/>
           <a:p>
-            <a:pPr marL="0" indent="0">
+            <a:pPr indent="0" marL="0">
               <a:lnSpc>
                 <a:spcPct val="100000"/>
               </a:lnSpc>
@@ -4449,13 +4514,6 @@
             <a:prstDash val="solid"/>
           </a:ln>
         </p:spPr>
-        <p:txBody>
-          <a:bodyPr/>
-          <a:lstStyle/>
-          <a:p>
-            <a:endParaRPr lang="pt-BR"/>
-          </a:p>
-        </p:txBody>
       </p:sp>
       <p:sp>
         <p:nvSpPr>
@@ -4478,7 +4536,7 @@
           <a:bodyPr wrap="square" lIns="0" tIns="0" rIns="0" bIns="0" rtlCol="0" anchor="t"/>
           <a:lstStyle/>
           <a:p>
-            <a:pPr marL="0" indent="0">
+            <a:pPr indent="0" marL="0">
               <a:lnSpc>
                 <a:spcPct val="100000"/>
               </a:lnSpc>
@@ -4520,7 +4578,7 @@
           <a:bodyPr wrap="square" lIns="0" tIns="0" rIns="0" bIns="0" rtlCol="0" anchor="t"/>
           <a:lstStyle/>
           <a:p>
-            <a:pPr marL="0" indent="0" algn="r">
+            <a:pPr algn="r" indent="0" marL="0">
               <a:buNone/>
             </a:pPr>
             <a:r>
@@ -4554,7 +4612,6 @@
         <a:solidFill>
           <a:srgbClr val="14120F"/>
         </a:solidFill>
-        <a:effectLst/>
       </p:bgPr>
     </p:bg>
     <p:spTree>
@@ -4592,7 +4649,7 @@
           <a:bodyPr wrap="square" lIns="0" tIns="0" rIns="0" bIns="0" rtlCol="0" anchor="ctr"/>
           <a:lstStyle/>
           <a:p>
-            <a:pPr marL="0" indent="0">
+            <a:pPr indent="0" marL="0">
               <a:buNone/>
             </a:pPr>
             <a:r>
@@ -4631,10 +4688,13 @@
           <a:bodyPr wrap="square" lIns="0" tIns="0" rIns="0" bIns="0" rtlCol="0" anchor="t"/>
           <a:lstStyle/>
           <a:p>
+            <a:pPr indent="0" marL="0">
+              <a:buNone/>
+            </a:pPr>
             <a:r>
               <a:rPr lang="en-US" sz="1600" b="1" dirty="0">
                 <a:solidFill>
-                  <a:srgbClr val="A8321F"/>
+                  <a:srgbClr val="D4622A"/>
                 </a:solidFill>
                 <a:latin typeface="Calibri" pitchFamily="34" charset="0"/>
                 <a:ea typeface="Calibri" pitchFamily="34" charset="-122"/>
@@ -4670,13 +4730,6 @@
             <a:prstDash val="solid"/>
           </a:ln>
         </p:spPr>
-        <p:txBody>
-          <a:bodyPr/>
-          <a:lstStyle/>
-          <a:p>
-            <a:endParaRPr lang="pt-BR"/>
-          </a:p>
-        </p:txBody>
       </p:sp>
       <p:sp>
         <p:nvSpPr>
@@ -4699,7 +4752,7 @@
           <a:bodyPr wrap="square" lIns="0" tIns="0" rIns="0" bIns="0" rtlCol="0" anchor="ctr"/>
           <a:lstStyle/>
           <a:p>
-            <a:pPr marL="0" indent="0" algn="ctr">
+            <a:pPr algn="ctr" indent="0" marL="0">
               <a:buNone/>
             </a:pPr>
             <a:r>
@@ -4738,7 +4791,7 @@
           <a:bodyPr wrap="square" lIns="0" tIns="0" rIns="0" bIns="0" rtlCol="0" anchor="ctr"/>
           <a:lstStyle/>
           <a:p>
-            <a:pPr marL="0" indent="0">
+            <a:pPr indent="0" marL="0">
               <a:lnSpc>
                 <a:spcPct val="100000"/>
               </a:lnSpc>
@@ -4783,13 +4836,6 @@
             <a:prstDash val="solid"/>
           </a:ln>
         </p:spPr>
-        <p:txBody>
-          <a:bodyPr/>
-          <a:lstStyle/>
-          <a:p>
-            <a:endParaRPr lang="pt-BR"/>
-          </a:p>
-        </p:txBody>
       </p:sp>
       <p:sp>
         <p:nvSpPr>
@@ -4812,7 +4858,7 @@
           <a:bodyPr wrap="square" lIns="0" tIns="0" rIns="0" bIns="0" rtlCol="0" anchor="ctr"/>
           <a:lstStyle/>
           <a:p>
-            <a:pPr marL="0" indent="0" algn="ctr">
+            <a:pPr algn="ctr" indent="0" marL="0">
               <a:buNone/>
             </a:pPr>
             <a:r>
@@ -4851,7 +4897,7 @@
           <a:bodyPr wrap="square" lIns="0" tIns="0" rIns="0" bIns="0" rtlCol="0" anchor="ctr"/>
           <a:lstStyle/>
           <a:p>
-            <a:pPr marL="0" indent="0">
+            <a:pPr indent="0" marL="0">
               <a:lnSpc>
                 <a:spcPct val="100000"/>
               </a:lnSpc>
@@ -4896,13 +4942,6 @@
             <a:prstDash val="solid"/>
           </a:ln>
         </p:spPr>
-        <p:txBody>
-          <a:bodyPr/>
-          <a:lstStyle/>
-          <a:p>
-            <a:endParaRPr lang="pt-BR"/>
-          </a:p>
-        </p:txBody>
       </p:sp>
       <p:sp>
         <p:nvSpPr>
@@ -4925,7 +4964,7 @@
           <a:bodyPr wrap="square" lIns="0" tIns="0" rIns="0" bIns="0" rtlCol="0" anchor="ctr"/>
           <a:lstStyle/>
           <a:p>
-            <a:pPr marL="0" indent="0" algn="ctr">
+            <a:pPr algn="ctr" indent="0" marL="0">
               <a:buNone/>
             </a:pPr>
             <a:r>
@@ -4964,7 +5003,7 @@
           <a:bodyPr wrap="square" lIns="0" tIns="0" rIns="0" bIns="0" rtlCol="0" anchor="ctr"/>
           <a:lstStyle/>
           <a:p>
-            <a:pPr marL="0" indent="0">
+            <a:pPr indent="0" marL="0">
               <a:lnSpc>
                 <a:spcPct val="100000"/>
               </a:lnSpc>
@@ -5009,13 +5048,6 @@
             <a:prstDash val="solid"/>
           </a:ln>
         </p:spPr>
-        <p:txBody>
-          <a:bodyPr/>
-          <a:lstStyle/>
-          <a:p>
-            <a:endParaRPr lang="pt-BR"/>
-          </a:p>
-        </p:txBody>
       </p:sp>
       <p:sp>
         <p:nvSpPr>
@@ -5038,7 +5070,7 @@
           <a:bodyPr wrap="square" lIns="0" tIns="0" rIns="0" bIns="0" rtlCol="0" anchor="ctr"/>
           <a:lstStyle/>
           <a:p>
-            <a:pPr marL="0" indent="0" algn="ctr">
+            <a:pPr algn="ctr" indent="0" marL="0">
               <a:buNone/>
             </a:pPr>
             <a:r>
@@ -5077,7 +5109,7 @@
           <a:bodyPr wrap="square" lIns="0" tIns="0" rIns="0" bIns="0" rtlCol="0" anchor="ctr"/>
           <a:lstStyle/>
           <a:p>
-            <a:pPr marL="0" indent="0">
+            <a:pPr indent="0" marL="0">
               <a:lnSpc>
                 <a:spcPct val="100000"/>
               </a:lnSpc>
@@ -5122,13 +5154,6 @@
             <a:prstDash val="solid"/>
           </a:ln>
         </p:spPr>
-        <p:txBody>
-          <a:bodyPr/>
-          <a:lstStyle/>
-          <a:p>
-            <a:endParaRPr lang="pt-BR"/>
-          </a:p>
-        </p:txBody>
       </p:sp>
       <p:sp>
         <p:nvSpPr>
@@ -5151,7 +5176,7 @@
           <a:bodyPr wrap="square" lIns="0" tIns="0" rIns="0" bIns="0" rtlCol="0" anchor="ctr"/>
           <a:lstStyle/>
           <a:p>
-            <a:pPr marL="0" indent="0" algn="ctr">
+            <a:pPr algn="ctr" indent="0" marL="0">
               <a:buNone/>
             </a:pPr>
             <a:r>
@@ -5190,7 +5215,7 @@
           <a:bodyPr wrap="square" lIns="0" tIns="0" rIns="0" bIns="0" rtlCol="0" anchor="ctr"/>
           <a:lstStyle/>
           <a:p>
-            <a:pPr marL="0" indent="0">
+            <a:pPr indent="0" marL="0">
               <a:lnSpc>
                 <a:spcPct val="100000"/>
               </a:lnSpc>
@@ -5205,7 +5230,7 @@
                 <a:ea typeface="Calibri" pitchFamily="34" charset="-122"/>
                 <a:cs typeface="Calibri" pitchFamily="34" charset="-120"/>
               </a:rPr>
-              <a:t>No painel do Cloudant: a ficha do pedido e a versão do café mudando</a:t>
+              <a:t>No painel do CouchDB: a ficha do pedido e a versão do café mudando</a:t>
             </a:r>
             <a:endParaRPr lang="en-US" sz="1450" dirty="0"/>
           </a:p>
@@ -5232,7 +5257,7 @@
           <a:bodyPr wrap="square" lIns="0" tIns="0" rIns="0" bIns="0" rtlCol="0" anchor="t"/>
           <a:lstStyle/>
           <a:p>
-            <a:pPr marL="0" indent="0">
+            <a:pPr indent="0" marL="0">
               <a:buNone/>
             </a:pPr>
             <a:r>
@@ -5276,24 +5301,17 @@
             <a:prstDash val="solid"/>
           </a:ln>
         </p:spPr>
-        <p:txBody>
-          <a:bodyPr/>
-          <a:lstStyle/>
-          <a:p>
-            <a:endParaRPr lang="pt-BR"/>
-          </a:p>
-        </p:txBody>
       </p:sp>
       <p:pic>
         <p:nvPicPr>
-          <p:cNvPr id="21" name="Image 0" descr="C:\Users\lipef\AppData\Local\Temp\torra_terra_whatsapp_qr.png"/>
+          <p:cNvPr id="21" name="Image 0" descr="C:\Users\lipef\AppData\Local\Temp\torra_terra_whatsapp_qr.png">    </p:cNvPr>
           <p:cNvPicPr>
             <a:picLocks noChangeAspect="1"/>
           </p:cNvPicPr>
           <p:nvPr/>
         </p:nvPicPr>
         <p:blipFill>
-          <a:blip r:embed="rId3"/>
+          <a:blip r:embed="rId1"/>
           <a:stretch>
             <a:fillRect/>
           </a:stretch>
@@ -5329,7 +5347,7 @@
           <a:bodyPr wrap="square" lIns="0" tIns="0" rIns="0" bIns="0" rtlCol="0" anchor="t"/>
           <a:lstStyle/>
           <a:p>
-            <a:pPr marL="0" indent="0" algn="ctr">
+            <a:pPr algn="ctr" indent="0" marL="0">
               <a:buNone/>
             </a:pPr>
             <a:r>
@@ -5368,7 +5386,7 @@
           <a:bodyPr wrap="square" lIns="0" tIns="0" rIns="0" bIns="0" rtlCol="0" anchor="t"/>
           <a:lstStyle/>
           <a:p>
-            <a:pPr marL="0" indent="0" algn="ctr">
+            <a:pPr algn="ctr" indent="0" marL="0">
               <a:lnSpc>
                 <a:spcPct val="100000"/>
               </a:lnSpc>
@@ -5383,29 +5401,7 @@
                 <a:ea typeface="Calibri" pitchFamily="34" charset="-122"/>
                 <a:cs typeface="Calibri" pitchFamily="34" charset="-120"/>
               </a:rPr>
-              <a:t>Aponte a câmera do celular e </a:t>
-            </a:r>
-            <a:r>
-              <a:rPr lang="en-US" sz="1100" dirty="0" err="1">
-                <a:solidFill>
-                  <a:srgbClr val="6B6560"/>
-                </a:solidFill>
-                <a:latin typeface="Calibri" pitchFamily="34" charset="0"/>
-                <a:ea typeface="Calibri" pitchFamily="34" charset="-122"/>
-                <a:cs typeface="Calibri" pitchFamily="34" charset="-120"/>
-              </a:rPr>
-              <a:t>compre</a:t>
-            </a:r>
-            <a:r>
-              <a:rPr lang="en-US" sz="1100" dirty="0">
-                <a:solidFill>
-                  <a:srgbClr val="6B6560"/>
-                </a:solidFill>
-                <a:latin typeface="Calibri" pitchFamily="34" charset="0"/>
-                <a:ea typeface="Calibri" pitchFamily="34" charset="-122"/>
-                <a:cs typeface="Calibri" pitchFamily="34" charset="-120"/>
-              </a:rPr>
-              <a:t> com a gente no WhatsApp.</a:t>
+              <a:t>Aponte a câmera do celular e compre com a gente no WhatsApp.</a:t>
             </a:r>
             <a:endParaRPr lang="en-US" sz="1100" dirty="0"/>
           </a:p>
@@ -5432,7 +5428,7 @@
           <a:bodyPr wrap="square" lIns="0" tIns="0" rIns="0" bIns="0" rtlCol="0" anchor="t"/>
           <a:lstStyle/>
           <a:p>
-            <a:pPr marL="0" indent="0" algn="ctr">
+            <a:pPr algn="ctr" indent="0" marL="0">
               <a:buNone/>
             </a:pPr>
             <a:r>
@@ -5471,7 +5467,7 @@
           <a:bodyPr wrap="square" lIns="0" tIns="0" rIns="0" bIns="0" rtlCol="0" anchor="t"/>
           <a:lstStyle/>
           <a:p>
-            <a:pPr marL="0" indent="0" algn="r">
+            <a:pPr algn="r" indent="0" marL="0">
               <a:buNone/>
             </a:pPr>
             <a:r>
@@ -5505,7 +5501,6 @@
         <a:solidFill>
           <a:srgbClr val="FAF9F7"/>
         </a:solidFill>
-        <a:effectLst/>
       </p:bgPr>
     </p:bg>
     <p:spTree>
@@ -5543,7 +5538,7 @@
           <a:bodyPr wrap="square" lIns="0" tIns="0" rIns="0" bIns="0" rtlCol="0" anchor="ctr"/>
           <a:lstStyle/>
           <a:p>
-            <a:pPr marL="0" indent="0">
+            <a:pPr indent="0" marL="0">
               <a:buNone/>
             </a:pPr>
             <a:r>
@@ -5582,7 +5577,7 @@
           <a:bodyPr wrap="square" lIns="0" tIns="0" rIns="0" bIns="0" rtlCol="0" anchor="t"/>
           <a:lstStyle/>
           <a:p>
-            <a:pPr marL="0" indent="0">
+            <a:pPr indent="0" marL="0">
               <a:buNone/>
             </a:pPr>
             <a:r>
@@ -5626,13 +5621,6 @@
             <a:prstDash val="solid"/>
           </a:ln>
         </p:spPr>
-        <p:txBody>
-          <a:bodyPr/>
-          <a:lstStyle/>
-          <a:p>
-            <a:endParaRPr lang="pt-BR"/>
-          </a:p>
-        </p:txBody>
       </p:sp>
       <p:sp>
         <p:nvSpPr>
@@ -5658,13 +5646,6 @@
             <a:prstDash val="solid"/>
           </a:ln>
         </p:spPr>
-        <p:txBody>
-          <a:bodyPr/>
-          <a:lstStyle/>
-          <a:p>
-            <a:endParaRPr lang="pt-BR"/>
-          </a:p>
-        </p:txBody>
       </p:sp>
       <p:sp>
         <p:nvSpPr>
@@ -5687,7 +5668,7 @@
           <a:bodyPr wrap="square" lIns="0" tIns="0" rIns="0" bIns="0" rtlCol="0" anchor="ctr"/>
           <a:lstStyle/>
           <a:p>
-            <a:pPr marL="0" indent="0" algn="ctr">
+            <a:pPr algn="ctr" indent="0" marL="0">
               <a:buNone/>
             </a:pPr>
             <a:r>
@@ -5726,7 +5707,7 @@
           <a:bodyPr wrap="square" lIns="0" tIns="0" rIns="0" bIns="0" rtlCol="0" anchor="t"/>
           <a:lstStyle/>
           <a:p>
-            <a:pPr marL="0" indent="0">
+            <a:pPr indent="0" marL="0">
               <a:buNone/>
             </a:pPr>
             <a:r>
@@ -5765,7 +5746,7 @@
           <a:bodyPr wrap="square" lIns="0" tIns="0" rIns="0" bIns="0" rtlCol="0" anchor="t"/>
           <a:lstStyle/>
           <a:p>
-            <a:pPr marL="0" indent="0">
+            <a:pPr indent="0" marL="0">
               <a:buNone/>
             </a:pPr>
             <a:r>
@@ -5809,13 +5790,6 @@
             <a:prstDash val="solid"/>
           </a:ln>
         </p:spPr>
-        <p:txBody>
-          <a:bodyPr/>
-          <a:lstStyle/>
-          <a:p>
-            <a:endParaRPr lang="pt-BR"/>
-          </a:p>
-        </p:txBody>
       </p:sp>
       <p:sp>
         <p:nvSpPr>
@@ -5841,13 +5815,6 @@
             <a:prstDash val="solid"/>
           </a:ln>
         </p:spPr>
-        <p:txBody>
-          <a:bodyPr/>
-          <a:lstStyle/>
-          <a:p>
-            <a:endParaRPr lang="pt-BR"/>
-          </a:p>
-        </p:txBody>
       </p:sp>
       <p:sp>
         <p:nvSpPr>
@@ -5870,7 +5837,7 @@
           <a:bodyPr wrap="square" lIns="0" tIns="0" rIns="0" bIns="0" rtlCol="0" anchor="ctr"/>
           <a:lstStyle/>
           <a:p>
-            <a:pPr marL="0" indent="0" algn="ctr">
+            <a:pPr algn="ctr" indent="0" marL="0">
               <a:buNone/>
             </a:pPr>
             <a:r>
@@ -5909,7 +5876,7 @@
           <a:bodyPr wrap="square" lIns="0" tIns="0" rIns="0" bIns="0" rtlCol="0" anchor="t"/>
           <a:lstStyle/>
           <a:p>
-            <a:pPr marL="0" indent="0">
+            <a:pPr indent="0" marL="0">
               <a:buNone/>
             </a:pPr>
             <a:r>
@@ -5948,7 +5915,7 @@
           <a:bodyPr wrap="square" lIns="0" tIns="0" rIns="0" bIns="0" rtlCol="0" anchor="t"/>
           <a:lstStyle/>
           <a:p>
-            <a:pPr marL="0" indent="0">
+            <a:pPr indent="0" marL="0">
               <a:buNone/>
             </a:pPr>
             <a:r>
@@ -5992,13 +5959,6 @@
             <a:prstDash val="solid"/>
           </a:ln>
         </p:spPr>
-        <p:txBody>
-          <a:bodyPr/>
-          <a:lstStyle/>
-          <a:p>
-            <a:endParaRPr lang="pt-BR"/>
-          </a:p>
-        </p:txBody>
       </p:sp>
       <p:sp>
         <p:nvSpPr>
@@ -6024,13 +5984,6 @@
             <a:prstDash val="solid"/>
           </a:ln>
         </p:spPr>
-        <p:txBody>
-          <a:bodyPr/>
-          <a:lstStyle/>
-          <a:p>
-            <a:endParaRPr lang="pt-BR"/>
-          </a:p>
-        </p:txBody>
       </p:sp>
       <p:sp>
         <p:nvSpPr>
@@ -6053,7 +6006,7 @@
           <a:bodyPr wrap="square" lIns="0" tIns="0" rIns="0" bIns="0" rtlCol="0" anchor="ctr"/>
           <a:lstStyle/>
           <a:p>
-            <a:pPr marL="0" indent="0" algn="ctr">
+            <a:pPr algn="ctr" indent="0" marL="0">
               <a:buNone/>
             </a:pPr>
             <a:r>
@@ -6092,7 +6045,7 @@
           <a:bodyPr wrap="square" lIns="0" tIns="0" rIns="0" bIns="0" rtlCol="0" anchor="t"/>
           <a:lstStyle/>
           <a:p>
-            <a:pPr marL="0" indent="0">
+            <a:pPr indent="0" marL="0">
               <a:buNone/>
             </a:pPr>
             <a:r>
@@ -6131,7 +6084,7 @@
           <a:bodyPr wrap="square" lIns="0" tIns="0" rIns="0" bIns="0" rtlCol="0" anchor="t"/>
           <a:lstStyle/>
           <a:p>
-            <a:pPr marL="0" indent="0">
+            <a:pPr indent="0" marL="0">
               <a:buNone/>
             </a:pPr>
             <a:r>
@@ -6175,13 +6128,6 @@
             <a:prstDash val="solid"/>
           </a:ln>
         </p:spPr>
-        <p:txBody>
-          <a:bodyPr/>
-          <a:lstStyle/>
-          <a:p>
-            <a:endParaRPr lang="pt-BR"/>
-          </a:p>
-        </p:txBody>
       </p:sp>
       <p:sp>
         <p:nvSpPr>
@@ -6207,13 +6153,6 @@
             <a:prstDash val="solid"/>
           </a:ln>
         </p:spPr>
-        <p:txBody>
-          <a:bodyPr/>
-          <a:lstStyle/>
-          <a:p>
-            <a:endParaRPr lang="pt-BR"/>
-          </a:p>
-        </p:txBody>
       </p:sp>
       <p:sp>
         <p:nvSpPr>
@@ -6236,7 +6175,7 @@
           <a:bodyPr wrap="square" lIns="0" tIns="0" rIns="0" bIns="0" rtlCol="0" anchor="ctr"/>
           <a:lstStyle/>
           <a:p>
-            <a:pPr marL="0" indent="0" algn="ctr">
+            <a:pPr algn="ctr" indent="0" marL="0">
               <a:buNone/>
             </a:pPr>
             <a:r>
@@ -6275,7 +6214,7 @@
           <a:bodyPr wrap="square" lIns="0" tIns="0" rIns="0" bIns="0" rtlCol="0" anchor="t"/>
           <a:lstStyle/>
           <a:p>
-            <a:pPr marL="0" indent="0">
+            <a:pPr indent="0" marL="0">
               <a:buNone/>
             </a:pPr>
             <a:r>
@@ -6314,7 +6253,7 @@
           <a:bodyPr wrap="square" lIns="0" tIns="0" rIns="0" bIns="0" rtlCol="0" anchor="t"/>
           <a:lstStyle/>
           <a:p>
-            <a:pPr marL="0" indent="0">
+            <a:pPr indent="0" marL="0">
               <a:buNone/>
             </a:pPr>
             <a:r>
@@ -6358,13 +6297,6 @@
             <a:prstDash val="solid"/>
           </a:ln>
         </p:spPr>
-        <p:txBody>
-          <a:bodyPr/>
-          <a:lstStyle/>
-          <a:p>
-            <a:endParaRPr lang="pt-BR"/>
-          </a:p>
-        </p:txBody>
       </p:sp>
       <p:sp>
         <p:nvSpPr>
@@ -6390,13 +6322,6 @@
             <a:prstDash val="solid"/>
           </a:ln>
         </p:spPr>
-        <p:txBody>
-          <a:bodyPr/>
-          <a:lstStyle/>
-          <a:p>
-            <a:endParaRPr lang="pt-BR"/>
-          </a:p>
-        </p:txBody>
       </p:sp>
       <p:sp>
         <p:nvSpPr>
@@ -6419,7 +6344,7 @@
           <a:bodyPr wrap="square" lIns="0" tIns="0" rIns="0" bIns="0" rtlCol="0" anchor="ctr"/>
           <a:lstStyle/>
           <a:p>
-            <a:pPr marL="0" indent="0" algn="ctr">
+            <a:pPr algn="ctr" indent="0" marL="0">
               <a:buNone/>
             </a:pPr>
             <a:r>
@@ -6458,7 +6383,7 @@
           <a:bodyPr wrap="square" lIns="0" tIns="0" rIns="0" bIns="0" rtlCol="0" anchor="t"/>
           <a:lstStyle/>
           <a:p>
-            <a:pPr marL="0" indent="0">
+            <a:pPr indent="0" marL="0">
               <a:buNone/>
             </a:pPr>
             <a:r>
@@ -6497,7 +6422,7 @@
           <a:bodyPr wrap="square" lIns="0" tIns="0" rIns="0" bIns="0" rtlCol="0" anchor="t"/>
           <a:lstStyle/>
           <a:p>
-            <a:pPr marL="0" indent="0">
+            <a:pPr indent="0" marL="0">
               <a:buNone/>
             </a:pPr>
             <a:r>
@@ -6541,13 +6466,6 @@
             <a:prstDash val="solid"/>
           </a:ln>
         </p:spPr>
-        <p:txBody>
-          <a:bodyPr/>
-          <a:lstStyle/>
-          <a:p>
-            <a:endParaRPr lang="pt-BR"/>
-          </a:p>
-        </p:txBody>
       </p:sp>
       <p:sp>
         <p:nvSpPr>
@@ -6573,13 +6491,6 @@
             <a:prstDash val="solid"/>
           </a:ln>
         </p:spPr>
-        <p:txBody>
-          <a:bodyPr/>
-          <a:lstStyle/>
-          <a:p>
-            <a:endParaRPr lang="pt-BR"/>
-          </a:p>
-        </p:txBody>
       </p:sp>
       <p:sp>
         <p:nvSpPr>
@@ -6602,7 +6513,7 @@
           <a:bodyPr wrap="square" lIns="0" tIns="0" rIns="0" bIns="0" rtlCol="0" anchor="ctr"/>
           <a:lstStyle/>
           <a:p>
-            <a:pPr marL="0" indent="0" algn="ctr">
+            <a:pPr algn="ctr" indent="0" marL="0">
               <a:buNone/>
             </a:pPr>
             <a:r>
@@ -6641,7 +6552,7 @@
           <a:bodyPr wrap="square" lIns="0" tIns="0" rIns="0" bIns="0" rtlCol="0" anchor="t"/>
           <a:lstStyle/>
           <a:p>
-            <a:pPr marL="0" indent="0">
+            <a:pPr indent="0" marL="0">
               <a:buNone/>
             </a:pPr>
             <a:r>
@@ -6680,7 +6591,7 @@
           <a:bodyPr wrap="square" lIns="0" tIns="0" rIns="0" bIns="0" rtlCol="0" anchor="t"/>
           <a:lstStyle/>
           <a:p>
-            <a:pPr marL="0" indent="0">
+            <a:pPr indent="0" marL="0">
               <a:buNone/>
             </a:pPr>
             <a:r>
@@ -6724,13 +6635,6 @@
             <a:prstDash val="solid"/>
           </a:ln>
         </p:spPr>
-        <p:txBody>
-          <a:bodyPr/>
-          <a:lstStyle/>
-          <a:p>
-            <a:endParaRPr lang="pt-BR"/>
-          </a:p>
-        </p:txBody>
       </p:sp>
       <p:sp>
         <p:nvSpPr>
@@ -6756,13 +6660,6 @@
             <a:prstDash val="solid"/>
           </a:ln>
         </p:spPr>
-        <p:txBody>
-          <a:bodyPr/>
-          <a:lstStyle/>
-          <a:p>
-            <a:endParaRPr lang="pt-BR"/>
-          </a:p>
-        </p:txBody>
       </p:sp>
       <p:sp>
         <p:nvSpPr>
@@ -6785,7 +6682,7 @@
           <a:bodyPr wrap="square" lIns="0" tIns="0" rIns="0" bIns="0" rtlCol="0" anchor="ctr"/>
           <a:lstStyle/>
           <a:p>
-            <a:pPr marL="0" indent="0" algn="ctr">
+            <a:pPr algn="ctr" indent="0" marL="0">
               <a:buNone/>
             </a:pPr>
             <a:r>
@@ -6824,7 +6721,7 @@
           <a:bodyPr wrap="square" lIns="0" tIns="0" rIns="0" bIns="0" rtlCol="0" anchor="t"/>
           <a:lstStyle/>
           <a:p>
-            <a:pPr marL="0" indent="0">
+            <a:pPr indent="0" marL="0">
               <a:buNone/>
             </a:pPr>
             <a:r>
@@ -6863,7 +6760,7 @@
           <a:bodyPr wrap="square" lIns="0" tIns="0" rIns="0" bIns="0" rtlCol="0" anchor="t"/>
           <a:lstStyle/>
           <a:p>
-            <a:pPr marL="0" indent="0">
+            <a:pPr indent="0" marL="0">
               <a:buNone/>
             </a:pPr>
             <a:r>
@@ -6875,7 +6772,7 @@
                 <a:ea typeface="Calibri" pitchFamily="34" charset="-122"/>
                 <a:cs typeface="Calibri" pitchFamily="34" charset="-120"/>
               </a:rPr>
-              <a:t>Vercel, Cloudant e os documentos</a:t>
+              <a:t>Vercel, Railway e os documentos</a:t>
             </a:r>
             <a:endParaRPr lang="en-US" sz="1100" dirty="0"/>
           </a:p>
@@ -6902,7 +6799,7 @@
           <a:bodyPr wrap="square" lIns="0" tIns="0" rIns="0" bIns="0" rtlCol="0" anchor="ctr"/>
           <a:lstStyle/>
           <a:p>
-            <a:pPr marL="0" indent="0">
+            <a:pPr indent="0" marL="0">
               <a:lnSpc>
                 <a:spcPct val="110000"/>
               </a:lnSpc>
@@ -6944,7 +6841,7 @@
           <a:bodyPr wrap="square" lIns="0" tIns="0" rIns="0" bIns="0" rtlCol="0" anchor="t"/>
           <a:lstStyle/>
           <a:p>
-            <a:pPr marL="0" indent="0" algn="r">
+            <a:pPr algn="r" indent="0" marL="0">
               <a:buNone/>
             </a:pPr>
             <a:r>
@@ -6978,7 +6875,6 @@
         <a:solidFill>
           <a:srgbClr val="FAF9F7"/>
         </a:solidFill>
-        <a:effectLst/>
       </p:bgPr>
     </p:bg>
     <p:spTree>
@@ -7016,7 +6912,7 @@
           <a:bodyPr wrap="square" lIns="0" tIns="0" rIns="0" bIns="0" rtlCol="0" anchor="ctr"/>
           <a:lstStyle/>
           <a:p>
-            <a:pPr marL="0" indent="0">
+            <a:pPr indent="0" marL="0">
               <a:buNone/>
             </a:pPr>
             <a:r>
@@ -7055,7 +6951,7 @@
           <a:bodyPr wrap="square" lIns="0" tIns="0" rIns="0" bIns="0" rtlCol="0" anchor="t"/>
           <a:lstStyle/>
           <a:p>
-            <a:pPr marL="0" indent="0">
+            <a:pPr indent="0" marL="0">
               <a:buNone/>
             </a:pPr>
             <a:r>
@@ -7099,13 +6995,6 @@
             <a:prstDash val="solid"/>
           </a:ln>
         </p:spPr>
-        <p:txBody>
-          <a:bodyPr/>
-          <a:lstStyle/>
-          <a:p>
-            <a:endParaRPr lang="pt-BR"/>
-          </a:p>
-        </p:txBody>
       </p:sp>
       <p:sp>
         <p:nvSpPr>
@@ -7128,7 +7017,7 @@
           <a:bodyPr wrap="square" lIns="0" tIns="0" rIns="0" bIns="0" rtlCol="0" anchor="t"/>
           <a:lstStyle/>
           <a:p>
-            <a:pPr marL="0" indent="0">
+            <a:pPr indent="0" marL="0">
               <a:buNone/>
             </a:pPr>
             <a:r>
@@ -7167,7 +7056,7 @@
           <a:bodyPr wrap="square" lIns="0" tIns="0" rIns="0" bIns="0" rtlCol="0" anchor="t"/>
           <a:lstStyle/>
           <a:p>
-            <a:pPr marL="0" indent="0">
+            <a:pPr indent="0" marL="0">
               <a:lnSpc>
                 <a:spcPct val="105000"/>
               </a:lnSpc>
@@ -7214,13 +7103,6 @@
             <a:prstDash val="solid"/>
           </a:ln>
         </p:spPr>
-        <p:txBody>
-          <a:bodyPr/>
-          <a:lstStyle/>
-          <a:p>
-            <a:endParaRPr lang="pt-BR"/>
-          </a:p>
-        </p:txBody>
       </p:sp>
       <p:sp>
         <p:nvSpPr>
@@ -7243,7 +7125,7 @@
           <a:bodyPr wrap="square" lIns="0" tIns="0" rIns="0" bIns="0" rtlCol="0" anchor="t"/>
           <a:lstStyle/>
           <a:p>
-            <a:pPr marL="0" indent="0">
+            <a:pPr indent="0" marL="0">
               <a:buNone/>
             </a:pPr>
             <a:r>
@@ -7282,7 +7164,7 @@
           <a:bodyPr wrap="square" lIns="0" tIns="0" rIns="0" bIns="0" rtlCol="0" anchor="t"/>
           <a:lstStyle/>
           <a:p>
-            <a:pPr marL="0" indent="0">
+            <a:pPr indent="0" marL="0">
               <a:lnSpc>
                 <a:spcPct val="105000"/>
               </a:lnSpc>
@@ -7329,13 +7211,6 @@
             <a:prstDash val="solid"/>
           </a:ln>
         </p:spPr>
-        <p:txBody>
-          <a:bodyPr/>
-          <a:lstStyle/>
-          <a:p>
-            <a:endParaRPr lang="pt-BR"/>
-          </a:p>
-        </p:txBody>
       </p:sp>
       <p:sp>
         <p:nvSpPr>
@@ -7358,7 +7233,7 @@
           <a:bodyPr wrap="square" lIns="0" tIns="0" rIns="0" bIns="0" rtlCol="0" anchor="t"/>
           <a:lstStyle/>
           <a:p>
-            <a:pPr marL="0" indent="0">
+            <a:pPr indent="0" marL="0">
               <a:buNone/>
             </a:pPr>
             <a:r>
@@ -7397,7 +7272,7 @@
           <a:bodyPr wrap="square" lIns="0" tIns="0" rIns="0" bIns="0" rtlCol="0" anchor="t"/>
           <a:lstStyle/>
           <a:p>
-            <a:pPr marL="0" indent="0">
+            <a:pPr indent="0" marL="0">
               <a:lnSpc>
                 <a:spcPct val="105000"/>
               </a:lnSpc>
@@ -7444,13 +7319,6 @@
             <a:prstDash val="solid"/>
           </a:ln>
         </p:spPr>
-        <p:txBody>
-          <a:bodyPr/>
-          <a:lstStyle/>
-          <a:p>
-            <a:endParaRPr lang="pt-BR"/>
-          </a:p>
-        </p:txBody>
       </p:sp>
       <p:sp>
         <p:nvSpPr>
@@ -7473,11 +7341,11 @@
           <a:bodyPr wrap="square" lIns="0" tIns="0" rIns="0" bIns="0" rtlCol="0" anchor="ctr"/>
           <a:lstStyle/>
           <a:p>
-            <a:pPr marL="0" indent="0">
-              <a:buNone/>
-            </a:pPr>
-            <a:r>
-              <a:rPr lang="en-US" sz="1000" b="1" kern="0" spc="120" dirty="0">
+            <a:pPr indent="0" marL="0">
+              <a:buNone/>
+            </a:pPr>
+            <a:r>
+              <a:rPr lang="en-US" sz="1000" b="1" spc="120" kern="0" dirty="0">
                 <a:solidFill>
                   <a:srgbClr val="D4622A"/>
                 </a:solidFill>
@@ -7512,7 +7380,7 @@
           <a:bodyPr wrap="square" lIns="0" tIns="0" rIns="0" bIns="0" rtlCol="0" anchor="t"/>
           <a:lstStyle/>
           <a:p>
-            <a:pPr marL="0" indent="0">
+            <a:pPr indent="0" marL="0">
               <a:buNone/>
             </a:pPr>
             <a:r>
@@ -7551,7 +7419,7 @@
           <a:bodyPr wrap="square" lIns="0" tIns="0" rIns="0" bIns="0" rtlCol="0" anchor="t"/>
           <a:lstStyle/>
           <a:p>
-            <a:pPr marL="0" indent="0">
+            <a:pPr indent="0" marL="0">
               <a:buNone/>
             </a:pPr>
             <a:r>
@@ -7591,13 +7459,6 @@
             <a:prstDash val="solid"/>
           </a:ln>
         </p:spPr>
-        <p:txBody>
-          <a:bodyPr/>
-          <a:lstStyle/>
-          <a:p>
-            <a:endParaRPr lang="pt-BR"/>
-          </a:p>
-        </p:txBody>
       </p:sp>
       <p:sp>
         <p:nvSpPr>
@@ -7620,7 +7481,7 @@
           <a:bodyPr wrap="square" lIns="0" tIns="0" rIns="0" bIns="0" rtlCol="0" anchor="t"/>
           <a:lstStyle/>
           <a:p>
-            <a:pPr marL="0" indent="0">
+            <a:pPr indent="0" marL="0">
               <a:buNone/>
             </a:pPr>
             <a:r>
@@ -7659,7 +7520,7 @@
           <a:bodyPr wrap="square" lIns="0" tIns="0" rIns="0" bIns="0" rtlCol="0" anchor="t"/>
           <a:lstStyle/>
           <a:p>
-            <a:pPr marL="0" indent="0">
+            <a:pPr indent="0" marL="0">
               <a:buNone/>
             </a:pPr>
             <a:r>
@@ -7699,13 +7560,6 @@
             <a:prstDash val="solid"/>
           </a:ln>
         </p:spPr>
-        <p:txBody>
-          <a:bodyPr/>
-          <a:lstStyle/>
-          <a:p>
-            <a:endParaRPr lang="pt-BR"/>
-          </a:p>
-        </p:txBody>
       </p:sp>
       <p:sp>
         <p:nvSpPr>
@@ -7728,7 +7582,7 @@
           <a:bodyPr wrap="square" lIns="0" tIns="0" rIns="0" bIns="0" rtlCol="0" anchor="t"/>
           <a:lstStyle/>
           <a:p>
-            <a:pPr marL="0" indent="0">
+            <a:pPr indent="0" marL="0">
               <a:buNone/>
             </a:pPr>
             <a:r>
@@ -7767,7 +7621,7 @@
           <a:bodyPr wrap="square" lIns="0" tIns="0" rIns="0" bIns="0" rtlCol="0" anchor="t"/>
           <a:lstStyle/>
           <a:p>
-            <a:pPr marL="0" indent="0">
+            <a:pPr indent="0" marL="0">
               <a:buNone/>
             </a:pPr>
             <a:r>
@@ -7807,13 +7661,6 @@
             <a:prstDash val="solid"/>
           </a:ln>
         </p:spPr>
-        <p:txBody>
-          <a:bodyPr/>
-          <a:lstStyle/>
-          <a:p>
-            <a:endParaRPr lang="pt-BR"/>
-          </a:p>
-        </p:txBody>
       </p:sp>
       <p:sp>
         <p:nvSpPr>
@@ -7836,7 +7683,7 @@
           <a:bodyPr wrap="square" lIns="0" tIns="0" rIns="0" bIns="0" rtlCol="0" anchor="t"/>
           <a:lstStyle/>
           <a:p>
-            <a:pPr marL="0" indent="0">
+            <a:pPr indent="0" marL="0">
               <a:buNone/>
             </a:pPr>
             <a:r>
@@ -7875,7 +7722,7 @@
           <a:bodyPr wrap="square" lIns="0" tIns="0" rIns="0" bIns="0" rtlCol="0" anchor="t"/>
           <a:lstStyle/>
           <a:p>
-            <a:pPr marL="0" indent="0">
+            <a:pPr indent="0" marL="0">
               <a:buNone/>
             </a:pPr>
             <a:r>
@@ -7914,7 +7761,7 @@
           <a:bodyPr wrap="square" lIns="0" tIns="0" rIns="0" bIns="0" rtlCol="0" anchor="t"/>
           <a:lstStyle/>
           <a:p>
-            <a:pPr marL="0" indent="0">
+            <a:pPr indent="0" marL="0">
               <a:buNone/>
             </a:pPr>
             <a:r>
@@ -7953,7 +7800,7 @@
           <a:bodyPr wrap="square" lIns="0" tIns="0" rIns="0" bIns="0" rtlCol="0" anchor="t"/>
           <a:lstStyle/>
           <a:p>
-            <a:pPr marL="0" indent="0" algn="r">
+            <a:pPr algn="r" indent="0" marL="0">
               <a:buNone/>
             </a:pPr>
             <a:r>
@@ -7987,7 +7834,6 @@
         <a:solidFill>
           <a:srgbClr val="FAF9F7"/>
         </a:solidFill>
-        <a:effectLst/>
       </p:bgPr>
     </p:bg>
     <p:spTree>
@@ -8025,7 +7871,7 @@
           <a:bodyPr wrap="square" lIns="0" tIns="0" rIns="0" bIns="0" rtlCol="0" anchor="ctr"/>
           <a:lstStyle/>
           <a:p>
-            <a:pPr marL="0" indent="0">
+            <a:pPr indent="0" marL="0">
               <a:buNone/>
             </a:pPr>
             <a:r>
@@ -8064,7 +7910,7 @@
           <a:bodyPr wrap="square" lIns="0" tIns="0" rIns="0" bIns="0" rtlCol="0" anchor="t"/>
           <a:lstStyle/>
           <a:p>
-            <a:pPr marL="0" indent="0">
+            <a:pPr indent="0" marL="0">
               <a:buNone/>
             </a:pPr>
             <a:r>
@@ -8108,13 +7954,6 @@
             <a:prstDash val="solid"/>
           </a:ln>
         </p:spPr>
-        <p:txBody>
-          <a:bodyPr/>
-          <a:lstStyle/>
-          <a:p>
-            <a:endParaRPr lang="pt-BR"/>
-          </a:p>
-        </p:txBody>
       </p:sp>
       <p:sp>
         <p:nvSpPr>
@@ -8137,7 +7976,7 @@
           <a:bodyPr wrap="square" lIns="0" tIns="0" rIns="0" bIns="0" rtlCol="0" anchor="t"/>
           <a:lstStyle/>
           <a:p>
-            <a:pPr marL="0" indent="0" algn="ctr">
+            <a:pPr algn="ctr" indent="0" marL="0">
               <a:buNone/>
             </a:pPr>
             <a:r>
@@ -8176,7 +8015,7 @@
           <a:bodyPr wrap="square" lIns="0" tIns="0" rIns="0" bIns="0" rtlCol="0" anchor="t"/>
           <a:lstStyle/>
           <a:p>
-            <a:pPr marL="0" indent="0" algn="ctr">
+            <a:pPr algn="ctr" indent="0" marL="0">
               <a:buNone/>
             </a:pPr>
             <a:r>
@@ -8215,7 +8054,7 @@
           <a:bodyPr wrap="square" lIns="0" tIns="0" rIns="0" bIns="0" rtlCol="0" anchor="ctr"/>
           <a:lstStyle/>
           <a:p>
-            <a:pPr marL="0" indent="0" algn="ctr">
+            <a:pPr algn="ctr" indent="0" marL="0">
               <a:buNone/>
             </a:pPr>
             <a:r>
@@ -8259,13 +8098,6 @@
             <a:prstDash val="solid"/>
           </a:ln>
         </p:spPr>
-        <p:txBody>
-          <a:bodyPr/>
-          <a:lstStyle/>
-          <a:p>
-            <a:endParaRPr lang="pt-BR"/>
-          </a:p>
-        </p:txBody>
       </p:sp>
       <p:sp>
         <p:nvSpPr>
@@ -8288,7 +8120,7 @@
           <a:bodyPr wrap="square" lIns="0" tIns="0" rIns="0" bIns="0" rtlCol="0" anchor="t"/>
           <a:lstStyle/>
           <a:p>
-            <a:pPr marL="0" indent="0" algn="ctr">
+            <a:pPr algn="ctr" indent="0" marL="0">
               <a:buNone/>
             </a:pPr>
             <a:r>
@@ -8327,7 +8159,7 @@
           <a:bodyPr wrap="square" lIns="0" tIns="0" rIns="0" bIns="0" rtlCol="0" anchor="t"/>
           <a:lstStyle/>
           <a:p>
-            <a:pPr marL="0" indent="0" algn="ctr">
+            <a:pPr algn="ctr" indent="0" marL="0">
               <a:buNone/>
             </a:pPr>
             <a:r>
@@ -8366,7 +8198,7 @@
           <a:bodyPr wrap="square" lIns="0" tIns="0" rIns="0" bIns="0" rtlCol="0" anchor="ctr"/>
           <a:lstStyle/>
           <a:p>
-            <a:pPr marL="0" indent="0" algn="ctr">
+            <a:pPr algn="ctr" indent="0" marL="0">
               <a:buNone/>
             </a:pPr>
             <a:r>
@@ -8410,13 +8242,6 @@
             <a:prstDash val="solid"/>
           </a:ln>
         </p:spPr>
-        <p:txBody>
-          <a:bodyPr/>
-          <a:lstStyle/>
-          <a:p>
-            <a:endParaRPr lang="pt-BR"/>
-          </a:p>
-        </p:txBody>
       </p:sp>
       <p:sp>
         <p:nvSpPr>
@@ -8439,7 +8264,7 @@
           <a:bodyPr wrap="square" lIns="0" tIns="0" rIns="0" bIns="0" rtlCol="0" anchor="t"/>
           <a:lstStyle/>
           <a:p>
-            <a:pPr marL="0" indent="0" algn="ctr">
+            <a:pPr algn="ctr" indent="0" marL="0">
               <a:buNone/>
             </a:pPr>
             <a:r>
@@ -8478,7 +8303,7 @@
           <a:bodyPr wrap="square" lIns="0" tIns="0" rIns="0" bIns="0" rtlCol="0" anchor="t"/>
           <a:lstStyle/>
           <a:p>
-            <a:pPr marL="0" indent="0" algn="ctr">
+            <a:pPr algn="ctr" indent="0" marL="0">
               <a:buNone/>
             </a:pPr>
             <a:r>
@@ -8517,7 +8342,7 @@
           <a:bodyPr wrap="square" lIns="0" tIns="0" rIns="0" bIns="0" rtlCol="0" anchor="ctr"/>
           <a:lstStyle/>
           <a:p>
-            <a:pPr marL="0" indent="0" algn="ctr">
+            <a:pPr algn="ctr" indent="0" marL="0">
               <a:buNone/>
             </a:pPr>
             <a:r>
@@ -8561,13 +8386,6 @@
             <a:prstDash val="solid"/>
           </a:ln>
         </p:spPr>
-        <p:txBody>
-          <a:bodyPr/>
-          <a:lstStyle/>
-          <a:p>
-            <a:endParaRPr lang="pt-BR"/>
-          </a:p>
-        </p:txBody>
       </p:sp>
       <p:sp>
         <p:nvSpPr>
@@ -8590,7 +8408,7 @@
           <a:bodyPr wrap="square" lIns="0" tIns="0" rIns="0" bIns="0" rtlCol="0" anchor="t"/>
           <a:lstStyle/>
           <a:p>
-            <a:pPr marL="0" indent="0" algn="ctr">
+            <a:pPr algn="ctr" indent="0" marL="0">
               <a:buNone/>
             </a:pPr>
             <a:r>
@@ -8629,7 +8447,7 @@
           <a:bodyPr wrap="square" lIns="0" tIns="0" rIns="0" bIns="0" rtlCol="0" anchor="t"/>
           <a:lstStyle/>
           <a:p>
-            <a:pPr marL="0" indent="0" algn="ctr">
+            <a:pPr algn="ctr" indent="0" marL="0">
               <a:buNone/>
             </a:pPr>
             <a:r>
@@ -8668,7 +8486,7 @@
           <a:bodyPr wrap="square" lIns="0" tIns="0" rIns="0" bIns="0" rtlCol="0" anchor="ctr"/>
           <a:lstStyle/>
           <a:p>
-            <a:pPr marL="0" indent="0" algn="ctr">
+            <a:pPr algn="ctr" indent="0" marL="0">
               <a:buNone/>
             </a:pPr>
             <a:r>
@@ -8712,13 +8530,6 @@
             <a:prstDash val="solid"/>
           </a:ln>
         </p:spPr>
-        <p:txBody>
-          <a:bodyPr/>
-          <a:lstStyle/>
-          <a:p>
-            <a:endParaRPr lang="pt-BR"/>
-          </a:p>
-        </p:txBody>
       </p:sp>
       <p:sp>
         <p:nvSpPr>
@@ -8741,7 +8552,7 @@
           <a:bodyPr wrap="square" lIns="0" tIns="0" rIns="0" bIns="0" rtlCol="0" anchor="t"/>
           <a:lstStyle/>
           <a:p>
-            <a:pPr marL="0" indent="0" algn="ctr">
+            <a:pPr algn="ctr" indent="0" marL="0">
               <a:buNone/>
             </a:pPr>
             <a:r>
@@ -8780,7 +8591,7 @@
           <a:bodyPr wrap="square" lIns="0" tIns="0" rIns="0" bIns="0" rtlCol="0" anchor="t"/>
           <a:lstStyle/>
           <a:p>
-            <a:pPr marL="0" indent="0" algn="ctr">
+            <a:pPr algn="ctr" indent="0" marL="0">
               <a:buNone/>
             </a:pPr>
             <a:r>
@@ -8819,7 +8630,7 @@
           <a:bodyPr wrap="square" lIns="0" tIns="0" rIns="0" bIns="0" rtlCol="0" anchor="t"/>
           <a:lstStyle/>
           <a:p>
-            <a:pPr marL="0" indent="0">
+            <a:pPr indent="0" marL="0">
               <a:buNone/>
             </a:pPr>
             <a:r>
@@ -8858,11 +8669,11 @@
           <a:bodyPr wrap="square" lIns="0" tIns="0" rIns="0" bIns="0" rtlCol="0" anchor="ctr"/>
           <a:lstStyle/>
           <a:p>
-            <a:pPr marL="0" indent="0">
-              <a:buNone/>
-            </a:pPr>
-            <a:r>
-              <a:rPr lang="en-US" sz="1000" b="1" kern="0" spc="120" dirty="0">
+            <a:pPr indent="0" marL="0">
+              <a:buNone/>
+            </a:pPr>
+            <a:r>
+              <a:rPr lang="en-US" sz="1000" b="1" spc="120" kern="0" dirty="0">
                 <a:solidFill>
                   <a:srgbClr val="D4622A"/>
                 </a:solidFill>
@@ -8897,7 +8708,7 @@
           <a:bodyPr wrap="square" lIns="0" tIns="0" rIns="0" bIns="0" rtlCol="0" anchor="ctr"/>
           <a:lstStyle/>
           <a:p>
-            <a:pPr marL="0" indent="0">
+            <a:pPr indent="0" marL="0">
               <a:buNone/>
             </a:pPr>
             <a:r>
@@ -8936,7 +8747,7 @@
           <a:bodyPr wrap="square" lIns="0" tIns="0" rIns="0" bIns="0" rtlCol="0" anchor="ctr"/>
           <a:lstStyle/>
           <a:p>
-            <a:pPr marL="0" indent="0">
+            <a:pPr indent="0" marL="0">
               <a:buNone/>
             </a:pPr>
             <a:r>
@@ -8975,7 +8786,7 @@
           <a:bodyPr wrap="square" lIns="0" tIns="0" rIns="0" bIns="0" rtlCol="0" anchor="ctr"/>
           <a:lstStyle/>
           <a:p>
-            <a:pPr marL="0" indent="0">
+            <a:pPr indent="0" marL="0">
               <a:buNone/>
             </a:pPr>
             <a:r>
@@ -8989,6 +8800,9 @@
               </a:rPr>
               <a:t>É o </a:t>
             </a:r>
+            <a:pPr indent="0" marL="0">
+              <a:buNone/>
+            </a:pPr>
             <a:r>
               <a:rPr lang="en-US" sz="1250" b="1" dirty="0">
                 <a:solidFill>
@@ -9000,6 +8814,9 @@
               </a:rPr>
               <a:t>PORTEIRO</a:t>
             </a:r>
+            <a:pPr indent="0" marL="0">
+              <a:buNone/>
+            </a:pPr>
             <a:r>
               <a:rPr lang="en-US" sz="1250" dirty="0">
                 <a:solidFill>
@@ -9037,13 +8854,6 @@
             <a:prstDash val="solid"/>
           </a:ln>
         </p:spPr>
-        <p:txBody>
-          <a:bodyPr/>
-          <a:lstStyle/>
-          <a:p>
-            <a:endParaRPr lang="pt-BR"/>
-          </a:p>
-        </p:txBody>
       </p:sp>
       <p:sp>
         <p:nvSpPr>
@@ -9066,7 +8876,7 @@
           <a:bodyPr wrap="square" lIns="0" tIns="0" rIns="0" bIns="0" rtlCol="0" anchor="ctr"/>
           <a:lstStyle/>
           <a:p>
-            <a:pPr marL="0" indent="0">
+            <a:pPr indent="0" marL="0">
               <a:buNone/>
             </a:pPr>
             <a:r>
@@ -9105,7 +8915,7 @@
           <a:bodyPr wrap="square" lIns="0" tIns="0" rIns="0" bIns="0" rtlCol="0" anchor="ctr"/>
           <a:lstStyle/>
           <a:p>
-            <a:pPr marL="0" indent="0">
+            <a:pPr indent="0" marL="0">
               <a:buNone/>
             </a:pPr>
             <a:r>
@@ -9144,7 +8954,7 @@
           <a:bodyPr wrap="square" lIns="0" tIns="0" rIns="0" bIns="0" rtlCol="0" anchor="ctr"/>
           <a:lstStyle/>
           <a:p>
-            <a:pPr marL="0" indent="0">
+            <a:pPr indent="0" marL="0">
               <a:buNone/>
             </a:pPr>
             <a:r>
@@ -9158,6 +8968,9 @@
               </a:rPr>
               <a:t>É o </a:t>
             </a:r>
+            <a:pPr indent="0" marL="0">
+              <a:buNone/>
+            </a:pPr>
             <a:r>
               <a:rPr lang="en-US" sz="1250" b="1" dirty="0">
                 <a:solidFill>
@@ -9169,6 +8982,9 @@
               </a:rPr>
               <a:t>CÉREBRO</a:t>
             </a:r>
+            <a:pPr indent="0" marL="0">
+              <a:buNone/>
+            </a:pPr>
             <a:r>
               <a:rPr lang="en-US" sz="1250" dirty="0">
                 <a:solidFill>
@@ -9206,13 +9022,6 @@
             <a:prstDash val="solid"/>
           </a:ln>
         </p:spPr>
-        <p:txBody>
-          <a:bodyPr/>
-          <a:lstStyle/>
-          <a:p>
-            <a:endParaRPr lang="pt-BR"/>
-          </a:p>
-        </p:txBody>
       </p:sp>
       <p:sp>
         <p:nvSpPr>
@@ -9235,7 +9044,7 @@
           <a:bodyPr wrap="square" lIns="0" tIns="0" rIns="0" bIns="0" rtlCol="0" anchor="ctr"/>
           <a:lstStyle/>
           <a:p>
-            <a:pPr marL="0" indent="0">
+            <a:pPr indent="0" marL="0">
               <a:buNone/>
             </a:pPr>
             <a:r>
@@ -9274,7 +9083,7 @@
           <a:bodyPr wrap="square" lIns="0" tIns="0" rIns="0" bIns="0" rtlCol="0" anchor="ctr"/>
           <a:lstStyle/>
           <a:p>
-            <a:pPr marL="0" indent="0">
+            <a:pPr indent="0" marL="0">
               <a:buNone/>
             </a:pPr>
             <a:r>
@@ -9313,7 +9122,7 @@
           <a:bodyPr wrap="square" lIns="0" tIns="0" rIns="0" bIns="0" rtlCol="0" anchor="ctr"/>
           <a:lstStyle/>
           <a:p>
-            <a:pPr marL="0" indent="0">
+            <a:pPr indent="0" marL="0">
               <a:buNone/>
             </a:pPr>
             <a:r>
@@ -9327,6 +9136,9 @@
               </a:rPr>
               <a:t>É o </a:t>
             </a:r>
+            <a:pPr indent="0" marL="0">
+              <a:buNone/>
+            </a:pPr>
             <a:r>
               <a:rPr lang="en-US" sz="1250" b="1" dirty="0">
                 <a:solidFill>
@@ -9338,6 +9150,9 @@
               </a:rPr>
               <a:t>MOLDE</a:t>
             </a:r>
+            <a:pPr indent="0" marL="0">
+              <a:buNone/>
+            </a:pPr>
             <a:r>
               <a:rPr lang="en-US" sz="1250" dirty="0">
                 <a:solidFill>
@@ -9375,13 +9190,6 @@
             <a:prstDash val="solid"/>
           </a:ln>
         </p:spPr>
-        <p:txBody>
-          <a:bodyPr/>
-          <a:lstStyle/>
-          <a:p>
-            <a:endParaRPr lang="pt-BR"/>
-          </a:p>
-        </p:txBody>
       </p:sp>
       <p:sp>
         <p:nvSpPr>
@@ -9404,7 +9212,7 @@
           <a:bodyPr wrap="square" lIns="0" tIns="0" rIns="0" bIns="0" rtlCol="0" anchor="ctr"/>
           <a:lstStyle/>
           <a:p>
-            <a:pPr marL="0" indent="0">
+            <a:pPr indent="0" marL="0">
               <a:buNone/>
             </a:pPr>
             <a:r>
@@ -9443,7 +9251,7 @@
           <a:bodyPr wrap="square" lIns="0" tIns="0" rIns="0" bIns="0" rtlCol="0" anchor="ctr"/>
           <a:lstStyle/>
           <a:p>
-            <a:pPr marL="0" indent="0">
+            <a:pPr indent="0" marL="0">
               <a:buNone/>
             </a:pPr>
             <a:r>
@@ -9482,7 +9290,7 @@
           <a:bodyPr wrap="square" lIns="0" tIns="0" rIns="0" bIns="0" rtlCol="0" anchor="ctr"/>
           <a:lstStyle/>
           <a:p>
-            <a:pPr marL="0" indent="0">
+            <a:pPr indent="0" marL="0">
               <a:buNone/>
             </a:pPr>
             <a:r>
@@ -9496,6 +9304,9 @@
               </a:rPr>
               <a:t>É o </a:t>
             </a:r>
+            <a:pPr indent="0" marL="0">
+              <a:buNone/>
+            </a:pPr>
             <a:r>
               <a:rPr lang="en-US" sz="1250" b="1" dirty="0">
                 <a:solidFill>
@@ -9507,6 +9318,9 @@
               </a:rPr>
               <a:t>CARTEIRO</a:t>
             </a:r>
+            <a:pPr indent="0" marL="0">
+              <a:buNone/>
+            </a:pPr>
             <a:r>
               <a:rPr lang="en-US" sz="1250" dirty="0">
                 <a:solidFill>
@@ -9544,13 +9358,6 @@
             <a:prstDash val="solid"/>
           </a:ln>
         </p:spPr>
-        <p:txBody>
-          <a:bodyPr/>
-          <a:lstStyle/>
-          <a:p>
-            <a:endParaRPr lang="pt-BR"/>
-          </a:p>
-        </p:txBody>
       </p:sp>
       <p:sp>
         <p:nvSpPr>
@@ -9573,7 +9380,7 @@
           <a:bodyPr wrap="square" lIns="0" tIns="0" rIns="0" bIns="0" rtlCol="0" anchor="ctr"/>
           <a:lstStyle/>
           <a:p>
-            <a:pPr marL="0" indent="0">
+            <a:pPr indent="0" marL="0">
               <a:buNone/>
             </a:pPr>
             <a:r>
@@ -9612,7 +9419,7 @@
           <a:bodyPr wrap="square" lIns="0" tIns="0" rIns="0" bIns="0" rtlCol="0" anchor="ctr"/>
           <a:lstStyle/>
           <a:p>
-            <a:pPr marL="0" indent="0">
+            <a:pPr indent="0" marL="0">
               <a:buNone/>
             </a:pPr>
             <a:r>
@@ -9651,7 +9458,7 @@
           <a:bodyPr wrap="square" lIns="0" tIns="0" rIns="0" bIns="0" rtlCol="0" anchor="ctr"/>
           <a:lstStyle/>
           <a:p>
-            <a:pPr marL="0" indent="0">
+            <a:pPr indent="0" marL="0">
               <a:buNone/>
             </a:pPr>
             <a:r>
@@ -9665,6 +9472,9 @@
               </a:rPr>
               <a:t>É o </a:t>
             </a:r>
+            <a:pPr indent="0" marL="0">
+              <a:buNone/>
+            </a:pPr>
             <a:r>
               <a:rPr lang="en-US" sz="1250" b="1" dirty="0">
                 <a:solidFill>
@@ -9676,6 +9486,9 @@
               </a:rPr>
               <a:t>ARQUIVO DE FICHAS</a:t>
             </a:r>
+            <a:pPr indent="0" marL="0">
+              <a:buNone/>
+            </a:pPr>
             <a:r>
               <a:rPr lang="en-US" sz="1250" dirty="0">
                 <a:solidFill>
@@ -9713,13 +9526,6 @@
             <a:prstDash val="solid"/>
           </a:ln>
         </p:spPr>
-        <p:txBody>
-          <a:bodyPr/>
-          <a:lstStyle/>
-          <a:p>
-            <a:endParaRPr lang="pt-BR"/>
-          </a:p>
-        </p:txBody>
       </p:sp>
       <p:sp>
         <p:nvSpPr>
@@ -9742,7 +9548,7 @@
           <a:bodyPr wrap="square" lIns="0" tIns="0" rIns="0" bIns="0" rtlCol="0" anchor="ctr"/>
           <a:lstStyle/>
           <a:p>
-            <a:pPr marL="0" indent="0">
+            <a:pPr indent="0" marL="0">
               <a:buNone/>
             </a:pPr>
             <a:r>
@@ -9754,7 +9560,7 @@
                 <a:ea typeface="Calibri" pitchFamily="34" charset="-122"/>
                 <a:cs typeface="Calibri" pitchFamily="34" charset="-120"/>
               </a:rPr>
-              <a:t>Cloudant</a:t>
+              <a:t>Railway</a:t>
             </a:r>
             <a:endParaRPr lang="en-US" sz="1250" dirty="0"/>
           </a:p>
@@ -9781,7 +9587,7 @@
           <a:bodyPr wrap="square" lIns="0" tIns="0" rIns="0" bIns="0" rtlCol="0" anchor="ctr"/>
           <a:lstStyle/>
           <a:p>
-            <a:pPr marL="0" indent="0">
+            <a:pPr indent="0" marL="0">
               <a:buNone/>
             </a:pPr>
             <a:r>
@@ -9793,7 +9599,7 @@
                 <a:ea typeface="Consolas" pitchFamily="34" charset="-122"/>
                 <a:cs typeface="Consolas" pitchFamily="34" charset="-120"/>
               </a:rPr>
-              <a:t>JSON</a:t>
+              <a:t>nuvem</a:t>
             </a:r>
             <a:endParaRPr lang="en-US" sz="1050" dirty="0"/>
           </a:p>
@@ -9820,7 +9626,7 @@
           <a:bodyPr wrap="square" lIns="0" tIns="0" rIns="0" bIns="0" rtlCol="0" anchor="ctr"/>
           <a:lstStyle/>
           <a:p>
-            <a:pPr marL="0" indent="0">
+            <a:pPr indent="0" marL="0">
               <a:buNone/>
             </a:pPr>
             <a:r>
@@ -9832,7 +9638,35 @@
                 <a:ea typeface="Calibri" pitchFamily="34" charset="-122"/>
                 <a:cs typeface="Calibri" pitchFamily="34" charset="-120"/>
               </a:rPr>
-              <a:t>É o mesmo arquivo, guardado num prédio da IBM: o CouchDB rodando na nuvem.</a:t>
+              <a:t>É o </a:t>
+            </a:r>
+            <a:pPr indent="0" marL="0">
+              <a:buNone/>
+            </a:pPr>
+            <a:r>
+              <a:rPr lang="en-US" sz="1250" b="1" dirty="0">
+                <a:solidFill>
+                  <a:srgbClr val="14120F"/>
+                </a:solidFill>
+                <a:latin typeface="Calibri" pitchFamily="34" charset="0"/>
+                <a:ea typeface="Calibri" pitchFamily="34" charset="-122"/>
+                <a:cs typeface="Calibri" pitchFamily="34" charset="-120"/>
+              </a:rPr>
+              <a:t>GALPÃO</a:t>
+            </a:r>
+            <a:pPr indent="0" marL="0">
+              <a:buNone/>
+            </a:pPr>
+            <a:r>
+              <a:rPr lang="en-US" sz="1250" dirty="0">
+                <a:solidFill>
+                  <a:srgbClr val="6B6560"/>
+                </a:solidFill>
+                <a:latin typeface="Calibri" pitchFamily="34" charset="0"/>
+                <a:ea typeface="Calibri" pitchFamily="34" charset="-122"/>
+                <a:cs typeface="Calibri" pitchFamily="34" charset="-120"/>
+              </a:rPr>
+              <a:t> alugado onde o arquivo fica, ligado dia e noite.</a:t>
             </a:r>
             <a:endParaRPr lang="en-US" sz="1250" dirty="0"/>
           </a:p>
@@ -9859,7 +9693,7 @@
           <a:bodyPr wrap="square" lIns="0" tIns="0" rIns="0" bIns="0" rtlCol="0" anchor="t"/>
           <a:lstStyle/>
           <a:p>
-            <a:pPr marL="0" indent="0">
+            <a:pPr indent="0" marL="0">
               <a:buNone/>
             </a:pPr>
             <a:r>
@@ -9898,7 +9732,7 @@
           <a:bodyPr wrap="square" lIns="0" tIns="0" rIns="0" bIns="0" rtlCol="0" anchor="t"/>
           <a:lstStyle/>
           <a:p>
-            <a:pPr marL="0" indent="0" algn="r">
+            <a:pPr algn="r" indent="0" marL="0">
               <a:buNone/>
             </a:pPr>
             <a:r>
@@ -9932,7 +9766,6 @@
         <a:solidFill>
           <a:srgbClr val="FAF9F7"/>
         </a:solidFill>
-        <a:effectLst/>
       </p:bgPr>
     </p:bg>
     <p:spTree>
@@ -9970,7 +9803,7 @@
           <a:bodyPr wrap="square" lIns="0" tIns="0" rIns="0" bIns="0" rtlCol="0" anchor="ctr"/>
           <a:lstStyle/>
           <a:p>
-            <a:pPr marL="0" indent="0">
+            <a:pPr indent="0" marL="0">
               <a:buNone/>
             </a:pPr>
             <a:r>
@@ -10009,7 +9842,7 @@
           <a:bodyPr wrap="square" lIns="0" tIns="0" rIns="0" bIns="0" rtlCol="0" anchor="t"/>
           <a:lstStyle/>
           <a:p>
-            <a:pPr marL="0" indent="0">
+            <a:pPr indent="0" marL="0">
               <a:buNone/>
             </a:pPr>
             <a:r>
@@ -10053,13 +9886,6 @@
             <a:prstDash val="solid"/>
           </a:ln>
         </p:spPr>
-        <p:txBody>
-          <a:bodyPr/>
-          <a:lstStyle/>
-          <a:p>
-            <a:endParaRPr lang="pt-BR"/>
-          </a:p>
-        </p:txBody>
       </p:sp>
       <p:sp>
         <p:nvSpPr>
@@ -10082,11 +9908,11 @@
           <a:bodyPr wrap="square" lIns="0" tIns="0" rIns="0" bIns="0" rtlCol="0" anchor="ctr"/>
           <a:lstStyle/>
           <a:p>
-            <a:pPr marL="0" indent="0">
-              <a:buNone/>
-            </a:pPr>
-            <a:r>
-              <a:rPr lang="en-US" sz="1000" b="1" kern="0" spc="120" dirty="0">
+            <a:pPr indent="0" marL="0">
+              <a:buNone/>
+            </a:pPr>
+            <a:r>
+              <a:rPr lang="en-US" sz="1000" b="1" spc="120" kern="0" dirty="0">
                 <a:solidFill>
                   <a:srgbClr val="D4622A"/>
                 </a:solidFill>
@@ -10121,7 +9947,7 @@
           <a:bodyPr wrap="square" lIns="0" tIns="0" rIns="0" bIns="0" rtlCol="0" anchor="t"/>
           <a:lstStyle/>
           <a:p>
-            <a:pPr marL="0" indent="0">
+            <a:pPr indent="0" marL="0">
               <a:buNone/>
             </a:pPr>
             <a:r>
@@ -10160,7 +9986,7 @@
           <a:bodyPr wrap="square" lIns="0" tIns="0" rIns="0" bIns="0" rtlCol="0" anchor="t"/>
           <a:lstStyle/>
           <a:p>
-            <a:pPr marL="0" indent="0">
+            <a:pPr indent="0" marL="0">
               <a:buNone/>
             </a:pPr>
             <a:r>
@@ -10199,7 +10025,7 @@
           <a:bodyPr wrap="square" lIns="0" tIns="0" rIns="0" bIns="0" rtlCol="0" anchor="t"/>
           <a:lstStyle/>
           <a:p>
-            <a:pPr marL="0" indent="0">
+            <a:pPr indent="0" marL="0">
               <a:buNone/>
             </a:pPr>
             <a:r>
@@ -10211,7 +10037,7 @@
                 <a:ea typeface="Consolas" pitchFamily="34" charset="-122"/>
                 <a:cs typeface="Consolas" pitchFamily="34" charset="-120"/>
               </a:rPr>
-              <a:t>IBM Cloudant</a:t>
+              <a:t>Railway</a:t>
             </a:r>
             <a:endParaRPr lang="en-US" sz="1200" dirty="0"/>
           </a:p>
@@ -10238,7 +10064,7 @@
           <a:bodyPr wrap="square" lIns="0" tIns="0" rIns="0" bIns="0" rtlCol="0" anchor="t"/>
           <a:lstStyle/>
           <a:p>
-            <a:pPr marL="0" indent="0">
+            <a:pPr indent="0" marL="0">
               <a:buNone/>
             </a:pPr>
             <a:r>
@@ -10250,7 +10076,7 @@
                 <a:ea typeface="Calibri" pitchFamily="34" charset="-122"/>
                 <a:cs typeface="Calibri" pitchFamily="34" charset="-120"/>
               </a:rPr>
-              <a:t>o mesmo arquivo na nuvem, plano gratuito</a:t>
+              <a:t>o galpão do CouchDB, com disco próprio</a:t>
             </a:r>
             <a:endParaRPr lang="en-US" sz="1100" dirty="0"/>
           </a:p>
@@ -10277,7 +10103,7 @@
           <a:bodyPr wrap="square" lIns="0" tIns="0" rIns="0" bIns="0" rtlCol="0" anchor="t"/>
           <a:lstStyle/>
           <a:p>
-            <a:pPr marL="0" indent="0">
+            <a:pPr indent="0" marL="0">
               <a:buNone/>
             </a:pPr>
             <a:r>
@@ -10316,7 +10142,7 @@
           <a:bodyPr wrap="square" lIns="0" tIns="0" rIns="0" bIns="0" rtlCol="0" anchor="t"/>
           <a:lstStyle/>
           <a:p>
-            <a:pPr marL="0" indent="0">
+            <a:pPr indent="0" marL="0">
               <a:buNone/>
             </a:pPr>
             <a:r>
@@ -10355,7 +10181,7 @@
           <a:bodyPr wrap="square" lIns="0" tIns="0" rIns="0" bIns="0" rtlCol="0" anchor="t"/>
           <a:lstStyle/>
           <a:p>
-            <a:pPr marL="0" indent="0">
+            <a:pPr indent="0" marL="0">
               <a:buNone/>
             </a:pPr>
             <a:r>
@@ -10394,7 +10220,7 @@
           <a:bodyPr wrap="square" lIns="0" tIns="0" rIns="0" bIns="0" rtlCol="0" anchor="t"/>
           <a:lstStyle/>
           <a:p>
-            <a:pPr marL="0" indent="0">
+            <a:pPr indent="0" marL="0">
               <a:buNone/>
             </a:pPr>
             <a:r>
@@ -10438,13 +10264,6 @@
             <a:prstDash val="solid"/>
           </a:ln>
         </p:spPr>
-        <p:txBody>
-          <a:bodyPr/>
-          <a:lstStyle/>
-          <a:p>
-            <a:endParaRPr lang="pt-BR"/>
-          </a:p>
-        </p:txBody>
       </p:sp>
       <p:sp>
         <p:nvSpPr>
@@ -10467,11 +10286,11 @@
           <a:bodyPr wrap="square" lIns="0" tIns="0" rIns="0" bIns="0" rtlCol="0" anchor="ctr"/>
           <a:lstStyle/>
           <a:p>
-            <a:pPr marL="0" indent="0">
-              <a:buNone/>
-            </a:pPr>
-            <a:r>
-              <a:rPr lang="en-US" sz="1000" b="1" kern="0" spc="120" dirty="0">
+            <a:pPr indent="0" marL="0">
+              <a:buNone/>
+            </a:pPr>
+            <a:r>
+              <a:rPr lang="en-US" sz="1000" b="1" spc="120" kern="0" dirty="0">
                 <a:solidFill>
                   <a:srgbClr val="14120F"/>
                 </a:solidFill>
@@ -10506,7 +10325,7 @@
           <a:bodyPr wrap="square" lIns="0" tIns="0" rIns="0" bIns="0" rtlCol="0" anchor="t"/>
           <a:lstStyle/>
           <a:p>
-            <a:pPr marL="0" indent="0">
+            <a:pPr indent="0" marL="0">
               <a:buNone/>
             </a:pPr>
             <a:r>
@@ -10545,7 +10364,7 @@
           <a:bodyPr wrap="square" lIns="0" tIns="0" rIns="0" bIns="0" rtlCol="0" anchor="t"/>
           <a:lstStyle/>
           <a:p>
-            <a:pPr marL="0" indent="0">
+            <a:pPr indent="0" marL="0">
               <a:buNone/>
             </a:pPr>
             <a:r>
@@ -10584,7 +10403,7 @@
           <a:bodyPr wrap="square" lIns="0" tIns="0" rIns="0" bIns="0" rtlCol="0" anchor="t"/>
           <a:lstStyle/>
           <a:p>
-            <a:pPr marL="0" indent="0">
+            <a:pPr indent="0" marL="0">
               <a:buNone/>
             </a:pPr>
             <a:r>
@@ -10623,7 +10442,7 @@
           <a:bodyPr wrap="square" lIns="0" tIns="0" rIns="0" bIns="0" rtlCol="0" anchor="t"/>
           <a:lstStyle/>
           <a:p>
-            <a:pPr marL="0" indent="0">
+            <a:pPr indent="0" marL="0">
               <a:buNone/>
             </a:pPr>
             <a:r>
@@ -10662,7 +10481,7 @@
           <a:bodyPr wrap="square" lIns="0" tIns="0" rIns="0" bIns="0" rtlCol="0" anchor="t"/>
           <a:lstStyle/>
           <a:p>
-            <a:pPr marL="0" indent="0">
+            <a:pPr indent="0" marL="0">
               <a:buNone/>
             </a:pPr>
             <a:r>
@@ -10701,7 +10520,7 @@
           <a:bodyPr wrap="square" lIns="0" tIns="0" rIns="0" bIns="0" rtlCol="0" anchor="t"/>
           <a:lstStyle/>
           <a:p>
-            <a:pPr marL="0" indent="0">
+            <a:pPr indent="0" marL="0">
               <a:buNone/>
             </a:pPr>
             <a:r>
@@ -10740,7 +10559,7 @@
           <a:bodyPr wrap="square" lIns="0" tIns="0" rIns="0" bIns="0" rtlCol="0" anchor="t"/>
           <a:lstStyle/>
           <a:p>
-            <a:pPr marL="0" indent="0">
+            <a:pPr indent="0" marL="0">
               <a:buNone/>
             </a:pPr>
             <a:r>
@@ -10779,7 +10598,7 @@
           <a:bodyPr wrap="square" lIns="0" tIns="0" rIns="0" bIns="0" rtlCol="0" anchor="t"/>
           <a:lstStyle/>
           <a:p>
-            <a:pPr marL="0" indent="0">
+            <a:pPr indent="0" marL="0">
               <a:buNone/>
             </a:pPr>
             <a:r>
@@ -10823,13 +10642,6 @@
             <a:prstDash val="solid"/>
           </a:ln>
         </p:spPr>
-        <p:txBody>
-          <a:bodyPr/>
-          <a:lstStyle/>
-          <a:p>
-            <a:endParaRPr lang="pt-BR"/>
-          </a:p>
-        </p:txBody>
       </p:sp>
       <p:sp>
         <p:nvSpPr>
@@ -10852,11 +10664,11 @@
           <a:bodyPr wrap="square" lIns="0" tIns="0" rIns="0" bIns="0" rtlCol="0" anchor="ctr"/>
           <a:lstStyle/>
           <a:p>
-            <a:pPr marL="0" indent="0">
-              <a:buNone/>
-            </a:pPr>
-            <a:r>
-              <a:rPr lang="en-US" sz="1000" b="1" kern="0" spc="120" dirty="0">
+            <a:pPr indent="0" marL="0">
+              <a:buNone/>
+            </a:pPr>
+            <a:r>
+              <a:rPr lang="en-US" sz="1000" b="1" spc="120" kern="0" dirty="0">
                 <a:solidFill>
                   <a:srgbClr val="2F6B45"/>
                 </a:solidFill>
@@ -10891,7 +10703,7 @@
           <a:bodyPr wrap="square" lIns="0" tIns="0" rIns="0" bIns="0" rtlCol="0" anchor="t"/>
           <a:lstStyle/>
           <a:p>
-            <a:pPr marL="0" indent="0">
+            <a:pPr indent="0" marL="0">
               <a:buNone/>
             </a:pPr>
             <a:r>
@@ -10930,7 +10742,7 @@
           <a:bodyPr wrap="square" lIns="0" tIns="0" rIns="0" bIns="0" rtlCol="0" anchor="t"/>
           <a:lstStyle/>
           <a:p>
-            <a:pPr marL="0" indent="0">
+            <a:pPr indent="0" marL="0">
               <a:buNone/>
             </a:pPr>
             <a:r>
@@ -10942,7 +10754,7 @@
                 <a:ea typeface="Calibri" pitchFamily="34" charset="-122"/>
                 <a:cs typeface="Calibri" pitchFamily="34" charset="-120"/>
               </a:rPr>
-              <a:t>107 testes</a:t>
+              <a:t>110 testes</a:t>
             </a:r>
             <a:endParaRPr lang="en-US" sz="1100" dirty="0"/>
           </a:p>
@@ -10969,7 +10781,7 @@
           <a:bodyPr wrap="square" lIns="0" tIns="0" rIns="0" bIns="0" rtlCol="0" anchor="t"/>
           <a:lstStyle/>
           <a:p>
-            <a:pPr marL="0" indent="0">
+            <a:pPr indent="0" marL="0">
               <a:buNone/>
             </a:pPr>
             <a:r>
@@ -11008,7 +10820,7 @@
           <a:bodyPr wrap="square" lIns="0" tIns="0" rIns="0" bIns="0" rtlCol="0" anchor="t"/>
           <a:lstStyle/>
           <a:p>
-            <a:pPr marL="0" indent="0">
+            <a:pPr indent="0" marL="0">
               <a:buNone/>
             </a:pPr>
             <a:r>
@@ -11047,7 +10859,7 @@
           <a:bodyPr wrap="square" lIns="0" tIns="0" rIns="0" bIns="0" rtlCol="0" anchor="t"/>
           <a:lstStyle/>
           <a:p>
-            <a:pPr marL="0" indent="0">
+            <a:pPr indent="0" marL="0">
               <a:buNone/>
             </a:pPr>
             <a:r>
@@ -11086,7 +10898,7 @@
           <a:bodyPr wrap="square" lIns="0" tIns="0" rIns="0" bIns="0" rtlCol="0" anchor="t"/>
           <a:lstStyle/>
           <a:p>
-            <a:pPr marL="0" indent="0">
+            <a:pPr indent="0" marL="0">
               <a:buNone/>
             </a:pPr>
             <a:r>
@@ -11125,7 +10937,7 @@
           <a:bodyPr wrap="square" lIns="0" tIns="0" rIns="0" bIns="0" rtlCol="0" anchor="t"/>
           <a:lstStyle/>
           <a:p>
-            <a:pPr marL="0" indent="0">
+            <a:pPr indent="0" marL="0">
               <a:buNone/>
             </a:pPr>
             <a:r>
@@ -11164,7 +10976,7 @@
           <a:bodyPr wrap="square" lIns="0" tIns="0" rIns="0" bIns="0" rtlCol="0" anchor="t"/>
           <a:lstStyle/>
           <a:p>
-            <a:pPr marL="0" indent="0">
+            <a:pPr indent="0" marL="0">
               <a:buNone/>
             </a:pPr>
             <a:r>
@@ -11208,13 +11020,6 @@
             <a:prstDash val="solid"/>
           </a:ln>
         </p:spPr>
-        <p:txBody>
-          <a:bodyPr/>
-          <a:lstStyle/>
-          <a:p>
-            <a:endParaRPr lang="pt-BR"/>
-          </a:p>
-        </p:txBody>
       </p:sp>
       <p:sp>
         <p:nvSpPr>
@@ -11237,7 +11042,7 @@
           <a:bodyPr wrap="square" lIns="0" tIns="0" rIns="0" bIns="0" rtlCol="0" anchor="ctr"/>
           <a:lstStyle/>
           <a:p>
-            <a:pPr marL="0" indent="0">
+            <a:pPr indent="0" marL="0">
               <a:buNone/>
             </a:pPr>
             <a:r>
@@ -11276,11 +11081,11 @@
           <a:bodyPr wrap="square" lIns="0" tIns="0" rIns="0" bIns="0" rtlCol="0" anchor="ctr"/>
           <a:lstStyle/>
           <a:p>
-            <a:pPr marL="0" indent="0">
-              <a:buNone/>
-            </a:pPr>
-            <a:r>
-              <a:rPr lang="en-US" sz="1000" b="1" kern="0" spc="120" dirty="0">
+            <a:pPr indent="0" marL="0">
+              <a:buNone/>
+            </a:pPr>
+            <a:r>
+              <a:rPr lang="en-US" sz="1000" b="1" spc="120" kern="0" dirty="0">
                 <a:solidFill>
                   <a:srgbClr val="D4622A"/>
                 </a:solidFill>
@@ -11315,7 +11120,7 @@
           <a:bodyPr wrap="square" lIns="0" tIns="0" rIns="0" bIns="0" rtlCol="0" anchor="ctr"/>
           <a:lstStyle/>
           <a:p>
-            <a:pPr marL="0" indent="0">
+            <a:pPr indent="0" marL="0">
               <a:lnSpc>
                 <a:spcPct val="108000"/>
               </a:lnSpc>
@@ -11330,8 +11135,48 @@
                 <a:ea typeface="Calibri" pitchFamily="34" charset="-122"/>
                 <a:cs typeface="Calibri" pitchFamily="34" charset="-120"/>
               </a:rPr>
-              <a:t>O PARCEIRO DE BANCADA.</a:t>
-            </a:r>
+              <a:t>O </a:t>
+            </a:r>
+            <a:pPr indent="0" marL="0">
+              <a:lnSpc>
+                <a:spcPct val="108000"/>
+              </a:lnSpc>
+              <a:buNone/>
+            </a:pPr>
+            <a:r>
+              <a:rPr lang="en-US" sz="1300" b="1" dirty="0">
+                <a:solidFill>
+                  <a:srgbClr val="D4622A"/>
+                </a:solidFill>
+                <a:latin typeface="Calibri" pitchFamily="34" charset="0"/>
+                <a:ea typeface="Calibri" pitchFamily="34" charset="-122"/>
+                <a:cs typeface="Calibri" pitchFamily="34" charset="-120"/>
+              </a:rPr>
+              <a:t>PARCEIRO DE BANCADA</a:t>
+            </a:r>
+            <a:pPr indent="0" marL="0">
+              <a:lnSpc>
+                <a:spcPct val="108000"/>
+              </a:lnSpc>
+              <a:buNone/>
+            </a:pPr>
+            <a:r>
+              <a:rPr lang="en-US" sz="1300" b="1" dirty="0">
+                <a:solidFill>
+                  <a:srgbClr val="D4622A"/>
+                </a:solidFill>
+                <a:latin typeface="Calibri" pitchFamily="34" charset="0"/>
+                <a:ea typeface="Calibri" pitchFamily="34" charset="-122"/>
+                <a:cs typeface="Calibri" pitchFamily="34" charset="-120"/>
+              </a:rPr>
+              <a:t>.</a:t>
+            </a:r>
+            <a:pPr indent="0" marL="0">
+              <a:lnSpc>
+                <a:spcPct val="108000"/>
+              </a:lnSpc>
+              <a:buNone/>
+            </a:pPr>
             <a:r>
               <a:rPr lang="en-US" sz="1300" dirty="0">
                 <a:solidFill>
@@ -11341,7 +11186,7 @@
                 <a:ea typeface="Calibri" pitchFamily="34" charset="-122"/>
                 <a:cs typeface="Calibri" pitchFamily="34" charset="-120"/>
               </a:rPr>
-              <a:t> Assistente de programação com IA: escreveu código, testes, documentos e estes slides. As decisões foram do grupo — CouchDB, Vercel com Cloudant e o roteiro desta apresentação.</a:t>
+              <a:t> Assistente de programação com IA: escreveu código, testes, documentos e estes slides. As decisões foram do grupo — CouchDB, Vercel com Railway e o roteiro desta apresentação.</a:t>
             </a:r>
             <a:endParaRPr lang="en-US" sz="1300" dirty="0"/>
           </a:p>
@@ -11368,7 +11213,7 @@
           <a:bodyPr wrap="square" lIns="0" tIns="0" rIns="0" bIns="0" rtlCol="0" anchor="t"/>
           <a:lstStyle/>
           <a:p>
-            <a:pPr marL="0" indent="0">
+            <a:pPr indent="0" marL="0">
               <a:buNone/>
             </a:pPr>
             <a:r>
@@ -11380,7 +11225,7 @@
                 <a:ea typeface="Calibri" pitchFamily="34" charset="-122"/>
                 <a:cs typeface="Calibri" pitchFamily="34" charset="-120"/>
               </a:rPr>
-              <a:t>Saímos do Railway por custo: Vercel e Cloudant, os dois no plano gratuito.</a:t>
+              <a:t>O site foi para o Vercel, grátis; só o banco continua no Railway.</a:t>
             </a:r>
             <a:endParaRPr lang="en-US" sz="1300" dirty="0"/>
           </a:p>
@@ -11407,7 +11252,7 @@
           <a:bodyPr wrap="square" lIns="0" tIns="0" rIns="0" bIns="0" rtlCol="0" anchor="t"/>
           <a:lstStyle/>
           <a:p>
-            <a:pPr marL="0" indent="0" algn="r">
+            <a:pPr algn="r" indent="0" marL="0">
               <a:buNone/>
             </a:pPr>
             <a:r>
@@ -11441,7 +11286,6 @@
         <a:solidFill>
           <a:srgbClr val="FAF9F7"/>
         </a:solidFill>
-        <a:effectLst/>
       </p:bgPr>
     </p:bg>
     <p:spTree>
@@ -11479,7 +11323,7 @@
           <a:bodyPr wrap="square" lIns="0" tIns="0" rIns="0" bIns="0" rtlCol="0" anchor="ctr"/>
           <a:lstStyle/>
           <a:p>
-            <a:pPr marL="0" indent="0">
+            <a:pPr indent="0" marL="0">
               <a:buNone/>
             </a:pPr>
             <a:r>
@@ -11518,7 +11362,7 @@
           <a:bodyPr wrap="square" lIns="0" tIns="0" rIns="0" bIns="0" rtlCol="0" anchor="t"/>
           <a:lstStyle/>
           <a:p>
-            <a:pPr marL="0" indent="0">
+            <a:pPr indent="0" marL="0">
               <a:buNone/>
             </a:pPr>
             <a:r>
@@ -11562,13 +11406,6 @@
             <a:prstDash val="solid"/>
           </a:ln>
         </p:spPr>
-        <p:txBody>
-          <a:bodyPr/>
-          <a:lstStyle/>
-          <a:p>
-            <a:endParaRPr lang="pt-BR"/>
-          </a:p>
-        </p:txBody>
       </p:sp>
       <p:sp>
         <p:nvSpPr>
@@ -11591,11 +11428,11 @@
           <a:bodyPr wrap="square" lIns="0" tIns="0" rIns="0" bIns="0" rtlCol="0" anchor="ctr"/>
           <a:lstStyle/>
           <a:p>
-            <a:pPr marL="0" indent="0">
-              <a:buNone/>
-            </a:pPr>
-            <a:r>
-              <a:rPr lang="en-US" sz="1000" b="1" kern="0" spc="120" dirty="0">
+            <a:pPr indent="0" marL="0">
+              <a:buNone/>
+            </a:pPr>
+            <a:r>
+              <a:rPr lang="en-US" sz="1000" b="1" spc="120" kern="0" dirty="0">
                 <a:solidFill>
                   <a:srgbClr val="6B6560"/>
                 </a:solidFill>
@@ -11630,7 +11467,7 @@
           <a:bodyPr wrap="square" lIns="0" tIns="0" rIns="0" bIns="0" rtlCol="0" anchor="t"/>
           <a:lstStyle/>
           <a:p>
-            <a:pPr marL="0" indent="0">
+            <a:pPr indent="0" marL="0">
               <a:lnSpc>
                 <a:spcPct val="100000"/>
               </a:lnSpc>
@@ -11650,7 +11487,7 @@
             <a:endParaRPr lang="en-US" sz="1050" dirty="0"/>
           </a:p>
           <a:p>
-            <a:pPr marL="0" indent="0">
+            <a:pPr indent="0" marL="0">
               <a:lnSpc>
                 <a:spcPct val="100000"/>
               </a:lnSpc>
@@ -11670,7 +11507,7 @@
             <a:endParaRPr lang="en-US" sz="1050" dirty="0"/>
           </a:p>
           <a:p>
-            <a:pPr marL="0" indent="0">
+            <a:pPr indent="0" marL="0">
               <a:lnSpc>
                 <a:spcPct val="100000"/>
               </a:lnSpc>
@@ -11690,7 +11527,7 @@
             <a:endParaRPr lang="en-US" sz="1050" dirty="0"/>
           </a:p>
           <a:p>
-            <a:pPr marL="0" indent="0">
+            <a:pPr indent="0" marL="0">
               <a:lnSpc>
                 <a:spcPct val="100000"/>
               </a:lnSpc>
@@ -11710,7 +11547,7 @@
             <a:endParaRPr lang="en-US" sz="1050" dirty="0"/>
           </a:p>
           <a:p>
-            <a:pPr marL="0" indent="0">
+            <a:pPr indent="0" marL="0">
               <a:lnSpc>
                 <a:spcPct val="100000"/>
               </a:lnSpc>
@@ -11730,7 +11567,7 @@
             <a:endParaRPr lang="en-US" sz="1050" dirty="0"/>
           </a:p>
           <a:p>
-            <a:pPr marL="0" indent="0">
+            <a:pPr indent="0" marL="0">
               <a:lnSpc>
                 <a:spcPct val="100000"/>
               </a:lnSpc>
@@ -11777,13 +11614,6 @@
             <a:prstDash val="solid"/>
           </a:ln>
         </p:spPr>
-        <p:txBody>
-          <a:bodyPr/>
-          <a:lstStyle/>
-          <a:p>
-            <a:endParaRPr lang="pt-BR"/>
-          </a:p>
-        </p:txBody>
       </p:sp>
       <p:sp>
         <p:nvSpPr>
@@ -11806,11 +11636,11 @@
           <a:bodyPr wrap="square" lIns="0" tIns="0" rIns="0" bIns="0" rtlCol="0" anchor="ctr"/>
           <a:lstStyle/>
           <a:p>
-            <a:pPr marL="0" indent="0">
-              <a:buNone/>
-            </a:pPr>
-            <a:r>
-              <a:rPr lang="en-US" sz="1000" b="1" kern="0" spc="120" dirty="0">
+            <a:pPr indent="0" marL="0">
+              <a:buNone/>
+            </a:pPr>
+            <a:r>
+              <a:rPr lang="en-US" sz="1000" b="1" spc="120" kern="0" dirty="0">
                 <a:solidFill>
                   <a:srgbClr val="6B6560"/>
                 </a:solidFill>
@@ -11845,7 +11675,7 @@
           <a:bodyPr wrap="square" lIns="0" tIns="0" rIns="0" bIns="0" rtlCol="0" anchor="t"/>
           <a:lstStyle/>
           <a:p>
-            <a:pPr marL="0" indent="0">
+            <a:pPr indent="0" marL="0">
               <a:lnSpc>
                 <a:spcPct val="100000"/>
               </a:lnSpc>
@@ -11865,7 +11695,7 @@
             <a:endParaRPr lang="en-US" sz="1050" dirty="0"/>
           </a:p>
           <a:p>
-            <a:pPr marL="0" indent="0">
+            <a:pPr indent="0" marL="0">
               <a:lnSpc>
                 <a:spcPct val="100000"/>
               </a:lnSpc>
@@ -11885,7 +11715,7 @@
             <a:endParaRPr lang="en-US" sz="1050" dirty="0"/>
           </a:p>
           <a:p>
-            <a:pPr marL="0" indent="0">
+            <a:pPr indent="0" marL="0">
               <a:lnSpc>
                 <a:spcPct val="100000"/>
               </a:lnSpc>
@@ -11905,7 +11735,7 @@
             <a:endParaRPr lang="en-US" sz="1050" dirty="0"/>
           </a:p>
           <a:p>
-            <a:pPr marL="0" indent="0">
+            <a:pPr indent="0" marL="0">
               <a:lnSpc>
                 <a:spcPct val="100000"/>
               </a:lnSpc>
@@ -11925,7 +11755,7 @@
             <a:endParaRPr lang="en-US" sz="1050" dirty="0"/>
           </a:p>
           <a:p>
-            <a:pPr marL="0" indent="0">
+            <a:pPr indent="0" marL="0">
               <a:lnSpc>
                 <a:spcPct val="100000"/>
               </a:lnSpc>
@@ -11945,7 +11775,7 @@
             <a:endParaRPr lang="en-US" sz="1050" dirty="0"/>
           </a:p>
           <a:p>
-            <a:pPr marL="0" indent="0">
+            <a:pPr indent="0" marL="0">
               <a:lnSpc>
                 <a:spcPct val="100000"/>
               </a:lnSpc>
@@ -11992,13 +11822,6 @@
             <a:prstDash val="solid"/>
           </a:ln>
         </p:spPr>
-        <p:txBody>
-          <a:bodyPr/>
-          <a:lstStyle/>
-          <a:p>
-            <a:endParaRPr lang="pt-BR"/>
-          </a:p>
-        </p:txBody>
       </p:sp>
       <p:sp>
         <p:nvSpPr>
@@ -12021,11 +11844,11 @@
           <a:bodyPr wrap="square" lIns="0" tIns="0" rIns="0" bIns="0" rtlCol="0" anchor="ctr"/>
           <a:lstStyle/>
           <a:p>
-            <a:pPr marL="0" indent="0">
-              <a:buNone/>
-            </a:pPr>
-            <a:r>
-              <a:rPr lang="en-US" sz="1000" b="1" kern="0" spc="120" dirty="0">
+            <a:pPr indent="0" marL="0">
+              <a:buNone/>
+            </a:pPr>
+            <a:r>
+              <a:rPr lang="en-US" sz="1000" b="1" spc="120" kern="0" dirty="0">
                 <a:solidFill>
                   <a:srgbClr val="D4622A"/>
                 </a:solidFill>
@@ -12060,7 +11883,7 @@
           <a:bodyPr wrap="square" lIns="0" tIns="0" rIns="0" bIns="0" rtlCol="0" anchor="t"/>
           <a:lstStyle/>
           <a:p>
-            <a:pPr marL="0" indent="0">
+            <a:pPr indent="0" marL="0">
               <a:lnSpc>
                 <a:spcPct val="100000"/>
               </a:lnSpc>
@@ -12080,7 +11903,7 @@
             <a:endParaRPr lang="en-US" sz="1050" dirty="0"/>
           </a:p>
           <a:p>
-            <a:pPr marL="0" indent="0">
+            <a:pPr indent="0" marL="0">
               <a:lnSpc>
                 <a:spcPct val="100000"/>
               </a:lnSpc>
@@ -12100,7 +11923,7 @@
             <a:endParaRPr lang="en-US" sz="1050" dirty="0"/>
           </a:p>
           <a:p>
-            <a:pPr marL="0" indent="0">
+            <a:pPr indent="0" marL="0">
               <a:lnSpc>
                 <a:spcPct val="100000"/>
               </a:lnSpc>
@@ -12120,7 +11943,7 @@
             <a:endParaRPr lang="en-US" sz="1050" dirty="0"/>
           </a:p>
           <a:p>
-            <a:pPr marL="0" indent="0">
+            <a:pPr indent="0" marL="0">
               <a:lnSpc>
                 <a:spcPct val="100000"/>
               </a:lnSpc>
@@ -12140,7 +11963,7 @@
             <a:endParaRPr lang="en-US" sz="1050" dirty="0"/>
           </a:p>
           <a:p>
-            <a:pPr marL="0" indent="0">
+            <a:pPr indent="0" marL="0">
               <a:lnSpc>
                 <a:spcPct val="100000"/>
               </a:lnSpc>
@@ -12160,7 +11983,7 @@
             <a:endParaRPr lang="en-US" sz="1050" dirty="0"/>
           </a:p>
           <a:p>
-            <a:pPr marL="0" indent="0">
+            <a:pPr indent="0" marL="0">
               <a:lnSpc>
                 <a:spcPct val="100000"/>
               </a:lnSpc>
@@ -12180,7 +12003,7 @@
             <a:endParaRPr lang="en-US" sz="1050" dirty="0"/>
           </a:p>
           <a:p>
-            <a:pPr marL="0" indent="0">
+            <a:pPr indent="0" marL="0">
               <a:lnSpc>
                 <a:spcPct val="100000"/>
               </a:lnSpc>
@@ -12200,7 +12023,7 @@
             <a:endParaRPr lang="en-US" sz="1050" dirty="0"/>
           </a:p>
           <a:p>
-            <a:pPr marL="0" indent="0">
+            <a:pPr indent="0" marL="0">
               <a:lnSpc>
                 <a:spcPct val="100000"/>
               </a:lnSpc>
@@ -12217,6 +12040,12 @@
               </a:rPr>
               <a:t>    </a:t>
             </a:r>
+            <a:pPr indent="0" marL="0">
+              <a:lnSpc>
+                <a:spcPct val="100000"/>
+              </a:lnSpc>
+              <a:buNone/>
+            </a:pPr>
             <a:r>
               <a:rPr lang="en-US" sz="1050" b="1" dirty="0">
                 <a:solidFill>
@@ -12234,7 +12063,7 @@
             <a:endParaRPr lang="en-US" sz="1050" dirty="0"/>
           </a:p>
           <a:p>
-            <a:pPr marL="0" indent="0">
+            <a:pPr indent="0" marL="0">
               <a:lnSpc>
                 <a:spcPct val="100000"/>
               </a:lnSpc>
@@ -12254,7 +12083,7 @@
             <a:endParaRPr lang="en-US" sz="1050" dirty="0"/>
           </a:p>
           <a:p>
-            <a:pPr marL="0" indent="0">
+            <a:pPr indent="0" marL="0">
               <a:lnSpc>
                 <a:spcPct val="100000"/>
               </a:lnSpc>
@@ -12274,7 +12103,7 @@
             <a:endParaRPr lang="en-US" sz="1050" dirty="0"/>
           </a:p>
           <a:p>
-            <a:pPr marL="0" indent="0">
+            <a:pPr indent="0" marL="0">
               <a:lnSpc>
                 <a:spcPct val="100000"/>
               </a:lnSpc>
@@ -12316,7 +12145,7 @@
           <a:bodyPr wrap="square" lIns="0" tIns="0" rIns="0" bIns="0" rtlCol="0" anchor="t"/>
           <a:lstStyle/>
           <a:p>
-            <a:pPr marL="0" indent="0">
+            <a:pPr indent="0" marL="0">
               <a:buNone/>
             </a:pPr>
             <a:r>
@@ -12360,13 +12189,6 @@
             <a:prstDash val="solid"/>
           </a:ln>
         </p:spPr>
-        <p:txBody>
-          <a:bodyPr/>
-          <a:lstStyle/>
-          <a:p>
-            <a:endParaRPr lang="pt-BR"/>
-          </a:p>
-        </p:txBody>
       </p:sp>
       <p:sp>
         <p:nvSpPr>
@@ -12389,11 +12211,11 @@
           <a:bodyPr wrap="square" lIns="0" tIns="0" rIns="0" bIns="0" rtlCol="0" anchor="ctr"/>
           <a:lstStyle/>
           <a:p>
-            <a:pPr marL="0" indent="0">
-              <a:buNone/>
-            </a:pPr>
-            <a:r>
-              <a:rPr lang="en-US" sz="1000" b="1" kern="0" spc="120" dirty="0">
+            <a:pPr indent="0" marL="0">
+              <a:buNone/>
+            </a:pPr>
+            <a:r>
+              <a:rPr lang="en-US" sz="1000" b="1" spc="120" kern="0" dirty="0">
                 <a:solidFill>
                   <a:srgbClr val="D4622A"/>
                 </a:solidFill>
@@ -12428,7 +12250,7 @@
           <a:bodyPr wrap="square" lIns="0" tIns="0" rIns="0" bIns="0" rtlCol="0" anchor="t"/>
           <a:lstStyle/>
           <a:p>
-            <a:pPr marL="0" indent="0">
+            <a:pPr indent="0" marL="0">
               <a:buNone/>
             </a:pPr>
             <a:r>
@@ -12467,7 +12289,7 @@
           <a:bodyPr wrap="square" lIns="0" tIns="0" rIns="0" bIns="0" rtlCol="0" anchor="t"/>
           <a:lstStyle/>
           <a:p>
-            <a:pPr marL="0" indent="0">
+            <a:pPr indent="0" marL="0">
               <a:lnSpc>
                 <a:spcPct val="100000"/>
               </a:lnSpc>
@@ -12514,13 +12336,6 @@
             <a:prstDash val="solid"/>
           </a:ln>
         </p:spPr>
-        <p:txBody>
-          <a:bodyPr/>
-          <a:lstStyle/>
-          <a:p>
-            <a:endParaRPr lang="pt-BR"/>
-          </a:p>
-        </p:txBody>
       </p:sp>
       <p:sp>
         <p:nvSpPr>
@@ -12543,11 +12358,11 @@
           <a:bodyPr wrap="square" lIns="0" tIns="0" rIns="0" bIns="0" rtlCol="0" anchor="ctr"/>
           <a:lstStyle/>
           <a:p>
-            <a:pPr marL="0" indent="0">
-              <a:buNone/>
-            </a:pPr>
-            <a:r>
-              <a:rPr lang="en-US" sz="1000" b="1" kern="0" spc="120" dirty="0">
+            <a:pPr indent="0" marL="0">
+              <a:buNone/>
+            </a:pPr>
+            <a:r>
+              <a:rPr lang="en-US" sz="1000" b="1" spc="120" kern="0" dirty="0">
                 <a:solidFill>
                   <a:srgbClr val="D4622A"/>
                 </a:solidFill>
@@ -12582,7 +12397,7 @@
           <a:bodyPr wrap="square" lIns="0" tIns="0" rIns="0" bIns="0" rtlCol="0" anchor="t"/>
           <a:lstStyle/>
           <a:p>
-            <a:pPr marL="0" indent="0">
+            <a:pPr indent="0" marL="0">
               <a:buNone/>
             </a:pPr>
             <a:r>
@@ -12621,7 +12436,7 @@
           <a:bodyPr wrap="square" lIns="0" tIns="0" rIns="0" bIns="0" rtlCol="0" anchor="t"/>
           <a:lstStyle/>
           <a:p>
-            <a:pPr marL="0" indent="0">
+            <a:pPr indent="0" marL="0">
               <a:lnSpc>
                 <a:spcPct val="100000"/>
               </a:lnSpc>
@@ -12668,13 +12483,6 @@
             <a:prstDash val="solid"/>
           </a:ln>
         </p:spPr>
-        <p:txBody>
-          <a:bodyPr/>
-          <a:lstStyle/>
-          <a:p>
-            <a:endParaRPr lang="pt-BR"/>
-          </a:p>
-        </p:txBody>
       </p:sp>
       <p:sp>
         <p:nvSpPr>
@@ -12697,11 +12505,11 @@
           <a:bodyPr wrap="square" lIns="0" tIns="0" rIns="0" bIns="0" rtlCol="0" anchor="ctr"/>
           <a:lstStyle/>
           <a:p>
-            <a:pPr marL="0" indent="0">
-              <a:buNone/>
-            </a:pPr>
-            <a:r>
-              <a:rPr lang="en-US" sz="1000" b="1" kern="0" spc="120" dirty="0">
+            <a:pPr indent="0" marL="0">
+              <a:buNone/>
+            </a:pPr>
+            <a:r>
+              <a:rPr lang="en-US" sz="1000" b="1" spc="120" kern="0" dirty="0">
                 <a:solidFill>
                   <a:srgbClr val="D4622A"/>
                 </a:solidFill>
@@ -12736,7 +12544,7 @@
           <a:bodyPr wrap="square" lIns="0" tIns="0" rIns="0" bIns="0" rtlCol="0" anchor="t"/>
           <a:lstStyle/>
           <a:p>
-            <a:pPr marL="0" indent="0">
+            <a:pPr indent="0" marL="0">
               <a:buNone/>
             </a:pPr>
             <a:r>
@@ -12775,7 +12583,7 @@
           <a:bodyPr wrap="square" lIns="0" tIns="0" rIns="0" bIns="0" rtlCol="0" anchor="t"/>
           <a:lstStyle/>
           <a:p>
-            <a:pPr marL="0" indent="0">
+            <a:pPr indent="0" marL="0">
               <a:lnSpc>
                 <a:spcPct val="100000"/>
               </a:lnSpc>
@@ -12817,7 +12625,7 @@
           <a:bodyPr wrap="square" lIns="0" tIns="0" rIns="0" bIns="0" rtlCol="0" anchor="t"/>
           <a:lstStyle/>
           <a:p>
-            <a:pPr marL="0" indent="0">
+            <a:pPr indent="0" marL="0">
               <a:buNone/>
             </a:pPr>
             <a:r>
@@ -12856,7 +12664,7 @@
           <a:bodyPr wrap="square" lIns="0" tIns="0" rIns="0" bIns="0" rtlCol="0" anchor="t"/>
           <a:lstStyle/>
           <a:p>
-            <a:pPr marL="0" indent="0" algn="r">
+            <a:pPr algn="r" indent="0" marL="0">
               <a:buNone/>
             </a:pPr>
             <a:r>
@@ -12890,7 +12698,6 @@
         <a:solidFill>
           <a:srgbClr val="FAF9F7"/>
         </a:solidFill>
-        <a:effectLst/>
       </p:bgPr>
     </p:bg>
     <p:spTree>
@@ -12928,7 +12735,7 @@
           <a:bodyPr wrap="square" lIns="0" tIns="0" rIns="0" bIns="0" rtlCol="0" anchor="ctr"/>
           <a:lstStyle/>
           <a:p>
-            <a:pPr marL="0" indent="0">
+            <a:pPr indent="0" marL="0">
               <a:buNone/>
             </a:pPr>
             <a:r>
@@ -12967,7 +12774,7 @@
           <a:bodyPr wrap="square" lIns="0" tIns="0" rIns="0" bIns="0" rtlCol="0" anchor="t"/>
           <a:lstStyle/>
           <a:p>
-            <a:pPr marL="0" indent="0">
+            <a:pPr indent="0" marL="0">
               <a:buNone/>
             </a:pPr>
             <a:r>
@@ -13011,13 +12818,6 @@
             <a:prstDash val="solid"/>
           </a:ln>
         </p:spPr>
-        <p:txBody>
-          <a:bodyPr/>
-          <a:lstStyle/>
-          <a:p>
-            <a:endParaRPr lang="pt-BR"/>
-          </a:p>
-        </p:txBody>
       </p:sp>
       <p:sp>
         <p:nvSpPr>
@@ -13040,11 +12840,11 @@
           <a:bodyPr wrap="square" lIns="0" tIns="0" rIns="0" bIns="0" rtlCol="0" anchor="ctr"/>
           <a:lstStyle/>
           <a:p>
-            <a:pPr marL="0" indent="0">
-              <a:buNone/>
-            </a:pPr>
-            <a:r>
-              <a:rPr lang="en-US" sz="1000" b="1" kern="0" spc="120" dirty="0">
+            <a:pPr indent="0" marL="0">
+              <a:buNone/>
+            </a:pPr>
+            <a:r>
+              <a:rPr lang="en-US" sz="1000" b="1" spc="120" kern="0" dirty="0">
                 <a:solidFill>
                   <a:srgbClr val="6B6560"/>
                 </a:solidFill>
@@ -13079,7 +12879,7 @@
           <a:bodyPr wrap="square" lIns="0" tIns="0" rIns="0" bIns="0" rtlCol="0" anchor="t"/>
           <a:lstStyle/>
           <a:p>
-            <a:pPr marL="0" indent="0">
+            <a:pPr indent="0" marL="0">
               <a:lnSpc>
                 <a:spcPct val="100000"/>
               </a:lnSpc>
@@ -13126,13 +12926,6 @@
             <a:prstDash val="solid"/>
           </a:ln>
         </p:spPr>
-        <p:txBody>
-          <a:bodyPr/>
-          <a:lstStyle/>
-          <a:p>
-            <a:endParaRPr lang="pt-BR"/>
-          </a:p>
-        </p:txBody>
       </p:sp>
       <p:sp>
         <p:nvSpPr>
@@ -13155,11 +12948,11 @@
           <a:bodyPr wrap="square" lIns="0" tIns="0" rIns="0" bIns="0" rtlCol="0" anchor="ctr"/>
           <a:lstStyle/>
           <a:p>
-            <a:pPr marL="0" indent="0">
-              <a:buNone/>
-            </a:pPr>
-            <a:r>
-              <a:rPr lang="en-US" sz="1000" b="1" kern="0" spc="120" dirty="0">
+            <a:pPr indent="0" marL="0">
+              <a:buNone/>
+            </a:pPr>
+            <a:r>
+              <a:rPr lang="en-US" sz="1000" b="1" spc="120" kern="0" dirty="0">
                 <a:solidFill>
                   <a:srgbClr val="D4622A"/>
                 </a:solidFill>
@@ -13194,7 +12987,7 @@
           <a:bodyPr wrap="square" lIns="0" tIns="0" rIns="0" bIns="0" rtlCol="0" anchor="t"/>
           <a:lstStyle/>
           <a:p>
-            <a:pPr marL="0" indent="0">
+            <a:pPr indent="0" marL="0">
               <a:lnSpc>
                 <a:spcPct val="100000"/>
               </a:lnSpc>
@@ -13236,11 +13029,11 @@
           <a:bodyPr wrap="square" lIns="0" tIns="0" rIns="0" bIns="0" rtlCol="0" anchor="ctr"/>
           <a:lstStyle/>
           <a:p>
-            <a:pPr marL="0" indent="0">
-              <a:buNone/>
-            </a:pPr>
-            <a:r>
-              <a:rPr lang="en-US" sz="1000" b="1" kern="0" spc="120" dirty="0">
+            <a:pPr indent="0" marL="0">
+              <a:buNone/>
+            </a:pPr>
+            <a:r>
+              <a:rPr lang="en-US" sz="1000" b="1" spc="120" kern="0" dirty="0">
                 <a:solidFill>
                   <a:srgbClr val="6B6560"/>
                 </a:solidFill>
@@ -13275,11 +13068,11 @@
           <a:bodyPr wrap="square" lIns="0" tIns="0" rIns="0" bIns="0" rtlCol="0" anchor="ctr"/>
           <a:lstStyle/>
           <a:p>
-            <a:pPr marL="0" indent="0">
-              <a:buNone/>
-            </a:pPr>
-            <a:r>
-              <a:rPr lang="en-US" sz="1000" b="1" kern="0" spc="120" dirty="0">
+            <a:pPr indent="0" marL="0">
+              <a:buNone/>
+            </a:pPr>
+            <a:r>
+              <a:rPr lang="en-US" sz="1000" b="1" spc="120" kern="0" dirty="0">
                 <a:solidFill>
                   <a:srgbClr val="D4622A"/>
                 </a:solidFill>
@@ -13315,13 +13108,6 @@
             <a:prstDash val="solid"/>
           </a:ln>
         </p:spPr>
-        <p:txBody>
-          <a:bodyPr/>
-          <a:lstStyle/>
-          <a:p>
-            <a:endParaRPr lang="pt-BR"/>
-          </a:p>
-        </p:txBody>
       </p:sp>
       <p:sp>
         <p:nvSpPr>
@@ -13344,7 +13130,7 @@
           <a:bodyPr wrap="square" lIns="0" tIns="0" rIns="0" bIns="0" rtlCol="0" anchor="ctr"/>
           <a:lstStyle/>
           <a:p>
-            <a:pPr marL="0" indent="0">
+            <a:pPr indent="0" marL="0">
               <a:buNone/>
             </a:pPr>
             <a:r>
@@ -13383,7 +13169,7 @@
           <a:bodyPr wrap="square" lIns="0" tIns="0" rIns="0" bIns="0" rtlCol="0" anchor="ctr"/>
           <a:lstStyle/>
           <a:p>
-            <a:pPr marL="0" indent="0">
+            <a:pPr indent="0" marL="0">
               <a:buNone/>
             </a:pPr>
             <a:r>
@@ -13422,7 +13208,7 @@
           <a:bodyPr wrap="square" lIns="0" tIns="0" rIns="0" bIns="0" rtlCol="0" anchor="ctr"/>
           <a:lstStyle/>
           <a:p>
-            <a:pPr marL="0" indent="0">
+            <a:pPr indent="0" marL="0">
               <a:buNone/>
             </a:pPr>
             <a:r>
@@ -13462,13 +13248,6 @@
             <a:prstDash val="solid"/>
           </a:ln>
         </p:spPr>
-        <p:txBody>
-          <a:bodyPr/>
-          <a:lstStyle/>
-          <a:p>
-            <a:endParaRPr lang="pt-BR"/>
-          </a:p>
-        </p:txBody>
       </p:sp>
       <p:sp>
         <p:nvSpPr>
@@ -13491,7 +13270,7 @@
           <a:bodyPr wrap="square" lIns="0" tIns="0" rIns="0" bIns="0" rtlCol="0" anchor="ctr"/>
           <a:lstStyle/>
           <a:p>
-            <a:pPr marL="0" indent="0">
+            <a:pPr indent="0" marL="0">
               <a:buNone/>
             </a:pPr>
             <a:r>
@@ -13530,7 +13309,7 @@
           <a:bodyPr wrap="square" lIns="0" tIns="0" rIns="0" bIns="0" rtlCol="0" anchor="ctr"/>
           <a:lstStyle/>
           <a:p>
-            <a:pPr marL="0" indent="0">
+            <a:pPr indent="0" marL="0">
               <a:buNone/>
             </a:pPr>
             <a:r>
@@ -13569,7 +13348,7 @@
           <a:bodyPr wrap="square" lIns="0" tIns="0" rIns="0" bIns="0" rtlCol="0" anchor="ctr"/>
           <a:lstStyle/>
           <a:p>
-            <a:pPr marL="0" indent="0">
+            <a:pPr indent="0" marL="0">
               <a:buNone/>
             </a:pPr>
             <a:r>
@@ -13609,13 +13388,6 @@
             <a:prstDash val="solid"/>
           </a:ln>
         </p:spPr>
-        <p:txBody>
-          <a:bodyPr/>
-          <a:lstStyle/>
-          <a:p>
-            <a:endParaRPr lang="pt-BR"/>
-          </a:p>
-        </p:txBody>
       </p:sp>
       <p:sp>
         <p:nvSpPr>
@@ -13638,7 +13410,7 @@
           <a:bodyPr wrap="square" lIns="0" tIns="0" rIns="0" bIns="0" rtlCol="0" anchor="ctr"/>
           <a:lstStyle/>
           <a:p>
-            <a:pPr marL="0" indent="0">
+            <a:pPr indent="0" marL="0">
               <a:buNone/>
             </a:pPr>
             <a:r>
@@ -13677,7 +13449,7 @@
           <a:bodyPr wrap="square" lIns="0" tIns="0" rIns="0" bIns="0" rtlCol="0" anchor="ctr"/>
           <a:lstStyle/>
           <a:p>
-            <a:pPr marL="0" indent="0">
+            <a:pPr indent="0" marL="0">
               <a:buNone/>
             </a:pPr>
             <a:r>
@@ -13716,7 +13488,7 @@
           <a:bodyPr wrap="square" lIns="0" tIns="0" rIns="0" bIns="0" rtlCol="0" anchor="ctr"/>
           <a:lstStyle/>
           <a:p>
-            <a:pPr marL="0" indent="0">
+            <a:pPr indent="0" marL="0">
               <a:buNone/>
             </a:pPr>
             <a:r>
@@ -13756,13 +13528,6 @@
             <a:prstDash val="solid"/>
           </a:ln>
         </p:spPr>
-        <p:txBody>
-          <a:bodyPr/>
-          <a:lstStyle/>
-          <a:p>
-            <a:endParaRPr lang="pt-BR"/>
-          </a:p>
-        </p:txBody>
       </p:sp>
       <p:sp>
         <p:nvSpPr>
@@ -13785,7 +13550,7 @@
           <a:bodyPr wrap="square" lIns="0" tIns="0" rIns="0" bIns="0" rtlCol="0" anchor="ctr"/>
           <a:lstStyle/>
           <a:p>
-            <a:pPr marL="0" indent="0">
+            <a:pPr indent="0" marL="0">
               <a:buNone/>
             </a:pPr>
             <a:r>
@@ -13824,7 +13589,7 @@
           <a:bodyPr wrap="square" lIns="0" tIns="0" rIns="0" bIns="0" rtlCol="0" anchor="ctr"/>
           <a:lstStyle/>
           <a:p>
-            <a:pPr marL="0" indent="0">
+            <a:pPr indent="0" marL="0">
               <a:buNone/>
             </a:pPr>
             <a:r>
@@ -13863,7 +13628,7 @@
           <a:bodyPr wrap="square" lIns="0" tIns="0" rIns="0" bIns="0" rtlCol="0" anchor="ctr"/>
           <a:lstStyle/>
           <a:p>
-            <a:pPr marL="0" indent="0">
+            <a:pPr indent="0" marL="0">
               <a:buNone/>
             </a:pPr>
             <a:r>
@@ -13903,13 +13668,6 @@
             <a:prstDash val="solid"/>
           </a:ln>
         </p:spPr>
-        <p:txBody>
-          <a:bodyPr/>
-          <a:lstStyle/>
-          <a:p>
-            <a:endParaRPr lang="pt-BR"/>
-          </a:p>
-        </p:txBody>
       </p:sp>
       <p:sp>
         <p:nvSpPr>
@@ -13932,7 +13690,7 @@
           <a:bodyPr wrap="square" lIns="0" tIns="0" rIns="0" bIns="0" rtlCol="0" anchor="ctr"/>
           <a:lstStyle/>
           <a:p>
-            <a:pPr marL="0" indent="0">
+            <a:pPr indent="0" marL="0">
               <a:buNone/>
             </a:pPr>
             <a:r>
@@ -13971,7 +13729,7 @@
           <a:bodyPr wrap="square" lIns="0" tIns="0" rIns="0" bIns="0" rtlCol="0" anchor="ctr"/>
           <a:lstStyle/>
           <a:p>
-            <a:pPr marL="0" indent="0">
+            <a:pPr indent="0" marL="0">
               <a:buNone/>
             </a:pPr>
             <a:r>
@@ -14010,7 +13768,7 @@
           <a:bodyPr wrap="square" lIns="0" tIns="0" rIns="0" bIns="0" rtlCol="0" anchor="ctr"/>
           <a:lstStyle/>
           <a:p>
-            <a:pPr marL="0" indent="0">
+            <a:pPr indent="0" marL="0">
               <a:buNone/>
             </a:pPr>
             <a:r>
@@ -14050,13 +13808,6 @@
             <a:prstDash val="solid"/>
           </a:ln>
         </p:spPr>
-        <p:txBody>
-          <a:bodyPr/>
-          <a:lstStyle/>
-          <a:p>
-            <a:endParaRPr lang="pt-BR"/>
-          </a:p>
-        </p:txBody>
       </p:sp>
       <p:sp>
         <p:nvSpPr>
@@ -14079,7 +13830,7 @@
           <a:bodyPr wrap="square" lIns="0" tIns="0" rIns="0" bIns="0" rtlCol="0" anchor="ctr"/>
           <a:lstStyle/>
           <a:p>
-            <a:pPr marL="0" indent="0">
+            <a:pPr indent="0" marL="0">
               <a:buNone/>
             </a:pPr>
             <a:r>
@@ -14118,7 +13869,7 @@
           <a:bodyPr wrap="square" lIns="0" tIns="0" rIns="0" bIns="0" rtlCol="0" anchor="ctr"/>
           <a:lstStyle/>
           <a:p>
-            <a:pPr marL="0" indent="0">
+            <a:pPr indent="0" marL="0">
               <a:buNone/>
             </a:pPr>
             <a:r>
@@ -14157,7 +13908,7 @@
           <a:bodyPr wrap="square" lIns="0" tIns="0" rIns="0" bIns="0" rtlCol="0" anchor="ctr"/>
           <a:lstStyle/>
           <a:p>
-            <a:pPr marL="0" indent="0">
+            <a:pPr indent="0" marL="0">
               <a:buNone/>
             </a:pPr>
             <a:r>
@@ -14197,13 +13948,6 @@
             <a:prstDash val="solid"/>
           </a:ln>
         </p:spPr>
-        <p:txBody>
-          <a:bodyPr/>
-          <a:lstStyle/>
-          <a:p>
-            <a:endParaRPr lang="pt-BR"/>
-          </a:p>
-        </p:txBody>
       </p:sp>
       <p:sp>
         <p:nvSpPr>
@@ -14226,7 +13970,7 @@
           <a:bodyPr wrap="square" lIns="0" tIns="0" rIns="0" bIns="0" rtlCol="0" anchor="ctr"/>
           <a:lstStyle/>
           <a:p>
-            <a:pPr marL="0" indent="0">
+            <a:pPr indent="0" marL="0">
               <a:buNone/>
             </a:pPr>
             <a:r>
@@ -14265,7 +14009,7 @@
           <a:bodyPr wrap="square" lIns="0" tIns="0" rIns="0" bIns="0" rtlCol="0" anchor="ctr"/>
           <a:lstStyle/>
           <a:p>
-            <a:pPr marL="0" indent="0">
+            <a:pPr indent="0" marL="0">
               <a:buNone/>
             </a:pPr>
             <a:r>
@@ -14304,7 +14048,7 @@
           <a:bodyPr wrap="square" lIns="0" tIns="0" rIns="0" bIns="0" rtlCol="0" anchor="ctr"/>
           <a:lstStyle/>
           <a:p>
-            <a:pPr marL="0" indent="0">
+            <a:pPr indent="0" marL="0">
               <a:buNone/>
             </a:pPr>
             <a:r>
@@ -14344,13 +14088,6 @@
             <a:prstDash val="solid"/>
           </a:ln>
         </p:spPr>
-        <p:txBody>
-          <a:bodyPr/>
-          <a:lstStyle/>
-          <a:p>
-            <a:endParaRPr lang="pt-BR"/>
-          </a:p>
-        </p:txBody>
       </p:sp>
       <p:sp>
         <p:nvSpPr>
@@ -14373,7 +14110,7 @@
           <a:bodyPr wrap="square" lIns="0" tIns="0" rIns="0" bIns="0" rtlCol="0" anchor="ctr"/>
           <a:lstStyle/>
           <a:p>
-            <a:pPr marL="0" indent="0">
+            <a:pPr indent="0" marL="0">
               <a:buNone/>
             </a:pPr>
             <a:r>
@@ -14412,7 +14149,7 @@
           <a:bodyPr wrap="square" lIns="0" tIns="0" rIns="0" bIns="0" rtlCol="0" anchor="ctr"/>
           <a:lstStyle/>
           <a:p>
-            <a:pPr marL="0" indent="0">
+            <a:pPr indent="0" marL="0">
               <a:buNone/>
             </a:pPr>
             <a:r>
@@ -14451,7 +14188,7 @@
           <a:bodyPr wrap="square" lIns="0" tIns="0" rIns="0" bIns="0" rtlCol="0" anchor="ctr"/>
           <a:lstStyle/>
           <a:p>
-            <a:pPr marL="0" indent="0">
+            <a:pPr indent="0" marL="0">
               <a:buNone/>
             </a:pPr>
             <a:r>
@@ -14490,7 +14227,7 @@
           <a:bodyPr wrap="square" lIns="0" tIns="0" rIns="0" bIns="0" rtlCol="0" anchor="t"/>
           <a:lstStyle/>
           <a:p>
-            <a:pPr marL="0" indent="0" algn="r">
+            <a:pPr algn="r" indent="0" marL="0">
               <a:buNone/>
             </a:pPr>
             <a:r>
@@ -14524,7 +14261,6 @@
         <a:solidFill>
           <a:srgbClr val="FAF9F7"/>
         </a:solidFill>
-        <a:effectLst/>
       </p:bgPr>
     </p:bg>
     <p:spTree>
@@ -14562,7 +14298,7 @@
           <a:bodyPr wrap="square" lIns="0" tIns="0" rIns="0" bIns="0" rtlCol="0" anchor="ctr"/>
           <a:lstStyle/>
           <a:p>
-            <a:pPr marL="0" indent="0">
+            <a:pPr indent="0" marL="0">
               <a:buNone/>
             </a:pPr>
             <a:r>
@@ -14601,7 +14337,7 @@
           <a:bodyPr wrap="square" lIns="0" tIns="0" rIns="0" bIns="0" rtlCol="0" anchor="t"/>
           <a:lstStyle/>
           <a:p>
-            <a:pPr marL="0" indent="0">
+            <a:pPr indent="0" marL="0">
               <a:buNone/>
             </a:pPr>
             <a:r>
@@ -14645,13 +14381,6 @@
             <a:prstDash val="solid"/>
           </a:ln>
         </p:spPr>
-        <p:txBody>
-          <a:bodyPr/>
-          <a:lstStyle/>
-          <a:p>
-            <a:endParaRPr lang="pt-BR"/>
-          </a:p>
-        </p:txBody>
       </p:sp>
       <p:sp>
         <p:nvSpPr>
@@ -14674,11 +14403,11 @@
           <a:bodyPr wrap="square" lIns="0" tIns="0" rIns="0" bIns="0" rtlCol="0" anchor="ctr"/>
           <a:lstStyle/>
           <a:p>
-            <a:pPr marL="0" indent="0">
-              <a:buNone/>
-            </a:pPr>
-            <a:r>
-              <a:rPr lang="en-US" sz="1000" b="1" kern="0" spc="120" dirty="0">
+            <a:pPr indent="0" marL="0">
+              <a:buNone/>
+            </a:pPr>
+            <a:r>
+              <a:rPr lang="en-US" sz="1000" b="1" spc="120" kern="0" dirty="0">
                 <a:solidFill>
                   <a:srgbClr val="A8321F"/>
                 </a:solidFill>
@@ -14713,7 +14442,7 @@
           <a:bodyPr wrap="square" lIns="0" tIns="0" rIns="0" bIns="0" rtlCol="0" anchor="t"/>
           <a:lstStyle/>
           <a:p>
-            <a:pPr marL="0" indent="0">
+            <a:pPr indent="0" marL="0">
               <a:lnSpc>
                 <a:spcPct val="100000"/>
               </a:lnSpc>
@@ -14760,13 +14489,6 @@
             <a:prstDash val="solid"/>
           </a:ln>
         </p:spPr>
-        <p:txBody>
-          <a:bodyPr/>
-          <a:lstStyle/>
-          <a:p>
-            <a:endParaRPr lang="pt-BR"/>
-          </a:p>
-        </p:txBody>
       </p:sp>
       <p:sp>
         <p:nvSpPr>
@@ -14789,11 +14511,11 @@
           <a:bodyPr wrap="square" lIns="0" tIns="0" rIns="0" bIns="0" rtlCol="0" anchor="ctr"/>
           <a:lstStyle/>
           <a:p>
-            <a:pPr marL="0" indent="0">
-              <a:buNone/>
-            </a:pPr>
-            <a:r>
-              <a:rPr lang="en-US" sz="1000" b="1" kern="0" spc="120" dirty="0">
+            <a:pPr indent="0" marL="0">
+              <a:buNone/>
+            </a:pPr>
+            <a:r>
+              <a:rPr lang="en-US" sz="1000" b="1" spc="120" kern="0" dirty="0">
                 <a:solidFill>
                   <a:srgbClr val="6B6560"/>
                 </a:solidFill>
@@ -14828,7 +14550,7 @@
           <a:bodyPr wrap="square" lIns="0" tIns="0" rIns="0" bIns="0" rtlCol="0" anchor="t"/>
           <a:lstStyle/>
           <a:p>
-            <a:pPr marL="0" indent="0">
+            <a:pPr indent="0" marL="0">
               <a:lnSpc>
                 <a:spcPct val="100000"/>
               </a:lnSpc>
@@ -14875,13 +14597,6 @@
             <a:prstDash val="solid"/>
           </a:ln>
         </p:spPr>
-        <p:txBody>
-          <a:bodyPr/>
-          <a:lstStyle/>
-          <a:p>
-            <a:endParaRPr lang="pt-BR"/>
-          </a:p>
-        </p:txBody>
       </p:sp>
       <p:sp>
         <p:nvSpPr>
@@ -14907,13 +14622,6 @@
             <a:prstDash val="solid"/>
           </a:ln>
         </p:spPr>
-        <p:txBody>
-          <a:bodyPr/>
-          <a:lstStyle/>
-          <a:p>
-            <a:endParaRPr lang="pt-BR"/>
-          </a:p>
-        </p:txBody>
       </p:sp>
       <p:sp>
         <p:nvSpPr>
@@ -14936,7 +14644,7 @@
           <a:bodyPr wrap="square" lIns="0" tIns="0" rIns="0" bIns="0" rtlCol="0" anchor="ctr"/>
           <a:lstStyle/>
           <a:p>
-            <a:pPr marL="0" indent="0" algn="ctr">
+            <a:pPr algn="ctr" indent="0" marL="0">
               <a:buNone/>
             </a:pPr>
             <a:r>
@@ -14975,7 +14683,7 @@
           <a:bodyPr wrap="square" lIns="0" tIns="0" rIns="0" bIns="0" rtlCol="0" anchor="t"/>
           <a:lstStyle/>
           <a:p>
-            <a:pPr marL="0" indent="0">
+            <a:pPr indent="0" marL="0">
               <a:buNone/>
             </a:pPr>
             <a:r>
@@ -15014,7 +14722,7 @@
           <a:bodyPr wrap="square" lIns="0" tIns="0" rIns="0" bIns="0" rtlCol="0" anchor="t"/>
           <a:lstStyle/>
           <a:p>
-            <a:pPr marL="0" indent="0">
+            <a:pPr indent="0" marL="0">
               <a:lnSpc>
                 <a:spcPct val="100000"/>
               </a:lnSpc>
@@ -15056,7 +14764,7 @@
           <a:bodyPr wrap="square" lIns="0" tIns="0" rIns="0" bIns="0" rtlCol="0" anchor="ctr"/>
           <a:lstStyle/>
           <a:p>
-            <a:pPr marL="0" indent="0" algn="ctr">
+            <a:pPr algn="ctr" indent="0" marL="0">
               <a:buNone/>
             </a:pPr>
             <a:r>
@@ -15100,13 +14808,6 @@
             <a:prstDash val="solid"/>
           </a:ln>
         </p:spPr>
-        <p:txBody>
-          <a:bodyPr/>
-          <a:lstStyle/>
-          <a:p>
-            <a:endParaRPr lang="pt-BR"/>
-          </a:p>
-        </p:txBody>
       </p:sp>
       <p:sp>
         <p:nvSpPr>
@@ -15132,13 +14833,6 @@
             <a:prstDash val="solid"/>
           </a:ln>
         </p:spPr>
-        <p:txBody>
-          <a:bodyPr/>
-          <a:lstStyle/>
-          <a:p>
-            <a:endParaRPr lang="pt-BR"/>
-          </a:p>
-        </p:txBody>
       </p:sp>
       <p:sp>
         <p:nvSpPr>
@@ -15161,7 +14855,7 @@
           <a:bodyPr wrap="square" lIns="0" tIns="0" rIns="0" bIns="0" rtlCol="0" anchor="ctr"/>
           <a:lstStyle/>
           <a:p>
-            <a:pPr marL="0" indent="0" algn="ctr">
+            <a:pPr algn="ctr" indent="0" marL="0">
               <a:buNone/>
             </a:pPr>
             <a:r>
@@ -15200,7 +14894,7 @@
           <a:bodyPr wrap="square" lIns="0" tIns="0" rIns="0" bIns="0" rtlCol="0" anchor="t"/>
           <a:lstStyle/>
           <a:p>
-            <a:pPr marL="0" indent="0">
+            <a:pPr indent="0" marL="0">
               <a:buNone/>
             </a:pPr>
             <a:r>
@@ -15239,7 +14933,7 @@
           <a:bodyPr wrap="square" lIns="0" tIns="0" rIns="0" bIns="0" rtlCol="0" anchor="t"/>
           <a:lstStyle/>
           <a:p>
-            <a:pPr marL="0" indent="0">
+            <a:pPr indent="0" marL="0">
               <a:lnSpc>
                 <a:spcPct val="100000"/>
               </a:lnSpc>
@@ -15281,7 +14975,7 @@
           <a:bodyPr wrap="square" lIns="0" tIns="0" rIns="0" bIns="0" rtlCol="0" anchor="ctr"/>
           <a:lstStyle/>
           <a:p>
-            <a:pPr marL="0" indent="0" algn="ctr">
+            <a:pPr algn="ctr" indent="0" marL="0">
               <a:buNone/>
             </a:pPr>
             <a:r>
@@ -15325,13 +15019,6 @@
             <a:prstDash val="solid"/>
           </a:ln>
         </p:spPr>
-        <p:txBody>
-          <a:bodyPr/>
-          <a:lstStyle/>
-          <a:p>
-            <a:endParaRPr lang="pt-BR"/>
-          </a:p>
-        </p:txBody>
       </p:sp>
       <p:sp>
         <p:nvSpPr>
@@ -15357,13 +15044,6 @@
             <a:prstDash val="solid"/>
           </a:ln>
         </p:spPr>
-        <p:txBody>
-          <a:bodyPr/>
-          <a:lstStyle/>
-          <a:p>
-            <a:endParaRPr lang="pt-BR"/>
-          </a:p>
-        </p:txBody>
       </p:sp>
       <p:sp>
         <p:nvSpPr>
@@ -15386,7 +15066,7 @@
           <a:bodyPr wrap="square" lIns="0" tIns="0" rIns="0" bIns="0" rtlCol="0" anchor="ctr"/>
           <a:lstStyle/>
           <a:p>
-            <a:pPr marL="0" indent="0" algn="ctr">
+            <a:pPr algn="ctr" indent="0" marL="0">
               <a:buNone/>
             </a:pPr>
             <a:r>
@@ -15425,7 +15105,7 @@
           <a:bodyPr wrap="square" lIns="0" tIns="0" rIns="0" bIns="0" rtlCol="0" anchor="t"/>
           <a:lstStyle/>
           <a:p>
-            <a:pPr marL="0" indent="0">
+            <a:pPr indent="0" marL="0">
               <a:buNone/>
             </a:pPr>
             <a:r>
@@ -15464,7 +15144,7 @@
           <a:bodyPr wrap="square" lIns="0" tIns="0" rIns="0" bIns="0" rtlCol="0" anchor="t"/>
           <a:lstStyle/>
           <a:p>
-            <a:pPr marL="0" indent="0">
+            <a:pPr indent="0" marL="0">
               <a:lnSpc>
                 <a:spcPct val="100000"/>
               </a:lnSpc>
@@ -15506,7 +15186,7 @@
           <a:bodyPr wrap="square" lIns="0" tIns="0" rIns="0" bIns="0" rtlCol="0" anchor="ctr"/>
           <a:lstStyle/>
           <a:p>
-            <a:pPr marL="0" indent="0" algn="ctr">
+            <a:pPr algn="ctr" indent="0" marL="0">
               <a:buNone/>
             </a:pPr>
             <a:r>
@@ -15550,13 +15230,6 @@
             <a:prstDash val="solid"/>
           </a:ln>
         </p:spPr>
-        <p:txBody>
-          <a:bodyPr/>
-          <a:lstStyle/>
-          <a:p>
-            <a:endParaRPr lang="pt-BR"/>
-          </a:p>
-        </p:txBody>
       </p:sp>
       <p:sp>
         <p:nvSpPr>
@@ -15582,13 +15255,6 @@
             <a:prstDash val="solid"/>
           </a:ln>
         </p:spPr>
-        <p:txBody>
-          <a:bodyPr/>
-          <a:lstStyle/>
-          <a:p>
-            <a:endParaRPr lang="pt-BR"/>
-          </a:p>
-        </p:txBody>
       </p:sp>
       <p:sp>
         <p:nvSpPr>
@@ -15611,7 +15277,7 @@
           <a:bodyPr wrap="square" lIns="0" tIns="0" rIns="0" bIns="0" rtlCol="0" anchor="ctr"/>
           <a:lstStyle/>
           <a:p>
-            <a:pPr marL="0" indent="0" algn="ctr">
+            <a:pPr algn="ctr" indent="0" marL="0">
               <a:buNone/>
             </a:pPr>
             <a:r>
@@ -15650,7 +15316,7 @@
           <a:bodyPr wrap="square" lIns="0" tIns="0" rIns="0" bIns="0" rtlCol="0" anchor="t"/>
           <a:lstStyle/>
           <a:p>
-            <a:pPr marL="0" indent="0">
+            <a:pPr indent="0" marL="0">
               <a:buNone/>
             </a:pPr>
             <a:r>
@@ -15689,7 +15355,7 @@
           <a:bodyPr wrap="square" lIns="0" tIns="0" rIns="0" bIns="0" rtlCol="0" anchor="t"/>
           <a:lstStyle/>
           <a:p>
-            <a:pPr marL="0" indent="0">
+            <a:pPr indent="0" marL="0">
               <a:lnSpc>
                 <a:spcPct val="100000"/>
               </a:lnSpc>
@@ -15731,7 +15397,7 @@
           <a:bodyPr wrap="square" lIns="0" tIns="0" rIns="0" bIns="0" rtlCol="0" anchor="ctr"/>
           <a:lstStyle/>
           <a:p>
-            <a:pPr marL="0" indent="0" algn="ctr">
+            <a:pPr algn="ctr" indent="0" marL="0">
               <a:buNone/>
             </a:pPr>
             <a:r>
@@ -15775,13 +15441,6 @@
             <a:prstDash val="solid"/>
           </a:ln>
         </p:spPr>
-        <p:txBody>
-          <a:bodyPr/>
-          <a:lstStyle/>
-          <a:p>
-            <a:endParaRPr lang="pt-BR"/>
-          </a:p>
-        </p:txBody>
       </p:sp>
       <p:sp>
         <p:nvSpPr>
@@ -15807,13 +15466,6 @@
             <a:prstDash val="solid"/>
           </a:ln>
         </p:spPr>
-        <p:txBody>
-          <a:bodyPr/>
-          <a:lstStyle/>
-          <a:p>
-            <a:endParaRPr lang="pt-BR"/>
-          </a:p>
-        </p:txBody>
       </p:sp>
       <p:sp>
         <p:nvSpPr>
@@ -15836,7 +15488,7 @@
           <a:bodyPr wrap="square" lIns="0" tIns="0" rIns="0" bIns="0" rtlCol="0" anchor="ctr"/>
           <a:lstStyle/>
           <a:p>
-            <a:pPr marL="0" indent="0" algn="ctr">
+            <a:pPr algn="ctr" indent="0" marL="0">
               <a:buNone/>
             </a:pPr>
             <a:r>
@@ -15875,7 +15527,7 @@
           <a:bodyPr wrap="square" lIns="0" tIns="0" rIns="0" bIns="0" rtlCol="0" anchor="t"/>
           <a:lstStyle/>
           <a:p>
-            <a:pPr marL="0" indent="0">
+            <a:pPr indent="0" marL="0">
               <a:buNone/>
             </a:pPr>
             <a:r>
@@ -15914,7 +15566,7 @@
           <a:bodyPr wrap="square" lIns="0" tIns="0" rIns="0" bIns="0" rtlCol="0" anchor="t"/>
           <a:lstStyle/>
           <a:p>
-            <a:pPr marL="0" indent="0">
+            <a:pPr indent="0" marL="0">
               <a:lnSpc>
                 <a:spcPct val="100000"/>
               </a:lnSpc>
@@ -15961,13 +15613,6 @@
             <a:prstDash val="solid"/>
           </a:ln>
         </p:spPr>
-        <p:txBody>
-          <a:bodyPr/>
-          <a:lstStyle/>
-          <a:p>
-            <a:endParaRPr lang="pt-BR"/>
-          </a:p>
-        </p:txBody>
       </p:sp>
       <p:sp>
         <p:nvSpPr>
@@ -15990,11 +15635,11 @@
           <a:bodyPr wrap="square" lIns="0" tIns="0" rIns="0" bIns="0" rtlCol="0" anchor="ctr"/>
           <a:lstStyle/>
           <a:p>
-            <a:pPr marL="0" indent="0">
-              <a:buNone/>
-            </a:pPr>
-            <a:r>
-              <a:rPr lang="en-US" sz="1000" b="1" kern="0" spc="120" dirty="0">
+            <a:pPr indent="0" marL="0">
+              <a:buNone/>
+            </a:pPr>
+            <a:r>
+              <a:rPr lang="en-US" sz="1000" b="1" spc="120" kern="0" dirty="0">
                 <a:solidFill>
                   <a:srgbClr val="A8321F"/>
                 </a:solidFill>
@@ -16029,7 +15674,7 @@
           <a:bodyPr wrap="square" lIns="0" tIns="0" rIns="0" bIns="0" rtlCol="0" anchor="t"/>
           <a:lstStyle/>
           <a:p>
-            <a:pPr marL="0" indent="0">
+            <a:pPr indent="0" marL="0">
               <a:buNone/>
             </a:pPr>
             <a:r>
@@ -16073,13 +15718,6 @@
             <a:prstDash val="solid"/>
           </a:ln>
         </p:spPr>
-        <p:txBody>
-          <a:bodyPr/>
-          <a:lstStyle/>
-          <a:p>
-            <a:endParaRPr lang="pt-BR"/>
-          </a:p>
-        </p:txBody>
       </p:sp>
       <p:sp>
         <p:nvSpPr>
@@ -16102,11 +15740,11 @@
           <a:bodyPr wrap="square" lIns="0" tIns="0" rIns="0" bIns="0" rtlCol="0" anchor="ctr"/>
           <a:lstStyle/>
           <a:p>
-            <a:pPr marL="0" indent="0">
-              <a:buNone/>
-            </a:pPr>
-            <a:r>
-              <a:rPr lang="en-US" sz="1000" b="1" kern="0" spc="120" dirty="0">
+            <a:pPr indent="0" marL="0">
+              <a:buNone/>
+            </a:pPr>
+            <a:r>
+              <a:rPr lang="en-US" sz="1000" b="1" spc="120" kern="0" dirty="0">
                 <a:solidFill>
                   <a:srgbClr val="2F6B45"/>
                 </a:solidFill>
@@ -16141,7 +15779,7 @@
           <a:bodyPr wrap="square" lIns="0" tIns="0" rIns="0" bIns="0" rtlCol="0" anchor="t"/>
           <a:lstStyle/>
           <a:p>
-            <a:pPr marL="0" indent="0">
+            <a:pPr indent="0" marL="0">
               <a:buNone/>
             </a:pPr>
             <a:r>
@@ -16180,7 +15818,7 @@
           <a:bodyPr wrap="square" lIns="0" tIns="0" rIns="0" bIns="0" rtlCol="0" anchor="t"/>
           <a:lstStyle/>
           <a:p>
-            <a:pPr marL="0" indent="0">
+            <a:pPr indent="0" marL="0">
               <a:buNone/>
             </a:pPr>
             <a:r>
@@ -16219,7 +15857,7 @@
           <a:bodyPr wrap="square" lIns="0" tIns="0" rIns="0" bIns="0" rtlCol="0" anchor="t"/>
           <a:lstStyle/>
           <a:p>
-            <a:pPr marL="0" indent="0" algn="r">
+            <a:pPr algn="r" indent="0" marL="0">
               <a:buNone/>
             </a:pPr>
             <a:r>
@@ -16253,7 +15891,6 @@
         <a:solidFill>
           <a:srgbClr val="FAF9F7"/>
         </a:solidFill>
-        <a:effectLst/>
       </p:bgPr>
     </p:bg>
     <p:spTree>
@@ -16291,7 +15928,7 @@
           <a:bodyPr wrap="square" lIns="0" tIns="0" rIns="0" bIns="0" rtlCol="0" anchor="ctr"/>
           <a:lstStyle/>
           <a:p>
-            <a:pPr marL="0" indent="0">
+            <a:pPr indent="0" marL="0">
               <a:buNone/>
             </a:pPr>
             <a:r>
@@ -16330,7 +15967,7 @@
           <a:bodyPr wrap="square" lIns="0" tIns="0" rIns="0" bIns="0" rtlCol="0" anchor="t"/>
           <a:lstStyle/>
           <a:p>
-            <a:pPr marL="0" indent="0">
+            <a:pPr indent="0" marL="0">
               <a:buNone/>
             </a:pPr>
             <a:r>
@@ -16372,13 +16009,6 @@
             <a:prstDash val="solid"/>
           </a:ln>
         </p:spPr>
-        <p:txBody>
-          <a:bodyPr/>
-          <a:lstStyle/>
-          <a:p>
-            <a:endParaRPr lang="pt-BR"/>
-          </a:p>
-        </p:txBody>
       </p:sp>
       <p:sp>
         <p:nvSpPr>
@@ -16401,7 +16031,7 @@
           <a:bodyPr wrap="square" lIns="0" tIns="0" rIns="0" bIns="0" rtlCol="0" anchor="ctr"/>
           <a:lstStyle/>
           <a:p>
-            <a:pPr marL="0" indent="0" algn="ctr">
+            <a:pPr algn="ctr" indent="0" marL="0">
               <a:buNone/>
             </a:pPr>
             <a:r>
@@ -16440,7 +16070,7 @@
           <a:bodyPr wrap="square" lIns="0" tIns="0" rIns="0" bIns="0" rtlCol="0" anchor="t"/>
           <a:lstStyle/>
           <a:p>
-            <a:pPr marL="0" indent="0">
+            <a:pPr indent="0" marL="0">
               <a:lnSpc>
                 <a:spcPct val="100000"/>
               </a:lnSpc>
@@ -16457,6 +16087,12 @@
               </a:rPr>
               <a:t>A Ana confere o carrinho</a:t>
             </a:r>
+            <a:pPr indent="0" marL="0">
+              <a:lnSpc>
+                <a:spcPct val="100000"/>
+              </a:lnSpc>
+              <a:buNone/>
+            </a:pPr>
             <a:r>
               <a:rPr lang="en-US" sz="1250" dirty="0">
                 <a:solidFill>
@@ -16496,13 +16132,6 @@
             <a:prstDash val="solid"/>
           </a:ln>
         </p:spPr>
-        <p:txBody>
-          <a:bodyPr/>
-          <a:lstStyle/>
-          <a:p>
-            <a:endParaRPr lang="pt-BR"/>
-          </a:p>
-        </p:txBody>
       </p:sp>
       <p:sp>
         <p:nvSpPr>
@@ -16525,7 +16154,7 @@
           <a:bodyPr wrap="square" lIns="0" tIns="0" rIns="0" bIns="0" rtlCol="0" anchor="ctr"/>
           <a:lstStyle/>
           <a:p>
-            <a:pPr marL="0" indent="0" algn="ctr">
+            <a:pPr algn="ctr" indent="0" marL="0">
               <a:buNone/>
             </a:pPr>
             <a:r>
@@ -16564,7 +16193,7 @@
           <a:bodyPr wrap="square" lIns="0" tIns="0" rIns="0" bIns="0" rtlCol="0" anchor="t"/>
           <a:lstStyle/>
           <a:p>
-            <a:pPr marL="0" indent="0">
+            <a:pPr indent="0" marL="0">
               <a:lnSpc>
                 <a:spcPct val="100000"/>
               </a:lnSpc>
@@ -16581,6 +16210,12 @@
               </a:rPr>
               <a:t>Outra compra chega antes</a:t>
             </a:r>
+            <a:pPr indent="0" marL="0">
+              <a:lnSpc>
+                <a:spcPct val="100000"/>
+              </a:lnSpc>
+              <a:buNone/>
+            </a:pPr>
             <a:r>
               <a:rPr lang="en-US" sz="1250" dirty="0">
                 <a:solidFill>
@@ -16620,13 +16255,6 @@
             <a:prstDash val="solid"/>
           </a:ln>
         </p:spPr>
-        <p:txBody>
-          <a:bodyPr/>
-          <a:lstStyle/>
-          <a:p>
-            <a:endParaRPr lang="pt-BR"/>
-          </a:p>
-        </p:txBody>
       </p:sp>
       <p:sp>
         <p:nvSpPr>
@@ -16649,7 +16277,7 @@
           <a:bodyPr wrap="square" lIns="0" tIns="0" rIns="0" bIns="0" rtlCol="0" anchor="ctr"/>
           <a:lstStyle/>
           <a:p>
-            <a:pPr marL="0" indent="0" algn="ctr">
+            <a:pPr algn="ctr" indent="0" marL="0">
               <a:buNone/>
             </a:pPr>
             <a:r>
@@ -16688,7 +16316,7 @@
           <a:bodyPr wrap="square" lIns="0" tIns="0" rIns="0" bIns="0" rtlCol="0" anchor="t"/>
           <a:lstStyle/>
           <a:p>
-            <a:pPr marL="0" indent="0">
+            <a:pPr indent="0" marL="0">
               <a:lnSpc>
                 <a:spcPct val="100000"/>
               </a:lnSpc>
@@ -16705,6 +16333,12 @@
               </a:rPr>
               <a:t>A Ana reserva com a versão velha</a:t>
             </a:r>
+            <a:pPr indent="0" marL="0">
+              <a:lnSpc>
+                <a:spcPct val="100000"/>
+              </a:lnSpc>
+              <a:buNone/>
+            </a:pPr>
             <a:r>
               <a:rPr lang="en-US" sz="1250" dirty="0">
                 <a:solidFill>
@@ -16744,13 +16378,6 @@
             <a:prstDash val="solid"/>
           </a:ln>
         </p:spPr>
-        <p:txBody>
-          <a:bodyPr/>
-          <a:lstStyle/>
-          <a:p>
-            <a:endParaRPr lang="pt-BR"/>
-          </a:p>
-        </p:txBody>
       </p:sp>
       <p:sp>
         <p:nvSpPr>
@@ -16773,7 +16400,7 @@
           <a:bodyPr wrap="square" lIns="0" tIns="0" rIns="0" bIns="0" rtlCol="0" anchor="ctr"/>
           <a:lstStyle/>
           <a:p>
-            <a:pPr marL="0" indent="0" algn="ctr">
+            <a:pPr algn="ctr" indent="0" marL="0">
               <a:buNone/>
             </a:pPr>
             <a:r>
@@ -16812,7 +16439,7 @@
           <a:bodyPr wrap="square" lIns="0" tIns="0" rIns="0" bIns="0" rtlCol="0" anchor="t"/>
           <a:lstStyle/>
           <a:p>
-            <a:pPr marL="0" indent="0">
+            <a:pPr indent="0" marL="0">
               <a:lnSpc>
                 <a:spcPct val="100000"/>
               </a:lnSpc>
@@ -16829,6 +16456,12 @@
               </a:rPr>
               <a:t>A loja relê o Geisha</a:t>
             </a:r>
+            <a:pPr indent="0" marL="0">
+              <a:lnSpc>
+                <a:spcPct val="100000"/>
+              </a:lnSpc>
+              <a:buNone/>
+            </a:pPr>
             <a:r>
               <a:rPr lang="en-US" sz="1250" dirty="0">
                 <a:solidFill>
@@ -16868,13 +16501,6 @@
             <a:prstDash val="solid"/>
           </a:ln>
         </p:spPr>
-        <p:txBody>
-          <a:bodyPr/>
-          <a:lstStyle/>
-          <a:p>
-            <a:endParaRPr lang="pt-BR"/>
-          </a:p>
-        </p:txBody>
       </p:sp>
       <p:sp>
         <p:nvSpPr>
@@ -16897,7 +16523,7 @@
           <a:bodyPr wrap="square" lIns="0" tIns="0" rIns="0" bIns="0" rtlCol="0" anchor="ctr"/>
           <a:lstStyle/>
           <a:p>
-            <a:pPr marL="0" indent="0" algn="ctr">
+            <a:pPr algn="ctr" indent="0" marL="0">
               <a:buNone/>
             </a:pPr>
             <a:r>
@@ -16936,7 +16562,7 @@
           <a:bodyPr wrap="square" lIns="0" tIns="0" rIns="0" bIns="0" rtlCol="0" anchor="t"/>
           <a:lstStyle/>
           <a:p>
-            <a:pPr marL="0" indent="0">
+            <a:pPr indent="0" marL="0">
               <a:lnSpc>
                 <a:spcPct val="100000"/>
               </a:lnSpc>
@@ -16953,6 +16579,12 @@
               </a:rPr>
               <a:t>Estorno</a:t>
             </a:r>
+            <a:pPr indent="0" marL="0">
+              <a:lnSpc>
+                <a:spcPct val="100000"/>
+              </a:lnSpc>
+              <a:buNone/>
+            </a:pPr>
             <a:r>
               <a:rPr lang="en-US" sz="1250" dirty="0">
                 <a:solidFill>
@@ -16992,13 +16624,6 @@
             <a:prstDash val="solid"/>
           </a:ln>
         </p:spPr>
-        <p:txBody>
-          <a:bodyPr/>
-          <a:lstStyle/>
-          <a:p>
-            <a:endParaRPr lang="pt-BR"/>
-          </a:p>
-        </p:txBody>
       </p:sp>
       <p:sp>
         <p:nvSpPr>
@@ -17021,7 +16646,7 @@
           <a:bodyPr wrap="square" lIns="0" tIns="0" rIns="0" bIns="0" rtlCol="0" anchor="ctr"/>
           <a:lstStyle/>
           <a:p>
-            <a:pPr marL="0" indent="0" algn="ctr">
+            <a:pPr algn="ctr" indent="0" marL="0">
               <a:buNone/>
             </a:pPr>
             <a:r>
@@ -17060,7 +16685,7 @@
           <a:bodyPr wrap="square" lIns="0" tIns="0" rIns="0" bIns="0" rtlCol="0" anchor="t"/>
           <a:lstStyle/>
           <a:p>
-            <a:pPr marL="0" indent="0">
+            <a:pPr indent="0" marL="0">
               <a:lnSpc>
                 <a:spcPct val="100000"/>
               </a:lnSpc>
@@ -17077,6 +16702,12 @@
               </a:rPr>
               <a:t>A Ana vê a mensagem</a:t>
             </a:r>
+            <a:pPr indent="0" marL="0">
+              <a:lnSpc>
+                <a:spcPct val="100000"/>
+              </a:lnSpc>
+              <a:buNone/>
+            </a:pPr>
             <a:r>
               <a:rPr lang="en-US" sz="1250" dirty="0">
                 <a:solidFill>
@@ -17118,13 +16749,6 @@
             <a:prstDash val="solid"/>
           </a:ln>
         </p:spPr>
-        <p:txBody>
-          <a:bodyPr/>
-          <a:lstStyle/>
-          <a:p>
-            <a:endParaRPr lang="pt-BR"/>
-          </a:p>
-        </p:txBody>
       </p:sp>
       <p:sp>
         <p:nvSpPr>
@@ -17147,11 +16771,11 @@
           <a:bodyPr wrap="square" lIns="0" tIns="0" rIns="0" bIns="0" rtlCol="0" anchor="ctr"/>
           <a:lstStyle/>
           <a:p>
-            <a:pPr marL="0" indent="0">
-              <a:buNone/>
-            </a:pPr>
-            <a:r>
-              <a:rPr lang="en-US" sz="1000" b="1" kern="0" spc="120" dirty="0">
+            <a:pPr indent="0" marL="0">
+              <a:buNone/>
+            </a:pPr>
+            <a:r>
+              <a:rPr lang="en-US" sz="1000" b="1" spc="120" kern="0" dirty="0">
                 <a:solidFill>
                   <a:srgbClr val="2F6B45"/>
                 </a:solidFill>
@@ -17186,7 +16810,7 @@
           <a:bodyPr wrap="square" lIns="0" tIns="0" rIns="0" bIns="0" rtlCol="0" anchor="t"/>
           <a:lstStyle/>
           <a:p>
-            <a:pPr marL="0" indent="0">
+            <a:pPr indent="0" marL="0">
               <a:lnSpc>
                 <a:spcPct val="105000"/>
               </a:lnSpc>
@@ -17228,7 +16852,7 @@
           <a:bodyPr wrap="square" lIns="0" tIns="0" rIns="0" bIns="0" rtlCol="0" anchor="t"/>
           <a:lstStyle/>
           <a:p>
-            <a:pPr marL="0" indent="0">
+            <a:pPr indent="0" marL="0">
               <a:buNone/>
             </a:pPr>
             <a:r>
@@ -17272,13 +16896,6 @@
             <a:prstDash val="solid"/>
           </a:ln>
         </p:spPr>
-        <p:txBody>
-          <a:bodyPr/>
-          <a:lstStyle/>
-          <a:p>
-            <a:endParaRPr lang="pt-BR"/>
-          </a:p>
-        </p:txBody>
       </p:sp>
       <p:sp>
         <p:nvSpPr>
@@ -17301,11 +16918,11 @@
           <a:bodyPr wrap="square" lIns="0" tIns="0" rIns="0" bIns="0" rtlCol="0" anchor="ctr"/>
           <a:lstStyle/>
           <a:p>
-            <a:pPr marL="0" indent="0">
-              <a:buNone/>
-            </a:pPr>
-            <a:r>
-              <a:rPr lang="en-US" sz="1000" b="1" kern="0" spc="120" dirty="0">
+            <a:pPr indent="0" marL="0">
+              <a:buNone/>
+            </a:pPr>
+            <a:r>
+              <a:rPr lang="en-US" sz="1000" b="1" spc="120" kern="0" dirty="0">
                 <a:solidFill>
                   <a:srgbClr val="2F6B45"/>
                 </a:solidFill>
@@ -17340,7 +16957,7 @@
           <a:bodyPr wrap="square" lIns="0" tIns="0" rIns="0" bIns="0" rtlCol="0" anchor="t"/>
           <a:lstStyle/>
           <a:p>
-            <a:pPr marL="0" indent="0">
+            <a:pPr indent="0" marL="0">
               <a:lnSpc>
                 <a:spcPct val="105000"/>
               </a:lnSpc>
@@ -17382,7 +16999,7 @@
           <a:bodyPr wrap="square" lIns="0" tIns="0" rIns="0" bIns="0" rtlCol="0" anchor="t"/>
           <a:lstStyle/>
           <a:p>
-            <a:pPr marL="0" indent="0">
+            <a:pPr indent="0" marL="0">
               <a:buNone/>
             </a:pPr>
             <a:r>
@@ -17421,7 +17038,7 @@
           <a:bodyPr wrap="square" lIns="0" tIns="0" rIns="0" bIns="0" rtlCol="0" anchor="t"/>
           <a:lstStyle/>
           <a:p>
-            <a:pPr marL="0" indent="0" algn="r">
+            <a:pPr algn="r" indent="0" marL="0">
               <a:buNone/>
             </a:pPr>
             <a:r>
@@ -17740,319 +17357,4 @@
     </a:ext>
   </a:extLst>
 </a:theme>
-</file>
-
-<file path=ppt/theme/theme2.xml><?xml version="1.0" encoding="utf-8"?>
-<a:theme xmlns:a="http://schemas.openxmlformats.org/drawingml/2006/main" name="Tema do Office">
-  <a:themeElements>
-    <a:clrScheme name="Office">
-      <a:dk1>
-        <a:sysClr val="windowText" lastClr="000000"/>
-      </a:dk1>
-      <a:lt1>
-        <a:sysClr val="window" lastClr="FFFFFF"/>
-      </a:lt1>
-      <a:dk2>
-        <a:srgbClr val="0E2841"/>
-      </a:dk2>
-      <a:lt2>
-        <a:srgbClr val="E8E8E8"/>
-      </a:lt2>
-      <a:accent1>
-        <a:srgbClr val="156082"/>
-      </a:accent1>
-      <a:accent2>
-        <a:srgbClr val="E97132"/>
-      </a:accent2>
-      <a:accent3>
-        <a:srgbClr val="196B24"/>
-      </a:accent3>
-      <a:accent4>
-        <a:srgbClr val="0F9ED5"/>
-      </a:accent4>
-      <a:accent5>
-        <a:srgbClr val="A02B93"/>
-      </a:accent5>
-      <a:accent6>
-        <a:srgbClr val="4EA72E"/>
-      </a:accent6>
-      <a:hlink>
-        <a:srgbClr val="467886"/>
-      </a:hlink>
-      <a:folHlink>
-        <a:srgbClr val="96607D"/>
-      </a:folHlink>
-    </a:clrScheme>
-    <a:fontScheme name="Office">
-      <a:majorFont>
-        <a:latin typeface="Aptos Display" panose="02110004020202020204"/>
-        <a:ea typeface=""/>
-        <a:cs typeface=""/>
-        <a:font script="Jpan" typeface="游ゴシック Light"/>
-        <a:font script="Hang" typeface="맑은 고딕"/>
-        <a:font script="Hans" typeface="等线 Light"/>
-        <a:font script="Hant" typeface="新細明體"/>
-        <a:font script="Arab" typeface="Times New Roman"/>
-        <a:font script="Hebr" typeface="Times New Roman"/>
-        <a:font script="Thai" typeface="Angsana New"/>
-        <a:font script="Ethi" typeface="Nyala"/>
-        <a:font script="Beng" typeface="Vrinda"/>
-        <a:font script="Gujr" typeface="Shruti"/>
-        <a:font script="Khmr" typeface="MoolBoran"/>
-        <a:font script="Knda" typeface="Tunga"/>
-        <a:font script="Guru" typeface="Raavi"/>
-        <a:font script="Cans" typeface="Euphemia"/>
-        <a:font script="Cher" typeface="Plantagenet Cherokee"/>
-        <a:font script="Yiii" typeface="Microsoft Yi Baiti"/>
-        <a:font script="Tibt" typeface="Microsoft Himalaya"/>
-        <a:font script="Thaa" typeface="MV Boli"/>
-        <a:font script="Deva" typeface="Mangal"/>
-        <a:font script="Telu" typeface="Gautami"/>
-        <a:font script="Taml" typeface="Latha"/>
-        <a:font script="Syrc" typeface="Estrangelo Edessa"/>
-        <a:font script="Orya" typeface="Kalinga"/>
-        <a:font script="Mlym" typeface="Kartika"/>
-        <a:font script="Laoo" typeface="DokChampa"/>
-        <a:font script="Sinh" typeface="Iskoola Pota"/>
-        <a:font script="Mong" typeface="Mongolian Baiti"/>
-        <a:font script="Viet" typeface="Times New Roman"/>
-        <a:font script="Uigh" typeface="Microsoft Uighur"/>
-        <a:font script="Geor" typeface="Sylfaen"/>
-        <a:font script="Armn" typeface="Arial"/>
-        <a:font script="Bugi" typeface="Leelawadee UI"/>
-        <a:font script="Bopo" typeface="Microsoft JhengHei"/>
-        <a:font script="Java" typeface="Javanese Text"/>
-        <a:font script="Lisu" typeface="Segoe UI"/>
-        <a:font script="Mymr" typeface="Myanmar Text"/>
-        <a:font script="Nkoo" typeface="Ebrima"/>
-        <a:font script="Olck" typeface="Nirmala UI"/>
-        <a:font script="Osma" typeface="Ebrima"/>
-        <a:font script="Phag" typeface="Phagspa"/>
-        <a:font script="Syrn" typeface="Estrangelo Edessa"/>
-        <a:font script="Syrj" typeface="Estrangelo Edessa"/>
-        <a:font script="Syre" typeface="Estrangelo Edessa"/>
-        <a:font script="Sora" typeface="Nirmala UI"/>
-        <a:font script="Tale" typeface="Microsoft Tai Le"/>
-        <a:font script="Talu" typeface="Microsoft New Tai Lue"/>
-        <a:font script="Tfng" typeface="Ebrima"/>
-      </a:majorFont>
-      <a:minorFont>
-        <a:latin typeface="Aptos" panose="02110004020202020204"/>
-        <a:ea typeface=""/>
-        <a:cs typeface=""/>
-        <a:font script="Jpan" typeface="游ゴシック"/>
-        <a:font script="Hang" typeface="맑은 고딕"/>
-        <a:font script="Hans" typeface="等线"/>
-        <a:font script="Hant" typeface="新細明體"/>
-        <a:font script="Arab" typeface="Arial"/>
-        <a:font script="Hebr" typeface="Arial"/>
-        <a:font script="Thai" typeface="Cordia New"/>
-        <a:font script="Ethi" typeface="Nyala"/>
-        <a:font script="Beng" typeface="Vrinda"/>
-        <a:font script="Gujr" typeface="Shruti"/>
-        <a:font script="Khmr" typeface="DaunPenh"/>
-        <a:font script="Knda" typeface="Tunga"/>
-        <a:font script="Guru" typeface="Raavi"/>
-        <a:font script="Cans" typeface="Euphemia"/>
-        <a:font script="Cher" typeface="Plantagenet Cherokee"/>
-        <a:font script="Yiii" typeface="Microsoft Yi Baiti"/>
-        <a:font script="Tibt" typeface="Microsoft Himalaya"/>
-        <a:font script="Thaa" typeface="MV Boli"/>
-        <a:font script="Deva" typeface="Mangal"/>
-        <a:font script="Telu" typeface="Gautami"/>
-        <a:font script="Taml" typeface="Latha"/>
-        <a:font script="Syrc" typeface="Estrangelo Edessa"/>
-        <a:font script="Orya" typeface="Kalinga"/>
-        <a:font script="Mlym" typeface="Kartika"/>
-        <a:font script="Laoo" typeface="DokChampa"/>
-        <a:font script="Sinh" typeface="Iskoola Pota"/>
-        <a:font script="Mong" typeface="Mongolian Baiti"/>
-        <a:font script="Viet" typeface="Arial"/>
-        <a:font script="Uigh" typeface="Microsoft Uighur"/>
-        <a:font script="Geor" typeface="Sylfaen"/>
-        <a:font script="Armn" typeface="Arial"/>
-        <a:font script="Bugi" typeface="Leelawadee UI"/>
-        <a:font script="Bopo" typeface="Microsoft JhengHei"/>
-        <a:font script="Java" typeface="Javanese Text"/>
-        <a:font script="Lisu" typeface="Segoe UI"/>
-        <a:font script="Mymr" typeface="Myanmar Text"/>
-        <a:font script="Nkoo" typeface="Ebrima"/>
-        <a:font script="Olck" typeface="Nirmala UI"/>
-        <a:font script="Osma" typeface="Ebrima"/>
-        <a:font script="Phag" typeface="Phagspa"/>
-        <a:font script="Syrn" typeface="Estrangelo Edessa"/>
-        <a:font script="Syrj" typeface="Estrangelo Edessa"/>
-        <a:font script="Syre" typeface="Estrangelo Edessa"/>
-        <a:font script="Sora" typeface="Nirmala UI"/>
-        <a:font script="Tale" typeface="Microsoft Tai Le"/>
-        <a:font script="Talu" typeface="Microsoft New Tai Lue"/>
-        <a:font script="Tfng" typeface="Ebrima"/>
-      </a:minorFont>
-    </a:fontScheme>
-    <a:fmtScheme name="Office">
-      <a:fillStyleLst>
-        <a:solidFill>
-          <a:schemeClr val="phClr"/>
-        </a:solidFill>
-        <a:gradFill rotWithShape="1">
-          <a:gsLst>
-            <a:gs pos="0">
-              <a:schemeClr val="phClr">
-                <a:lumMod val="110000"/>
-                <a:satMod val="105000"/>
-                <a:tint val="67000"/>
-              </a:schemeClr>
-            </a:gs>
-            <a:gs pos="50000">
-              <a:schemeClr val="phClr">
-                <a:lumMod val="105000"/>
-                <a:satMod val="103000"/>
-                <a:tint val="73000"/>
-              </a:schemeClr>
-            </a:gs>
-            <a:gs pos="100000">
-              <a:schemeClr val="phClr">
-                <a:lumMod val="105000"/>
-                <a:satMod val="109000"/>
-                <a:tint val="81000"/>
-              </a:schemeClr>
-            </a:gs>
-          </a:gsLst>
-          <a:lin ang="5400000" scaled="0"/>
-        </a:gradFill>
-        <a:gradFill rotWithShape="1">
-          <a:gsLst>
-            <a:gs pos="0">
-              <a:schemeClr val="phClr">
-                <a:satMod val="103000"/>
-                <a:lumMod val="102000"/>
-                <a:tint val="94000"/>
-              </a:schemeClr>
-            </a:gs>
-            <a:gs pos="50000">
-              <a:schemeClr val="phClr">
-                <a:satMod val="110000"/>
-                <a:lumMod val="100000"/>
-                <a:shade val="100000"/>
-              </a:schemeClr>
-            </a:gs>
-            <a:gs pos="100000">
-              <a:schemeClr val="phClr">
-                <a:lumMod val="99000"/>
-                <a:satMod val="120000"/>
-                <a:shade val="78000"/>
-              </a:schemeClr>
-            </a:gs>
-          </a:gsLst>
-          <a:lin ang="5400000" scaled="0"/>
-        </a:gradFill>
-      </a:fillStyleLst>
-      <a:lnStyleLst>
-        <a:ln w="12700" cap="flat" cmpd="sng" algn="ctr">
-          <a:solidFill>
-            <a:schemeClr val="phClr"/>
-          </a:solidFill>
-          <a:prstDash val="solid"/>
-          <a:miter lim="800000"/>
-        </a:ln>
-        <a:ln w="19050" cap="flat" cmpd="sng" algn="ctr">
-          <a:solidFill>
-            <a:schemeClr val="phClr"/>
-          </a:solidFill>
-          <a:prstDash val="solid"/>
-          <a:miter lim="800000"/>
-        </a:ln>
-        <a:ln w="25400" cap="flat" cmpd="sng" algn="ctr">
-          <a:solidFill>
-            <a:schemeClr val="phClr"/>
-          </a:solidFill>
-          <a:prstDash val="solid"/>
-          <a:miter lim="800000"/>
-        </a:ln>
-      </a:lnStyleLst>
-      <a:effectStyleLst>
-        <a:effectStyle>
-          <a:effectLst/>
-        </a:effectStyle>
-        <a:effectStyle>
-          <a:effectLst/>
-        </a:effectStyle>
-        <a:effectStyle>
-          <a:effectLst>
-            <a:outerShdw blurRad="57150" dist="19050" dir="5400000" algn="ctr" rotWithShape="0">
-              <a:srgbClr val="000000">
-                <a:alpha val="63000"/>
-              </a:srgbClr>
-            </a:outerShdw>
-          </a:effectLst>
-        </a:effectStyle>
-      </a:effectStyleLst>
-      <a:bgFillStyleLst>
-        <a:solidFill>
-          <a:schemeClr val="phClr"/>
-        </a:solidFill>
-        <a:solidFill>
-          <a:schemeClr val="phClr">
-            <a:tint val="95000"/>
-            <a:satMod val="170000"/>
-          </a:schemeClr>
-        </a:solidFill>
-        <a:gradFill rotWithShape="1">
-          <a:gsLst>
-            <a:gs pos="0">
-              <a:schemeClr val="phClr">
-                <a:tint val="93000"/>
-                <a:satMod val="150000"/>
-                <a:shade val="98000"/>
-                <a:lumMod val="102000"/>
-              </a:schemeClr>
-            </a:gs>
-            <a:gs pos="50000">
-              <a:schemeClr val="phClr">
-                <a:tint val="98000"/>
-                <a:satMod val="130000"/>
-                <a:shade val="90000"/>
-                <a:lumMod val="103000"/>
-              </a:schemeClr>
-            </a:gs>
-            <a:gs pos="100000">
-              <a:schemeClr val="phClr">
-                <a:shade val="63000"/>
-                <a:satMod val="120000"/>
-              </a:schemeClr>
-            </a:gs>
-          </a:gsLst>
-          <a:lin ang="5400000" scaled="0"/>
-        </a:gradFill>
-      </a:bgFillStyleLst>
-    </a:fmtScheme>
-  </a:themeElements>
-  <a:objectDefaults>
-    <a:lnDef>
-      <a:spPr/>
-      <a:bodyPr/>
-      <a:lstStyle/>
-      <a:style>
-        <a:lnRef idx="2">
-          <a:schemeClr val="accent1"/>
-        </a:lnRef>
-        <a:fillRef idx="0">
-          <a:schemeClr val="accent1"/>
-        </a:fillRef>
-        <a:effectRef idx="1">
-          <a:schemeClr val="accent1"/>
-        </a:effectRef>
-        <a:fontRef idx="minor">
-          <a:schemeClr val="tx1"/>
-        </a:fontRef>
-      </a:style>
-    </a:lnDef>
-  </a:objectDefaults>
-  <a:extraClrSchemeLst/>
-  <a:extLst>
-    <a:ext uri="{05A4C25C-085E-4340-85A3-A5531E510DB2}">
-      <thm15:themeFamily xmlns:thm15="http://schemas.microsoft.com/office/thememl/2012/main" name="Office Theme" id="{2E142A2C-CD16-42D6-873A-C26D2A0506FA}" vid="{1BDDFF52-6CD6-40A5-AB3C-68EB2F1E4D0A}"/>
-    </a:ext>
-  </a:extLst>
-</a:theme>
 </file>